--- a/update/compatibility/fig/prompt.pptx
+++ b/update/compatibility/fig/prompt.pptx
@@ -203,7 +203,7 @@
           <a:p>
             <a:fld id="{2A4973AF-1E6D-4746-8FA3-3206D360D595}" type="datetimeFigureOut">
               <a:rPr lang="en-CN" smtClean="0"/>
-              <a:t>2025/12/11</a:t>
+              <a:t>12/30/2025</a:t>
             </a:fld>
             <a:endParaRPr lang="en-CN"/>
           </a:p>
@@ -1421,7 +1421,7 @@
           <a:p>
             <a:fld id="{F89A057A-0BEA-48B2-A216-D46DB2C83327}" type="datetimeFigureOut">
               <a:rPr lang="zh-CN" altLang="en-US" smtClean="0"/>
-              <a:t>2025/12/11</a:t>
+              <a:t>2025/12/30</a:t>
             </a:fld>
             <a:endParaRPr lang="zh-CN" altLang="en-US"/>
           </a:p>
@@ -1591,7 +1591,7 @@
           <a:p>
             <a:fld id="{F89A057A-0BEA-48B2-A216-D46DB2C83327}" type="datetimeFigureOut">
               <a:rPr lang="zh-CN" altLang="en-US" smtClean="0"/>
-              <a:t>2025/12/11</a:t>
+              <a:t>2025/12/30</a:t>
             </a:fld>
             <a:endParaRPr lang="zh-CN" altLang="en-US"/>
           </a:p>
@@ -1771,7 +1771,7 @@
           <a:p>
             <a:fld id="{F89A057A-0BEA-48B2-A216-D46DB2C83327}" type="datetimeFigureOut">
               <a:rPr lang="zh-CN" altLang="en-US" smtClean="0"/>
-              <a:t>2025/12/11</a:t>
+              <a:t>2025/12/30</a:t>
             </a:fld>
             <a:endParaRPr lang="zh-CN" altLang="en-US"/>
           </a:p>
@@ -1941,7 +1941,7 @@
           <a:p>
             <a:fld id="{F89A057A-0BEA-48B2-A216-D46DB2C83327}" type="datetimeFigureOut">
               <a:rPr lang="zh-CN" altLang="en-US" smtClean="0"/>
-              <a:t>2025/12/11</a:t>
+              <a:t>2025/12/30</a:t>
             </a:fld>
             <a:endParaRPr lang="zh-CN" altLang="en-US"/>
           </a:p>
@@ -2185,7 +2185,7 @@
           <a:p>
             <a:fld id="{F89A057A-0BEA-48B2-A216-D46DB2C83327}" type="datetimeFigureOut">
               <a:rPr lang="zh-CN" altLang="en-US" smtClean="0"/>
-              <a:t>2025/12/11</a:t>
+              <a:t>2025/12/30</a:t>
             </a:fld>
             <a:endParaRPr lang="zh-CN" altLang="en-US"/>
           </a:p>
@@ -2417,7 +2417,7 @@
           <a:p>
             <a:fld id="{F89A057A-0BEA-48B2-A216-D46DB2C83327}" type="datetimeFigureOut">
               <a:rPr lang="zh-CN" altLang="en-US" smtClean="0"/>
-              <a:t>2025/12/11</a:t>
+              <a:t>2025/12/30</a:t>
             </a:fld>
             <a:endParaRPr lang="zh-CN" altLang="en-US"/>
           </a:p>
@@ -2784,7 +2784,7 @@
           <a:p>
             <a:fld id="{F89A057A-0BEA-48B2-A216-D46DB2C83327}" type="datetimeFigureOut">
               <a:rPr lang="zh-CN" altLang="en-US" smtClean="0"/>
-              <a:t>2025/12/11</a:t>
+              <a:t>2025/12/30</a:t>
             </a:fld>
             <a:endParaRPr lang="zh-CN" altLang="en-US"/>
           </a:p>
@@ -2902,7 +2902,7 @@
           <a:p>
             <a:fld id="{F89A057A-0BEA-48B2-A216-D46DB2C83327}" type="datetimeFigureOut">
               <a:rPr lang="zh-CN" altLang="en-US" smtClean="0"/>
-              <a:t>2025/12/11</a:t>
+              <a:t>2025/12/30</a:t>
             </a:fld>
             <a:endParaRPr lang="zh-CN" altLang="en-US"/>
           </a:p>
@@ -2997,7 +2997,7 @@
           <a:p>
             <a:fld id="{F89A057A-0BEA-48B2-A216-D46DB2C83327}" type="datetimeFigureOut">
               <a:rPr lang="zh-CN" altLang="en-US" smtClean="0"/>
-              <a:t>2025/12/11</a:t>
+              <a:t>2025/12/30</a:t>
             </a:fld>
             <a:endParaRPr lang="zh-CN" altLang="en-US"/>
           </a:p>
@@ -3274,7 +3274,7 @@
           <a:p>
             <a:fld id="{F89A057A-0BEA-48B2-A216-D46DB2C83327}" type="datetimeFigureOut">
               <a:rPr lang="zh-CN" altLang="en-US" smtClean="0"/>
-              <a:t>2025/12/11</a:t>
+              <a:t>2025/12/30</a:t>
             </a:fld>
             <a:endParaRPr lang="zh-CN" altLang="en-US"/>
           </a:p>
@@ -3531,7 +3531,7 @@
           <a:p>
             <a:fld id="{F89A057A-0BEA-48B2-A216-D46DB2C83327}" type="datetimeFigureOut">
               <a:rPr lang="zh-CN" altLang="en-US" smtClean="0"/>
-              <a:t>2025/12/11</a:t>
+              <a:t>2025/12/30</a:t>
             </a:fld>
             <a:endParaRPr lang="zh-CN" altLang="en-US"/>
           </a:p>
@@ -3744,7 +3744,7 @@
           <a:p>
             <a:fld id="{F89A057A-0BEA-48B2-A216-D46DB2C83327}" type="datetimeFigureOut">
               <a:rPr lang="zh-CN" altLang="en-US" smtClean="0"/>
-              <a:t>2025/12/11</a:t>
+              <a:t>2025/12/30</a:t>
             </a:fld>
             <a:endParaRPr lang="zh-CN" altLang="en-US"/>
           </a:p>
@@ -4164,7 +4164,7 @@
         <p:spPr>
           <a:xfrm>
             <a:off x="1850529" y="239911"/>
-            <a:ext cx="8676000" cy="7816069"/>
+            <a:ext cx="8676000" cy="8837828"/>
           </a:xfrm>
           <a:prstGeom prst="roundRect">
             <a:avLst>
@@ -4382,8 +4382,8 @@
         </p:nvSpPr>
         <p:spPr>
           <a:xfrm>
-            <a:off x="1850527" y="598961"/>
-            <a:ext cx="8676000" cy="7457019"/>
+            <a:off x="2062555" y="697731"/>
+            <a:ext cx="8676000" cy="7922187"/>
           </a:xfrm>
           <a:prstGeom prst="rect">
             <a:avLst/>
@@ -4397,613 +4397,962 @@
           <a:lstStyle/>
           <a:p>
             <a:r>
-              <a:rPr lang="en-US" altLang="zh-CN" b="1" u="sng" dirty="0">
-                <a:latin typeface="Helvetica Neue" panose="02000503000000020004" pitchFamily="2" charset="0"/>
-                <a:ea typeface="Helvetica Neue" panose="02000503000000020004" pitchFamily="2" charset="0"/>
-                <a:cs typeface="Helvetica Neue" panose="02000503000000020004" pitchFamily="2" charset="0"/>
-              </a:rPr>
-              <a:t>System:</a:t>
-            </a:r>
-          </a:p>
-          <a:p>
-            <a:pPr marL="360000"/>
-            <a:r>
-              <a:rPr lang="en-US" altLang="zh-CN" dirty="0">
-                <a:solidFill>
-                  <a:srgbClr val="FF0000"/>
-                </a:solidFill>
-                <a:latin typeface="Helvetica Neue" panose="02000503000000020004" pitchFamily="2" charset="0"/>
-                <a:ea typeface="Helvetica Neue" panose="02000503000000020004" pitchFamily="2" charset="0"/>
-                <a:cs typeface="Helvetica Neue" panose="02000503000000020004" pitchFamily="2" charset="0"/>
-              </a:rPr>
-              <a:t>You are now a code analyst and reverse engineering expert, with in-depth knowledge of various encryption algorithms and the underlying principles of ransomware.</a:t>
-            </a:r>
-          </a:p>
-          <a:p>
-            <a:r>
-              <a:rPr lang="en-US" altLang="zh-CN" b="1" u="sng" dirty="0">
-                <a:latin typeface="Helvetica Neue" panose="02000503000000020004" pitchFamily="2" charset="0"/>
-                <a:ea typeface="Helvetica Neue" panose="02000503000000020004" pitchFamily="2" charset="0"/>
-                <a:cs typeface="Helvetica Neue" panose="02000503000000020004" pitchFamily="2" charset="0"/>
-              </a:rPr>
-              <a:t>Task:</a:t>
-            </a:r>
-          </a:p>
-          <a:p>
-            <a:pPr marL="360000"/>
-            <a:r>
-              <a:rPr lang="en-US" altLang="zh-CN" dirty="0">
-                <a:solidFill>
-                  <a:srgbClr val="FF0000"/>
-                </a:solidFill>
-                <a:latin typeface="Helvetica Neue" panose="02000503000000020004" pitchFamily="2" charset="0"/>
-                <a:ea typeface="Helvetica Neue" panose="02000503000000020004" pitchFamily="2" charset="0"/>
-                <a:cs typeface="Helvetica Neue" panose="02000503000000020004" pitchFamily="2" charset="0"/>
-              </a:rPr>
-              <a:t>Your task is to determine whether the given code implements an encryption function.</a:t>
-            </a:r>
-          </a:p>
-          <a:p>
-            <a:pPr marL="360000"/>
-            <a:r>
-              <a:rPr lang="en-US" altLang="zh-CN" i="1" dirty="0">
-                <a:solidFill>
-                  <a:srgbClr val="FF0000"/>
-                </a:solidFill>
-                <a:latin typeface="Helvetica Neue" panose="02000503000000020004" pitchFamily="2" charset="0"/>
-                <a:ea typeface="Helvetica Neue" panose="02000503000000020004" pitchFamily="2" charset="0"/>
-                <a:cs typeface="Helvetica Neue" panose="02000503000000020004" pitchFamily="2" charset="0"/>
-              </a:rPr>
-              <a:t>Rules and conditions:</a:t>
-            </a:r>
-          </a:p>
-          <a:p>
-            <a:pPr marL="645750" indent="-285750">
-              <a:buFont typeface="Arial" panose="020B0604020202020204" pitchFamily="34" charset="0"/>
-              <a:buChar char="•"/>
-            </a:pPr>
-            <a:r>
-              <a:rPr lang="en-US" altLang="zh-CN" dirty="0">
-                <a:solidFill>
-                  <a:srgbClr val="FF0000"/>
-                </a:solidFill>
-                <a:latin typeface="Helvetica Neue" panose="02000503000000020004" pitchFamily="2" charset="0"/>
-                <a:ea typeface="Helvetica Neue" panose="02000503000000020004" pitchFamily="2" charset="0"/>
-                <a:cs typeface="Helvetica Neue" panose="02000503000000020004" pitchFamily="2" charset="0"/>
-              </a:rPr>
-              <a:t>If the code does not meet the criteria, set "</a:t>
-            </a:r>
-            <a:r>
-              <a:rPr lang="en-US" altLang="zh-CN" dirty="0" err="1">
-                <a:solidFill>
-                  <a:srgbClr val="FF0000"/>
-                </a:solidFill>
-                <a:latin typeface="Helvetica Neue" panose="02000503000000020004" pitchFamily="2" charset="0"/>
-                <a:ea typeface="Helvetica Neue" panose="02000503000000020004" pitchFamily="2" charset="0"/>
-                <a:cs typeface="Helvetica Neue" panose="02000503000000020004" pitchFamily="2" charset="0"/>
-              </a:rPr>
-              <a:t>is_encryption_function</a:t>
-            </a:r>
-            <a:r>
-              <a:rPr lang="en-US" altLang="zh-CN" dirty="0">
-                <a:solidFill>
-                  <a:srgbClr val="FF0000"/>
-                </a:solidFill>
-                <a:latin typeface="Helvetica Neue" panose="02000503000000020004" pitchFamily="2" charset="0"/>
-                <a:ea typeface="Helvetica Neue" panose="02000503000000020004" pitchFamily="2" charset="0"/>
-                <a:cs typeface="Helvetica Neue" panose="02000503000000020004" pitchFamily="2" charset="0"/>
-              </a:rPr>
-              <a:t>" to false.</a:t>
-            </a:r>
-          </a:p>
-          <a:p>
-            <a:pPr marL="645750" indent="-285750">
-              <a:buFont typeface="Arial" panose="020B0604020202020204" pitchFamily="34" charset="0"/>
-              <a:buChar char="•"/>
-            </a:pPr>
-            <a:r>
-              <a:rPr lang="en-US" altLang="zh-CN" dirty="0">
-                <a:solidFill>
-                  <a:srgbClr val="FF0000"/>
-                </a:solidFill>
-                <a:latin typeface="Helvetica Neue" panose="02000503000000020004" pitchFamily="2" charset="0"/>
-                <a:ea typeface="Helvetica Neue" panose="02000503000000020004" pitchFamily="2" charset="0"/>
-                <a:cs typeface="Helvetica Neue" panose="02000503000000020004" pitchFamily="2" charset="0"/>
-              </a:rPr>
-              <a:t>The output should be structured in JSON format: </a:t>
-            </a:r>
-          </a:p>
-          <a:p>
-            <a:pPr marL="360000"/>
-            <a:r>
-              <a:rPr lang="en-US" altLang="zh-CN" dirty="0">
-                <a:solidFill>
-                  <a:srgbClr val="FF0000"/>
-                </a:solidFill>
-                <a:latin typeface="Helvetica Neue" panose="02000503000000020004" pitchFamily="2" charset="0"/>
-                <a:ea typeface="Helvetica Neue" panose="02000503000000020004" pitchFamily="2" charset="0"/>
-                <a:cs typeface="Helvetica Neue" panose="02000503000000020004" pitchFamily="2" charset="0"/>
-              </a:rPr>
-              <a:t>		{</a:t>
-            </a:r>
-          </a:p>
-          <a:p>
-            <a:pPr marL="360000"/>
-            <a:r>
-              <a:rPr lang="en-US" altLang="zh-CN" dirty="0">
-                <a:solidFill>
-                  <a:srgbClr val="FF0000"/>
-                </a:solidFill>
-                <a:latin typeface="Helvetica Neue" panose="02000503000000020004" pitchFamily="2" charset="0"/>
-                <a:ea typeface="Helvetica Neue" panose="02000503000000020004" pitchFamily="2" charset="0"/>
-                <a:cs typeface="Helvetica Neue" panose="02000503000000020004" pitchFamily="2" charset="0"/>
-              </a:rPr>
-              <a:t>			"</a:t>
-            </a:r>
-            <a:r>
-              <a:rPr lang="en-US" altLang="zh-CN" dirty="0" err="1">
-                <a:solidFill>
-                  <a:srgbClr val="FF0000"/>
-                </a:solidFill>
-                <a:latin typeface="Helvetica Neue" panose="02000503000000020004" pitchFamily="2" charset="0"/>
-                <a:ea typeface="Helvetica Neue" panose="02000503000000020004" pitchFamily="2" charset="0"/>
-                <a:cs typeface="Helvetica Neue" panose="02000503000000020004" pitchFamily="2" charset="0"/>
-              </a:rPr>
-              <a:t>function_name</a:t>
-            </a:r>
-            <a:r>
-              <a:rPr lang="en-US" altLang="zh-CN" dirty="0">
-                <a:solidFill>
-                  <a:srgbClr val="FF0000"/>
-                </a:solidFill>
-                <a:latin typeface="Helvetica Neue" panose="02000503000000020004" pitchFamily="2" charset="0"/>
-                <a:ea typeface="Helvetica Neue" panose="02000503000000020004" pitchFamily="2" charset="0"/>
-                <a:cs typeface="Helvetica Neue" panose="02000503000000020004" pitchFamily="2" charset="0"/>
-              </a:rPr>
-              <a:t>": </a:t>
-            </a:r>
-            <a:r>
-              <a:rPr lang="zh-CN" altLang="en-US" dirty="0">
-                <a:solidFill>
-                  <a:srgbClr val="FF0000"/>
-                </a:solidFill>
-                <a:latin typeface="Helvetica Neue" panose="02000503000000020004" pitchFamily="2" charset="0"/>
-                <a:ea typeface="Helvetica Neue" panose="02000503000000020004" pitchFamily="2" charset="0"/>
-                <a:cs typeface="Helvetica Neue" panose="02000503000000020004" pitchFamily="2" charset="0"/>
-              </a:rPr>
-              <a:t> </a:t>
-            </a:r>
-            <a:r>
-              <a:rPr lang="en-US" altLang="zh-CN" dirty="0">
-                <a:solidFill>
-                  <a:srgbClr val="FF0000"/>
-                </a:solidFill>
-                <a:latin typeface="Helvetica Neue" panose="02000503000000020004" pitchFamily="2" charset="0"/>
-                <a:ea typeface="Helvetica Neue" panose="02000503000000020004" pitchFamily="2" charset="0"/>
-                <a:cs typeface="Helvetica Neue" panose="02000503000000020004" pitchFamily="2" charset="0"/>
-              </a:rPr>
-              <a:t>"", </a:t>
-            </a:r>
-          </a:p>
-          <a:p>
-            <a:pPr marL="360000"/>
-            <a:r>
-              <a:rPr lang="en-US" altLang="zh-CN" dirty="0">
-                <a:solidFill>
-                  <a:srgbClr val="FF0000"/>
-                </a:solidFill>
-                <a:latin typeface="Helvetica Neue" panose="02000503000000020004" pitchFamily="2" charset="0"/>
-                <a:ea typeface="Helvetica Neue" panose="02000503000000020004" pitchFamily="2" charset="0"/>
-                <a:cs typeface="Helvetica Neue" panose="02000503000000020004" pitchFamily="2" charset="0"/>
-              </a:rPr>
-              <a:t>			"</a:t>
-            </a:r>
-            <a:r>
-              <a:rPr lang="en-US" altLang="zh-CN" dirty="0" err="1">
-                <a:solidFill>
-                  <a:srgbClr val="FF0000"/>
-                </a:solidFill>
-                <a:latin typeface="Helvetica Neue" panose="02000503000000020004" pitchFamily="2" charset="0"/>
-                <a:ea typeface="Helvetica Neue" panose="02000503000000020004" pitchFamily="2" charset="0"/>
-                <a:cs typeface="Helvetica Neue" panose="02000503000000020004" pitchFamily="2" charset="0"/>
-              </a:rPr>
-              <a:t>is_encryption_function</a:t>
-            </a:r>
-            <a:r>
-              <a:rPr lang="en-US" altLang="zh-CN" dirty="0">
-                <a:solidFill>
-                  <a:srgbClr val="FF0000"/>
-                </a:solidFill>
-                <a:latin typeface="Helvetica Neue" panose="02000503000000020004" pitchFamily="2" charset="0"/>
-                <a:ea typeface="Helvetica Neue" panose="02000503000000020004" pitchFamily="2" charset="0"/>
-                <a:cs typeface="Helvetica Neue" panose="02000503000000020004" pitchFamily="2" charset="0"/>
-              </a:rPr>
-              <a:t>": true/false,</a:t>
-            </a:r>
-          </a:p>
-          <a:p>
-            <a:pPr marL="360000"/>
-            <a:r>
-              <a:rPr lang="en-US" altLang="zh-CN" dirty="0">
-                <a:solidFill>
-                  <a:srgbClr val="FF0000"/>
-                </a:solidFill>
-                <a:latin typeface="Helvetica Neue" panose="02000503000000020004" pitchFamily="2" charset="0"/>
-                <a:ea typeface="Helvetica Neue" panose="02000503000000020004" pitchFamily="2" charset="0"/>
-                <a:cs typeface="Helvetica Neue" panose="02000503000000020004" pitchFamily="2" charset="0"/>
-              </a:rPr>
-              <a:t>			"description": "</a:t>
-            </a:r>
-            <a:r>
-              <a:rPr lang="en-US" altLang="zh-CN" dirty="0">
-                <a:solidFill>
-                  <a:srgbClr val="FF0000"/>
-                </a:solidFill>
-                <a:latin typeface="Helvetica Neue" panose="02000503000000020004" pitchFamily="2" charset="0"/>
-              </a:rPr>
-              <a:t> Elaborate your reason here</a:t>
-            </a:r>
-            <a:r>
-              <a:rPr lang="en-US" altLang="zh-CN" dirty="0">
-                <a:solidFill>
-                  <a:srgbClr val="FF0000"/>
-                </a:solidFill>
-                <a:latin typeface="Helvetica Neue" panose="02000503000000020004" pitchFamily="2" charset="0"/>
-                <a:ea typeface="Helvetica Neue" panose="02000503000000020004" pitchFamily="2" charset="0"/>
-                <a:cs typeface="Helvetica Neue" panose="02000503000000020004" pitchFamily="2" charset="0"/>
-              </a:rPr>
-              <a:t>."    </a:t>
-            </a:r>
-          </a:p>
-          <a:p>
-            <a:pPr marL="360000"/>
-            <a:r>
-              <a:rPr lang="en-US" altLang="zh-CN" dirty="0">
-                <a:solidFill>
-                  <a:srgbClr val="FF0000"/>
-                </a:solidFill>
-                <a:latin typeface="Helvetica Neue" panose="02000503000000020004" pitchFamily="2" charset="0"/>
-                <a:ea typeface="Helvetica Neue" panose="02000503000000020004" pitchFamily="2" charset="0"/>
-                <a:cs typeface="Helvetica Neue" panose="02000503000000020004" pitchFamily="2" charset="0"/>
-              </a:rPr>
-              <a:t>          }</a:t>
-            </a:r>
-          </a:p>
-          <a:p>
-            <a:pPr marL="645750" indent="-285750">
-              <a:buFont typeface="Arial" panose="020B0604020202020204" pitchFamily="34" charset="0"/>
-              <a:buChar char="•"/>
-            </a:pPr>
-            <a:r>
-              <a:rPr lang="en-US" altLang="zh-CN" dirty="0">
-                <a:solidFill>
-                  <a:srgbClr val="FF0000"/>
-                </a:solidFill>
-                <a:latin typeface="Helvetica Neue" panose="02000503000000020004" pitchFamily="2" charset="0"/>
-                <a:ea typeface="Helvetica Neue" panose="02000503000000020004" pitchFamily="2" charset="0"/>
-                <a:cs typeface="Helvetica Neue" panose="02000503000000020004" pitchFamily="2" charset="0"/>
-              </a:rPr>
-              <a:t>Hash functions and other irreversible algorithms are not considered as encryption algorithms.</a:t>
-            </a:r>
-          </a:p>
-          <a:p>
-            <a:pPr marL="645750" indent="-285750">
-              <a:buFont typeface="Arial" panose="020B0604020202020204" pitchFamily="34" charset="0"/>
-              <a:buChar char="•"/>
-            </a:pPr>
-            <a:r>
-              <a:rPr lang="en-US" altLang="zh-CN" dirty="0">
-                <a:solidFill>
-                  <a:srgbClr val="FF0000"/>
-                </a:solidFill>
-                <a:latin typeface="Helvetica Neue" panose="02000503000000020004" pitchFamily="2" charset="0"/>
-                <a:ea typeface="Helvetica Neue" panose="02000503000000020004" pitchFamily="2" charset="0"/>
-                <a:cs typeface="Helvetica Neue" panose="02000503000000020004" pitchFamily="2" charset="0"/>
-              </a:rPr>
-              <a:t>Below is an example of an encryption function from a cryptographic library:</a:t>
-            </a:r>
-          </a:p>
-          <a:p>
-            <a:pPr marL="360000"/>
-            <a:r>
-              <a:rPr lang="en-US" altLang="zh-CN" dirty="0">
-                <a:solidFill>
-                  <a:srgbClr val="FF0000"/>
-                </a:solidFill>
-                <a:latin typeface="Helvetica Neue" panose="02000503000000020004" pitchFamily="2" charset="0"/>
-                <a:ea typeface="Helvetica Neue" panose="02000503000000020004" pitchFamily="2" charset="0"/>
-                <a:cs typeface="Helvetica Neue" panose="02000503000000020004" pitchFamily="2" charset="0"/>
-              </a:rPr>
-              <a:t>```</a:t>
-            </a:r>
-          </a:p>
-          <a:p>
-            <a:pPr marL="360000"/>
-            <a:r>
-              <a:rPr lang="en-US" altLang="zh-CN" i="1" dirty="0">
-                <a:solidFill>
-                  <a:srgbClr val="FF0000"/>
-                </a:solidFill>
-                <a:latin typeface="Helvetica Neue" panose="02000503000000020004" pitchFamily="2" charset="0"/>
-                <a:ea typeface="Helvetica Neue" panose="02000503000000020004" pitchFamily="2" charset="0"/>
-                <a:cs typeface="Helvetica Neue" panose="02000503000000020004" pitchFamily="2" charset="0"/>
-              </a:rPr>
-              <a:t>Library function name: {</a:t>
-            </a:r>
-            <a:r>
-              <a:rPr lang="en-US" altLang="zh-CN" i="1" dirty="0" err="1">
-                <a:solidFill>
-                  <a:srgbClr val="FF0000"/>
-                </a:solidFill>
-                <a:latin typeface="Helvetica Neue" panose="02000503000000020004" pitchFamily="2" charset="0"/>
-                <a:ea typeface="Helvetica Neue" panose="02000503000000020004" pitchFamily="2" charset="0"/>
-                <a:cs typeface="Helvetica Neue" panose="02000503000000020004" pitchFamily="2" charset="0"/>
-              </a:rPr>
-              <a:t>f</a:t>
-            </a:r>
-            <a:r>
-              <a:rPr lang="en-US" altLang="zh-CN" i="1" baseline="-25000" dirty="0" err="1">
-                <a:solidFill>
-                  <a:srgbClr val="FF0000"/>
-                </a:solidFill>
-                <a:latin typeface="Helvetica Neue" panose="02000503000000020004" pitchFamily="2" charset="0"/>
-                <a:ea typeface="Helvetica Neue" panose="02000503000000020004" pitchFamily="2" charset="0"/>
-                <a:cs typeface="Helvetica Neue" panose="02000503000000020004" pitchFamily="2" charset="0"/>
-              </a:rPr>
-              <a:t>db</a:t>
-            </a:r>
-            <a:r>
-              <a:rPr lang="en-US" altLang="zh-CN" i="1" dirty="0" err="1">
-                <a:solidFill>
-                  <a:srgbClr val="FF0000"/>
-                </a:solidFill>
-                <a:latin typeface="Helvetica Neue" panose="02000503000000020004" pitchFamily="2" charset="0"/>
-                <a:ea typeface="Helvetica Neue" panose="02000503000000020004" pitchFamily="2" charset="0"/>
-                <a:cs typeface="Helvetica Neue" panose="02000503000000020004" pitchFamily="2" charset="0"/>
-              </a:rPr>
-              <a:t>.nm</a:t>
-            </a:r>
-            <a:r>
-              <a:rPr lang="en-US" altLang="zh-CN" i="1" dirty="0">
-                <a:solidFill>
-                  <a:srgbClr val="FF0000"/>
-                </a:solidFill>
-                <a:latin typeface="Helvetica Neue" panose="02000503000000020004" pitchFamily="2" charset="0"/>
-                <a:ea typeface="Helvetica Neue" panose="02000503000000020004" pitchFamily="2" charset="0"/>
-                <a:cs typeface="Helvetica Neue" panose="02000503000000020004" pitchFamily="2" charset="0"/>
-              </a:rPr>
-              <a:t>} </a:t>
-            </a:r>
-          </a:p>
-          <a:p>
-            <a:pPr marL="360000"/>
-            <a:r>
-              <a:rPr lang="en-US" altLang="zh-CN" i="1" dirty="0">
-                <a:solidFill>
-                  <a:srgbClr val="FF0000"/>
-                </a:solidFill>
-                <a:latin typeface="Helvetica Neue" panose="02000503000000020004" pitchFamily="2" charset="0"/>
-                <a:ea typeface="Helvetica Neue" panose="02000503000000020004" pitchFamily="2" charset="0"/>
-                <a:cs typeface="Helvetica Neue" panose="02000503000000020004" pitchFamily="2" charset="0"/>
-              </a:rPr>
-              <a:t>Library function body: {</a:t>
-            </a:r>
-            <a:r>
-              <a:rPr lang="en-US" altLang="zh-CN" i="1" dirty="0" err="1">
-                <a:solidFill>
-                  <a:srgbClr val="FF0000"/>
-                </a:solidFill>
-                <a:latin typeface="Helvetica Neue" panose="02000503000000020004" pitchFamily="2" charset="0"/>
-                <a:ea typeface="Helvetica Neue" panose="02000503000000020004" pitchFamily="2" charset="0"/>
-                <a:cs typeface="Helvetica Neue" panose="02000503000000020004" pitchFamily="2" charset="0"/>
-              </a:rPr>
-              <a:t>f</a:t>
-            </a:r>
-            <a:r>
-              <a:rPr lang="en-US" altLang="zh-CN" i="1" baseline="-25000" dirty="0" err="1">
-                <a:solidFill>
-                  <a:srgbClr val="FF0000"/>
-                </a:solidFill>
-                <a:latin typeface="Helvetica Neue" panose="02000503000000020004" pitchFamily="2" charset="0"/>
-                <a:ea typeface="Helvetica Neue" panose="02000503000000020004" pitchFamily="2" charset="0"/>
-                <a:cs typeface="Helvetica Neue" panose="02000503000000020004" pitchFamily="2" charset="0"/>
-              </a:rPr>
-              <a:t>db</a:t>
-            </a:r>
-            <a:r>
-              <a:rPr lang="en-US" altLang="zh-CN" i="1" dirty="0" err="1">
-                <a:solidFill>
-                  <a:srgbClr val="FF0000"/>
-                </a:solidFill>
-                <a:latin typeface="Helvetica Neue" panose="02000503000000020004" pitchFamily="2" charset="0"/>
-                <a:ea typeface="Helvetica Neue" panose="02000503000000020004" pitchFamily="2" charset="0"/>
-                <a:cs typeface="Helvetica Neue" panose="02000503000000020004" pitchFamily="2" charset="0"/>
-              </a:rPr>
-              <a:t>.S</a:t>
-            </a:r>
-            <a:r>
-              <a:rPr lang="en-US" altLang="zh-CN" i="1" dirty="0">
-                <a:solidFill>
-                  <a:srgbClr val="FF0000"/>
-                </a:solidFill>
-                <a:latin typeface="Helvetica Neue" panose="02000503000000020004" pitchFamily="2" charset="0"/>
-                <a:ea typeface="Helvetica Neue" panose="02000503000000020004" pitchFamily="2" charset="0"/>
-                <a:cs typeface="Helvetica Neue" panose="02000503000000020004" pitchFamily="2" charset="0"/>
-              </a:rPr>
-              <a:t>}</a:t>
-            </a:r>
-          </a:p>
-          <a:p>
-            <a:pPr marL="360000"/>
-            <a:r>
-              <a:rPr lang="en-US" altLang="zh-CN" i="1" dirty="0">
-                <a:solidFill>
-                  <a:srgbClr val="FF0000"/>
-                </a:solidFill>
-                <a:latin typeface="Helvetica Neue" panose="02000503000000020004" pitchFamily="2" charset="0"/>
-                <a:ea typeface="Helvetica Neue" panose="02000503000000020004" pitchFamily="2" charset="0"/>
-                <a:cs typeface="Helvetica Neue" panose="02000503000000020004" pitchFamily="2" charset="0"/>
-              </a:rPr>
-              <a:t>```</a:t>
-            </a:r>
-          </a:p>
-          <a:p>
-            <a:pPr marL="645750" indent="-285750">
-              <a:buFont typeface="Arial" panose="020B0604020202020204" pitchFamily="34" charset="0"/>
-              <a:buChar char="•"/>
-            </a:pPr>
-            <a:r>
-              <a:rPr lang="en-US" altLang="zh-CN" dirty="0">
-                <a:solidFill>
-                  <a:srgbClr val="FF0000"/>
-                </a:solidFill>
-                <a:latin typeface="Helvetica Neue" panose="02000503000000020004" pitchFamily="2" charset="0"/>
-                <a:ea typeface="Helvetica Neue" panose="02000503000000020004" pitchFamily="2" charset="0"/>
-                <a:cs typeface="Helvetica Neue" panose="02000503000000020004" pitchFamily="2" charset="0"/>
-              </a:rPr>
-              <a:t>If you are ready, please reply 'Understood’.</a:t>
-            </a:r>
-          </a:p>
-          <a:p>
-            <a:pPr marL="360000"/>
-            <a:r>
-              <a:rPr lang="en-US" altLang="zh-CN" dirty="0">
-                <a:solidFill>
-                  <a:srgbClr val="FF0000"/>
-                </a:solidFill>
-                <a:latin typeface="Helvetica Neue" panose="02000503000000020004" pitchFamily="2" charset="0"/>
-                <a:ea typeface="Helvetica Neue" panose="02000503000000020004" pitchFamily="2" charset="0"/>
-                <a:cs typeface="Helvetica Neue" panose="02000503000000020004" pitchFamily="2" charset="0"/>
-              </a:rPr>
-              <a:t>```</a:t>
-            </a:r>
-          </a:p>
-          <a:p>
-            <a:pPr marL="360000"/>
-            <a:r>
-              <a:rPr lang="en-US" altLang="zh-CN" i="1" dirty="0">
-                <a:solidFill>
-                  <a:srgbClr val="FF0000"/>
-                </a:solidFill>
-                <a:latin typeface="Helvetica Neue" panose="02000503000000020004" pitchFamily="2" charset="0"/>
-                <a:ea typeface="Helvetica Neue" panose="02000503000000020004" pitchFamily="2" charset="0"/>
-                <a:cs typeface="Helvetica Neue" panose="02000503000000020004" pitchFamily="2" charset="0"/>
-              </a:rPr>
-              <a:t>Function name: {</a:t>
-            </a:r>
-            <a:r>
-              <a:rPr lang="en-US" altLang="zh-CN" i="1" dirty="0" err="1">
-                <a:solidFill>
-                  <a:srgbClr val="FF0000"/>
-                </a:solidFill>
-                <a:latin typeface="Helvetica Neue" panose="02000503000000020004" pitchFamily="2" charset="0"/>
-                <a:ea typeface="Helvetica Neue" panose="02000503000000020004" pitchFamily="2" charset="0"/>
-                <a:cs typeface="Helvetica Neue" panose="02000503000000020004" pitchFamily="2" charset="0"/>
-              </a:rPr>
-              <a:t>f</a:t>
-            </a:r>
-            <a:r>
-              <a:rPr lang="en-US" altLang="zh-CN" i="1" baseline="-25000" dirty="0" err="1">
-                <a:solidFill>
-                  <a:srgbClr val="FF0000"/>
-                </a:solidFill>
-                <a:latin typeface="Helvetica Neue" panose="02000503000000020004" pitchFamily="2" charset="0"/>
-                <a:ea typeface="Helvetica Neue" panose="02000503000000020004" pitchFamily="2" charset="0"/>
-                <a:cs typeface="Helvetica Neue" panose="02000503000000020004" pitchFamily="2" charset="0"/>
-              </a:rPr>
-              <a:t>bf</a:t>
-            </a:r>
-            <a:r>
-              <a:rPr lang="en-US" altLang="zh-CN" i="1" dirty="0" err="1">
-                <a:solidFill>
-                  <a:srgbClr val="FF0000"/>
-                </a:solidFill>
-                <a:latin typeface="Helvetica Neue" panose="02000503000000020004" pitchFamily="2" charset="0"/>
-                <a:ea typeface="Helvetica Neue" panose="02000503000000020004" pitchFamily="2" charset="0"/>
-                <a:cs typeface="Helvetica Neue" panose="02000503000000020004" pitchFamily="2" charset="0"/>
-              </a:rPr>
-              <a:t>.nm</a:t>
-            </a:r>
-            <a:r>
-              <a:rPr lang="en-US" altLang="zh-CN" i="1" dirty="0">
-                <a:solidFill>
-                  <a:srgbClr val="FF0000"/>
-                </a:solidFill>
-                <a:latin typeface="Helvetica Neue" panose="02000503000000020004" pitchFamily="2" charset="0"/>
-                <a:ea typeface="Helvetica Neue" panose="02000503000000020004" pitchFamily="2" charset="0"/>
-                <a:cs typeface="Helvetica Neue" panose="02000503000000020004" pitchFamily="2" charset="0"/>
-              </a:rPr>
-              <a:t>} </a:t>
-            </a:r>
-          </a:p>
-          <a:p>
-            <a:pPr marL="360000"/>
-            <a:r>
-              <a:rPr lang="en-US" altLang="zh-CN" i="1" dirty="0">
-                <a:solidFill>
-                  <a:srgbClr val="FF0000"/>
-                </a:solidFill>
-                <a:latin typeface="Helvetica Neue" panose="02000503000000020004" pitchFamily="2" charset="0"/>
-                <a:ea typeface="Helvetica Neue" panose="02000503000000020004" pitchFamily="2" charset="0"/>
-                <a:cs typeface="Helvetica Neue" panose="02000503000000020004" pitchFamily="2" charset="0"/>
-              </a:rPr>
-              <a:t>Function body: {</a:t>
-            </a:r>
-            <a:r>
-              <a:rPr lang="en-US" altLang="zh-CN" i="1" dirty="0" err="1">
-                <a:solidFill>
-                  <a:srgbClr val="FF0000"/>
-                </a:solidFill>
-                <a:latin typeface="Helvetica Neue" panose="02000503000000020004" pitchFamily="2" charset="0"/>
-                <a:ea typeface="Helvetica Neue" panose="02000503000000020004" pitchFamily="2" charset="0"/>
-                <a:cs typeface="Helvetica Neue" panose="02000503000000020004" pitchFamily="2" charset="0"/>
-              </a:rPr>
-              <a:t>f</a:t>
-            </a:r>
-            <a:r>
-              <a:rPr lang="en-US" altLang="zh-CN" i="1" baseline="-25000" dirty="0" err="1">
-                <a:solidFill>
-                  <a:srgbClr val="FF0000"/>
-                </a:solidFill>
-                <a:latin typeface="Helvetica Neue" panose="02000503000000020004" pitchFamily="2" charset="0"/>
-                <a:ea typeface="Helvetica Neue" panose="02000503000000020004" pitchFamily="2" charset="0"/>
-                <a:cs typeface="Helvetica Neue" panose="02000503000000020004" pitchFamily="2" charset="0"/>
-              </a:rPr>
-              <a:t>bf</a:t>
-            </a:r>
-            <a:r>
-              <a:rPr lang="en-US" altLang="zh-CN" i="1" dirty="0" err="1">
-                <a:solidFill>
-                  <a:srgbClr val="FF0000"/>
-                </a:solidFill>
-                <a:latin typeface="Helvetica Neue" panose="02000503000000020004" pitchFamily="2" charset="0"/>
-                <a:ea typeface="Helvetica Neue" panose="02000503000000020004" pitchFamily="2" charset="0"/>
-                <a:cs typeface="Helvetica Neue" panose="02000503000000020004" pitchFamily="2" charset="0"/>
-              </a:rPr>
-              <a:t>.S</a:t>
-            </a:r>
-            <a:r>
-              <a:rPr lang="en-US" altLang="zh-CN" i="1" dirty="0">
-                <a:solidFill>
-                  <a:srgbClr val="FF0000"/>
-                </a:solidFill>
-                <a:latin typeface="Helvetica Neue" panose="02000503000000020004" pitchFamily="2" charset="0"/>
-                <a:ea typeface="Helvetica Neue" panose="02000503000000020004" pitchFamily="2" charset="0"/>
-                <a:cs typeface="Helvetica Neue" panose="02000503000000020004" pitchFamily="2" charset="0"/>
-              </a:rPr>
-              <a:t>}</a:t>
-            </a:r>
-          </a:p>
-          <a:p>
-            <a:pPr marL="360000"/>
-            <a:r>
-              <a:rPr lang="en-US" altLang="zh-CN" i="1" dirty="0">
-                <a:latin typeface="Helvetica Neue" panose="02000503000000020004" pitchFamily="2" charset="0"/>
-                <a:ea typeface="Helvetica Neue" panose="02000503000000020004" pitchFamily="2" charset="0"/>
-                <a:cs typeface="Helvetica Neue" panose="02000503000000020004" pitchFamily="2" charset="0"/>
-              </a:rPr>
-              <a:t>```</a:t>
-            </a:r>
+              <a:rPr lang="en-US" altLang="zh-CN" b="1" dirty="0">
+                <a:solidFill>
+                  <a:srgbClr val="000080"/>
+                </a:solidFill>
+                <a:effectLst/>
+                <a:latin typeface="Consolas" panose="020B0609020204030204" pitchFamily="49" charset="0"/>
+              </a:rPr>
+              <a:t>**Phase 2: CFG Construction (Single Pass, Indentation Driven)**</a:t>
+            </a:r>
+            <a:r>
+              <a:rPr lang="en-US" altLang="zh-CN" b="1" dirty="0">
+                <a:solidFill>
+                  <a:srgbClr val="800000"/>
+                </a:solidFill>
+                <a:effectLst/>
+                <a:latin typeface="Consolas" panose="020B0609020204030204" pitchFamily="49" charset="0"/>
+              </a:rPr>
+              <a:t>  </a:t>
+            </a:r>
+            <a:endParaRPr lang="en-US" altLang="zh-CN" b="0" dirty="0">
+              <a:solidFill>
+                <a:srgbClr val="000000"/>
+              </a:solidFill>
+              <a:effectLst/>
+              <a:latin typeface="Consolas" panose="020B0609020204030204" pitchFamily="49" charset="0"/>
+            </a:endParaRPr>
+          </a:p>
+          <a:p>
+            <a:br>
+              <a:rPr lang="en-US" altLang="zh-CN" b="0" dirty="0">
+                <a:solidFill>
+                  <a:srgbClr val="000000"/>
+                </a:solidFill>
+                <a:effectLst/>
+                <a:latin typeface="Consolas" panose="020B0609020204030204" pitchFamily="49" charset="0"/>
+              </a:rPr>
+            </a:br>
+            <a:r>
+              <a:rPr lang="en-US" altLang="zh-CN" b="1" dirty="0">
+                <a:solidFill>
+                  <a:srgbClr val="800000"/>
+                </a:solidFill>
+                <a:effectLst/>
+                <a:latin typeface="Consolas" panose="020B0609020204030204" pitchFamily="49" charset="0"/>
+              </a:rPr>
+              <a:t>###### </a:t>
+            </a:r>
+            <a:r>
+              <a:rPr lang="en-US" altLang="zh-CN" b="1" dirty="0">
+                <a:solidFill>
+                  <a:srgbClr val="000000"/>
+                </a:solidFill>
+                <a:effectLst/>
+                <a:latin typeface="Consolas" panose="020B0609020204030204" pitchFamily="49" charset="0"/>
+              </a:rPr>
+              <a:t>Step 1: Indentation Reduction (Scope Exit)</a:t>
+            </a:r>
+            <a:br>
+              <a:rPr lang="en-US" altLang="zh-CN" b="0" dirty="0">
+                <a:solidFill>
+                  <a:srgbClr val="000000"/>
+                </a:solidFill>
+                <a:effectLst/>
+                <a:latin typeface="Consolas" panose="020B0609020204030204" pitchFamily="49" charset="0"/>
+              </a:rPr>
+            </a:br>
+            <a:r>
+              <a:rPr lang="en-US" altLang="zh-CN" b="1" dirty="0">
+                <a:solidFill>
+                  <a:srgbClr val="800000"/>
+                </a:solidFill>
+                <a:effectLst/>
+                <a:latin typeface="Consolas" panose="020B0609020204030204" pitchFamily="49" charset="0"/>
+              </a:rPr>
+              <a:t>###### </a:t>
+            </a:r>
+            <a:r>
+              <a:rPr lang="en-US" altLang="zh-CN" b="1" dirty="0">
+                <a:solidFill>
+                  <a:srgbClr val="000000"/>
+                </a:solidFill>
+                <a:effectLst/>
+                <a:latin typeface="Consolas" panose="020B0609020204030204" pitchFamily="49" charset="0"/>
+              </a:rPr>
+              <a:t>If statement is a condition:</a:t>
+            </a:r>
+            <a:br>
+              <a:rPr lang="en-US" altLang="zh-CN" b="0" dirty="0">
+                <a:solidFill>
+                  <a:srgbClr val="000000"/>
+                </a:solidFill>
+                <a:effectLst/>
+                <a:latin typeface="Consolas" panose="020B0609020204030204" pitchFamily="49" charset="0"/>
+              </a:rPr>
+            </a:br>
+            <a:r>
+              <a:rPr lang="en-US" altLang="zh-CN" b="0" dirty="0">
+                <a:solidFill>
+                  <a:srgbClr val="000000"/>
+                </a:solidFill>
+                <a:effectLst/>
+                <a:latin typeface="Consolas" panose="020B0609020204030204" pitchFamily="49" charset="0"/>
+              </a:rPr>
+              <a:t>For Condition Start Statements: (</a:t>
+            </a:r>
+            <a:r>
+              <a:rPr lang="en-US" altLang="zh-CN" b="0" dirty="0">
+                <a:solidFill>
+                  <a:srgbClr val="800000"/>
+                </a:solidFill>
+                <a:effectLst/>
+                <a:latin typeface="Consolas" panose="020B0609020204030204" pitchFamily="49" charset="0"/>
+              </a:rPr>
+              <a:t>`if`</a:t>
+            </a:r>
+            <a:r>
+              <a:rPr lang="en-US" altLang="zh-CN" b="0" dirty="0">
+                <a:solidFill>
+                  <a:srgbClr val="000000"/>
+                </a:solidFill>
+                <a:effectLst/>
+                <a:latin typeface="Consolas" panose="020B0609020204030204" pitchFamily="49" charset="0"/>
+              </a:rPr>
+              <a:t>, </a:t>
+            </a:r>
+            <a:r>
+              <a:rPr lang="en-US" altLang="zh-CN" b="0" dirty="0">
+                <a:solidFill>
+                  <a:srgbClr val="800000"/>
+                </a:solidFill>
+                <a:effectLst/>
+                <a:latin typeface="Consolas" panose="020B0609020204030204" pitchFamily="49" charset="0"/>
+              </a:rPr>
+              <a:t>`while`</a:t>
+            </a:r>
+            <a:r>
+              <a:rPr lang="en-US" altLang="zh-CN" b="0" dirty="0">
+                <a:solidFill>
+                  <a:srgbClr val="000000"/>
+                </a:solidFill>
+                <a:effectLst/>
+                <a:latin typeface="Consolas" panose="020B0609020204030204" pitchFamily="49" charset="0"/>
+              </a:rPr>
+              <a:t>, </a:t>
+            </a:r>
+            <a:r>
+              <a:rPr lang="en-US" altLang="zh-CN" b="0" dirty="0">
+                <a:solidFill>
+                  <a:srgbClr val="800000"/>
+                </a:solidFill>
+                <a:effectLst/>
+                <a:latin typeface="Consolas" panose="020B0609020204030204" pitchFamily="49" charset="0"/>
+              </a:rPr>
+              <a:t>`for`</a:t>
+            </a:r>
+            <a:r>
+              <a:rPr lang="en-US" altLang="zh-CN" b="0" dirty="0">
+                <a:solidFill>
+                  <a:srgbClr val="000000"/>
+                </a:solidFill>
+                <a:effectLst/>
+                <a:latin typeface="Consolas" panose="020B0609020204030204" pitchFamily="49" charset="0"/>
+              </a:rPr>
+              <a:t>, </a:t>
+            </a:r>
+            <a:r>
+              <a:rPr lang="en-US" altLang="zh-CN" b="0" dirty="0">
+                <a:solidFill>
+                  <a:srgbClr val="800000"/>
+                </a:solidFill>
+                <a:effectLst/>
+                <a:latin typeface="Consolas" panose="020B0609020204030204" pitchFamily="49" charset="0"/>
+              </a:rPr>
+              <a:t>`try`</a:t>
+            </a:r>
+            <a:r>
+              <a:rPr lang="en-US" altLang="zh-CN" b="0" dirty="0">
+                <a:solidFill>
+                  <a:srgbClr val="000000"/>
+                </a:solidFill>
+                <a:effectLst/>
+                <a:latin typeface="Consolas" panose="020B0609020204030204" pitchFamily="49" charset="0"/>
+              </a:rPr>
+              <a:t>)</a:t>
+            </a:r>
+            <a:br>
+              <a:rPr lang="en-US" altLang="zh-CN" b="0" dirty="0">
+                <a:solidFill>
+                  <a:srgbClr val="000000"/>
+                </a:solidFill>
+                <a:effectLst/>
+                <a:latin typeface="Consolas" panose="020B0609020204030204" pitchFamily="49" charset="0"/>
+              </a:rPr>
+            </a:br>
+            <a:r>
+              <a:rPr lang="en-US" altLang="zh-CN" b="0" dirty="0">
+                <a:solidFill>
+                  <a:srgbClr val="000000"/>
+                </a:solidFill>
+                <a:effectLst/>
+                <a:latin typeface="Consolas" panose="020B0609020204030204" pitchFamily="49" charset="0"/>
+              </a:rPr>
+              <a:t>    1. Create a new `Condition`:</a:t>
+            </a:r>
+          </a:p>
+          <a:p>
+            <a:r>
+              <a:rPr lang="en-US" altLang="zh-CN" b="0" dirty="0">
+                <a:solidFill>
+                  <a:srgbClr val="000000"/>
+                </a:solidFill>
+                <a:effectLst/>
+                <a:latin typeface="Consolas" panose="020B0609020204030204" pitchFamily="49" charset="0"/>
+              </a:rPr>
+              <a:t>        * `</a:t>
+            </a:r>
+            <a:r>
+              <a:rPr lang="en-US" altLang="zh-CN" b="0" dirty="0" err="1">
+                <a:solidFill>
+                  <a:srgbClr val="000000"/>
+                </a:solidFill>
+                <a:effectLst/>
+                <a:latin typeface="Consolas" panose="020B0609020204030204" pitchFamily="49" charset="0"/>
+              </a:rPr>
+              <a:t>parent_node</a:t>
+            </a:r>
+            <a:r>
+              <a:rPr lang="en-US" altLang="zh-CN" b="0" dirty="0">
+                <a:solidFill>
+                  <a:srgbClr val="000000"/>
+                </a:solidFill>
+                <a:effectLst/>
+                <a:latin typeface="Consolas" panose="020B0609020204030204" pitchFamily="49" charset="0"/>
+              </a:rPr>
+              <a:t> = [current]`</a:t>
+            </a:r>
+          </a:p>
+          <a:p>
+            <a:r>
+              <a:rPr lang="en-US" altLang="zh-CN" b="0" dirty="0">
+                <a:solidFill>
+                  <a:srgbClr val="000000"/>
+                </a:solidFill>
+                <a:effectLst/>
+                <a:latin typeface="Consolas" panose="020B0609020204030204" pitchFamily="49" charset="0"/>
+              </a:rPr>
+              <a:t>        * `content = line without trailing ':'`</a:t>
+            </a:r>
+          </a:p>
+          <a:p>
+            <a:r>
+              <a:rPr lang="en-US" altLang="zh-CN" b="0" dirty="0">
+                <a:solidFill>
+                  <a:srgbClr val="000000"/>
+                </a:solidFill>
+                <a:effectLst/>
+                <a:latin typeface="Consolas" panose="020B0609020204030204" pitchFamily="49" charset="0"/>
+              </a:rPr>
+              <a:t>    2. …</a:t>
+            </a:r>
+            <a:br>
+              <a:rPr lang="en-US" altLang="zh-CN" b="0" dirty="0">
+                <a:solidFill>
+                  <a:srgbClr val="000000"/>
+                </a:solidFill>
+                <a:effectLst/>
+                <a:latin typeface="Consolas" panose="020B0609020204030204" pitchFamily="49" charset="0"/>
+              </a:rPr>
+            </a:br>
+            <a:r>
+              <a:rPr lang="en-US" altLang="zh-CN" b="0" dirty="0">
+                <a:solidFill>
+                  <a:srgbClr val="000000"/>
+                </a:solidFill>
+                <a:effectLst/>
+                <a:latin typeface="Consolas" panose="020B0609020204030204" pitchFamily="49" charset="0"/>
+              </a:rPr>
+              <a:t>For Condition Middle Statements: (</a:t>
+            </a:r>
+            <a:r>
+              <a:rPr lang="en-US" altLang="zh-CN" b="0" dirty="0">
+                <a:solidFill>
+                  <a:srgbClr val="800000"/>
+                </a:solidFill>
+                <a:effectLst/>
+                <a:latin typeface="Consolas" panose="020B0609020204030204" pitchFamily="49" charset="0"/>
+              </a:rPr>
+              <a:t>`</a:t>
+            </a:r>
+            <a:r>
+              <a:rPr lang="en-US" altLang="zh-CN" b="0" dirty="0" err="1">
+                <a:solidFill>
+                  <a:srgbClr val="800000"/>
+                </a:solidFill>
+                <a:effectLst/>
+                <a:latin typeface="Consolas" panose="020B0609020204030204" pitchFamily="49" charset="0"/>
+              </a:rPr>
+              <a:t>elif</a:t>
+            </a:r>
+            <a:r>
+              <a:rPr lang="en-US" altLang="zh-CN" b="0" dirty="0">
+                <a:solidFill>
+                  <a:srgbClr val="800000"/>
+                </a:solidFill>
+                <a:effectLst/>
+                <a:latin typeface="Consolas" panose="020B0609020204030204" pitchFamily="49" charset="0"/>
+              </a:rPr>
+              <a:t>`</a:t>
+            </a:r>
+            <a:r>
+              <a:rPr lang="en-US" altLang="zh-CN" b="0" dirty="0">
+                <a:solidFill>
+                  <a:srgbClr val="000000"/>
+                </a:solidFill>
+                <a:effectLst/>
+                <a:latin typeface="Consolas" panose="020B0609020204030204" pitchFamily="49" charset="0"/>
+              </a:rPr>
+              <a:t>, </a:t>
+            </a:r>
+            <a:r>
+              <a:rPr lang="en-US" altLang="zh-CN" b="0" dirty="0">
+                <a:solidFill>
+                  <a:srgbClr val="800000"/>
+                </a:solidFill>
+                <a:effectLst/>
+                <a:latin typeface="Consolas" panose="020B0609020204030204" pitchFamily="49" charset="0"/>
+              </a:rPr>
+              <a:t>`else`</a:t>
+            </a:r>
+            <a:r>
+              <a:rPr lang="en-US" altLang="zh-CN" b="0" dirty="0">
+                <a:solidFill>
+                  <a:srgbClr val="000000"/>
+                </a:solidFill>
+                <a:effectLst/>
+                <a:latin typeface="Consolas" panose="020B0609020204030204" pitchFamily="49" charset="0"/>
+              </a:rPr>
+              <a:t>, </a:t>
+            </a:r>
+            <a:r>
+              <a:rPr lang="en-US" altLang="zh-CN" b="0" dirty="0">
+                <a:solidFill>
+                  <a:srgbClr val="800000"/>
+                </a:solidFill>
+                <a:effectLst/>
+                <a:latin typeface="Consolas" panose="020B0609020204030204" pitchFamily="49" charset="0"/>
+              </a:rPr>
+              <a:t>`except`</a:t>
+            </a:r>
+            <a:r>
+              <a:rPr lang="en-US" altLang="zh-CN" b="0" dirty="0">
+                <a:solidFill>
+                  <a:srgbClr val="000000"/>
+                </a:solidFill>
+                <a:effectLst/>
+                <a:latin typeface="Consolas" panose="020B0609020204030204" pitchFamily="49" charset="0"/>
+              </a:rPr>
+              <a:t>)</a:t>
+            </a:r>
+          </a:p>
+          <a:p>
+            <a:r>
+              <a:rPr lang="en-US" altLang="zh-CN" b="0" dirty="0">
+                <a:solidFill>
+                  <a:srgbClr val="000000"/>
+                </a:solidFill>
+                <a:effectLst/>
+                <a:latin typeface="Consolas" panose="020B0609020204030204" pitchFamily="49" charset="0"/>
+              </a:rPr>
+              <a:t>…</a:t>
+            </a:r>
+            <a:br>
+              <a:rPr lang="en-US" altLang="zh-CN" b="0" dirty="0">
+                <a:solidFill>
+                  <a:srgbClr val="000000"/>
+                </a:solidFill>
+                <a:effectLst/>
+                <a:latin typeface="Consolas" panose="020B0609020204030204" pitchFamily="49" charset="0"/>
+              </a:rPr>
+            </a:br>
+            <a:r>
+              <a:rPr lang="en-US" altLang="zh-CN" b="1" dirty="0">
+                <a:solidFill>
+                  <a:srgbClr val="800000"/>
+                </a:solidFill>
+                <a:effectLst/>
+                <a:latin typeface="Consolas" panose="020B0609020204030204" pitchFamily="49" charset="0"/>
+              </a:rPr>
+              <a:t>###### </a:t>
+            </a:r>
+            <a:r>
+              <a:rPr lang="en-US" altLang="zh-CN" b="1" dirty="0">
+                <a:solidFill>
+                  <a:srgbClr val="000000"/>
+                </a:solidFill>
+                <a:effectLst/>
+                <a:latin typeface="Consolas" panose="020B0609020204030204" pitchFamily="49" charset="0"/>
+              </a:rPr>
+              <a:t>If statement is an Ordinary Statement:</a:t>
+            </a:r>
+            <a:endParaRPr lang="en-US" altLang="zh-CN" b="0" dirty="0">
+              <a:solidFill>
+                <a:srgbClr val="000000"/>
+              </a:solidFill>
+              <a:effectLst/>
+              <a:latin typeface="Consolas" panose="020B0609020204030204" pitchFamily="49" charset="0"/>
+            </a:endParaRPr>
+          </a:p>
+          <a:p>
+            <a:r>
+              <a:rPr lang="en-US" altLang="zh-CN" b="0" dirty="0">
+                <a:solidFill>
+                  <a:srgbClr val="000000"/>
+                </a:solidFill>
+                <a:effectLst/>
+                <a:latin typeface="Consolas" panose="020B0609020204030204" pitchFamily="49" charset="0"/>
+              </a:rPr>
+              <a:t>…</a:t>
+            </a:r>
+            <a:br>
+              <a:rPr lang="en-US" altLang="zh-CN" b="0" dirty="0">
+                <a:solidFill>
+                  <a:srgbClr val="000000"/>
+                </a:solidFill>
+                <a:effectLst/>
+                <a:latin typeface="Consolas" panose="020B0609020204030204" pitchFamily="49" charset="0"/>
+              </a:rPr>
+            </a:br>
+            <a:r>
+              <a:rPr lang="en-US" altLang="zh-CN" b="0" dirty="0">
+                <a:solidFill>
+                  <a:srgbClr val="000000"/>
+                </a:solidFill>
+                <a:effectLst/>
+                <a:latin typeface="Consolas" panose="020B0609020204030204" pitchFamily="49" charset="0"/>
+              </a:rPr>
+              <a:t>Let </a:t>
+            </a:r>
+            <a:r>
+              <a:rPr lang="en-US" altLang="zh-CN" b="0" dirty="0">
+                <a:solidFill>
+                  <a:srgbClr val="800000"/>
+                </a:solidFill>
+                <a:effectLst/>
+                <a:latin typeface="Consolas" panose="020B0609020204030204" pitchFamily="49" charset="0"/>
+              </a:rPr>
+              <a:t>`indent`</a:t>
+            </a:r>
+            <a:r>
+              <a:rPr lang="en-US" altLang="zh-CN" b="0" dirty="0">
+                <a:solidFill>
+                  <a:srgbClr val="000000"/>
+                </a:solidFill>
+                <a:effectLst/>
+                <a:latin typeface="Consolas" panose="020B0609020204030204" pitchFamily="49" charset="0"/>
+              </a:rPr>
+              <a:t> be current indentation.</a:t>
+            </a:r>
+          </a:p>
+          <a:p>
+            <a:br>
+              <a:rPr lang="en-US" altLang="zh-CN" b="0" dirty="0">
+                <a:solidFill>
+                  <a:srgbClr val="000000"/>
+                </a:solidFill>
+                <a:effectLst/>
+                <a:latin typeface="Consolas" panose="020B0609020204030204" pitchFamily="49" charset="0"/>
+              </a:rPr>
+            </a:br>
+            <a:r>
+              <a:rPr lang="en-US" altLang="zh-CN" b="0" dirty="0">
+                <a:solidFill>
+                  <a:srgbClr val="000000"/>
+                </a:solidFill>
+                <a:effectLst/>
+                <a:latin typeface="Consolas" panose="020B0609020204030204" pitchFamily="49" charset="0"/>
+              </a:rPr>
+              <a:t>Case A: Indentation Increases (Entering Condition Body)</a:t>
+            </a:r>
+            <a:br>
+              <a:rPr lang="en-US" altLang="zh-CN" b="0" dirty="0">
+                <a:solidFill>
+                  <a:srgbClr val="000000"/>
+                </a:solidFill>
+                <a:effectLst/>
+                <a:latin typeface="Consolas" panose="020B0609020204030204" pitchFamily="49" charset="0"/>
+              </a:rPr>
+            </a:br>
+            <a:r>
+              <a:rPr lang="en-US" altLang="zh-CN" b="0" dirty="0">
+                <a:solidFill>
+                  <a:srgbClr val="0451A5"/>
+                </a:solidFill>
+                <a:effectLst/>
+                <a:latin typeface="Consolas" panose="020B0609020204030204" pitchFamily="49" charset="0"/>
+              </a:rPr>
+              <a:t>*</a:t>
+            </a:r>
+            <a:r>
+              <a:rPr lang="en-US" altLang="zh-CN" b="0" dirty="0">
+                <a:solidFill>
+                  <a:srgbClr val="000000"/>
+                </a:solidFill>
+                <a:effectLst/>
+                <a:latin typeface="Consolas" panose="020B0609020204030204" pitchFamily="49" charset="0"/>
+              </a:rPr>
+              <a:t> If </a:t>
+            </a:r>
+            <a:r>
+              <a:rPr lang="en-US" altLang="zh-CN" b="0" dirty="0">
+                <a:solidFill>
+                  <a:srgbClr val="800000"/>
+                </a:solidFill>
+                <a:effectLst/>
+                <a:latin typeface="Consolas" panose="020B0609020204030204" pitchFamily="49" charset="0"/>
+              </a:rPr>
+              <a:t>`</a:t>
+            </a:r>
+            <a:r>
+              <a:rPr lang="en-US" altLang="zh-CN" b="0" dirty="0" err="1">
+                <a:solidFill>
+                  <a:srgbClr val="800000"/>
+                </a:solidFill>
+                <a:effectLst/>
+                <a:latin typeface="Consolas" panose="020B0609020204030204" pitchFamily="49" charset="0"/>
+              </a:rPr>
+              <a:t>CS.top</a:t>
+            </a:r>
+            <a:r>
+              <a:rPr lang="en-US" altLang="zh-CN" b="0" dirty="0">
+                <a:solidFill>
+                  <a:srgbClr val="800000"/>
+                </a:solidFill>
+                <a:effectLst/>
+                <a:latin typeface="Consolas" panose="020B0609020204030204" pitchFamily="49" charset="0"/>
+              </a:rPr>
+              <a:t>()`</a:t>
+            </a:r>
+            <a:r>
+              <a:rPr lang="en-US" altLang="zh-CN" b="0" dirty="0">
+                <a:solidFill>
+                  <a:srgbClr val="000000"/>
+                </a:solidFill>
+                <a:effectLst/>
+                <a:latin typeface="Consolas" panose="020B0609020204030204" pitchFamily="49" charset="0"/>
+              </a:rPr>
+              <a:t> exists:</a:t>
+            </a:r>
+          </a:p>
+          <a:p>
+            <a:r>
+              <a:rPr lang="en-US" altLang="zh-CN" b="0" dirty="0">
+                <a:solidFill>
+                  <a:srgbClr val="000000"/>
+                </a:solidFill>
+                <a:effectLst/>
+                <a:latin typeface="Consolas" panose="020B0609020204030204" pitchFamily="49" charset="0"/>
+              </a:rPr>
+              <a:t>  </a:t>
+            </a:r>
+            <a:r>
+              <a:rPr lang="en-US" altLang="zh-CN" b="0" dirty="0">
+                <a:solidFill>
+                  <a:srgbClr val="0451A5"/>
+                </a:solidFill>
+                <a:effectLst/>
+                <a:latin typeface="Consolas" panose="020B0609020204030204" pitchFamily="49" charset="0"/>
+              </a:rPr>
+              <a:t>*</a:t>
+            </a:r>
+            <a:r>
+              <a:rPr lang="en-US" altLang="zh-CN" b="0" dirty="0">
+                <a:solidFill>
+                  <a:srgbClr val="000000"/>
+                </a:solidFill>
+                <a:effectLst/>
+                <a:latin typeface="Consolas" panose="020B0609020204030204" pitchFamily="49" charset="0"/>
+              </a:rPr>
+              <a:t> Add edge: </a:t>
+            </a:r>
+            <a:r>
+              <a:rPr lang="en-US" altLang="zh-CN" b="0" dirty="0">
+                <a:solidFill>
+                  <a:srgbClr val="800000"/>
+                </a:solidFill>
+                <a:effectLst/>
+                <a:latin typeface="Consolas" panose="020B0609020204030204" pitchFamily="49" charset="0"/>
+              </a:rPr>
+              <a:t>`current → node`</a:t>
+            </a:r>
+            <a:r>
+              <a:rPr lang="en-US" altLang="zh-CN" b="0" dirty="0">
+                <a:solidFill>
+                  <a:srgbClr val="000000"/>
+                </a:solidFill>
+                <a:effectLst/>
+                <a:latin typeface="Consolas" panose="020B0609020204030204" pitchFamily="49" charset="0"/>
+              </a:rPr>
+              <a:t> with condition = </a:t>
+            </a:r>
+            <a:r>
+              <a:rPr lang="en-US" altLang="zh-CN" b="0" dirty="0">
+                <a:solidFill>
+                  <a:srgbClr val="800000"/>
+                </a:solidFill>
+                <a:effectLst/>
+                <a:latin typeface="Consolas" panose="020B0609020204030204" pitchFamily="49" charset="0"/>
+              </a:rPr>
+              <a:t>`</a:t>
+            </a:r>
+            <a:r>
+              <a:rPr lang="en-US" altLang="zh-CN" b="0" dirty="0" err="1">
+                <a:solidFill>
+                  <a:srgbClr val="800000"/>
+                </a:solidFill>
+                <a:effectLst/>
+                <a:latin typeface="Consolas" panose="020B0609020204030204" pitchFamily="49" charset="0"/>
+              </a:rPr>
+              <a:t>CS.top</a:t>
+            </a:r>
+            <a:r>
+              <a:rPr lang="en-US" altLang="zh-CN" b="0" dirty="0">
+                <a:solidFill>
+                  <a:srgbClr val="800000"/>
+                </a:solidFill>
+                <a:effectLst/>
+                <a:latin typeface="Consolas" panose="020B0609020204030204" pitchFamily="49" charset="0"/>
+              </a:rPr>
+              <a:t>()`</a:t>
+            </a:r>
+            <a:endParaRPr lang="en-US" altLang="zh-CN" b="0" dirty="0">
+              <a:solidFill>
+                <a:srgbClr val="000000"/>
+              </a:solidFill>
+              <a:effectLst/>
+              <a:latin typeface="Consolas" panose="020B0609020204030204" pitchFamily="49" charset="0"/>
+            </a:endParaRPr>
+          </a:p>
+          <a:p>
+            <a:r>
+              <a:rPr lang="en-US" altLang="zh-CN" b="0" dirty="0">
+                <a:solidFill>
+                  <a:srgbClr val="000000"/>
+                </a:solidFill>
+                <a:effectLst/>
+                <a:latin typeface="Consolas" panose="020B0609020204030204" pitchFamily="49" charset="0"/>
+              </a:rPr>
+              <a:t>  </a:t>
+            </a:r>
+            <a:r>
+              <a:rPr lang="en-US" altLang="zh-CN" b="0" dirty="0">
+                <a:solidFill>
+                  <a:srgbClr val="0451A5"/>
+                </a:solidFill>
+                <a:effectLst/>
+                <a:latin typeface="Consolas" panose="020B0609020204030204" pitchFamily="49" charset="0"/>
+              </a:rPr>
+              <a:t>*</a:t>
+            </a:r>
+            <a:r>
+              <a:rPr lang="en-US" altLang="zh-CN" b="0" dirty="0">
+                <a:solidFill>
+                  <a:srgbClr val="000000"/>
+                </a:solidFill>
+                <a:effectLst/>
+                <a:latin typeface="Consolas" panose="020B0609020204030204" pitchFamily="49" charset="0"/>
+              </a:rPr>
+              <a:t> Push indentation</a:t>
+            </a:r>
+            <a:br>
+              <a:rPr lang="en-US" altLang="zh-CN" b="0" dirty="0">
+                <a:solidFill>
+                  <a:srgbClr val="000000"/>
+                </a:solidFill>
+                <a:effectLst/>
+                <a:latin typeface="Consolas" panose="020B0609020204030204" pitchFamily="49" charset="0"/>
+              </a:rPr>
+            </a:br>
+            <a:r>
+              <a:rPr lang="en-US" altLang="zh-CN" b="0" dirty="0">
+                <a:solidFill>
+                  <a:srgbClr val="000000"/>
+                </a:solidFill>
+                <a:effectLst/>
+                <a:latin typeface="Consolas" panose="020B0609020204030204" pitchFamily="49" charset="0"/>
+              </a:rPr>
+              <a:t>Case B: Same Indentation, Condition Active</a:t>
+            </a:r>
+          </a:p>
+          <a:p>
+            <a:r>
+              <a:rPr lang="en-US" altLang="zh-CN" b="0" dirty="0">
+                <a:solidFill>
+                  <a:srgbClr val="000000"/>
+                </a:solidFill>
+                <a:effectLst/>
+                <a:latin typeface="Consolas" panose="020B0609020204030204" pitchFamily="49" charset="0"/>
+              </a:rPr>
+              <a:t>…</a:t>
+            </a:r>
+            <a:br>
+              <a:rPr lang="en-US" altLang="zh-CN" b="0" dirty="0">
+                <a:solidFill>
+                  <a:srgbClr val="000000"/>
+                </a:solidFill>
+                <a:effectLst/>
+                <a:latin typeface="Consolas" panose="020B0609020204030204" pitchFamily="49" charset="0"/>
+              </a:rPr>
+            </a:br>
+            <a:r>
+              <a:rPr lang="en-US" altLang="zh-CN" b="0" dirty="0">
+                <a:solidFill>
+                  <a:srgbClr val="000000"/>
+                </a:solidFill>
+                <a:effectLst/>
+                <a:latin typeface="Consolas" panose="020B0609020204030204" pitchFamily="49" charset="0"/>
+              </a:rPr>
+              <a:t>Case C: Indentation Ends</a:t>
+            </a:r>
+          </a:p>
+          <a:p>
+            <a:r>
+              <a:rPr lang="en-US" altLang="zh-CN" b="0" dirty="0">
+                <a:solidFill>
+                  <a:srgbClr val="000000"/>
+                </a:solidFill>
+                <a:effectLst/>
+                <a:latin typeface="Consolas" panose="020B0609020204030204" pitchFamily="49" charset="0"/>
+              </a:rPr>
+              <a:t>…</a:t>
+            </a:r>
+            <a:br>
+              <a:rPr lang="en-US" altLang="zh-CN" b="0" dirty="0">
+                <a:solidFill>
+                  <a:srgbClr val="000000"/>
+                </a:solidFill>
+                <a:effectLst/>
+                <a:latin typeface="Consolas" panose="020B0609020204030204" pitchFamily="49" charset="0"/>
+              </a:rPr>
+            </a:br>
+            <a:r>
+              <a:rPr lang="en-US" altLang="zh-CN" b="1" dirty="0">
+                <a:solidFill>
+                  <a:srgbClr val="800000"/>
+                </a:solidFill>
+                <a:effectLst/>
+                <a:latin typeface="Consolas" panose="020B0609020204030204" pitchFamily="49" charset="0"/>
+              </a:rPr>
+              <a:t>###### </a:t>
+            </a:r>
+            <a:r>
+              <a:rPr lang="en-US" altLang="zh-CN" b="1" dirty="0">
+                <a:solidFill>
+                  <a:srgbClr val="000000"/>
+                </a:solidFill>
+                <a:effectLst/>
+                <a:latin typeface="Consolas" panose="020B0609020204030204" pitchFamily="49" charset="0"/>
+              </a:rPr>
+              <a:t>Finalization</a:t>
+            </a:r>
+            <a:br>
+              <a:rPr lang="en-US" altLang="zh-CN" b="0" dirty="0">
+                <a:solidFill>
+                  <a:srgbClr val="000000"/>
+                </a:solidFill>
+                <a:effectLst/>
+                <a:latin typeface="Consolas" panose="020B0609020204030204" pitchFamily="49" charset="0"/>
+              </a:rPr>
+            </a:br>
+            <a:r>
+              <a:rPr lang="en-US" altLang="zh-CN" b="0" dirty="0">
+                <a:solidFill>
+                  <a:srgbClr val="0451A5"/>
+                </a:solidFill>
+                <a:effectLst/>
+                <a:latin typeface="Consolas" panose="020B0609020204030204" pitchFamily="49" charset="0"/>
+              </a:rPr>
+              <a:t>1.</a:t>
+            </a:r>
+            <a:r>
+              <a:rPr lang="en-US" altLang="zh-CN" b="0" dirty="0">
+                <a:solidFill>
+                  <a:srgbClr val="000000"/>
+                </a:solidFill>
+                <a:effectLst/>
+                <a:latin typeface="Consolas" panose="020B0609020204030204" pitchFamily="49" charset="0"/>
+              </a:rPr>
+              <a:t> Pop all remaining conditions in </a:t>
+            </a:r>
+            <a:r>
+              <a:rPr lang="en-US" altLang="zh-CN" b="0" dirty="0">
+                <a:solidFill>
+                  <a:srgbClr val="800000"/>
+                </a:solidFill>
+                <a:effectLst/>
+                <a:latin typeface="Consolas" panose="020B0609020204030204" pitchFamily="49" charset="0"/>
+              </a:rPr>
+              <a:t>`CS`</a:t>
+            </a:r>
+            <a:endParaRPr lang="en-US" altLang="zh-CN" b="0" dirty="0">
+              <a:solidFill>
+                <a:srgbClr val="000000"/>
+              </a:solidFill>
+              <a:effectLst/>
+              <a:latin typeface="Consolas" panose="020B0609020204030204" pitchFamily="49" charset="0"/>
+            </a:endParaRPr>
+          </a:p>
+          <a:p>
+            <a:r>
+              <a:rPr lang="en-US" altLang="zh-CN" b="0" dirty="0">
+                <a:solidFill>
+                  <a:srgbClr val="0451A5"/>
+                </a:solidFill>
+                <a:effectLst/>
+                <a:latin typeface="Consolas" panose="020B0609020204030204" pitchFamily="49" charset="0"/>
+              </a:rPr>
+              <a:t>2.</a:t>
+            </a:r>
+            <a:r>
+              <a:rPr lang="en-US" altLang="zh-CN" b="0" dirty="0">
+                <a:solidFill>
+                  <a:srgbClr val="000000"/>
+                </a:solidFill>
+                <a:effectLst/>
+                <a:latin typeface="Consolas" panose="020B0609020204030204" pitchFamily="49" charset="0"/>
+              </a:rPr>
+              <a:t> For each parent node of those conditions:</a:t>
+            </a:r>
+          </a:p>
+          <a:p>
+            <a:r>
+              <a:rPr lang="en-US" altLang="zh-CN" b="0" dirty="0">
+                <a:solidFill>
+                  <a:srgbClr val="000000"/>
+                </a:solidFill>
+                <a:effectLst/>
+                <a:latin typeface="Consolas" panose="020B0609020204030204" pitchFamily="49" charset="0"/>
+              </a:rPr>
+              <a:t>   </a:t>
+            </a:r>
+            <a:r>
+              <a:rPr lang="en-US" altLang="zh-CN" b="0" dirty="0">
+                <a:solidFill>
+                  <a:srgbClr val="0451A5"/>
+                </a:solidFill>
+                <a:effectLst/>
+                <a:latin typeface="Consolas" panose="020B0609020204030204" pitchFamily="49" charset="0"/>
+              </a:rPr>
+              <a:t>*</a:t>
+            </a:r>
+            <a:r>
+              <a:rPr lang="en-US" altLang="zh-CN" b="0" dirty="0">
+                <a:solidFill>
+                  <a:srgbClr val="000000"/>
+                </a:solidFill>
+                <a:effectLst/>
+                <a:latin typeface="Consolas" panose="020B0609020204030204" pitchFamily="49" charset="0"/>
+              </a:rPr>
+              <a:t> Add edge to </a:t>
+            </a:r>
+            <a:r>
+              <a:rPr lang="en-US" altLang="zh-CN" b="0" dirty="0">
+                <a:solidFill>
+                  <a:srgbClr val="800000"/>
+                </a:solidFill>
+                <a:effectLst/>
+                <a:latin typeface="Consolas" panose="020B0609020204030204" pitchFamily="49" charset="0"/>
+              </a:rPr>
+              <a:t>`END`</a:t>
+            </a:r>
+            <a:endParaRPr lang="en-US" altLang="zh-CN" b="0" dirty="0">
+              <a:solidFill>
+                <a:srgbClr val="000000"/>
+              </a:solidFill>
+              <a:effectLst/>
+              <a:latin typeface="Consolas" panose="020B0609020204030204" pitchFamily="49" charset="0"/>
+            </a:endParaRPr>
+          </a:p>
+          <a:p>
+            <a:r>
+              <a:rPr lang="en-US" altLang="zh-CN" b="0" dirty="0">
+                <a:solidFill>
+                  <a:srgbClr val="0451A5"/>
+                </a:solidFill>
+                <a:effectLst/>
+                <a:latin typeface="Consolas" panose="020B0609020204030204" pitchFamily="49" charset="0"/>
+              </a:rPr>
+              <a:t>3.</a:t>
+            </a:r>
+            <a:r>
+              <a:rPr lang="en-US" altLang="zh-CN" b="0" dirty="0">
+                <a:solidFill>
+                  <a:srgbClr val="000000"/>
+                </a:solidFill>
+                <a:effectLst/>
+                <a:latin typeface="Consolas" panose="020B0609020204030204" pitchFamily="49" charset="0"/>
+              </a:rPr>
+              <a:t> If </a:t>
+            </a:r>
+            <a:r>
+              <a:rPr lang="en-US" altLang="zh-CN" b="0" dirty="0">
+                <a:solidFill>
+                  <a:srgbClr val="800000"/>
+                </a:solidFill>
+                <a:effectLst/>
+                <a:latin typeface="Consolas" panose="020B0609020204030204" pitchFamily="49" charset="0"/>
+              </a:rPr>
+              <a:t>`current`</a:t>
+            </a:r>
+            <a:r>
+              <a:rPr lang="en-US" altLang="zh-CN" b="0" dirty="0">
+                <a:solidFill>
+                  <a:srgbClr val="000000"/>
+                </a:solidFill>
+                <a:effectLst/>
+                <a:latin typeface="Consolas" panose="020B0609020204030204" pitchFamily="49" charset="0"/>
+              </a:rPr>
+              <a:t> is not </a:t>
+            </a:r>
+            <a:r>
+              <a:rPr lang="en-US" altLang="zh-CN" b="0" dirty="0">
+                <a:solidFill>
+                  <a:srgbClr val="800000"/>
+                </a:solidFill>
+                <a:effectLst/>
+                <a:latin typeface="Consolas" panose="020B0609020204030204" pitchFamily="49" charset="0"/>
+              </a:rPr>
+              <a:t>`END`</a:t>
+            </a:r>
+            <a:r>
+              <a:rPr lang="en-US" altLang="zh-CN" b="0" dirty="0">
+                <a:solidFill>
+                  <a:srgbClr val="000000"/>
+                </a:solidFill>
+                <a:effectLst/>
+                <a:latin typeface="Consolas" panose="020B0609020204030204" pitchFamily="49" charset="0"/>
+              </a:rPr>
+              <a:t>, connect </a:t>
+            </a:r>
+            <a:r>
+              <a:rPr lang="en-US" altLang="zh-CN" b="0" dirty="0">
+                <a:solidFill>
+                  <a:srgbClr val="800000"/>
+                </a:solidFill>
+                <a:effectLst/>
+                <a:latin typeface="Consolas" panose="020B0609020204030204" pitchFamily="49" charset="0"/>
+              </a:rPr>
+              <a:t>`current → END`</a:t>
+            </a:r>
+            <a:endParaRPr lang="en-US" altLang="zh-CN" b="0" dirty="0">
+              <a:solidFill>
+                <a:srgbClr val="000000"/>
+              </a:solidFill>
+              <a:effectLst/>
+              <a:latin typeface="Consolas" panose="020B0609020204030204" pitchFamily="49" charset="0"/>
+            </a:endParaRPr>
           </a:p>
         </p:txBody>
       </p:sp>
@@ -5052,7 +5401,7 @@
         <p:spPr>
           <a:xfrm>
             <a:off x="1850529" y="239911"/>
-            <a:ext cx="8676000" cy="7816069"/>
+            <a:ext cx="8676000" cy="4411603"/>
           </a:xfrm>
           <a:prstGeom prst="roundRect">
             <a:avLst>
@@ -5270,8 +5619,8 @@
         </p:nvSpPr>
         <p:spPr>
           <a:xfrm>
-            <a:off x="1850527" y="598961"/>
-            <a:ext cx="8676000" cy="7457019"/>
+            <a:off x="1850527" y="598962"/>
+            <a:ext cx="8676000" cy="4052552"/>
           </a:xfrm>
           <a:prstGeom prst="rect">
             <a:avLst/>
@@ -5304,7 +5653,7 @@
                 <a:ea typeface="Helvetica Neue" panose="02000503000000020004" pitchFamily="2" charset="0"/>
                 <a:cs typeface="Helvetica Neue" panose="02000503000000020004" pitchFamily="2" charset="0"/>
               </a:rPr>
-              <a:t>You are now a code analyst and reverse engineering expert, with in-depth knowledge of various encryption algorithms and the underlying principles of ransomware.</a:t>
+              <a:t>While constructing the CFG, Use the following data structure to record important nodes:</a:t>
             </a:r>
           </a:p>
           <a:p>
@@ -5328,77 +5677,21 @@
                 <a:ea typeface="Helvetica Neue" panose="02000503000000020004" pitchFamily="2" charset="0"/>
                 <a:cs typeface="Helvetica Neue" panose="02000503000000020004" pitchFamily="2" charset="0"/>
               </a:rPr>
-              <a:t>Your task is to determine whether the given code implements an encryption function.</a:t>
+              <a:t>* Parameter assignments and uses. For instance, PA_amount1 represents all nodes in CFG1 for code_v1 that contains an assignment to parameter `amount`</a:t>
             </a:r>
           </a:p>
           <a:p>
             <a:pPr marL="360000"/>
             <a:r>
-              <a:rPr lang="en-US" altLang="zh-CN" i="1" dirty="0">
-                <a:solidFill>
-                  <a:srgbClr val="FF0000"/>
-                </a:solidFill>
-                <a:latin typeface="Helvetica Neue" panose="02000503000000020004" pitchFamily="2" charset="0"/>
-                <a:ea typeface="Helvetica Neue" panose="02000503000000020004" pitchFamily="2" charset="0"/>
-                <a:cs typeface="Helvetica Neue" panose="02000503000000020004" pitchFamily="2" charset="0"/>
-              </a:rPr>
-              <a:t>Rules and conditions:</a:t>
-            </a:r>
-          </a:p>
-          <a:p>
-            <a:pPr marL="645750" indent="-285750">
-              <a:buFont typeface="Arial" panose="020B0604020202020204" pitchFamily="34" charset="0"/>
-              <a:buChar char="•"/>
-            </a:pPr>
-            <a:r>
-              <a:rPr lang="en-US" altLang="zh-CN" dirty="0">
-                <a:solidFill>
-                  <a:srgbClr val="FF0000"/>
-                </a:solidFill>
-                <a:latin typeface="Helvetica Neue" panose="02000503000000020004" pitchFamily="2" charset="0"/>
-                <a:ea typeface="Helvetica Neue" panose="02000503000000020004" pitchFamily="2" charset="0"/>
-                <a:cs typeface="Helvetica Neue" panose="02000503000000020004" pitchFamily="2" charset="0"/>
-              </a:rPr>
-              <a:t>If the code does not meet the criteria, set "</a:t>
-            </a:r>
-            <a:r>
-              <a:rPr lang="en-US" altLang="zh-CN" dirty="0" err="1">
-                <a:solidFill>
-                  <a:srgbClr val="FF0000"/>
-                </a:solidFill>
-                <a:latin typeface="Helvetica Neue" panose="02000503000000020004" pitchFamily="2" charset="0"/>
-                <a:ea typeface="Helvetica Neue" panose="02000503000000020004" pitchFamily="2" charset="0"/>
-                <a:cs typeface="Helvetica Neue" panose="02000503000000020004" pitchFamily="2" charset="0"/>
-              </a:rPr>
-              <a:t>is_encryption_function</a:t>
-            </a:r>
-            <a:r>
-              <a:rPr lang="en-US" altLang="zh-CN" dirty="0">
-                <a:solidFill>
-                  <a:srgbClr val="FF0000"/>
-                </a:solidFill>
-                <a:latin typeface="Helvetica Neue" panose="02000503000000020004" pitchFamily="2" charset="0"/>
-                <a:ea typeface="Helvetica Neue" panose="02000503000000020004" pitchFamily="2" charset="0"/>
-                <a:cs typeface="Helvetica Neue" panose="02000503000000020004" pitchFamily="2" charset="0"/>
-              </a:rPr>
-              <a:t>" to false.</a:t>
-            </a:r>
-          </a:p>
-          <a:p>
-            <a:pPr marL="645750" indent="-285750">
-              <a:buFont typeface="Arial" panose="020B0604020202020204" pitchFamily="34" charset="0"/>
-              <a:buChar char="•"/>
-            </a:pPr>
-            <a:r>
-              <a:rPr lang="en-US" altLang="zh-CN" dirty="0">
-                <a:solidFill>
-                  <a:srgbClr val="FF0000"/>
-                </a:solidFill>
-                <a:latin typeface="Helvetica Neue" panose="02000503000000020004" pitchFamily="2" charset="0"/>
-                <a:ea typeface="Helvetica Neue" panose="02000503000000020004" pitchFamily="2" charset="0"/>
-                <a:cs typeface="Helvetica Neue" panose="02000503000000020004" pitchFamily="2" charset="0"/>
-              </a:rPr>
-              <a:t>The output should be structured in JSON format: </a:t>
+              <a:rPr lang="en-US" altLang="zh-CN" dirty="0">
+                <a:solidFill>
+                  <a:srgbClr val="FF0000"/>
+                </a:solidFill>
+                <a:latin typeface="Helvetica Neue" panose="02000503000000020004" pitchFamily="2" charset="0"/>
+                <a:ea typeface="Helvetica Neue" panose="02000503000000020004" pitchFamily="2" charset="0"/>
+                <a:cs typeface="Helvetica Neue" panose="02000503000000020004" pitchFamily="2" charset="0"/>
+              </a:rPr>
+              <a:t>* Global variable assignments. Similar to Parameter but you have to decide which one is Global variable.</a:t>
             </a:r>
           </a:p>
           <a:p>
@@ -5412,7 +5705,7 @@
                 <a:ea typeface="Helvetica Neue" panose="02000503000000020004" pitchFamily="2" charset="0"/>
                 <a:cs typeface="Helvetica Neue" panose="02000503000000020004" pitchFamily="2" charset="0"/>
               </a:rPr>
-              <a:t>		{</a:t>
+              <a:t>* Return nodes. For instance, R1 represents all nodes in CFG1 for code_v1 that contains a `Return` Statement.</a:t>
             </a:r>
           </a:p>
           <a:p>
@@ -5426,51 +5719,7 @@
                 <a:ea typeface="Helvetica Neue" panose="02000503000000020004" pitchFamily="2" charset="0"/>
                 <a:cs typeface="Helvetica Neue" panose="02000503000000020004" pitchFamily="2" charset="0"/>
               </a:rPr>
-              <a:t>			"</a:t>
-            </a:r>
-            <a:r>
-              <a:rPr lang="en-US" altLang="zh-CN" dirty="0" err="1">
-                <a:solidFill>
-                  <a:srgbClr val="FF0000"/>
-                </a:solidFill>
-                <a:latin typeface="Helvetica Neue" panose="02000503000000020004" pitchFamily="2" charset="0"/>
-                <a:ea typeface="Helvetica Neue" panose="02000503000000020004" pitchFamily="2" charset="0"/>
-                <a:cs typeface="Helvetica Neue" panose="02000503000000020004" pitchFamily="2" charset="0"/>
-              </a:rPr>
-              <a:t>function_name</a:t>
-            </a:r>
-            <a:r>
-              <a:rPr lang="en-US" altLang="zh-CN" dirty="0">
-                <a:solidFill>
-                  <a:srgbClr val="FF0000"/>
-                </a:solidFill>
-                <a:latin typeface="Helvetica Neue" panose="02000503000000020004" pitchFamily="2" charset="0"/>
-                <a:ea typeface="Helvetica Neue" panose="02000503000000020004" pitchFamily="2" charset="0"/>
-                <a:cs typeface="Helvetica Neue" panose="02000503000000020004" pitchFamily="2" charset="0"/>
-              </a:rPr>
-              <a:t>": </a:t>
-            </a:r>
-            <a:r>
-              <a:rPr lang="zh-CN" altLang="en-US" dirty="0">
-                <a:solidFill>
-                  <a:srgbClr val="FF0000"/>
-                </a:solidFill>
-                <a:latin typeface="Helvetica Neue" panose="02000503000000020004" pitchFamily="2" charset="0"/>
-                <a:ea typeface="Helvetica Neue" panose="02000503000000020004" pitchFamily="2" charset="0"/>
-                <a:cs typeface="Helvetica Neue" panose="02000503000000020004" pitchFamily="2" charset="0"/>
-              </a:rPr>
-              <a:t> </a:t>
-            </a:r>
-            <a:r>
-              <a:rPr lang="en-US" altLang="zh-CN" dirty="0">
-                <a:solidFill>
-                  <a:srgbClr val="FF0000"/>
-                </a:solidFill>
-                <a:latin typeface="Helvetica Neue" panose="02000503000000020004" pitchFamily="2" charset="0"/>
-                <a:ea typeface="Helvetica Neue" panose="02000503000000020004" pitchFamily="2" charset="0"/>
-                <a:cs typeface="Helvetica Neue" panose="02000503000000020004" pitchFamily="2" charset="0"/>
-              </a:rPr>
-              <a:t>"", </a:t>
+              <a:t>* Exception nodes. Similar to Return.</a:t>
             </a:r>
           </a:p>
           <a:p>
@@ -5484,414 +5733,13 @@
                 <a:ea typeface="Helvetica Neue" panose="02000503000000020004" pitchFamily="2" charset="0"/>
                 <a:cs typeface="Helvetica Neue" panose="02000503000000020004" pitchFamily="2" charset="0"/>
               </a:rPr>
-              <a:t>			"</a:t>
-            </a:r>
-            <a:r>
-              <a:rPr lang="en-US" altLang="zh-CN" dirty="0" err="1">
-                <a:solidFill>
-                  <a:srgbClr val="FF0000"/>
-                </a:solidFill>
-                <a:latin typeface="Helvetica Neue" panose="02000503000000020004" pitchFamily="2" charset="0"/>
-                <a:ea typeface="Helvetica Neue" panose="02000503000000020004" pitchFamily="2" charset="0"/>
-                <a:cs typeface="Helvetica Neue" panose="02000503000000020004" pitchFamily="2" charset="0"/>
-              </a:rPr>
-              <a:t>is_encryption_function</a:t>
-            </a:r>
-            <a:r>
-              <a:rPr lang="en-US" altLang="zh-CN" dirty="0">
-                <a:solidFill>
-                  <a:srgbClr val="FF0000"/>
-                </a:solidFill>
-                <a:latin typeface="Helvetica Neue" panose="02000503000000020004" pitchFamily="2" charset="0"/>
-                <a:ea typeface="Helvetica Neue" panose="02000503000000020004" pitchFamily="2" charset="0"/>
-                <a:cs typeface="Helvetica Neue" panose="02000503000000020004" pitchFamily="2" charset="0"/>
-              </a:rPr>
-              <a:t>": true/false,</a:t>
-            </a:r>
-          </a:p>
-          <a:p>
-            <a:pPr marL="360000"/>
-            <a:r>
-              <a:rPr lang="en-US" altLang="zh-CN" dirty="0">
-                <a:solidFill>
-                  <a:srgbClr val="FF0000"/>
-                </a:solidFill>
-                <a:latin typeface="Helvetica Neue" panose="02000503000000020004" pitchFamily="2" charset="0"/>
-                <a:ea typeface="Helvetica Neue" panose="02000503000000020004" pitchFamily="2" charset="0"/>
-                <a:cs typeface="Helvetica Neue" panose="02000503000000020004" pitchFamily="2" charset="0"/>
-              </a:rPr>
-              <a:t>			"description": "</a:t>
-            </a:r>
-            <a:r>
-              <a:rPr lang="en-US" altLang="zh-CN" dirty="0">
-                <a:solidFill>
-                  <a:srgbClr val="FF0000"/>
-                </a:solidFill>
-                <a:latin typeface="Helvetica Neue" panose="02000503000000020004" pitchFamily="2" charset="0"/>
-              </a:rPr>
-              <a:t> Elaborate your reason here</a:t>
-            </a:r>
-            <a:r>
-              <a:rPr lang="en-US" altLang="zh-CN" dirty="0">
-                <a:solidFill>
-                  <a:srgbClr val="FF0000"/>
-                </a:solidFill>
-                <a:latin typeface="Helvetica Neue" panose="02000503000000020004" pitchFamily="2" charset="0"/>
-                <a:ea typeface="Helvetica Neue" panose="02000503000000020004" pitchFamily="2" charset="0"/>
-                <a:cs typeface="Helvetica Neue" panose="02000503000000020004" pitchFamily="2" charset="0"/>
-              </a:rPr>
-              <a:t>."    </a:t>
-            </a:r>
-          </a:p>
-          <a:p>
-            <a:pPr marL="360000"/>
-            <a:r>
-              <a:rPr lang="en-US" altLang="zh-CN" dirty="0">
-                <a:solidFill>
-                  <a:srgbClr val="FF0000"/>
-                </a:solidFill>
-                <a:latin typeface="Helvetica Neue" panose="02000503000000020004" pitchFamily="2" charset="0"/>
-                <a:ea typeface="Helvetica Neue" panose="02000503000000020004" pitchFamily="2" charset="0"/>
-                <a:cs typeface="Helvetica Neue" panose="02000503000000020004" pitchFamily="2" charset="0"/>
-              </a:rPr>
-              <a:t>          }</a:t>
-            </a:r>
-          </a:p>
-          <a:p>
-            <a:pPr marL="645750" indent="-285750">
-              <a:buFont typeface="Arial" panose="020B0604020202020204" pitchFamily="34" charset="0"/>
-              <a:buChar char="•"/>
-            </a:pPr>
-            <a:r>
-              <a:rPr lang="en-US" altLang="zh-CN" dirty="0">
-                <a:solidFill>
-                  <a:srgbClr val="FF0000"/>
-                </a:solidFill>
-                <a:latin typeface="Helvetica Neue" panose="02000503000000020004" pitchFamily="2" charset="0"/>
-                <a:ea typeface="Helvetica Neue" panose="02000503000000020004" pitchFamily="2" charset="0"/>
-                <a:cs typeface="Helvetica Neue" panose="02000503000000020004" pitchFamily="2" charset="0"/>
-              </a:rPr>
-              <a:t>Hash functions and other irreversible algorithms are not considered as encryption algorithms.</a:t>
-            </a:r>
-          </a:p>
-          <a:p>
-            <a:pPr marL="645750" indent="-285750">
-              <a:buFont typeface="Arial" panose="020B0604020202020204" pitchFamily="34" charset="0"/>
-              <a:buChar char="•"/>
-            </a:pPr>
-            <a:r>
-              <a:rPr lang="en-US" altLang="zh-CN" dirty="0">
-                <a:solidFill>
-                  <a:srgbClr val="FF0000"/>
-                </a:solidFill>
-                <a:latin typeface="Helvetica Neue" panose="02000503000000020004" pitchFamily="2" charset="0"/>
-                <a:ea typeface="Helvetica Neue" panose="02000503000000020004" pitchFamily="2" charset="0"/>
-                <a:cs typeface="Helvetica Neue" panose="02000503000000020004" pitchFamily="2" charset="0"/>
-              </a:rPr>
-              <a:t>Below is an example of an encryption function from a cryptographic library:</a:t>
-            </a:r>
-          </a:p>
-          <a:p>
-            <a:pPr marL="360000"/>
-            <a:r>
-              <a:rPr lang="en-US" altLang="zh-CN" dirty="0">
-                <a:solidFill>
-                  <a:srgbClr val="FF0000"/>
-                </a:solidFill>
-                <a:latin typeface="Helvetica Neue" panose="02000503000000020004" pitchFamily="2" charset="0"/>
-                <a:ea typeface="Helvetica Neue" panose="02000503000000020004" pitchFamily="2" charset="0"/>
-                <a:cs typeface="Helvetica Neue" panose="02000503000000020004" pitchFamily="2" charset="0"/>
-              </a:rPr>
-              <a:t>```</a:t>
-            </a:r>
-          </a:p>
-          <a:p>
-            <a:pPr marL="360000"/>
-            <a:r>
-              <a:rPr lang="en-US" altLang="zh-CN" i="1" dirty="0">
-                <a:solidFill>
-                  <a:srgbClr val="FF0000"/>
-                </a:solidFill>
-                <a:latin typeface="Helvetica Neue" panose="02000503000000020004" pitchFamily="2" charset="0"/>
-                <a:ea typeface="Helvetica Neue" panose="02000503000000020004" pitchFamily="2" charset="0"/>
-                <a:cs typeface="Helvetica Neue" panose="02000503000000020004" pitchFamily="2" charset="0"/>
-              </a:rPr>
-              <a:t>Library function name: {</a:t>
-            </a:r>
-            <a:r>
-              <a:rPr lang="en-US" altLang="zh-CN" i="1" dirty="0" err="1">
-                <a:solidFill>
-                  <a:srgbClr val="FF0000"/>
-                </a:solidFill>
-                <a:latin typeface="Helvetica Neue" panose="02000503000000020004" pitchFamily="2" charset="0"/>
-                <a:ea typeface="Helvetica Neue" panose="02000503000000020004" pitchFamily="2" charset="0"/>
-                <a:cs typeface="Helvetica Neue" panose="02000503000000020004" pitchFamily="2" charset="0"/>
-              </a:rPr>
-              <a:t>f</a:t>
-            </a:r>
-            <a:r>
-              <a:rPr lang="en-US" altLang="zh-CN" i="1" baseline="-25000" dirty="0" err="1">
-                <a:solidFill>
-                  <a:srgbClr val="FF0000"/>
-                </a:solidFill>
-                <a:latin typeface="Helvetica Neue" panose="02000503000000020004" pitchFamily="2" charset="0"/>
-                <a:ea typeface="Helvetica Neue" panose="02000503000000020004" pitchFamily="2" charset="0"/>
-                <a:cs typeface="Helvetica Neue" panose="02000503000000020004" pitchFamily="2" charset="0"/>
-              </a:rPr>
-              <a:t>db</a:t>
-            </a:r>
-            <a:r>
-              <a:rPr lang="en-US" altLang="zh-CN" i="1" dirty="0" err="1">
-                <a:solidFill>
-                  <a:srgbClr val="FF0000"/>
-                </a:solidFill>
-                <a:latin typeface="Helvetica Neue" panose="02000503000000020004" pitchFamily="2" charset="0"/>
-                <a:ea typeface="Helvetica Neue" panose="02000503000000020004" pitchFamily="2" charset="0"/>
-                <a:cs typeface="Helvetica Neue" panose="02000503000000020004" pitchFamily="2" charset="0"/>
-              </a:rPr>
-              <a:t>.nm</a:t>
-            </a:r>
-            <a:r>
-              <a:rPr lang="en-US" altLang="zh-CN" i="1" dirty="0">
-                <a:solidFill>
-                  <a:srgbClr val="FF0000"/>
-                </a:solidFill>
-                <a:latin typeface="Helvetica Neue" panose="02000503000000020004" pitchFamily="2" charset="0"/>
-                <a:ea typeface="Helvetica Neue" panose="02000503000000020004" pitchFamily="2" charset="0"/>
-                <a:cs typeface="Helvetica Neue" panose="02000503000000020004" pitchFamily="2" charset="0"/>
-              </a:rPr>
-              <a:t>} </a:t>
-            </a:r>
-          </a:p>
-          <a:p>
-            <a:pPr marL="360000"/>
-            <a:r>
-              <a:rPr lang="en-US" altLang="zh-CN" i="1" dirty="0">
-                <a:solidFill>
-                  <a:srgbClr val="FF0000"/>
-                </a:solidFill>
-                <a:latin typeface="Helvetica Neue" panose="02000503000000020004" pitchFamily="2" charset="0"/>
-                <a:ea typeface="Helvetica Neue" panose="02000503000000020004" pitchFamily="2" charset="0"/>
-                <a:cs typeface="Helvetica Neue" panose="02000503000000020004" pitchFamily="2" charset="0"/>
-              </a:rPr>
-              <a:t>Library function body: {</a:t>
-            </a:r>
-            <a:r>
-              <a:rPr lang="en-US" altLang="zh-CN" i="1" dirty="0" err="1">
-                <a:solidFill>
-                  <a:srgbClr val="FF0000"/>
-                </a:solidFill>
-                <a:latin typeface="Helvetica Neue" panose="02000503000000020004" pitchFamily="2" charset="0"/>
-                <a:ea typeface="Helvetica Neue" panose="02000503000000020004" pitchFamily="2" charset="0"/>
-                <a:cs typeface="Helvetica Neue" panose="02000503000000020004" pitchFamily="2" charset="0"/>
-              </a:rPr>
-              <a:t>f</a:t>
-            </a:r>
-            <a:r>
-              <a:rPr lang="en-US" altLang="zh-CN" i="1" baseline="-25000" dirty="0" err="1">
-                <a:solidFill>
-                  <a:srgbClr val="FF0000"/>
-                </a:solidFill>
-                <a:latin typeface="Helvetica Neue" panose="02000503000000020004" pitchFamily="2" charset="0"/>
-                <a:ea typeface="Helvetica Neue" panose="02000503000000020004" pitchFamily="2" charset="0"/>
-                <a:cs typeface="Helvetica Neue" panose="02000503000000020004" pitchFamily="2" charset="0"/>
-              </a:rPr>
-              <a:t>db</a:t>
-            </a:r>
-            <a:r>
-              <a:rPr lang="en-US" altLang="zh-CN" i="1" dirty="0" err="1">
-                <a:solidFill>
-                  <a:srgbClr val="FF0000"/>
-                </a:solidFill>
-                <a:latin typeface="Helvetica Neue" panose="02000503000000020004" pitchFamily="2" charset="0"/>
-                <a:ea typeface="Helvetica Neue" panose="02000503000000020004" pitchFamily="2" charset="0"/>
-                <a:cs typeface="Helvetica Neue" panose="02000503000000020004" pitchFamily="2" charset="0"/>
-              </a:rPr>
-              <a:t>.S</a:t>
-            </a:r>
-            <a:r>
-              <a:rPr lang="en-US" altLang="zh-CN" i="1" dirty="0">
-                <a:solidFill>
-                  <a:srgbClr val="FF0000"/>
-                </a:solidFill>
-                <a:latin typeface="Helvetica Neue" panose="02000503000000020004" pitchFamily="2" charset="0"/>
-                <a:ea typeface="Helvetica Neue" panose="02000503000000020004" pitchFamily="2" charset="0"/>
-                <a:cs typeface="Helvetica Neue" panose="02000503000000020004" pitchFamily="2" charset="0"/>
-              </a:rPr>
-              <a:t>}</a:t>
-            </a:r>
-          </a:p>
-          <a:p>
-            <a:pPr marL="360000"/>
-            <a:r>
-              <a:rPr lang="en-US" altLang="zh-CN" i="1" dirty="0">
-                <a:solidFill>
-                  <a:srgbClr val="FF0000"/>
-                </a:solidFill>
-                <a:latin typeface="Helvetica Neue" panose="02000503000000020004" pitchFamily="2" charset="0"/>
-                <a:ea typeface="Helvetica Neue" panose="02000503000000020004" pitchFamily="2" charset="0"/>
-                <a:cs typeface="Helvetica Neue" panose="02000503000000020004" pitchFamily="2" charset="0"/>
-              </a:rPr>
-              <a:t>```</a:t>
-            </a:r>
-          </a:p>
-          <a:p>
-            <a:pPr marL="645750" indent="-285750">
-              <a:buFont typeface="Arial" panose="020B0604020202020204" pitchFamily="34" charset="0"/>
-              <a:buChar char="•"/>
-            </a:pPr>
-            <a:r>
-              <a:rPr lang="en-US" altLang="zh-CN" dirty="0">
-                <a:solidFill>
-                  <a:srgbClr val="FF0000"/>
-                </a:solidFill>
-                <a:latin typeface="Helvetica Neue" panose="02000503000000020004" pitchFamily="2" charset="0"/>
-                <a:ea typeface="Helvetica Neue" panose="02000503000000020004" pitchFamily="2" charset="0"/>
-                <a:cs typeface="Helvetica Neue" panose="02000503000000020004" pitchFamily="2" charset="0"/>
-              </a:rPr>
-              <a:t>If you are ready, please reply 'Understood’.</a:t>
-            </a:r>
-          </a:p>
-          <a:p>
-            <a:pPr marL="360000"/>
-            <a:r>
-              <a:rPr lang="en-US" altLang="zh-CN" dirty="0">
-                <a:solidFill>
-                  <a:srgbClr val="FF0000"/>
-                </a:solidFill>
-                <a:latin typeface="Helvetica Neue" panose="02000503000000020004" pitchFamily="2" charset="0"/>
-                <a:ea typeface="Helvetica Neue" panose="02000503000000020004" pitchFamily="2" charset="0"/>
-                <a:cs typeface="Helvetica Neue" panose="02000503000000020004" pitchFamily="2" charset="0"/>
-              </a:rPr>
-              <a:t>```</a:t>
-            </a:r>
-          </a:p>
-          <a:p>
-            <a:pPr marL="360000"/>
-            <a:r>
-              <a:rPr lang="en-US" altLang="zh-CN" i="1" dirty="0">
-                <a:solidFill>
-                  <a:srgbClr val="FF0000"/>
-                </a:solidFill>
-                <a:latin typeface="Helvetica Neue" panose="02000503000000020004" pitchFamily="2" charset="0"/>
-                <a:ea typeface="Helvetica Neue" panose="02000503000000020004" pitchFamily="2" charset="0"/>
-                <a:cs typeface="Helvetica Neue" panose="02000503000000020004" pitchFamily="2" charset="0"/>
-              </a:rPr>
-              <a:t>Function name: {</a:t>
-            </a:r>
-            <a:r>
-              <a:rPr lang="en-US" altLang="zh-CN" i="1" dirty="0" err="1">
-                <a:solidFill>
-                  <a:srgbClr val="FF0000"/>
-                </a:solidFill>
-                <a:latin typeface="Helvetica Neue" panose="02000503000000020004" pitchFamily="2" charset="0"/>
-                <a:ea typeface="Helvetica Neue" panose="02000503000000020004" pitchFamily="2" charset="0"/>
-                <a:cs typeface="Helvetica Neue" panose="02000503000000020004" pitchFamily="2" charset="0"/>
-              </a:rPr>
-              <a:t>f</a:t>
-            </a:r>
-            <a:r>
-              <a:rPr lang="en-US" altLang="zh-CN" i="1" baseline="-25000" dirty="0" err="1">
-                <a:solidFill>
-                  <a:srgbClr val="FF0000"/>
-                </a:solidFill>
-                <a:latin typeface="Helvetica Neue" panose="02000503000000020004" pitchFamily="2" charset="0"/>
-                <a:ea typeface="Helvetica Neue" panose="02000503000000020004" pitchFamily="2" charset="0"/>
-                <a:cs typeface="Helvetica Neue" panose="02000503000000020004" pitchFamily="2" charset="0"/>
-              </a:rPr>
-              <a:t>bf</a:t>
-            </a:r>
-            <a:r>
-              <a:rPr lang="en-US" altLang="zh-CN" i="1" dirty="0" err="1">
-                <a:solidFill>
-                  <a:srgbClr val="FF0000"/>
-                </a:solidFill>
-                <a:latin typeface="Helvetica Neue" panose="02000503000000020004" pitchFamily="2" charset="0"/>
-                <a:ea typeface="Helvetica Neue" panose="02000503000000020004" pitchFamily="2" charset="0"/>
-                <a:cs typeface="Helvetica Neue" panose="02000503000000020004" pitchFamily="2" charset="0"/>
-              </a:rPr>
-              <a:t>.nm</a:t>
-            </a:r>
-            <a:r>
-              <a:rPr lang="en-US" altLang="zh-CN" i="1" dirty="0">
-                <a:solidFill>
-                  <a:srgbClr val="FF0000"/>
-                </a:solidFill>
-                <a:latin typeface="Helvetica Neue" panose="02000503000000020004" pitchFamily="2" charset="0"/>
-                <a:ea typeface="Helvetica Neue" panose="02000503000000020004" pitchFamily="2" charset="0"/>
-                <a:cs typeface="Helvetica Neue" panose="02000503000000020004" pitchFamily="2" charset="0"/>
-              </a:rPr>
-              <a:t>} </a:t>
-            </a:r>
-          </a:p>
-          <a:p>
-            <a:pPr marL="360000"/>
-            <a:r>
-              <a:rPr lang="en-US" altLang="zh-CN" i="1" dirty="0">
-                <a:solidFill>
-                  <a:srgbClr val="FF0000"/>
-                </a:solidFill>
-                <a:latin typeface="Helvetica Neue" panose="02000503000000020004" pitchFamily="2" charset="0"/>
-                <a:ea typeface="Helvetica Neue" panose="02000503000000020004" pitchFamily="2" charset="0"/>
-                <a:cs typeface="Helvetica Neue" panose="02000503000000020004" pitchFamily="2" charset="0"/>
-              </a:rPr>
-              <a:t>Function body: {</a:t>
-            </a:r>
-            <a:r>
-              <a:rPr lang="en-US" altLang="zh-CN" i="1" dirty="0" err="1">
-                <a:solidFill>
-                  <a:srgbClr val="FF0000"/>
-                </a:solidFill>
-                <a:latin typeface="Helvetica Neue" panose="02000503000000020004" pitchFamily="2" charset="0"/>
-                <a:ea typeface="Helvetica Neue" panose="02000503000000020004" pitchFamily="2" charset="0"/>
-                <a:cs typeface="Helvetica Neue" panose="02000503000000020004" pitchFamily="2" charset="0"/>
-              </a:rPr>
-              <a:t>f</a:t>
-            </a:r>
-            <a:r>
-              <a:rPr lang="en-US" altLang="zh-CN" i="1" baseline="-25000" dirty="0" err="1">
-                <a:solidFill>
-                  <a:srgbClr val="FF0000"/>
-                </a:solidFill>
-                <a:latin typeface="Helvetica Neue" panose="02000503000000020004" pitchFamily="2" charset="0"/>
-                <a:ea typeface="Helvetica Neue" panose="02000503000000020004" pitchFamily="2" charset="0"/>
-                <a:cs typeface="Helvetica Neue" panose="02000503000000020004" pitchFamily="2" charset="0"/>
-              </a:rPr>
-              <a:t>bf</a:t>
-            </a:r>
-            <a:r>
-              <a:rPr lang="en-US" altLang="zh-CN" i="1" dirty="0" err="1">
-                <a:solidFill>
-                  <a:srgbClr val="FF0000"/>
-                </a:solidFill>
-                <a:latin typeface="Helvetica Neue" panose="02000503000000020004" pitchFamily="2" charset="0"/>
-                <a:ea typeface="Helvetica Neue" panose="02000503000000020004" pitchFamily="2" charset="0"/>
-                <a:cs typeface="Helvetica Neue" panose="02000503000000020004" pitchFamily="2" charset="0"/>
-              </a:rPr>
-              <a:t>.S</a:t>
-            </a:r>
-            <a:r>
-              <a:rPr lang="en-US" altLang="zh-CN" i="1" dirty="0">
-                <a:solidFill>
-                  <a:srgbClr val="FF0000"/>
-                </a:solidFill>
-                <a:latin typeface="Helvetica Neue" panose="02000503000000020004" pitchFamily="2" charset="0"/>
-                <a:ea typeface="Helvetica Neue" panose="02000503000000020004" pitchFamily="2" charset="0"/>
-                <a:cs typeface="Helvetica Neue" panose="02000503000000020004" pitchFamily="2" charset="0"/>
-              </a:rPr>
-              <a:t>}</a:t>
-            </a:r>
-          </a:p>
-          <a:p>
-            <a:pPr marL="360000"/>
-            <a:r>
-              <a:rPr lang="en-US" altLang="zh-CN" i="1" dirty="0">
-                <a:latin typeface="Helvetica Neue" panose="02000503000000020004" pitchFamily="2" charset="0"/>
-                <a:ea typeface="Helvetica Neue" panose="02000503000000020004" pitchFamily="2" charset="0"/>
-                <a:cs typeface="Helvetica Neue" panose="02000503000000020004" pitchFamily="2" charset="0"/>
-              </a:rPr>
-              <a:t>```</a:t>
-            </a:r>
+              <a:t>* Nodes present in only one CFG version. For instance, OnlyV1 represents all nodes in CFG1 for code_v1 that doesn't exist in CFG2.</a:t>
+            </a:r>
+            <a:endParaRPr lang="en-US" altLang="zh-CN" i="1" dirty="0">
+              <a:latin typeface="Helvetica Neue" panose="02000503000000020004" pitchFamily="2" charset="0"/>
+              <a:ea typeface="Helvetica Neue" panose="02000503000000020004" pitchFamily="2" charset="0"/>
+              <a:cs typeface="Helvetica Neue" panose="02000503000000020004" pitchFamily="2" charset="0"/>
+            </a:endParaRPr>
           </a:p>
         </p:txBody>
       </p:sp>
@@ -5940,7 +5788,7 @@
         <p:spPr>
           <a:xfrm>
             <a:off x="1850529" y="239911"/>
-            <a:ext cx="8676000" cy="7816069"/>
+            <a:ext cx="8676000" cy="5272993"/>
           </a:xfrm>
           <a:prstGeom prst="roundRect">
             <a:avLst>
@@ -6159,7 +6007,7 @@
         <p:spPr>
           <a:xfrm>
             <a:off x="1850527" y="598961"/>
-            <a:ext cx="8676000" cy="7457019"/>
+            <a:ext cx="8676000" cy="5059717"/>
           </a:xfrm>
           <a:prstGeom prst="rect">
             <a:avLst/>
@@ -6172,16 +6020,6 @@
           </a:bodyPr>
           <a:lstStyle/>
           <a:p>
-            <a:r>
-              <a:rPr lang="en-US" altLang="zh-CN" b="1" u="sng" dirty="0">
-                <a:latin typeface="Helvetica Neue" panose="02000503000000020004" pitchFamily="2" charset="0"/>
-                <a:ea typeface="Helvetica Neue" panose="02000503000000020004" pitchFamily="2" charset="0"/>
-                <a:cs typeface="Helvetica Neue" panose="02000503000000020004" pitchFamily="2" charset="0"/>
-              </a:rPr>
-              <a:t>System:</a:t>
-            </a:r>
-          </a:p>
-          <a:p>
             <a:pPr marL="360000"/>
             <a:r>
               <a:rPr lang="en-US" altLang="zh-CN" dirty="0">
@@ -6189,54 +6027,212 @@
                   <a:srgbClr val="FF0000"/>
                 </a:solidFill>
                 <a:latin typeface="Helvetica Neue" panose="02000503000000020004" pitchFamily="2" charset="0"/>
-                <a:ea typeface="Helvetica Neue" panose="02000503000000020004" pitchFamily="2" charset="0"/>
-                <a:cs typeface="Helvetica Neue" panose="02000503000000020004" pitchFamily="2" charset="0"/>
-              </a:rPr>
-              <a:t>You are now a code analyst and reverse engineering expert, with in-depth knowledge of various encryption algorithms and the underlying principles of ransomware.</a:t>
-            </a:r>
-          </a:p>
-          <a:p>
-            <a:r>
-              <a:rPr lang="en-US" altLang="zh-CN" b="1" u="sng" dirty="0">
-                <a:latin typeface="Helvetica Neue" panose="02000503000000020004" pitchFamily="2" charset="0"/>
-                <a:ea typeface="Helvetica Neue" panose="02000503000000020004" pitchFamily="2" charset="0"/>
-                <a:cs typeface="Helvetica Neue" panose="02000503000000020004" pitchFamily="2" charset="0"/>
-              </a:rPr>
-              <a:t>Task:</a:t>
+              </a:rPr>
+              <a:t>Use data structures to identify the following incompatibilities and update Results:</a:t>
             </a:r>
           </a:p>
           <a:p>
             <a:pPr marL="360000"/>
-            <a:r>
-              <a:rPr lang="en-US" altLang="zh-CN" dirty="0">
-                <a:solidFill>
-                  <a:srgbClr val="FF0000"/>
-                </a:solidFill>
-                <a:latin typeface="Helvetica Neue" panose="02000503000000020004" pitchFamily="2" charset="0"/>
-                <a:ea typeface="Helvetica Neue" panose="02000503000000020004" pitchFamily="2" charset="0"/>
-                <a:cs typeface="Helvetica Neue" panose="02000503000000020004" pitchFamily="2" charset="0"/>
-              </a:rPr>
-              <a:t>Your task is to determine whether the given code implements an encryption function.</a:t>
-            </a:r>
+            <a:endParaRPr lang="en-US" altLang="zh-CN" dirty="0">
+              <a:solidFill>
+                <a:srgbClr val="FF0000"/>
+              </a:solidFill>
+              <a:latin typeface="Helvetica Neue" panose="02000503000000020004" pitchFamily="2" charset="0"/>
+            </a:endParaRPr>
           </a:p>
           <a:p>
             <a:pPr marL="360000"/>
             <a:r>
-              <a:rPr lang="en-US" altLang="zh-CN" i="1" dirty="0">
-                <a:solidFill>
-                  <a:srgbClr val="FF0000"/>
-                </a:solidFill>
-                <a:latin typeface="Helvetica Neue" panose="02000503000000020004" pitchFamily="2" charset="0"/>
-                <a:ea typeface="Helvetica Neue" panose="02000503000000020004" pitchFamily="2" charset="0"/>
-                <a:cs typeface="Helvetica Neue" panose="02000503000000020004" pitchFamily="2" charset="0"/>
-              </a:rPr>
-              <a:t>Rules and conditions:</a:t>
+              <a:rPr lang="en-US" altLang="zh-CN" dirty="0">
+                <a:solidFill>
+                  <a:srgbClr val="FF0000"/>
+                </a:solidFill>
+                <a:latin typeface="Helvetica Neue" panose="02000503000000020004" pitchFamily="2" charset="0"/>
+              </a:rPr>
+              <a:t>1. **CI2 (Key of </a:t>
+            </a:r>
+            <a:r>
+              <a:rPr lang="en-US" altLang="zh-CN" dirty="0" err="1">
+                <a:solidFill>
+                  <a:srgbClr val="FF0000"/>
+                </a:solidFill>
+                <a:latin typeface="Helvetica Neue" panose="02000503000000020004" pitchFamily="2" charset="0"/>
+              </a:rPr>
+              <a:t>kwargs</a:t>
+            </a:r>
+            <a:r>
+              <a:rPr lang="en-US" altLang="zh-CN" dirty="0">
+                <a:solidFill>
+                  <a:srgbClr val="FF0000"/>
+                </a:solidFill>
+                <a:latin typeface="Helvetica Neue" panose="02000503000000020004" pitchFamily="2" charset="0"/>
+              </a:rPr>
+              <a:t> Addition or Deletion)**: </a:t>
+            </a:r>
+          </a:p>
+          <a:p>
+            <a:pPr marL="360000"/>
+            <a:r>
+              <a:rPr lang="en-US" altLang="zh-CN" dirty="0">
+                <a:solidFill>
+                  <a:srgbClr val="FF0000"/>
+                </a:solidFill>
+                <a:latin typeface="Helvetica Neue" panose="02000503000000020004" pitchFamily="2" charset="0"/>
+              </a:rPr>
+              <a:t>KWARGS is NOT empty (both P1 and P2 have `**</a:t>
+            </a:r>
+            <a:r>
+              <a:rPr lang="en-US" altLang="zh-CN" dirty="0" err="1">
+                <a:solidFill>
+                  <a:srgbClr val="FF0000"/>
+                </a:solidFill>
+                <a:latin typeface="Helvetica Neue" panose="02000503000000020004" pitchFamily="2" charset="0"/>
+              </a:rPr>
+              <a:t>kwargs</a:t>
+            </a:r>
+            <a:r>
+              <a:rPr lang="en-US" altLang="zh-CN" dirty="0">
+                <a:solidFill>
+                  <a:srgbClr val="FF0000"/>
+                </a:solidFill>
+                <a:latin typeface="Helvetica Neue" panose="02000503000000020004" pitchFamily="2" charset="0"/>
+              </a:rPr>
+              <a:t>`):</a:t>
+            </a:r>
+          </a:p>
+          <a:p>
+            <a:pPr marL="360000"/>
+            <a:r>
+              <a:rPr lang="en-US" altLang="zh-CN" dirty="0">
+                <a:solidFill>
+                  <a:srgbClr val="FF0000"/>
+                </a:solidFill>
+                <a:latin typeface="Helvetica Neue" panose="02000503000000020004" pitchFamily="2" charset="0"/>
+              </a:rPr>
+              <a:t>    - For each nodes labeled in PU_kwargs1: record all keys accessed by `</a:t>
+            </a:r>
+            <a:r>
+              <a:rPr lang="en-US" altLang="zh-CN" dirty="0" err="1">
+                <a:solidFill>
+                  <a:srgbClr val="FF0000"/>
+                </a:solidFill>
+                <a:latin typeface="Helvetica Neue" panose="02000503000000020004" pitchFamily="2" charset="0"/>
+              </a:rPr>
+              <a:t>kwargs.get</a:t>
+            </a:r>
+            <a:r>
+              <a:rPr lang="en-US" altLang="zh-CN" dirty="0">
+                <a:solidFill>
+                  <a:srgbClr val="FF0000"/>
+                </a:solidFill>
+                <a:latin typeface="Helvetica Neue" panose="02000503000000020004" pitchFamily="2" charset="0"/>
+              </a:rPr>
+              <a:t>()` or `</a:t>
+            </a:r>
+            <a:r>
+              <a:rPr lang="en-US" altLang="zh-CN" dirty="0" err="1">
+                <a:solidFill>
+                  <a:srgbClr val="FF0000"/>
+                </a:solidFill>
+                <a:latin typeface="Helvetica Neue" panose="02000503000000020004" pitchFamily="2" charset="0"/>
+              </a:rPr>
+              <a:t>kwargs</a:t>
+            </a:r>
+            <a:r>
+              <a:rPr lang="en-US" altLang="zh-CN" dirty="0">
+                <a:solidFill>
+                  <a:srgbClr val="FF0000"/>
+                </a:solidFill>
+                <a:latin typeface="Helvetica Neue" panose="02000503000000020004" pitchFamily="2" charset="0"/>
+              </a:rPr>
+              <a:t>[]`</a:t>
+            </a:r>
+          </a:p>
+          <a:p>
+            <a:pPr marL="360000"/>
+            <a:r>
+              <a:rPr lang="en-US" altLang="zh-CN" dirty="0">
+                <a:solidFill>
+                  <a:srgbClr val="FF0000"/>
+                </a:solidFill>
+                <a:latin typeface="Helvetica Neue" panose="02000503000000020004" pitchFamily="2" charset="0"/>
+              </a:rPr>
+              <a:t>    - For each nodes labeled in PU_kwargs1: record all keys accessed by `</a:t>
+            </a:r>
+            <a:r>
+              <a:rPr lang="en-US" altLang="zh-CN" dirty="0" err="1">
+                <a:solidFill>
+                  <a:srgbClr val="FF0000"/>
+                </a:solidFill>
+                <a:latin typeface="Helvetica Neue" panose="02000503000000020004" pitchFamily="2" charset="0"/>
+              </a:rPr>
+              <a:t>kwargs.get</a:t>
+            </a:r>
+            <a:r>
+              <a:rPr lang="en-US" altLang="zh-CN" dirty="0">
+                <a:solidFill>
+                  <a:srgbClr val="FF0000"/>
+                </a:solidFill>
+                <a:latin typeface="Helvetica Neue" panose="02000503000000020004" pitchFamily="2" charset="0"/>
+              </a:rPr>
+              <a:t>()` or `</a:t>
+            </a:r>
+            <a:r>
+              <a:rPr lang="en-US" altLang="zh-CN" dirty="0" err="1">
+                <a:solidFill>
+                  <a:srgbClr val="FF0000"/>
+                </a:solidFill>
+                <a:latin typeface="Helvetica Neue" panose="02000503000000020004" pitchFamily="2" charset="0"/>
+              </a:rPr>
+              <a:t>kwargs</a:t>
+            </a:r>
+            <a:r>
+              <a:rPr lang="en-US" altLang="zh-CN" dirty="0">
+                <a:solidFill>
+                  <a:srgbClr val="FF0000"/>
+                </a:solidFill>
+                <a:latin typeface="Helvetica Neue" panose="02000503000000020004" pitchFamily="2" charset="0"/>
+              </a:rPr>
+              <a:t>[]`</a:t>
+            </a:r>
+          </a:p>
+          <a:p>
+            <a:pPr marL="360000"/>
+            <a:endParaRPr lang="en-US" altLang="zh-CN" dirty="0">
+              <a:solidFill>
+                <a:srgbClr val="FF0000"/>
+              </a:solidFill>
+              <a:latin typeface="Helvetica Neue" panose="02000503000000020004" pitchFamily="2" charset="0"/>
+            </a:endParaRPr>
+          </a:p>
+          <a:p>
+            <a:pPr marL="360000"/>
+            <a:r>
+              <a:rPr lang="en-US" altLang="zh-CN" dirty="0">
+                <a:solidFill>
+                  <a:srgbClr val="FF0000"/>
+                </a:solidFill>
+                <a:latin typeface="Helvetica Neue" panose="02000503000000020004" pitchFamily="2" charset="0"/>
+              </a:rPr>
+              <a:t>2. **CI3 (Parameter Rename)**: </a:t>
+            </a:r>
+          </a:p>
+          <a:p>
+            <a:pPr marL="360000"/>
+            <a:r>
+              <a:rPr lang="en-US" altLang="zh-CN" dirty="0">
+                <a:solidFill>
+                  <a:srgbClr val="FF0000"/>
+                </a:solidFill>
+                <a:latin typeface="Helvetica Neue" panose="02000503000000020004" pitchFamily="2" charset="0"/>
+              </a:rPr>
+              <a:t>- For each nodes labeled in PA_p1 and PU_p1: record all Usage of the parameter</a:t>
             </a:r>
           </a:p>
           <a:p>
             <a:pPr marL="645750" indent="-285750">
-              <a:buFont typeface="Arial" panose="020B0604020202020204" pitchFamily="34" charset="0"/>
-              <a:buChar char="•"/>
+              <a:buFontTx/>
+              <a:buChar char="-"/>
             </a:pPr>
             <a:r>
               <a:rPr lang="en-US" altLang="zh-CN" dirty="0">
@@ -6244,50 +6240,21 @@
                   <a:srgbClr val="FF0000"/>
                 </a:solidFill>
                 <a:latin typeface="Helvetica Neue" panose="02000503000000020004" pitchFamily="2" charset="0"/>
-                <a:ea typeface="Helvetica Neue" panose="02000503000000020004" pitchFamily="2" charset="0"/>
-                <a:cs typeface="Helvetica Neue" panose="02000503000000020004" pitchFamily="2" charset="0"/>
-              </a:rPr>
-              <a:t>If the code does not meet the criteria, set "</a:t>
-            </a:r>
-            <a:r>
-              <a:rPr lang="en-US" altLang="zh-CN" dirty="0" err="1">
-                <a:solidFill>
-                  <a:srgbClr val="FF0000"/>
-                </a:solidFill>
-                <a:latin typeface="Helvetica Neue" panose="02000503000000020004" pitchFamily="2" charset="0"/>
-                <a:ea typeface="Helvetica Neue" panose="02000503000000020004" pitchFamily="2" charset="0"/>
-                <a:cs typeface="Helvetica Neue" panose="02000503000000020004" pitchFamily="2" charset="0"/>
-              </a:rPr>
-              <a:t>is_encryption_function</a:t>
-            </a:r>
-            <a:r>
-              <a:rPr lang="en-US" altLang="zh-CN" dirty="0">
-                <a:solidFill>
-                  <a:srgbClr val="FF0000"/>
-                </a:solidFill>
-                <a:latin typeface="Helvetica Neue" panose="02000503000000020004" pitchFamily="2" charset="0"/>
-                <a:ea typeface="Helvetica Neue" panose="02000503000000020004" pitchFamily="2" charset="0"/>
-                <a:cs typeface="Helvetica Neue" panose="02000503000000020004" pitchFamily="2" charset="0"/>
-              </a:rPr>
-              <a:t>" to false.</a:t>
+              </a:rPr>
+              <a:t>Do the same for p2</a:t>
             </a:r>
           </a:p>
           <a:p>
             <a:pPr marL="645750" indent="-285750">
-              <a:buFont typeface="Arial" panose="020B0604020202020204" pitchFamily="34" charset="0"/>
-              <a:buChar char="•"/>
+              <a:buFontTx/>
+              <a:buChar char="-"/>
             </a:pPr>
-            <a:r>
-              <a:rPr lang="en-US" altLang="zh-CN" dirty="0">
-                <a:solidFill>
-                  <a:srgbClr val="FF0000"/>
-                </a:solidFill>
-                <a:latin typeface="Helvetica Neue" panose="02000503000000020004" pitchFamily="2" charset="0"/>
-                <a:ea typeface="Helvetica Neue" panose="02000503000000020004" pitchFamily="2" charset="0"/>
-                <a:cs typeface="Helvetica Neue" panose="02000503000000020004" pitchFamily="2" charset="0"/>
-              </a:rPr>
-              <a:t>The output should be structured in JSON format: </a:t>
-            </a:r>
+            <a:endParaRPr lang="en-US" altLang="zh-CN" dirty="0">
+              <a:solidFill>
+                <a:srgbClr val="FF0000"/>
+              </a:solidFill>
+              <a:latin typeface="Helvetica Neue" panose="02000503000000020004" pitchFamily="2" charset="0"/>
+            </a:endParaRPr>
           </a:p>
           <a:p>
             <a:pPr marL="360000"/>
@@ -6297,10 +6264,8 @@
                   <a:srgbClr val="FF0000"/>
                 </a:solidFill>
                 <a:latin typeface="Helvetica Neue" panose="02000503000000020004" pitchFamily="2" charset="0"/>
-                <a:ea typeface="Helvetica Neue" panose="02000503000000020004" pitchFamily="2" charset="0"/>
-                <a:cs typeface="Helvetica Neue" panose="02000503000000020004" pitchFamily="2" charset="0"/>
-              </a:rPr>
-              <a:t>		{</a:t>
+              </a:rPr>
+              <a:t>5. **CI7 (Return Value Change)**: </a:t>
             </a:r>
           </a:p>
           <a:p>
@@ -6311,54 +6276,8 @@
                   <a:srgbClr val="FF0000"/>
                 </a:solidFill>
                 <a:latin typeface="Helvetica Neue" panose="02000503000000020004" pitchFamily="2" charset="0"/>
-                <a:ea typeface="Helvetica Neue" panose="02000503000000020004" pitchFamily="2" charset="0"/>
-                <a:cs typeface="Helvetica Neue" panose="02000503000000020004" pitchFamily="2" charset="0"/>
-              </a:rPr>
-              <a:t>			"</a:t>
-            </a:r>
-            <a:r>
-              <a:rPr lang="en-US" altLang="zh-CN" dirty="0" err="1">
-                <a:solidFill>
-                  <a:srgbClr val="FF0000"/>
-                </a:solidFill>
-                <a:latin typeface="Helvetica Neue" panose="02000503000000020004" pitchFamily="2" charset="0"/>
-                <a:ea typeface="Helvetica Neue" panose="02000503000000020004" pitchFamily="2" charset="0"/>
-                <a:cs typeface="Helvetica Neue" panose="02000503000000020004" pitchFamily="2" charset="0"/>
-              </a:rPr>
-              <a:t>function_name</a:t>
-            </a:r>
-            <a:r>
-              <a:rPr lang="en-US" altLang="zh-CN" dirty="0">
-                <a:solidFill>
-                  <a:srgbClr val="FF0000"/>
-                </a:solidFill>
-                <a:latin typeface="Helvetica Neue" panose="02000503000000020004" pitchFamily="2" charset="0"/>
-                <a:ea typeface="Helvetica Neue" panose="02000503000000020004" pitchFamily="2" charset="0"/>
-                <a:cs typeface="Helvetica Neue" panose="02000503000000020004" pitchFamily="2" charset="0"/>
-              </a:rPr>
-              <a:t>": </a:t>
-            </a:r>
-            <a:r>
-              <a:rPr lang="zh-CN" altLang="en-US" dirty="0">
-                <a:solidFill>
-                  <a:srgbClr val="FF0000"/>
-                </a:solidFill>
-                <a:latin typeface="Helvetica Neue" panose="02000503000000020004" pitchFamily="2" charset="0"/>
-                <a:ea typeface="Helvetica Neue" panose="02000503000000020004" pitchFamily="2" charset="0"/>
-                <a:cs typeface="Helvetica Neue" panose="02000503000000020004" pitchFamily="2" charset="0"/>
-              </a:rPr>
-              <a:t> </a:t>
-            </a:r>
-            <a:r>
-              <a:rPr lang="en-US" altLang="zh-CN" dirty="0">
-                <a:solidFill>
-                  <a:srgbClr val="FF0000"/>
-                </a:solidFill>
-                <a:latin typeface="Helvetica Neue" panose="02000503000000020004" pitchFamily="2" charset="0"/>
-                <a:ea typeface="Helvetica Neue" panose="02000503000000020004" pitchFamily="2" charset="0"/>
-                <a:cs typeface="Helvetica Neue" panose="02000503000000020004" pitchFamily="2" charset="0"/>
-              </a:rPr>
-              <a:t>"", </a:t>
+              </a:rPr>
+              <a:t>For each return node in R1, trace back for each return node through CFG, and find the data flow of the return variable differs.</a:t>
             </a:r>
           </a:p>
           <a:p>
@@ -6369,416 +6288,8 @@
                   <a:srgbClr val="FF0000"/>
                 </a:solidFill>
                 <a:latin typeface="Helvetica Neue" panose="02000503000000020004" pitchFamily="2" charset="0"/>
-                <a:ea typeface="Helvetica Neue" panose="02000503000000020004" pitchFamily="2" charset="0"/>
-                <a:cs typeface="Helvetica Neue" panose="02000503000000020004" pitchFamily="2" charset="0"/>
-              </a:rPr>
-              <a:t>			"</a:t>
-            </a:r>
-            <a:r>
-              <a:rPr lang="en-US" altLang="zh-CN" dirty="0" err="1">
-                <a:solidFill>
-                  <a:srgbClr val="FF0000"/>
-                </a:solidFill>
-                <a:latin typeface="Helvetica Neue" panose="02000503000000020004" pitchFamily="2" charset="0"/>
-                <a:ea typeface="Helvetica Neue" panose="02000503000000020004" pitchFamily="2" charset="0"/>
-                <a:cs typeface="Helvetica Neue" panose="02000503000000020004" pitchFamily="2" charset="0"/>
-              </a:rPr>
-              <a:t>is_encryption_function</a:t>
-            </a:r>
-            <a:r>
-              <a:rPr lang="en-US" altLang="zh-CN" dirty="0">
-                <a:solidFill>
-                  <a:srgbClr val="FF0000"/>
-                </a:solidFill>
-                <a:latin typeface="Helvetica Neue" panose="02000503000000020004" pitchFamily="2" charset="0"/>
-                <a:ea typeface="Helvetica Neue" panose="02000503000000020004" pitchFamily="2" charset="0"/>
-                <a:cs typeface="Helvetica Neue" panose="02000503000000020004" pitchFamily="2" charset="0"/>
-              </a:rPr>
-              <a:t>": true/false,</a:t>
-            </a:r>
-          </a:p>
-          <a:p>
-            <a:pPr marL="360000"/>
-            <a:r>
-              <a:rPr lang="en-US" altLang="zh-CN" dirty="0">
-                <a:solidFill>
-                  <a:srgbClr val="FF0000"/>
-                </a:solidFill>
-                <a:latin typeface="Helvetica Neue" panose="02000503000000020004" pitchFamily="2" charset="0"/>
-                <a:ea typeface="Helvetica Neue" panose="02000503000000020004" pitchFamily="2" charset="0"/>
-                <a:cs typeface="Helvetica Neue" panose="02000503000000020004" pitchFamily="2" charset="0"/>
-              </a:rPr>
-              <a:t>			"description": "</a:t>
-            </a:r>
-            <a:r>
-              <a:rPr lang="en-US" altLang="zh-CN" dirty="0">
-                <a:solidFill>
-                  <a:srgbClr val="FF0000"/>
-                </a:solidFill>
-                <a:latin typeface="Helvetica Neue" panose="02000503000000020004" pitchFamily="2" charset="0"/>
-              </a:rPr>
-              <a:t> Elaborate your reason here</a:t>
-            </a:r>
-            <a:r>
-              <a:rPr lang="en-US" altLang="zh-CN" dirty="0">
-                <a:solidFill>
-                  <a:srgbClr val="FF0000"/>
-                </a:solidFill>
-                <a:latin typeface="Helvetica Neue" panose="02000503000000020004" pitchFamily="2" charset="0"/>
-                <a:ea typeface="Helvetica Neue" panose="02000503000000020004" pitchFamily="2" charset="0"/>
-                <a:cs typeface="Helvetica Neue" panose="02000503000000020004" pitchFamily="2" charset="0"/>
-              </a:rPr>
-              <a:t>."    </a:t>
-            </a:r>
-          </a:p>
-          <a:p>
-            <a:pPr marL="360000"/>
-            <a:r>
-              <a:rPr lang="en-US" altLang="zh-CN" dirty="0">
-                <a:solidFill>
-                  <a:srgbClr val="FF0000"/>
-                </a:solidFill>
-                <a:latin typeface="Helvetica Neue" panose="02000503000000020004" pitchFamily="2" charset="0"/>
-                <a:ea typeface="Helvetica Neue" panose="02000503000000020004" pitchFamily="2" charset="0"/>
-                <a:cs typeface="Helvetica Neue" panose="02000503000000020004" pitchFamily="2" charset="0"/>
-              </a:rPr>
-              <a:t>          }</a:t>
-            </a:r>
-          </a:p>
-          <a:p>
-            <a:pPr marL="645750" indent="-285750">
-              <a:buFont typeface="Arial" panose="020B0604020202020204" pitchFamily="34" charset="0"/>
-              <a:buChar char="•"/>
-            </a:pPr>
-            <a:r>
-              <a:rPr lang="en-US" altLang="zh-CN" dirty="0">
-                <a:solidFill>
-                  <a:srgbClr val="FF0000"/>
-                </a:solidFill>
-                <a:latin typeface="Helvetica Neue" panose="02000503000000020004" pitchFamily="2" charset="0"/>
-                <a:ea typeface="Helvetica Neue" panose="02000503000000020004" pitchFamily="2" charset="0"/>
-                <a:cs typeface="Helvetica Neue" panose="02000503000000020004" pitchFamily="2" charset="0"/>
-              </a:rPr>
-              <a:t>Hash functions and other irreversible algorithms are not considered as encryption algorithms.</a:t>
-            </a:r>
-          </a:p>
-          <a:p>
-            <a:pPr marL="645750" indent="-285750">
-              <a:buFont typeface="Arial" panose="020B0604020202020204" pitchFamily="34" charset="0"/>
-              <a:buChar char="•"/>
-            </a:pPr>
-            <a:r>
-              <a:rPr lang="en-US" altLang="zh-CN" dirty="0">
-                <a:solidFill>
-                  <a:srgbClr val="FF0000"/>
-                </a:solidFill>
-                <a:latin typeface="Helvetica Neue" panose="02000503000000020004" pitchFamily="2" charset="0"/>
-                <a:ea typeface="Helvetica Neue" panose="02000503000000020004" pitchFamily="2" charset="0"/>
-                <a:cs typeface="Helvetica Neue" panose="02000503000000020004" pitchFamily="2" charset="0"/>
-              </a:rPr>
-              <a:t>Below is an example of an encryption function from a cryptographic library:</a:t>
-            </a:r>
-          </a:p>
-          <a:p>
-            <a:pPr marL="360000"/>
-            <a:r>
-              <a:rPr lang="en-US" altLang="zh-CN" dirty="0">
-                <a:solidFill>
-                  <a:srgbClr val="FF0000"/>
-                </a:solidFill>
-                <a:latin typeface="Helvetica Neue" panose="02000503000000020004" pitchFamily="2" charset="0"/>
-                <a:ea typeface="Helvetica Neue" panose="02000503000000020004" pitchFamily="2" charset="0"/>
-                <a:cs typeface="Helvetica Neue" panose="02000503000000020004" pitchFamily="2" charset="0"/>
-              </a:rPr>
-              <a:t>```</a:t>
-            </a:r>
-          </a:p>
-          <a:p>
-            <a:pPr marL="360000"/>
-            <a:r>
-              <a:rPr lang="en-US" altLang="zh-CN" i="1" dirty="0">
-                <a:solidFill>
-                  <a:srgbClr val="FF0000"/>
-                </a:solidFill>
-                <a:latin typeface="Helvetica Neue" panose="02000503000000020004" pitchFamily="2" charset="0"/>
-                <a:ea typeface="Helvetica Neue" panose="02000503000000020004" pitchFamily="2" charset="0"/>
-                <a:cs typeface="Helvetica Neue" panose="02000503000000020004" pitchFamily="2" charset="0"/>
-              </a:rPr>
-              <a:t>Library function name: {</a:t>
-            </a:r>
-            <a:r>
-              <a:rPr lang="en-US" altLang="zh-CN" i="1" dirty="0" err="1">
-                <a:solidFill>
-                  <a:srgbClr val="FF0000"/>
-                </a:solidFill>
-                <a:latin typeface="Helvetica Neue" panose="02000503000000020004" pitchFamily="2" charset="0"/>
-                <a:ea typeface="Helvetica Neue" panose="02000503000000020004" pitchFamily="2" charset="0"/>
-                <a:cs typeface="Helvetica Neue" panose="02000503000000020004" pitchFamily="2" charset="0"/>
-              </a:rPr>
-              <a:t>f</a:t>
-            </a:r>
-            <a:r>
-              <a:rPr lang="en-US" altLang="zh-CN" i="1" baseline="-25000" dirty="0" err="1">
-                <a:solidFill>
-                  <a:srgbClr val="FF0000"/>
-                </a:solidFill>
-                <a:latin typeface="Helvetica Neue" panose="02000503000000020004" pitchFamily="2" charset="0"/>
-                <a:ea typeface="Helvetica Neue" panose="02000503000000020004" pitchFamily="2" charset="0"/>
-                <a:cs typeface="Helvetica Neue" panose="02000503000000020004" pitchFamily="2" charset="0"/>
-              </a:rPr>
-              <a:t>db</a:t>
-            </a:r>
-            <a:r>
-              <a:rPr lang="en-US" altLang="zh-CN" i="1" dirty="0" err="1">
-                <a:solidFill>
-                  <a:srgbClr val="FF0000"/>
-                </a:solidFill>
-                <a:latin typeface="Helvetica Neue" panose="02000503000000020004" pitchFamily="2" charset="0"/>
-                <a:ea typeface="Helvetica Neue" panose="02000503000000020004" pitchFamily="2" charset="0"/>
-                <a:cs typeface="Helvetica Neue" panose="02000503000000020004" pitchFamily="2" charset="0"/>
-              </a:rPr>
-              <a:t>.nm</a:t>
-            </a:r>
-            <a:r>
-              <a:rPr lang="en-US" altLang="zh-CN" i="1" dirty="0">
-                <a:solidFill>
-                  <a:srgbClr val="FF0000"/>
-                </a:solidFill>
-                <a:latin typeface="Helvetica Neue" panose="02000503000000020004" pitchFamily="2" charset="0"/>
-                <a:ea typeface="Helvetica Neue" panose="02000503000000020004" pitchFamily="2" charset="0"/>
-                <a:cs typeface="Helvetica Neue" panose="02000503000000020004" pitchFamily="2" charset="0"/>
-              </a:rPr>
-              <a:t>} </a:t>
-            </a:r>
-          </a:p>
-          <a:p>
-            <a:pPr marL="360000"/>
-            <a:r>
-              <a:rPr lang="en-US" altLang="zh-CN" i="1" dirty="0">
-                <a:solidFill>
-                  <a:srgbClr val="FF0000"/>
-                </a:solidFill>
-                <a:latin typeface="Helvetica Neue" panose="02000503000000020004" pitchFamily="2" charset="0"/>
-                <a:ea typeface="Helvetica Neue" panose="02000503000000020004" pitchFamily="2" charset="0"/>
-                <a:cs typeface="Helvetica Neue" panose="02000503000000020004" pitchFamily="2" charset="0"/>
-              </a:rPr>
-              <a:t>Library function body: {</a:t>
-            </a:r>
-            <a:r>
-              <a:rPr lang="en-US" altLang="zh-CN" i="1" dirty="0" err="1">
-                <a:solidFill>
-                  <a:srgbClr val="FF0000"/>
-                </a:solidFill>
-                <a:latin typeface="Helvetica Neue" panose="02000503000000020004" pitchFamily="2" charset="0"/>
-                <a:ea typeface="Helvetica Neue" panose="02000503000000020004" pitchFamily="2" charset="0"/>
-                <a:cs typeface="Helvetica Neue" panose="02000503000000020004" pitchFamily="2" charset="0"/>
-              </a:rPr>
-              <a:t>f</a:t>
-            </a:r>
-            <a:r>
-              <a:rPr lang="en-US" altLang="zh-CN" i="1" baseline="-25000" dirty="0" err="1">
-                <a:solidFill>
-                  <a:srgbClr val="FF0000"/>
-                </a:solidFill>
-                <a:latin typeface="Helvetica Neue" panose="02000503000000020004" pitchFamily="2" charset="0"/>
-                <a:ea typeface="Helvetica Neue" panose="02000503000000020004" pitchFamily="2" charset="0"/>
-                <a:cs typeface="Helvetica Neue" panose="02000503000000020004" pitchFamily="2" charset="0"/>
-              </a:rPr>
-              <a:t>db</a:t>
-            </a:r>
-            <a:r>
-              <a:rPr lang="en-US" altLang="zh-CN" i="1" dirty="0" err="1">
-                <a:solidFill>
-                  <a:srgbClr val="FF0000"/>
-                </a:solidFill>
-                <a:latin typeface="Helvetica Neue" panose="02000503000000020004" pitchFamily="2" charset="0"/>
-                <a:ea typeface="Helvetica Neue" panose="02000503000000020004" pitchFamily="2" charset="0"/>
-                <a:cs typeface="Helvetica Neue" panose="02000503000000020004" pitchFamily="2" charset="0"/>
-              </a:rPr>
-              <a:t>.S</a:t>
-            </a:r>
-            <a:r>
-              <a:rPr lang="en-US" altLang="zh-CN" i="1" dirty="0">
-                <a:solidFill>
-                  <a:srgbClr val="FF0000"/>
-                </a:solidFill>
-                <a:latin typeface="Helvetica Neue" panose="02000503000000020004" pitchFamily="2" charset="0"/>
-                <a:ea typeface="Helvetica Neue" panose="02000503000000020004" pitchFamily="2" charset="0"/>
-                <a:cs typeface="Helvetica Neue" panose="02000503000000020004" pitchFamily="2" charset="0"/>
-              </a:rPr>
-              <a:t>}</a:t>
-            </a:r>
-          </a:p>
-          <a:p>
-            <a:pPr marL="360000"/>
-            <a:r>
-              <a:rPr lang="en-US" altLang="zh-CN" i="1" dirty="0">
-                <a:solidFill>
-                  <a:srgbClr val="FF0000"/>
-                </a:solidFill>
-                <a:latin typeface="Helvetica Neue" panose="02000503000000020004" pitchFamily="2" charset="0"/>
-                <a:ea typeface="Helvetica Neue" panose="02000503000000020004" pitchFamily="2" charset="0"/>
-                <a:cs typeface="Helvetica Neue" panose="02000503000000020004" pitchFamily="2" charset="0"/>
-              </a:rPr>
-              <a:t>```</a:t>
-            </a:r>
-          </a:p>
-          <a:p>
-            <a:pPr marL="645750" indent="-285750">
-              <a:buFont typeface="Arial" panose="020B0604020202020204" pitchFamily="34" charset="0"/>
-              <a:buChar char="•"/>
-            </a:pPr>
-            <a:r>
-              <a:rPr lang="en-US" altLang="zh-CN" dirty="0">
-                <a:solidFill>
-                  <a:srgbClr val="FF0000"/>
-                </a:solidFill>
-                <a:latin typeface="Helvetica Neue" panose="02000503000000020004" pitchFamily="2" charset="0"/>
-                <a:ea typeface="Helvetica Neue" panose="02000503000000020004" pitchFamily="2" charset="0"/>
-                <a:cs typeface="Helvetica Neue" panose="02000503000000020004" pitchFamily="2" charset="0"/>
-              </a:rPr>
-              <a:t>If you are ready, please reply 'Understood’.</a:t>
-            </a:r>
-          </a:p>
-          <a:p>
-            <a:pPr marL="360000"/>
-            <a:r>
-              <a:rPr lang="en-US" altLang="zh-CN" dirty="0">
-                <a:solidFill>
-                  <a:srgbClr val="FF0000"/>
-                </a:solidFill>
-                <a:latin typeface="Helvetica Neue" panose="02000503000000020004" pitchFamily="2" charset="0"/>
-                <a:ea typeface="Helvetica Neue" panose="02000503000000020004" pitchFamily="2" charset="0"/>
-                <a:cs typeface="Helvetica Neue" panose="02000503000000020004" pitchFamily="2" charset="0"/>
-              </a:rPr>
-              <a:t>```</a:t>
-            </a:r>
-          </a:p>
-          <a:p>
-            <a:pPr marL="360000"/>
-            <a:r>
-              <a:rPr lang="en-US" altLang="zh-CN" i="1" dirty="0">
-                <a:solidFill>
-                  <a:srgbClr val="FF0000"/>
-                </a:solidFill>
-                <a:latin typeface="Helvetica Neue" panose="02000503000000020004" pitchFamily="2" charset="0"/>
-                <a:ea typeface="Helvetica Neue" panose="02000503000000020004" pitchFamily="2" charset="0"/>
-                <a:cs typeface="Helvetica Neue" panose="02000503000000020004" pitchFamily="2" charset="0"/>
-              </a:rPr>
-              <a:t>Function name: {</a:t>
-            </a:r>
-            <a:r>
-              <a:rPr lang="en-US" altLang="zh-CN" i="1" dirty="0" err="1">
-                <a:solidFill>
-                  <a:srgbClr val="FF0000"/>
-                </a:solidFill>
-                <a:latin typeface="Helvetica Neue" panose="02000503000000020004" pitchFamily="2" charset="0"/>
-                <a:ea typeface="Helvetica Neue" panose="02000503000000020004" pitchFamily="2" charset="0"/>
-                <a:cs typeface="Helvetica Neue" panose="02000503000000020004" pitchFamily="2" charset="0"/>
-              </a:rPr>
-              <a:t>f</a:t>
-            </a:r>
-            <a:r>
-              <a:rPr lang="en-US" altLang="zh-CN" i="1" baseline="-25000" dirty="0" err="1">
-                <a:solidFill>
-                  <a:srgbClr val="FF0000"/>
-                </a:solidFill>
-                <a:latin typeface="Helvetica Neue" panose="02000503000000020004" pitchFamily="2" charset="0"/>
-                <a:ea typeface="Helvetica Neue" panose="02000503000000020004" pitchFamily="2" charset="0"/>
-                <a:cs typeface="Helvetica Neue" panose="02000503000000020004" pitchFamily="2" charset="0"/>
-              </a:rPr>
-              <a:t>bf</a:t>
-            </a:r>
-            <a:r>
-              <a:rPr lang="en-US" altLang="zh-CN" i="1" dirty="0" err="1">
-                <a:solidFill>
-                  <a:srgbClr val="FF0000"/>
-                </a:solidFill>
-                <a:latin typeface="Helvetica Neue" panose="02000503000000020004" pitchFamily="2" charset="0"/>
-                <a:ea typeface="Helvetica Neue" panose="02000503000000020004" pitchFamily="2" charset="0"/>
-                <a:cs typeface="Helvetica Neue" panose="02000503000000020004" pitchFamily="2" charset="0"/>
-              </a:rPr>
-              <a:t>.nm</a:t>
-            </a:r>
-            <a:r>
-              <a:rPr lang="en-US" altLang="zh-CN" i="1" dirty="0">
-                <a:solidFill>
-                  <a:srgbClr val="FF0000"/>
-                </a:solidFill>
-                <a:latin typeface="Helvetica Neue" panose="02000503000000020004" pitchFamily="2" charset="0"/>
-                <a:ea typeface="Helvetica Neue" panose="02000503000000020004" pitchFamily="2" charset="0"/>
-                <a:cs typeface="Helvetica Neue" panose="02000503000000020004" pitchFamily="2" charset="0"/>
-              </a:rPr>
-              <a:t>} </a:t>
-            </a:r>
-          </a:p>
-          <a:p>
-            <a:pPr marL="360000"/>
-            <a:r>
-              <a:rPr lang="en-US" altLang="zh-CN" i="1" dirty="0">
-                <a:solidFill>
-                  <a:srgbClr val="FF0000"/>
-                </a:solidFill>
-                <a:latin typeface="Helvetica Neue" panose="02000503000000020004" pitchFamily="2" charset="0"/>
-                <a:ea typeface="Helvetica Neue" panose="02000503000000020004" pitchFamily="2" charset="0"/>
-                <a:cs typeface="Helvetica Neue" panose="02000503000000020004" pitchFamily="2" charset="0"/>
-              </a:rPr>
-              <a:t>Function body: {</a:t>
-            </a:r>
-            <a:r>
-              <a:rPr lang="en-US" altLang="zh-CN" i="1" dirty="0" err="1">
-                <a:solidFill>
-                  <a:srgbClr val="FF0000"/>
-                </a:solidFill>
-                <a:latin typeface="Helvetica Neue" panose="02000503000000020004" pitchFamily="2" charset="0"/>
-                <a:ea typeface="Helvetica Neue" panose="02000503000000020004" pitchFamily="2" charset="0"/>
-                <a:cs typeface="Helvetica Neue" panose="02000503000000020004" pitchFamily="2" charset="0"/>
-              </a:rPr>
-              <a:t>f</a:t>
-            </a:r>
-            <a:r>
-              <a:rPr lang="en-US" altLang="zh-CN" i="1" baseline="-25000" dirty="0" err="1">
-                <a:solidFill>
-                  <a:srgbClr val="FF0000"/>
-                </a:solidFill>
-                <a:latin typeface="Helvetica Neue" panose="02000503000000020004" pitchFamily="2" charset="0"/>
-                <a:ea typeface="Helvetica Neue" panose="02000503000000020004" pitchFamily="2" charset="0"/>
-                <a:cs typeface="Helvetica Neue" panose="02000503000000020004" pitchFamily="2" charset="0"/>
-              </a:rPr>
-              <a:t>bf</a:t>
-            </a:r>
-            <a:r>
-              <a:rPr lang="en-US" altLang="zh-CN" i="1" dirty="0" err="1">
-                <a:solidFill>
-                  <a:srgbClr val="FF0000"/>
-                </a:solidFill>
-                <a:latin typeface="Helvetica Neue" panose="02000503000000020004" pitchFamily="2" charset="0"/>
-                <a:ea typeface="Helvetica Neue" panose="02000503000000020004" pitchFamily="2" charset="0"/>
-                <a:cs typeface="Helvetica Neue" panose="02000503000000020004" pitchFamily="2" charset="0"/>
-              </a:rPr>
-              <a:t>.S</a:t>
-            </a:r>
-            <a:r>
-              <a:rPr lang="en-US" altLang="zh-CN" i="1" dirty="0">
-                <a:solidFill>
-                  <a:srgbClr val="FF0000"/>
-                </a:solidFill>
-                <a:latin typeface="Helvetica Neue" panose="02000503000000020004" pitchFamily="2" charset="0"/>
-                <a:ea typeface="Helvetica Neue" panose="02000503000000020004" pitchFamily="2" charset="0"/>
-                <a:cs typeface="Helvetica Neue" panose="02000503000000020004" pitchFamily="2" charset="0"/>
-              </a:rPr>
-              <a:t>}</a:t>
-            </a:r>
-          </a:p>
-          <a:p>
-            <a:pPr marL="360000"/>
-            <a:r>
-              <a:rPr lang="en-US" altLang="zh-CN" i="1" dirty="0">
-                <a:latin typeface="Helvetica Neue" panose="02000503000000020004" pitchFamily="2" charset="0"/>
-                <a:ea typeface="Helvetica Neue" panose="02000503000000020004" pitchFamily="2" charset="0"/>
-                <a:cs typeface="Helvetica Neue" panose="02000503000000020004" pitchFamily="2" charset="0"/>
-              </a:rPr>
-              <a:t>```</a:t>
+              </a:rPr>
+              <a:t>    </a:t>
             </a:r>
           </a:p>
         </p:txBody>
@@ -6828,7 +6339,7 @@
         <p:spPr>
           <a:xfrm>
             <a:off x="1850529" y="239911"/>
-            <a:ext cx="8676000" cy="7816069"/>
+            <a:ext cx="8676000" cy="8957098"/>
           </a:xfrm>
           <a:prstGeom prst="roundRect">
             <a:avLst>
@@ -7046,8 +6557,8 @@
         </p:nvSpPr>
         <p:spPr>
           <a:xfrm>
-            <a:off x="1850527" y="598961"/>
-            <a:ext cx="8676000" cy="7457019"/>
+            <a:off x="1850529" y="609243"/>
+            <a:ext cx="8676000" cy="8598048"/>
           </a:xfrm>
           <a:prstGeom prst="rect">
             <a:avLst/>
@@ -7060,16 +6571,6 @@
           </a:bodyPr>
           <a:lstStyle/>
           <a:p>
-            <a:r>
-              <a:rPr lang="en-US" altLang="zh-CN" b="1" u="sng" dirty="0">
-                <a:latin typeface="Helvetica Neue" panose="02000503000000020004" pitchFamily="2" charset="0"/>
-                <a:ea typeface="Helvetica Neue" panose="02000503000000020004" pitchFamily="2" charset="0"/>
-                <a:cs typeface="Helvetica Neue" panose="02000503000000020004" pitchFamily="2" charset="0"/>
-              </a:rPr>
-              <a:t>System:</a:t>
-            </a:r>
-          </a:p>
-          <a:p>
             <a:pPr marL="360000"/>
             <a:r>
               <a:rPr lang="en-US" altLang="zh-CN" dirty="0">
@@ -7077,20 +6578,8 @@
                   <a:srgbClr val="FF0000"/>
                 </a:solidFill>
                 <a:latin typeface="Helvetica Neue" panose="02000503000000020004" pitchFamily="2" charset="0"/>
-                <a:ea typeface="Helvetica Neue" panose="02000503000000020004" pitchFamily="2" charset="0"/>
-                <a:cs typeface="Helvetica Neue" panose="02000503000000020004" pitchFamily="2" charset="0"/>
-              </a:rPr>
-              <a:t>You are now a code analyst and reverse engineering expert, with in-depth knowledge of various encryption algorithms and the underlying principles of ransomware.</a:t>
-            </a:r>
-          </a:p>
-          <a:p>
-            <a:r>
-              <a:rPr lang="en-US" altLang="zh-CN" b="1" u="sng" dirty="0">
-                <a:latin typeface="Helvetica Neue" panose="02000503000000020004" pitchFamily="2" charset="0"/>
-                <a:ea typeface="Helvetica Neue" panose="02000503000000020004" pitchFamily="2" charset="0"/>
-                <a:cs typeface="Helvetica Neue" panose="02000503000000020004" pitchFamily="2" charset="0"/>
-              </a:rPr>
-              <a:t>Task:</a:t>
+              </a:rPr>
+              <a:t>CI1 (Parameter Addition or Deletion) and CI4 (Parameter Default Value Change):</a:t>
             </a:r>
           </a:p>
           <a:p>
@@ -7101,41 +6590,44 @@
                   <a:srgbClr val="FF0000"/>
                 </a:solidFill>
                 <a:latin typeface="Helvetica Neue" panose="02000503000000020004" pitchFamily="2" charset="0"/>
-                <a:ea typeface="Helvetica Neue" panose="02000503000000020004" pitchFamily="2" charset="0"/>
-                <a:cs typeface="Helvetica Neue" panose="02000503000000020004" pitchFamily="2" charset="0"/>
-              </a:rPr>
-              <a:t>Your task is to determine whether the given code implements an encryption function.</a:t>
+              </a:rPr>
+              <a:t>The difference occurs in the function signature parameters P1 and P2. Check Following situations:</a:t>
             </a:r>
           </a:p>
           <a:p>
             <a:pPr marL="360000"/>
             <a:r>
-              <a:rPr lang="en-US" altLang="zh-CN" i="1" dirty="0">
-                <a:solidFill>
-                  <a:srgbClr val="FF0000"/>
-                </a:solidFill>
-                <a:latin typeface="Helvetica Neue" panose="02000503000000020004" pitchFamily="2" charset="0"/>
-                <a:ea typeface="Helvetica Neue" panose="02000503000000020004" pitchFamily="2" charset="0"/>
-                <a:cs typeface="Helvetica Neue" panose="02000503000000020004" pitchFamily="2" charset="0"/>
-              </a:rPr>
-              <a:t>Rules and conditions:</a:t>
-            </a:r>
-          </a:p>
-          <a:p>
-            <a:pPr marL="645750" indent="-285750">
-              <a:buFont typeface="Arial" panose="020B0604020202020204" pitchFamily="34" charset="0"/>
-              <a:buChar char="•"/>
-            </a:pPr>
-            <a:r>
-              <a:rPr lang="en-US" altLang="zh-CN" dirty="0">
-                <a:solidFill>
-                  <a:srgbClr val="FF0000"/>
-                </a:solidFill>
-                <a:latin typeface="Helvetica Neue" panose="02000503000000020004" pitchFamily="2" charset="0"/>
-                <a:ea typeface="Helvetica Neue" panose="02000503000000020004" pitchFamily="2" charset="0"/>
-                <a:cs typeface="Helvetica Neue" panose="02000503000000020004" pitchFamily="2" charset="0"/>
-              </a:rPr>
-              <a:t>If the code does not meet the criteria, set "</a:t>
+              <a:rPr lang="en-US" altLang="zh-CN" dirty="0">
+                <a:solidFill>
+                  <a:srgbClr val="FF0000"/>
+                </a:solidFill>
+                <a:latin typeface="Helvetica Neue" panose="02000503000000020004" pitchFamily="2" charset="0"/>
+              </a:rPr>
+              <a:t>    - A parameter `p` exists in P1 but not in P2, mark CI1.  </a:t>
+            </a:r>
+          </a:p>
+          <a:p>
+            <a:pPr marL="360000"/>
+            <a:r>
+              <a:rPr lang="en-US" altLang="zh-CN" dirty="0">
+                <a:solidFill>
+                  <a:srgbClr val="FF0000"/>
+                </a:solidFill>
+                <a:latin typeface="Helvetica Neue" panose="02000503000000020004" pitchFamily="2" charset="0"/>
+              </a:rPr>
+              <a:t>    - A parameter `p` exists in P2 but not in P1 and its type is `positional`, mark CI1.  </a:t>
+            </a:r>
+          </a:p>
+          <a:p>
+            <a:pPr marL="360000"/>
+            <a:r>
+              <a:rPr lang="en-US" altLang="zh-CN" dirty="0">
+                <a:solidFill>
+                  <a:srgbClr val="FF0000"/>
+                </a:solidFill>
+                <a:latin typeface="Helvetica Neue" panose="02000503000000020004" pitchFamily="2" charset="0"/>
+              </a:rPr>
+              <a:t>    - A parameter `p` exists in P2 but not in P1 and its type is `optional`, and the parameter at `</a:t>
             </a:r>
             <a:r>
               <a:rPr lang="en-US" altLang="zh-CN" dirty="0" err="1">
@@ -7143,38 +6635,17 @@
                   <a:srgbClr val="FF0000"/>
                 </a:solidFill>
                 <a:latin typeface="Helvetica Neue" panose="02000503000000020004" pitchFamily="2" charset="0"/>
-                <a:ea typeface="Helvetica Neue" panose="02000503000000020004" pitchFamily="2" charset="0"/>
-                <a:cs typeface="Helvetica Neue" panose="02000503000000020004" pitchFamily="2" charset="0"/>
-              </a:rPr>
-              <a:t>is_encryption_function</a:t>
-            </a:r>
-            <a:r>
-              <a:rPr lang="en-US" altLang="zh-CN" dirty="0">
-                <a:solidFill>
-                  <a:srgbClr val="FF0000"/>
-                </a:solidFill>
-                <a:latin typeface="Helvetica Neue" panose="02000503000000020004" pitchFamily="2" charset="0"/>
-                <a:ea typeface="Helvetica Neue" panose="02000503000000020004" pitchFamily="2" charset="0"/>
-                <a:cs typeface="Helvetica Neue" panose="02000503000000020004" pitchFamily="2" charset="0"/>
-              </a:rPr>
-              <a:t>" to false.</a:t>
-            </a:r>
-          </a:p>
-          <a:p>
-            <a:pPr marL="645750" indent="-285750">
-              <a:buFont typeface="Arial" panose="020B0604020202020204" pitchFamily="34" charset="0"/>
-              <a:buChar char="•"/>
-            </a:pPr>
-            <a:r>
-              <a:rPr lang="en-US" altLang="zh-CN" dirty="0">
-                <a:solidFill>
-                  <a:srgbClr val="FF0000"/>
-                </a:solidFill>
-                <a:latin typeface="Helvetica Neue" panose="02000503000000020004" pitchFamily="2" charset="0"/>
-                <a:ea typeface="Helvetica Neue" panose="02000503000000020004" pitchFamily="2" charset="0"/>
-                <a:cs typeface="Helvetica Neue" panose="02000503000000020004" pitchFamily="2" charset="0"/>
-              </a:rPr>
-              <a:t>The output should be structured in JSON format: </a:t>
+              </a:rPr>
+              <a:t>position_index</a:t>
+            </a:r>
+            <a:r>
+              <a:rPr lang="en-US" altLang="zh-CN" dirty="0">
+                <a:solidFill>
+                  <a:srgbClr val="FF0000"/>
+                </a:solidFill>
+                <a:latin typeface="Helvetica Neue" panose="02000503000000020004" pitchFamily="2" charset="0"/>
+              </a:rPr>
+              <a:t> + 1` exists in P2, mark CI1.  </a:t>
             </a:r>
           </a:p>
           <a:p>
@@ -7185,24 +6656,47 @@
                   <a:srgbClr val="FF0000"/>
                 </a:solidFill>
                 <a:latin typeface="Helvetica Neue" panose="02000503000000020004" pitchFamily="2" charset="0"/>
-                <a:ea typeface="Helvetica Neue" panose="02000503000000020004" pitchFamily="2" charset="0"/>
-                <a:cs typeface="Helvetica Neue" panose="02000503000000020004" pitchFamily="2" charset="0"/>
-              </a:rPr>
-              <a:t>		{</a:t>
+              </a:rPr>
+              <a:t>    - A parameter `p` exists both in P1 and P2(same name, can have different position index or different type </a:t>
+            </a:r>
+            <a:r>
+              <a:rPr lang="en-US" altLang="zh-CN" dirty="0" err="1">
+                <a:solidFill>
+                  <a:srgbClr val="FF0000"/>
+                </a:solidFill>
+                <a:latin typeface="Helvetica Neue" panose="02000503000000020004" pitchFamily="2" charset="0"/>
+              </a:rPr>
+              <a:t>nanotation</a:t>
+            </a:r>
+            <a:r>
+              <a:rPr lang="en-US" altLang="zh-CN" dirty="0">
+                <a:solidFill>
+                  <a:srgbClr val="FF0000"/>
+                </a:solidFill>
+                <a:latin typeface="Helvetica Neue" panose="02000503000000020004" pitchFamily="2" charset="0"/>
+              </a:rPr>
+              <a:t>) but the default values are different, mark CI4.</a:t>
             </a:r>
           </a:p>
           <a:p>
             <a:pPr marL="360000"/>
-            <a:r>
-              <a:rPr lang="en-US" altLang="zh-CN" dirty="0">
-                <a:solidFill>
-                  <a:srgbClr val="FF0000"/>
-                </a:solidFill>
-                <a:latin typeface="Helvetica Neue" panose="02000503000000020004" pitchFamily="2" charset="0"/>
-                <a:ea typeface="Helvetica Neue" panose="02000503000000020004" pitchFamily="2" charset="0"/>
-                <a:cs typeface="Helvetica Neue" panose="02000503000000020004" pitchFamily="2" charset="0"/>
-              </a:rPr>
-              <a:t>			"</a:t>
+            <a:endParaRPr lang="en-US" altLang="zh-CN" dirty="0">
+              <a:solidFill>
+                <a:srgbClr val="FF0000"/>
+              </a:solidFill>
+              <a:latin typeface="Helvetica Neue" panose="02000503000000020004" pitchFamily="2" charset="0"/>
+            </a:endParaRPr>
+          </a:p>
+          <a:p>
+            <a:pPr marL="360000"/>
+            <a:r>
+              <a:rPr lang="en-US" altLang="zh-CN" dirty="0">
+                <a:solidFill>
+                  <a:srgbClr val="FF0000"/>
+                </a:solidFill>
+                <a:latin typeface="Helvetica Neue" panose="02000503000000020004" pitchFamily="2" charset="0"/>
+              </a:rPr>
+              <a:t>CI2 (Key of </a:t>
             </a:r>
             <a:r>
               <a:rPr lang="en-US" altLang="zh-CN" dirty="0" err="1">
@@ -7210,43 +6704,17 @@
                   <a:srgbClr val="FF0000"/>
                 </a:solidFill>
                 <a:latin typeface="Helvetica Neue" panose="02000503000000020004" pitchFamily="2" charset="0"/>
-                <a:ea typeface="Helvetica Neue" panose="02000503000000020004" pitchFamily="2" charset="0"/>
-                <a:cs typeface="Helvetica Neue" panose="02000503000000020004" pitchFamily="2" charset="0"/>
-              </a:rPr>
-              <a:t>function_name</a:t>
-            </a:r>
-            <a:r>
-              <a:rPr lang="en-US" altLang="zh-CN" dirty="0">
-                <a:solidFill>
-                  <a:srgbClr val="FF0000"/>
-                </a:solidFill>
-                <a:latin typeface="Helvetica Neue" panose="02000503000000020004" pitchFamily="2" charset="0"/>
-                <a:ea typeface="Helvetica Neue" panose="02000503000000020004" pitchFamily="2" charset="0"/>
-                <a:cs typeface="Helvetica Neue" panose="02000503000000020004" pitchFamily="2" charset="0"/>
-              </a:rPr>
-              <a:t>": </a:t>
-            </a:r>
-            <a:r>
-              <a:rPr lang="zh-CN" altLang="en-US" dirty="0">
-                <a:solidFill>
-                  <a:srgbClr val="FF0000"/>
-                </a:solidFill>
-                <a:latin typeface="Helvetica Neue" panose="02000503000000020004" pitchFamily="2" charset="0"/>
-                <a:ea typeface="Helvetica Neue" panose="02000503000000020004" pitchFamily="2" charset="0"/>
-                <a:cs typeface="Helvetica Neue" panose="02000503000000020004" pitchFamily="2" charset="0"/>
-              </a:rPr>
-              <a:t> </a:t>
-            </a:r>
-            <a:r>
-              <a:rPr lang="en-US" altLang="zh-CN" dirty="0">
-                <a:solidFill>
-                  <a:srgbClr val="FF0000"/>
-                </a:solidFill>
-                <a:latin typeface="Helvetica Neue" panose="02000503000000020004" pitchFamily="2" charset="0"/>
-                <a:ea typeface="Helvetica Neue" panose="02000503000000020004" pitchFamily="2" charset="0"/>
-                <a:cs typeface="Helvetica Neue" panose="02000503000000020004" pitchFamily="2" charset="0"/>
-              </a:rPr>
-              <a:t>"", </a:t>
+              </a:rPr>
+              <a:t>kwargs</a:t>
+            </a:r>
+            <a:r>
+              <a:rPr lang="en-US" altLang="zh-CN" dirty="0">
+                <a:solidFill>
+                  <a:srgbClr val="FF0000"/>
+                </a:solidFill>
+                <a:latin typeface="Helvetica Neue" panose="02000503000000020004" pitchFamily="2" charset="0"/>
+              </a:rPr>
+              <a:t> Addition or Deletion): </a:t>
             </a:r>
           </a:p>
           <a:p>
@@ -7257,10 +6725,8 @@
                   <a:srgbClr val="FF0000"/>
                 </a:solidFill>
                 <a:latin typeface="Helvetica Neue" panose="02000503000000020004" pitchFamily="2" charset="0"/>
-                <a:ea typeface="Helvetica Neue" panose="02000503000000020004" pitchFamily="2" charset="0"/>
-                <a:cs typeface="Helvetica Neue" panose="02000503000000020004" pitchFamily="2" charset="0"/>
-              </a:rPr>
-              <a:t>			"</a:t>
+              </a:rPr>
+              <a:t>KWARGS is NOT empty (both P1 and P2 have `**</a:t>
             </a:r>
             <a:r>
               <a:rPr lang="en-US" altLang="zh-CN" dirty="0" err="1">
@@ -7268,56 +6734,27 @@
                   <a:srgbClr val="FF0000"/>
                 </a:solidFill>
                 <a:latin typeface="Helvetica Neue" panose="02000503000000020004" pitchFamily="2" charset="0"/>
-                <a:ea typeface="Helvetica Neue" panose="02000503000000020004" pitchFamily="2" charset="0"/>
-                <a:cs typeface="Helvetica Neue" panose="02000503000000020004" pitchFamily="2" charset="0"/>
-              </a:rPr>
-              <a:t>is_encryption_function</a:t>
-            </a:r>
-            <a:r>
-              <a:rPr lang="en-US" altLang="zh-CN" dirty="0">
-                <a:solidFill>
-                  <a:srgbClr val="FF0000"/>
-                </a:solidFill>
-                <a:latin typeface="Helvetica Neue" panose="02000503000000020004" pitchFamily="2" charset="0"/>
-                <a:ea typeface="Helvetica Neue" panose="02000503000000020004" pitchFamily="2" charset="0"/>
-                <a:cs typeface="Helvetica Neue" panose="02000503000000020004" pitchFamily="2" charset="0"/>
-              </a:rPr>
-              <a:t>": true/false,</a:t>
+              </a:rPr>
+              <a:t>kwargs</a:t>
+            </a:r>
+            <a:r>
+              <a:rPr lang="en-US" altLang="zh-CN" dirty="0">
+                <a:solidFill>
+                  <a:srgbClr val="FF0000"/>
+                </a:solidFill>
+                <a:latin typeface="Helvetica Neue" panose="02000503000000020004" pitchFamily="2" charset="0"/>
+              </a:rPr>
+              <a:t>`) and keys of PU_kwargs1 and PU_kwargs1 are different, mark as CI2</a:t>
             </a:r>
           </a:p>
           <a:p>
             <a:pPr marL="360000"/>
-            <a:r>
-              <a:rPr lang="en-US" altLang="zh-CN" dirty="0">
-                <a:solidFill>
-                  <a:srgbClr val="FF0000"/>
-                </a:solidFill>
-                <a:latin typeface="Helvetica Neue" panose="02000503000000020004" pitchFamily="2" charset="0"/>
-                <a:ea typeface="Helvetica Neue" panose="02000503000000020004" pitchFamily="2" charset="0"/>
-                <a:cs typeface="Helvetica Neue" panose="02000503000000020004" pitchFamily="2" charset="0"/>
-              </a:rPr>
-              <a:t>			"description": "</a:t>
-            </a:r>
-            <a:r>
-              <a:rPr lang="en-US" altLang="zh-CN" dirty="0">
-                <a:solidFill>
-                  <a:srgbClr val="FF0000"/>
-                </a:solidFill>
-                <a:latin typeface="Helvetica Neue" panose="02000503000000020004" pitchFamily="2" charset="0"/>
-              </a:rPr>
-              <a:t> Elaborate your reason here</a:t>
-            </a:r>
-            <a:r>
-              <a:rPr lang="en-US" altLang="zh-CN" dirty="0">
-                <a:solidFill>
-                  <a:srgbClr val="FF0000"/>
-                </a:solidFill>
-                <a:latin typeface="Helvetica Neue" panose="02000503000000020004" pitchFamily="2" charset="0"/>
-                <a:ea typeface="Helvetica Neue" panose="02000503000000020004" pitchFamily="2" charset="0"/>
-                <a:cs typeface="Helvetica Neue" panose="02000503000000020004" pitchFamily="2" charset="0"/>
-              </a:rPr>
-              <a:t>."    </a:t>
-            </a:r>
+            <a:endParaRPr lang="en-US" altLang="zh-CN" dirty="0">
+              <a:solidFill>
+                <a:srgbClr val="FF0000"/>
+              </a:solidFill>
+              <a:latin typeface="Helvetica Neue" panose="02000503000000020004" pitchFamily="2" charset="0"/>
+            </a:endParaRPr>
           </a:p>
           <a:p>
             <a:pPr marL="360000"/>
@@ -7327,44 +6764,8 @@
                   <a:srgbClr val="FF0000"/>
                 </a:solidFill>
                 <a:latin typeface="Helvetica Neue" panose="02000503000000020004" pitchFamily="2" charset="0"/>
-                <a:ea typeface="Helvetica Neue" panose="02000503000000020004" pitchFamily="2" charset="0"/>
-                <a:cs typeface="Helvetica Neue" panose="02000503000000020004" pitchFamily="2" charset="0"/>
-              </a:rPr>
-              <a:t>          }</a:t>
-            </a:r>
-          </a:p>
-          <a:p>
-            <a:pPr marL="645750" indent="-285750">
-              <a:buFont typeface="Arial" panose="020B0604020202020204" pitchFamily="34" charset="0"/>
-              <a:buChar char="•"/>
-            </a:pPr>
-            <a:r>
-              <a:rPr lang="en-US" altLang="zh-CN" dirty="0">
-                <a:solidFill>
-                  <a:srgbClr val="FF0000"/>
-                </a:solidFill>
-                <a:latin typeface="Helvetica Neue" panose="02000503000000020004" pitchFamily="2" charset="0"/>
-                <a:ea typeface="Helvetica Neue" panose="02000503000000020004" pitchFamily="2" charset="0"/>
-                <a:cs typeface="Helvetica Neue" panose="02000503000000020004" pitchFamily="2" charset="0"/>
-              </a:rPr>
-              <a:t>Hash functions and other irreversible algorithms are not considered as encryption algorithms.</a:t>
-            </a:r>
-          </a:p>
-          <a:p>
-            <a:pPr marL="645750" indent="-285750">
-              <a:buFont typeface="Arial" panose="020B0604020202020204" pitchFamily="34" charset="0"/>
-              <a:buChar char="•"/>
-            </a:pPr>
-            <a:r>
-              <a:rPr lang="en-US" altLang="zh-CN" dirty="0">
-                <a:solidFill>
-                  <a:srgbClr val="FF0000"/>
-                </a:solidFill>
-                <a:latin typeface="Helvetica Neue" panose="02000503000000020004" pitchFamily="2" charset="0"/>
-                <a:ea typeface="Helvetica Neue" panose="02000503000000020004" pitchFamily="2" charset="0"/>
-                <a:cs typeface="Helvetica Neue" panose="02000503000000020004" pitchFamily="2" charset="0"/>
-              </a:rPr>
-              <a:t>Below is an example of an encryption function from a cryptographic library:</a:t>
+              </a:rPr>
+              <a:t>2. **CI3 (Parameter Rename)**: </a:t>
             </a:r>
           </a:p>
           <a:p>
@@ -7375,157 +6776,74 @@
                   <a:srgbClr val="FF0000"/>
                 </a:solidFill>
                 <a:latin typeface="Helvetica Neue" panose="02000503000000020004" pitchFamily="2" charset="0"/>
-                <a:ea typeface="Helvetica Neue" panose="02000503000000020004" pitchFamily="2" charset="0"/>
-                <a:cs typeface="Helvetica Neue" panose="02000503000000020004" pitchFamily="2" charset="0"/>
-              </a:rPr>
-              <a:t>```</a:t>
-            </a:r>
+              </a:rPr>
+              <a:t>The assignments to p1 and p2 are identical and most usages are </a:t>
+            </a:r>
+            <a:r>
+              <a:rPr lang="en-US" altLang="zh-CN" dirty="0" err="1">
+                <a:solidFill>
+                  <a:srgbClr val="FF0000"/>
+                </a:solidFill>
+                <a:latin typeface="Helvetica Neue" panose="02000503000000020004" pitchFamily="2" charset="0"/>
+              </a:rPr>
+              <a:t>indentical</a:t>
+            </a:r>
+            <a:endParaRPr lang="en-US" altLang="zh-CN" dirty="0">
+              <a:solidFill>
+                <a:srgbClr val="FF0000"/>
+              </a:solidFill>
+              <a:latin typeface="Helvetica Neue" panose="02000503000000020004" pitchFamily="2" charset="0"/>
+            </a:endParaRPr>
           </a:p>
           <a:p>
             <a:pPr marL="360000"/>
-            <a:r>
-              <a:rPr lang="en-US" altLang="zh-CN" i="1" dirty="0">
-                <a:solidFill>
-                  <a:srgbClr val="FF0000"/>
-                </a:solidFill>
-                <a:latin typeface="Helvetica Neue" panose="02000503000000020004" pitchFamily="2" charset="0"/>
-                <a:ea typeface="Helvetica Neue" panose="02000503000000020004" pitchFamily="2" charset="0"/>
-                <a:cs typeface="Helvetica Neue" panose="02000503000000020004" pitchFamily="2" charset="0"/>
-              </a:rPr>
-              <a:t>Library function name: {</a:t>
-            </a:r>
-            <a:r>
-              <a:rPr lang="en-US" altLang="zh-CN" i="1" dirty="0" err="1">
-                <a:solidFill>
-                  <a:srgbClr val="FF0000"/>
-                </a:solidFill>
-                <a:latin typeface="Helvetica Neue" panose="02000503000000020004" pitchFamily="2" charset="0"/>
-                <a:ea typeface="Helvetica Neue" panose="02000503000000020004" pitchFamily="2" charset="0"/>
-                <a:cs typeface="Helvetica Neue" panose="02000503000000020004" pitchFamily="2" charset="0"/>
-              </a:rPr>
-              <a:t>f</a:t>
-            </a:r>
-            <a:r>
-              <a:rPr lang="en-US" altLang="zh-CN" i="1" baseline="-25000" dirty="0" err="1">
-                <a:solidFill>
-                  <a:srgbClr val="FF0000"/>
-                </a:solidFill>
-                <a:latin typeface="Helvetica Neue" panose="02000503000000020004" pitchFamily="2" charset="0"/>
-                <a:ea typeface="Helvetica Neue" panose="02000503000000020004" pitchFamily="2" charset="0"/>
-                <a:cs typeface="Helvetica Neue" panose="02000503000000020004" pitchFamily="2" charset="0"/>
-              </a:rPr>
-              <a:t>db</a:t>
-            </a:r>
-            <a:r>
-              <a:rPr lang="en-US" altLang="zh-CN" i="1" dirty="0" err="1">
-                <a:solidFill>
-                  <a:srgbClr val="FF0000"/>
-                </a:solidFill>
-                <a:latin typeface="Helvetica Neue" panose="02000503000000020004" pitchFamily="2" charset="0"/>
-                <a:ea typeface="Helvetica Neue" panose="02000503000000020004" pitchFamily="2" charset="0"/>
-                <a:cs typeface="Helvetica Neue" panose="02000503000000020004" pitchFamily="2" charset="0"/>
-              </a:rPr>
-              <a:t>.nm</a:t>
-            </a:r>
-            <a:r>
-              <a:rPr lang="en-US" altLang="zh-CN" i="1" dirty="0">
-                <a:solidFill>
-                  <a:srgbClr val="FF0000"/>
-                </a:solidFill>
-                <a:latin typeface="Helvetica Neue" panose="02000503000000020004" pitchFamily="2" charset="0"/>
-                <a:ea typeface="Helvetica Neue" panose="02000503000000020004" pitchFamily="2" charset="0"/>
-                <a:cs typeface="Helvetica Neue" panose="02000503000000020004" pitchFamily="2" charset="0"/>
-              </a:rPr>
-              <a:t>} </a:t>
-            </a:r>
+            <a:endParaRPr lang="en-US" altLang="zh-CN" dirty="0">
+              <a:solidFill>
+                <a:srgbClr val="FF0000"/>
+              </a:solidFill>
+              <a:latin typeface="Helvetica Neue" panose="02000503000000020004" pitchFamily="2" charset="0"/>
+            </a:endParaRPr>
           </a:p>
           <a:p>
             <a:pPr marL="360000"/>
             <a:r>
-              <a:rPr lang="en-US" altLang="zh-CN" i="1" dirty="0">
-                <a:solidFill>
-                  <a:srgbClr val="FF0000"/>
-                </a:solidFill>
-                <a:latin typeface="Helvetica Neue" panose="02000503000000020004" pitchFamily="2" charset="0"/>
-                <a:ea typeface="Helvetica Neue" panose="02000503000000020004" pitchFamily="2" charset="0"/>
-                <a:cs typeface="Helvetica Neue" panose="02000503000000020004" pitchFamily="2" charset="0"/>
-              </a:rPr>
-              <a:t>Library function body: {</a:t>
-            </a:r>
-            <a:r>
-              <a:rPr lang="en-US" altLang="zh-CN" i="1" dirty="0" err="1">
-                <a:solidFill>
-                  <a:srgbClr val="FF0000"/>
-                </a:solidFill>
-                <a:latin typeface="Helvetica Neue" panose="02000503000000020004" pitchFamily="2" charset="0"/>
-                <a:ea typeface="Helvetica Neue" panose="02000503000000020004" pitchFamily="2" charset="0"/>
-                <a:cs typeface="Helvetica Neue" panose="02000503000000020004" pitchFamily="2" charset="0"/>
-              </a:rPr>
-              <a:t>f</a:t>
-            </a:r>
-            <a:r>
-              <a:rPr lang="en-US" altLang="zh-CN" i="1" baseline="-25000" dirty="0" err="1">
-                <a:solidFill>
-                  <a:srgbClr val="FF0000"/>
-                </a:solidFill>
-                <a:latin typeface="Helvetica Neue" panose="02000503000000020004" pitchFamily="2" charset="0"/>
-                <a:ea typeface="Helvetica Neue" panose="02000503000000020004" pitchFamily="2" charset="0"/>
-                <a:cs typeface="Helvetica Neue" panose="02000503000000020004" pitchFamily="2" charset="0"/>
-              </a:rPr>
-              <a:t>db</a:t>
-            </a:r>
-            <a:r>
-              <a:rPr lang="en-US" altLang="zh-CN" i="1" dirty="0" err="1">
-                <a:solidFill>
-                  <a:srgbClr val="FF0000"/>
-                </a:solidFill>
-                <a:latin typeface="Helvetica Neue" panose="02000503000000020004" pitchFamily="2" charset="0"/>
-                <a:ea typeface="Helvetica Neue" panose="02000503000000020004" pitchFamily="2" charset="0"/>
-                <a:cs typeface="Helvetica Neue" panose="02000503000000020004" pitchFamily="2" charset="0"/>
-              </a:rPr>
-              <a:t>.S</a:t>
-            </a:r>
-            <a:r>
-              <a:rPr lang="en-US" altLang="zh-CN" i="1" dirty="0">
-                <a:solidFill>
-                  <a:srgbClr val="FF0000"/>
-                </a:solidFill>
-                <a:latin typeface="Helvetica Neue" panose="02000503000000020004" pitchFamily="2" charset="0"/>
-                <a:ea typeface="Helvetica Neue" panose="02000503000000020004" pitchFamily="2" charset="0"/>
-                <a:cs typeface="Helvetica Neue" panose="02000503000000020004" pitchFamily="2" charset="0"/>
-              </a:rPr>
-              <a:t>}</a:t>
+              <a:rPr lang="en-US" altLang="zh-CN" dirty="0">
+                <a:solidFill>
+                  <a:srgbClr val="FF0000"/>
+                </a:solidFill>
+                <a:latin typeface="Helvetica Neue" panose="02000503000000020004" pitchFamily="2" charset="0"/>
+              </a:rPr>
+              <a:t>3. **CI5 (Parameter Range Change for exception)**:</a:t>
             </a:r>
           </a:p>
           <a:p>
             <a:pPr marL="360000"/>
             <a:r>
-              <a:rPr lang="en-US" altLang="zh-CN" i="1" dirty="0">
-                <a:solidFill>
-                  <a:srgbClr val="FF0000"/>
-                </a:solidFill>
-                <a:latin typeface="Helvetica Neue" panose="02000503000000020004" pitchFamily="2" charset="0"/>
-                <a:ea typeface="Helvetica Neue" panose="02000503000000020004" pitchFamily="2" charset="0"/>
-                <a:cs typeface="Helvetica Neue" panose="02000503000000020004" pitchFamily="2" charset="0"/>
-              </a:rPr>
-              <a:t>```</a:t>
-            </a:r>
-          </a:p>
-          <a:p>
-            <a:pPr marL="645750" indent="-285750">
-              <a:buFont typeface="Arial" panose="020B0604020202020204" pitchFamily="34" charset="0"/>
-              <a:buChar char="•"/>
-            </a:pPr>
-            <a:r>
-              <a:rPr lang="en-US" altLang="zh-CN" dirty="0">
-                <a:solidFill>
-                  <a:srgbClr val="FF0000"/>
-                </a:solidFill>
-                <a:latin typeface="Helvetica Neue" panose="02000503000000020004" pitchFamily="2" charset="0"/>
-                <a:ea typeface="Helvetica Neue" panose="02000503000000020004" pitchFamily="2" charset="0"/>
-                <a:cs typeface="Helvetica Neue" panose="02000503000000020004" pitchFamily="2" charset="0"/>
-              </a:rPr>
-              <a:t>If you are ready, please reply 'Understood’.</a:t>
+              <a:rPr lang="en-US" altLang="zh-CN" dirty="0">
+                <a:solidFill>
+                  <a:srgbClr val="FF0000"/>
+                </a:solidFill>
+                <a:latin typeface="Helvetica Neue" panose="02000503000000020004" pitchFamily="2" charset="0"/>
+              </a:rPr>
+              <a:t>CI5 denotes compatibility issues caused by changes of exception conditions which includes any parameter in parameter list. If </a:t>
+            </a:r>
+            <a:r>
+              <a:rPr lang="en-US" altLang="zh-CN" dirty="0" err="1">
+                <a:solidFill>
+                  <a:srgbClr val="FF0000"/>
+                </a:solidFill>
+                <a:latin typeface="Helvetica Neue" panose="02000503000000020004" pitchFamily="2" charset="0"/>
+              </a:rPr>
+              <a:t>identifing</a:t>
+            </a:r>
+            <a:r>
+              <a:rPr lang="en-US" altLang="zh-CN" dirty="0">
+                <a:solidFill>
+                  <a:srgbClr val="FF0000"/>
+                </a:solidFill>
+                <a:latin typeface="Helvetica Neue" panose="02000503000000020004" pitchFamily="2" charset="0"/>
+              </a:rPr>
+              <a:t> following situation, mark CI5:</a:t>
             </a:r>
           </a:p>
           <a:p>
@@ -7536,137 +6854,50 @@
                   <a:srgbClr val="FF0000"/>
                 </a:solidFill>
                 <a:latin typeface="Helvetica Neue" panose="02000503000000020004" pitchFamily="2" charset="0"/>
-                <a:ea typeface="Helvetica Neue" panose="02000503000000020004" pitchFamily="2" charset="0"/>
-                <a:cs typeface="Helvetica Neue" panose="02000503000000020004" pitchFamily="2" charset="0"/>
-              </a:rPr>
-              <a:t>```</a:t>
+              </a:rPr>
+              <a:t>    - For exception nodes in E1 and E2:</a:t>
             </a:r>
           </a:p>
           <a:p>
             <a:pPr marL="360000"/>
             <a:r>
-              <a:rPr lang="en-US" altLang="zh-CN" i="1" dirty="0">
-                <a:solidFill>
-                  <a:srgbClr val="FF0000"/>
-                </a:solidFill>
-                <a:latin typeface="Helvetica Neue" panose="02000503000000020004" pitchFamily="2" charset="0"/>
-                <a:ea typeface="Helvetica Neue" panose="02000503000000020004" pitchFamily="2" charset="0"/>
-                <a:cs typeface="Helvetica Neue" panose="02000503000000020004" pitchFamily="2" charset="0"/>
-              </a:rPr>
-              <a:t>Function name: {</a:t>
-            </a:r>
-            <a:r>
-              <a:rPr lang="en-US" altLang="zh-CN" i="1" dirty="0" err="1">
-                <a:solidFill>
-                  <a:srgbClr val="FF0000"/>
-                </a:solidFill>
-                <a:latin typeface="Helvetica Neue" panose="02000503000000020004" pitchFamily="2" charset="0"/>
-                <a:ea typeface="Helvetica Neue" panose="02000503000000020004" pitchFamily="2" charset="0"/>
-                <a:cs typeface="Helvetica Neue" panose="02000503000000020004" pitchFamily="2" charset="0"/>
-              </a:rPr>
-              <a:t>f</a:t>
-            </a:r>
-            <a:r>
-              <a:rPr lang="en-US" altLang="zh-CN" i="1" baseline="-25000" dirty="0" err="1">
-                <a:solidFill>
-                  <a:srgbClr val="FF0000"/>
-                </a:solidFill>
-                <a:latin typeface="Helvetica Neue" panose="02000503000000020004" pitchFamily="2" charset="0"/>
-                <a:ea typeface="Helvetica Neue" panose="02000503000000020004" pitchFamily="2" charset="0"/>
-                <a:cs typeface="Helvetica Neue" panose="02000503000000020004" pitchFamily="2" charset="0"/>
-              </a:rPr>
-              <a:t>bf</a:t>
-            </a:r>
-            <a:r>
-              <a:rPr lang="en-US" altLang="zh-CN" i="1" dirty="0" err="1">
-                <a:solidFill>
-                  <a:srgbClr val="FF0000"/>
-                </a:solidFill>
-                <a:latin typeface="Helvetica Neue" panose="02000503000000020004" pitchFamily="2" charset="0"/>
-                <a:ea typeface="Helvetica Neue" panose="02000503000000020004" pitchFamily="2" charset="0"/>
-                <a:cs typeface="Helvetica Neue" panose="02000503000000020004" pitchFamily="2" charset="0"/>
-              </a:rPr>
-              <a:t>.nm</a:t>
-            </a:r>
-            <a:r>
-              <a:rPr lang="en-US" altLang="zh-CN" i="1" dirty="0">
-                <a:solidFill>
-                  <a:srgbClr val="FF0000"/>
-                </a:solidFill>
-                <a:latin typeface="Helvetica Neue" panose="02000503000000020004" pitchFamily="2" charset="0"/>
-                <a:ea typeface="Helvetica Neue" panose="02000503000000020004" pitchFamily="2" charset="0"/>
-                <a:cs typeface="Helvetica Neue" panose="02000503000000020004" pitchFamily="2" charset="0"/>
-              </a:rPr>
-              <a:t>} </a:t>
+              <a:rPr lang="en-US" altLang="zh-CN" dirty="0">
+                <a:solidFill>
+                  <a:srgbClr val="FF0000"/>
+                </a:solidFill>
+                <a:latin typeface="Helvetica Neue" panose="02000503000000020004" pitchFamily="2" charset="0"/>
+              </a:rPr>
+              <a:t>    1. nodes amounts are different and the added/deleted exception `e` is associated with condition `c` which contains a parameter `p` (`p` must in condition description of `c`).</a:t>
             </a:r>
           </a:p>
           <a:p>
             <a:pPr marL="360000"/>
             <a:r>
-              <a:rPr lang="en-US" altLang="zh-CN" i="1" dirty="0">
-                <a:solidFill>
-                  <a:srgbClr val="FF0000"/>
-                </a:solidFill>
-                <a:latin typeface="Helvetica Neue" panose="02000503000000020004" pitchFamily="2" charset="0"/>
-                <a:ea typeface="Helvetica Neue" panose="02000503000000020004" pitchFamily="2" charset="0"/>
-                <a:cs typeface="Helvetica Neue" panose="02000503000000020004" pitchFamily="2" charset="0"/>
-              </a:rPr>
-              <a:t>Function body: {</a:t>
-            </a:r>
-            <a:r>
-              <a:rPr lang="en-US" altLang="zh-CN" i="1" dirty="0" err="1">
-                <a:solidFill>
-                  <a:srgbClr val="FF0000"/>
-                </a:solidFill>
-                <a:latin typeface="Helvetica Neue" panose="02000503000000020004" pitchFamily="2" charset="0"/>
-                <a:ea typeface="Helvetica Neue" panose="02000503000000020004" pitchFamily="2" charset="0"/>
-                <a:cs typeface="Helvetica Neue" panose="02000503000000020004" pitchFamily="2" charset="0"/>
-              </a:rPr>
-              <a:t>f</a:t>
-            </a:r>
-            <a:r>
-              <a:rPr lang="en-US" altLang="zh-CN" i="1" baseline="-25000" dirty="0" err="1">
-                <a:solidFill>
-                  <a:srgbClr val="FF0000"/>
-                </a:solidFill>
-                <a:latin typeface="Helvetica Neue" panose="02000503000000020004" pitchFamily="2" charset="0"/>
-                <a:ea typeface="Helvetica Neue" panose="02000503000000020004" pitchFamily="2" charset="0"/>
-                <a:cs typeface="Helvetica Neue" panose="02000503000000020004" pitchFamily="2" charset="0"/>
-              </a:rPr>
-              <a:t>bf</a:t>
-            </a:r>
-            <a:r>
-              <a:rPr lang="en-US" altLang="zh-CN" i="1" dirty="0" err="1">
-                <a:solidFill>
-                  <a:srgbClr val="FF0000"/>
-                </a:solidFill>
-                <a:latin typeface="Helvetica Neue" panose="02000503000000020004" pitchFamily="2" charset="0"/>
-                <a:ea typeface="Helvetica Neue" panose="02000503000000020004" pitchFamily="2" charset="0"/>
-                <a:cs typeface="Helvetica Neue" panose="02000503000000020004" pitchFamily="2" charset="0"/>
-              </a:rPr>
-              <a:t>.S</a:t>
-            </a:r>
-            <a:r>
-              <a:rPr lang="en-US" altLang="zh-CN" i="1" dirty="0">
-                <a:solidFill>
-                  <a:srgbClr val="FF0000"/>
-                </a:solidFill>
-                <a:latin typeface="Helvetica Neue" panose="02000503000000020004" pitchFamily="2" charset="0"/>
-                <a:ea typeface="Helvetica Neue" panose="02000503000000020004" pitchFamily="2" charset="0"/>
-                <a:cs typeface="Helvetica Neue" panose="02000503000000020004" pitchFamily="2" charset="0"/>
-              </a:rPr>
-              <a:t>}</a:t>
-            </a:r>
-          </a:p>
-          <a:p>
-            <a:pPr marL="360000"/>
-            <a:r>
-              <a:rPr lang="en-US" altLang="zh-CN" i="1" dirty="0">
-                <a:latin typeface="Helvetica Neue" panose="02000503000000020004" pitchFamily="2" charset="0"/>
-                <a:ea typeface="Helvetica Neue" panose="02000503000000020004" pitchFamily="2" charset="0"/>
-                <a:cs typeface="Helvetica Neue" panose="02000503000000020004" pitchFamily="2" charset="0"/>
-              </a:rPr>
-              <a:t>```</a:t>
+              <a:rPr lang="en-US" altLang="zh-CN" dirty="0">
+                <a:solidFill>
+                  <a:srgbClr val="FF0000"/>
+                </a:solidFill>
+                <a:latin typeface="Helvetica Neue" panose="02000503000000020004" pitchFamily="2" charset="0"/>
+              </a:rPr>
+              <a:t>    2. Or for any pair of exception (`e1` in E1 and `e2` in E2): </a:t>
+            </a:r>
+            <a:r>
+              <a:rPr lang="en-US" altLang="zh-CN" dirty="0" err="1">
+                <a:solidFill>
+                  <a:srgbClr val="FF0000"/>
+                </a:solidFill>
+                <a:latin typeface="Helvetica Neue" panose="02000503000000020004" pitchFamily="2" charset="0"/>
+              </a:rPr>
+              <a:t>backtrace</a:t>
+            </a:r>
+            <a:r>
+              <a:rPr lang="en-US" altLang="zh-CN" dirty="0">
+                <a:solidFill>
+                  <a:srgbClr val="FF0000"/>
+                </a:solidFill>
+                <a:latin typeface="Helvetica Neue" panose="02000503000000020004" pitchFamily="2" charset="0"/>
+              </a:rPr>
+              <a:t> the condition c1 for e1 and c2 for e2 through CFG. If both condition contain a parameter `p` but have different range criteria for `p`.</a:t>
             </a:r>
           </a:p>
         </p:txBody>

--- a/update/compatibility/fig/prompt.pptx
+++ b/update/compatibility/fig/prompt.pptx
@@ -2,13 +2,13 @@
 <file path=ppt/presentation.xml><?xml version="1.0" encoding="utf-8"?>
 <p:presentation xmlns:a="http://schemas.openxmlformats.org/drawingml/2006/main" xmlns:r="http://schemas.openxmlformats.org/officeDocument/2006/relationships" xmlns:p="http://schemas.openxmlformats.org/presentationml/2006/main" saveSubsetFonts="1">
   <p:sldMasterIdLst>
-    <p:sldMasterId id="2147483672" r:id="rId1"/>
+    <p:sldMasterId id="2147483684" r:id="rId1"/>
   </p:sldMasterIdLst>
   <p:notesMasterIdLst>
     <p:notesMasterId r:id="rId9"/>
   </p:notesMasterIdLst>
   <p:sldIdLst>
-    <p:sldId id="256" r:id="rId2"/>
+    <p:sldId id="263" r:id="rId2"/>
     <p:sldId id="257" r:id="rId3"/>
     <p:sldId id="258" r:id="rId4"/>
     <p:sldId id="259" r:id="rId5"/>
@@ -16,7 +16,7 @@
     <p:sldId id="261" r:id="rId7"/>
     <p:sldId id="262" r:id="rId8"/>
   </p:sldIdLst>
-  <p:sldSz cx="12193588" cy="14057313"/>
+  <p:sldSz cx="12193588" cy="17657763"/>
   <p:notesSz cx="6858000" cy="9144000"/>
   <p:defaultTextStyle>
     <a:defPPr>
@@ -203,7 +203,7 @@
           <a:p>
             <a:fld id="{2A4973AF-1E6D-4746-8FA3-3206D360D595}" type="datetimeFigureOut">
               <a:rPr lang="en-CN" smtClean="0"/>
-              <a:t>12/30/2025</a:t>
+              <a:t>2026/1/4</a:t>
             </a:fld>
             <a:endParaRPr lang="en-CN"/>
           </a:p>
@@ -221,8 +221,8 @@
         </p:nvSpPr>
         <p:spPr>
           <a:xfrm>
-            <a:off x="2090738" y="1143000"/>
-            <a:ext cx="2676525" cy="3086100"/>
+            <a:off x="2363788" y="1143000"/>
+            <a:ext cx="2130425" cy="3086100"/>
           </a:xfrm>
           <a:prstGeom prst="rect">
             <a:avLst/>
@@ -498,7 +498,12 @@
             <p:ph type="sldImg"/>
           </p:nvPr>
         </p:nvSpPr>
-        <p:spPr/>
+        <p:spPr>
+          <a:xfrm>
+            <a:off x="2363788" y="1143000"/>
+            <a:ext cx="2130425" cy="3086100"/>
+          </a:xfrm>
+        </p:spPr>
       </p:sp>
       <p:sp>
         <p:nvSpPr>
@@ -578,7 +583,7 @@
     </p:spTree>
     <p:extLst>
       <p:ext uri="{BB962C8B-B14F-4D97-AF65-F5344CB8AC3E}">
-        <p14:creationId xmlns:p14="http://schemas.microsoft.com/office/powerpoint/2010/main" val="749095264"/>
+        <p14:creationId xmlns:p14="http://schemas.microsoft.com/office/powerpoint/2010/main" val="3589845542"/>
       </p:ext>
     </p:extLst>
   </p:cSld>
@@ -615,7 +620,12 @@
             <p:ph type="sldImg"/>
           </p:nvPr>
         </p:nvSpPr>
-        <p:spPr/>
+        <p:spPr>
+          <a:xfrm>
+            <a:off x="2363788" y="1143000"/>
+            <a:ext cx="2130425" cy="3086100"/>
+          </a:xfrm>
+        </p:spPr>
       </p:sp>
       <p:sp>
         <p:nvSpPr>
@@ -732,7 +742,12 @@
             <p:ph type="sldImg"/>
           </p:nvPr>
         </p:nvSpPr>
-        <p:spPr/>
+        <p:spPr>
+          <a:xfrm>
+            <a:off x="2363788" y="1143000"/>
+            <a:ext cx="2130425" cy="3086100"/>
+          </a:xfrm>
+        </p:spPr>
       </p:sp>
       <p:sp>
         <p:nvSpPr>
@@ -849,7 +864,12 @@
             <p:ph type="sldImg"/>
           </p:nvPr>
         </p:nvSpPr>
-        <p:spPr/>
+        <p:spPr>
+          <a:xfrm>
+            <a:off x="2363788" y="1143000"/>
+            <a:ext cx="2130425" cy="3086100"/>
+          </a:xfrm>
+        </p:spPr>
       </p:sp>
       <p:sp>
         <p:nvSpPr>
@@ -966,7 +986,12 @@
             <p:ph type="sldImg"/>
           </p:nvPr>
         </p:nvSpPr>
-        <p:spPr/>
+        <p:spPr>
+          <a:xfrm>
+            <a:off x="2363788" y="1143000"/>
+            <a:ext cx="2130425" cy="3086100"/>
+          </a:xfrm>
+        </p:spPr>
       </p:sp>
       <p:sp>
         <p:nvSpPr>
@@ -1083,7 +1108,12 @@
             <p:ph type="sldImg"/>
           </p:nvPr>
         </p:nvSpPr>
-        <p:spPr/>
+        <p:spPr>
+          <a:xfrm>
+            <a:off x="2363788" y="1143000"/>
+            <a:ext cx="2130425" cy="3086100"/>
+          </a:xfrm>
+        </p:spPr>
       </p:sp>
       <p:sp>
         <p:nvSpPr>
@@ -1200,7 +1230,12 @@
             <p:ph type="sldImg"/>
           </p:nvPr>
         </p:nvSpPr>
-        <p:spPr/>
+        <p:spPr>
+          <a:xfrm>
+            <a:off x="2363788" y="1143000"/>
+            <a:ext cx="2130425" cy="3086100"/>
+          </a:xfrm>
+        </p:spPr>
       </p:sp>
       <p:sp>
         <p:nvSpPr>
@@ -1319,8 +1354,8 @@
         </p:nvSpPr>
         <p:spPr>
           <a:xfrm>
-            <a:off x="914519" y="2300585"/>
-            <a:ext cx="10364550" cy="4894027"/>
+            <a:off x="914519" y="2889825"/>
+            <a:ext cx="10364550" cy="6147517"/>
           </a:xfrm>
         </p:spPr>
         <p:txBody>
@@ -1351,8 +1386,8 @@
         </p:nvSpPr>
         <p:spPr>
           <a:xfrm>
-            <a:off x="1524199" y="7383344"/>
-            <a:ext cx="9145191" cy="3393929"/>
+            <a:off x="1524199" y="9274414"/>
+            <a:ext cx="9145191" cy="4263204"/>
           </a:xfrm>
         </p:spPr>
         <p:txBody>
@@ -1421,7 +1456,7 @@
           <a:p>
             <a:fld id="{F89A057A-0BEA-48B2-A216-D46DB2C83327}" type="datetimeFigureOut">
               <a:rPr lang="zh-CN" altLang="en-US" smtClean="0"/>
-              <a:t>2025/12/30</a:t>
+              <a:t>2026/1/4</a:t>
             </a:fld>
             <a:endParaRPr lang="zh-CN" altLang="en-US"/>
           </a:p>
@@ -1472,7 +1507,7 @@
     </p:spTree>
     <p:extLst>
       <p:ext uri="{BB962C8B-B14F-4D97-AF65-F5344CB8AC3E}">
-        <p14:creationId xmlns:p14="http://schemas.microsoft.com/office/powerpoint/2010/main" val="970492105"/>
+        <p14:creationId xmlns:p14="http://schemas.microsoft.com/office/powerpoint/2010/main" val="3011917982"/>
       </p:ext>
     </p:extLst>
   </p:cSld>
@@ -1591,7 +1626,7 @@
           <a:p>
             <a:fld id="{F89A057A-0BEA-48B2-A216-D46DB2C83327}" type="datetimeFigureOut">
               <a:rPr lang="zh-CN" altLang="en-US" smtClean="0"/>
-              <a:t>2025/12/30</a:t>
+              <a:t>2026/1/4</a:t>
             </a:fld>
             <a:endParaRPr lang="zh-CN" altLang="en-US"/>
           </a:p>
@@ -1642,7 +1677,7 @@
     </p:spTree>
     <p:extLst>
       <p:ext uri="{BB962C8B-B14F-4D97-AF65-F5344CB8AC3E}">
-        <p14:creationId xmlns:p14="http://schemas.microsoft.com/office/powerpoint/2010/main" val="4129224081"/>
+        <p14:creationId xmlns:p14="http://schemas.microsoft.com/office/powerpoint/2010/main" val="431240136"/>
       </p:ext>
     </p:extLst>
   </p:cSld>
@@ -1681,8 +1716,8 @@
         </p:nvSpPr>
         <p:spPr>
           <a:xfrm>
-            <a:off x="8726037" y="748422"/>
-            <a:ext cx="2629242" cy="11912923"/>
+            <a:off x="8726037" y="940112"/>
+            <a:ext cx="2629242" cy="14964138"/>
           </a:xfrm>
         </p:spPr>
         <p:txBody>
@@ -1709,8 +1744,8 @@
         </p:nvSpPr>
         <p:spPr>
           <a:xfrm>
-            <a:off x="838310" y="748422"/>
-            <a:ext cx="7735307" cy="11912923"/>
+            <a:off x="838310" y="940112"/>
+            <a:ext cx="7735307" cy="14964138"/>
           </a:xfrm>
         </p:spPr>
         <p:txBody>
@@ -1771,7 +1806,7 @@
           <a:p>
             <a:fld id="{F89A057A-0BEA-48B2-A216-D46DB2C83327}" type="datetimeFigureOut">
               <a:rPr lang="zh-CN" altLang="en-US" smtClean="0"/>
-              <a:t>2025/12/30</a:t>
+              <a:t>2026/1/4</a:t>
             </a:fld>
             <a:endParaRPr lang="zh-CN" altLang="en-US"/>
           </a:p>
@@ -1822,7 +1857,7 @@
     </p:spTree>
     <p:extLst>
       <p:ext uri="{BB962C8B-B14F-4D97-AF65-F5344CB8AC3E}">
-        <p14:creationId xmlns:p14="http://schemas.microsoft.com/office/powerpoint/2010/main" val="3955693519"/>
+        <p14:creationId xmlns:p14="http://schemas.microsoft.com/office/powerpoint/2010/main" val="562239247"/>
       </p:ext>
     </p:extLst>
   </p:cSld>
@@ -1941,7 +1976,7 @@
           <a:p>
             <a:fld id="{F89A057A-0BEA-48B2-A216-D46DB2C83327}" type="datetimeFigureOut">
               <a:rPr lang="zh-CN" altLang="en-US" smtClean="0"/>
-              <a:t>2025/12/30</a:t>
+              <a:t>2026/1/4</a:t>
             </a:fld>
             <a:endParaRPr lang="zh-CN" altLang="en-US"/>
           </a:p>
@@ -1992,7 +2027,7 @@
     </p:spTree>
     <p:extLst>
       <p:ext uri="{BB962C8B-B14F-4D97-AF65-F5344CB8AC3E}">
-        <p14:creationId xmlns:p14="http://schemas.microsoft.com/office/powerpoint/2010/main" val="3715824877"/>
+        <p14:creationId xmlns:p14="http://schemas.microsoft.com/office/powerpoint/2010/main" val="851644991"/>
       </p:ext>
     </p:extLst>
   </p:cSld>
@@ -2031,8 +2066,8 @@
         </p:nvSpPr>
         <p:spPr>
           <a:xfrm>
-            <a:off x="831959" y="3504570"/>
-            <a:ext cx="10516970" cy="5847451"/>
+            <a:off x="831959" y="4402183"/>
+            <a:ext cx="10516970" cy="7345138"/>
           </a:xfrm>
         </p:spPr>
         <p:txBody>
@@ -2063,8 +2098,8 @@
         </p:nvSpPr>
         <p:spPr>
           <a:xfrm>
-            <a:off x="831959" y="9407340"/>
-            <a:ext cx="10516970" cy="3075036"/>
+            <a:off x="831959" y="11816809"/>
+            <a:ext cx="10516970" cy="3862634"/>
           </a:xfrm>
         </p:spPr>
         <p:txBody>
@@ -2185,7 +2220,7 @@
           <a:p>
             <a:fld id="{F89A057A-0BEA-48B2-A216-D46DB2C83327}" type="datetimeFigureOut">
               <a:rPr lang="zh-CN" altLang="en-US" smtClean="0"/>
-              <a:t>2025/12/30</a:t>
+              <a:t>2026/1/4</a:t>
             </a:fld>
             <a:endParaRPr lang="zh-CN" altLang="en-US"/>
           </a:p>
@@ -2236,7 +2271,7 @@
     </p:spTree>
     <p:extLst>
       <p:ext uri="{BB962C8B-B14F-4D97-AF65-F5344CB8AC3E}">
-        <p14:creationId xmlns:p14="http://schemas.microsoft.com/office/powerpoint/2010/main" val="1065194292"/>
+        <p14:creationId xmlns:p14="http://schemas.microsoft.com/office/powerpoint/2010/main" val="739618038"/>
       </p:ext>
     </p:extLst>
   </p:cSld>
@@ -2298,8 +2333,8 @@
         </p:nvSpPr>
         <p:spPr>
           <a:xfrm>
-            <a:off x="838309" y="3742109"/>
-            <a:ext cx="5182275" cy="8919236"/>
+            <a:off x="838309" y="4700562"/>
+            <a:ext cx="5182275" cy="11203688"/>
           </a:xfrm>
         </p:spPr>
         <p:txBody>
@@ -2355,8 +2390,8 @@
         </p:nvSpPr>
         <p:spPr>
           <a:xfrm>
-            <a:off x="6173004" y="3742109"/>
-            <a:ext cx="5182275" cy="8919236"/>
+            <a:off x="6173004" y="4700562"/>
+            <a:ext cx="5182275" cy="11203688"/>
           </a:xfrm>
         </p:spPr>
         <p:txBody>
@@ -2417,7 +2452,7 @@
           <a:p>
             <a:fld id="{F89A057A-0BEA-48B2-A216-D46DB2C83327}" type="datetimeFigureOut">
               <a:rPr lang="zh-CN" altLang="en-US" smtClean="0"/>
-              <a:t>2025/12/30</a:t>
+              <a:t>2026/1/4</a:t>
             </a:fld>
             <a:endParaRPr lang="zh-CN" altLang="en-US"/>
           </a:p>
@@ -2468,7 +2503,7 @@
     </p:spTree>
     <p:extLst>
       <p:ext uri="{BB962C8B-B14F-4D97-AF65-F5344CB8AC3E}">
-        <p14:creationId xmlns:p14="http://schemas.microsoft.com/office/powerpoint/2010/main" val="38321012"/>
+        <p14:creationId xmlns:p14="http://schemas.microsoft.com/office/powerpoint/2010/main" val="3132768588"/>
       </p:ext>
     </p:extLst>
   </p:cSld>
@@ -2507,8 +2542,8 @@
         </p:nvSpPr>
         <p:spPr>
           <a:xfrm>
-            <a:off x="839897" y="748425"/>
-            <a:ext cx="10516970" cy="2717097"/>
+            <a:off x="839897" y="940116"/>
+            <a:ext cx="10516970" cy="3413018"/>
           </a:xfrm>
         </p:spPr>
         <p:txBody>
@@ -2535,8 +2570,8 @@
         </p:nvSpPr>
         <p:spPr>
           <a:xfrm>
-            <a:off x="839899" y="3445995"/>
-            <a:ext cx="5158458" cy="1688829"/>
+            <a:off x="839899" y="4328606"/>
+            <a:ext cx="5158458" cy="2121383"/>
           </a:xfrm>
         </p:spPr>
         <p:txBody>
@@ -2600,8 +2635,8 @@
         </p:nvSpPr>
         <p:spPr>
           <a:xfrm>
-            <a:off x="839899" y="5134824"/>
-            <a:ext cx="5158458" cy="7552553"/>
+            <a:off x="839899" y="6449989"/>
+            <a:ext cx="5158458" cy="9486961"/>
           </a:xfrm>
         </p:spPr>
         <p:txBody>
@@ -2657,8 +2692,8 @@
         </p:nvSpPr>
         <p:spPr>
           <a:xfrm>
-            <a:off x="6173005" y="3445995"/>
-            <a:ext cx="5183863" cy="1688829"/>
+            <a:off x="6173005" y="4328606"/>
+            <a:ext cx="5183863" cy="2121383"/>
           </a:xfrm>
         </p:spPr>
         <p:txBody>
@@ -2722,8 +2757,8 @@
         </p:nvSpPr>
         <p:spPr>
           <a:xfrm>
-            <a:off x="6173005" y="5134824"/>
-            <a:ext cx="5183863" cy="7552553"/>
+            <a:off x="6173005" y="6449989"/>
+            <a:ext cx="5183863" cy="9486961"/>
           </a:xfrm>
         </p:spPr>
         <p:txBody>
@@ -2784,7 +2819,7 @@
           <a:p>
             <a:fld id="{F89A057A-0BEA-48B2-A216-D46DB2C83327}" type="datetimeFigureOut">
               <a:rPr lang="zh-CN" altLang="en-US" smtClean="0"/>
-              <a:t>2025/12/30</a:t>
+              <a:t>2026/1/4</a:t>
             </a:fld>
             <a:endParaRPr lang="zh-CN" altLang="en-US"/>
           </a:p>
@@ -2835,7 +2870,7 @@
     </p:spTree>
     <p:extLst>
       <p:ext uri="{BB962C8B-B14F-4D97-AF65-F5344CB8AC3E}">
-        <p14:creationId xmlns:p14="http://schemas.microsoft.com/office/powerpoint/2010/main" val="2897227168"/>
+        <p14:creationId xmlns:p14="http://schemas.microsoft.com/office/powerpoint/2010/main" val="3820130543"/>
       </p:ext>
     </p:extLst>
   </p:cSld>
@@ -2902,7 +2937,7 @@
           <a:p>
             <a:fld id="{F89A057A-0BEA-48B2-A216-D46DB2C83327}" type="datetimeFigureOut">
               <a:rPr lang="zh-CN" altLang="en-US" smtClean="0"/>
-              <a:t>2025/12/30</a:t>
+              <a:t>2026/1/4</a:t>
             </a:fld>
             <a:endParaRPr lang="zh-CN" altLang="en-US"/>
           </a:p>
@@ -2953,7 +2988,7 @@
     </p:spTree>
     <p:extLst>
       <p:ext uri="{BB962C8B-B14F-4D97-AF65-F5344CB8AC3E}">
-        <p14:creationId xmlns:p14="http://schemas.microsoft.com/office/powerpoint/2010/main" val="3164843967"/>
+        <p14:creationId xmlns:p14="http://schemas.microsoft.com/office/powerpoint/2010/main" val="1077849753"/>
       </p:ext>
     </p:extLst>
   </p:cSld>
@@ -2997,7 +3032,7 @@
           <a:p>
             <a:fld id="{F89A057A-0BEA-48B2-A216-D46DB2C83327}" type="datetimeFigureOut">
               <a:rPr lang="zh-CN" altLang="en-US" smtClean="0"/>
-              <a:t>2025/12/30</a:t>
+              <a:t>2026/1/4</a:t>
             </a:fld>
             <a:endParaRPr lang="zh-CN" altLang="en-US"/>
           </a:p>
@@ -3048,7 +3083,7 @@
     </p:spTree>
     <p:extLst>
       <p:ext uri="{BB962C8B-B14F-4D97-AF65-F5344CB8AC3E}">
-        <p14:creationId xmlns:p14="http://schemas.microsoft.com/office/powerpoint/2010/main" val="2355634855"/>
+        <p14:creationId xmlns:p14="http://schemas.microsoft.com/office/powerpoint/2010/main" val="3783106292"/>
       </p:ext>
     </p:extLst>
   </p:cSld>
@@ -3087,8 +3122,8 @@
         </p:nvSpPr>
         <p:spPr>
           <a:xfrm>
-            <a:off x="839897" y="937154"/>
-            <a:ext cx="3932750" cy="3280040"/>
+            <a:off x="839897" y="1177184"/>
+            <a:ext cx="3932750" cy="4120145"/>
           </a:xfrm>
         </p:spPr>
         <p:txBody>
@@ -3119,8 +3154,8 @@
         </p:nvSpPr>
         <p:spPr>
           <a:xfrm>
-            <a:off x="5183863" y="2023996"/>
-            <a:ext cx="6173004" cy="9989803"/>
+            <a:off x="5183863" y="2542395"/>
+            <a:ext cx="6173004" cy="12548457"/>
           </a:xfrm>
         </p:spPr>
         <p:txBody>
@@ -3204,8 +3239,8 @@
         </p:nvSpPr>
         <p:spPr>
           <a:xfrm>
-            <a:off x="839897" y="4217194"/>
-            <a:ext cx="3932750" cy="7812873"/>
+            <a:off x="839897" y="5297329"/>
+            <a:ext cx="3932750" cy="9813957"/>
           </a:xfrm>
         </p:spPr>
         <p:txBody>
@@ -3274,7 +3309,7 @@
           <a:p>
             <a:fld id="{F89A057A-0BEA-48B2-A216-D46DB2C83327}" type="datetimeFigureOut">
               <a:rPr lang="zh-CN" altLang="en-US" smtClean="0"/>
-              <a:t>2025/12/30</a:t>
+              <a:t>2026/1/4</a:t>
             </a:fld>
             <a:endParaRPr lang="zh-CN" altLang="en-US"/>
           </a:p>
@@ -3325,7 +3360,7 @@
     </p:spTree>
     <p:extLst>
       <p:ext uri="{BB962C8B-B14F-4D97-AF65-F5344CB8AC3E}">
-        <p14:creationId xmlns:p14="http://schemas.microsoft.com/office/powerpoint/2010/main" val="3792223178"/>
+        <p14:creationId xmlns:p14="http://schemas.microsoft.com/office/powerpoint/2010/main" val="306864459"/>
       </p:ext>
     </p:extLst>
   </p:cSld>
@@ -3364,8 +3399,8 @@
         </p:nvSpPr>
         <p:spPr>
           <a:xfrm>
-            <a:off x="839897" y="937154"/>
-            <a:ext cx="3932750" cy="3280040"/>
+            <a:off x="839897" y="1177184"/>
+            <a:ext cx="3932750" cy="4120145"/>
           </a:xfrm>
         </p:spPr>
         <p:txBody>
@@ -3396,8 +3431,8 @@
         </p:nvSpPr>
         <p:spPr>
           <a:xfrm>
-            <a:off x="5183863" y="2023996"/>
-            <a:ext cx="6173004" cy="9989803"/>
+            <a:off x="5183863" y="2542395"/>
+            <a:ext cx="6173004" cy="12548457"/>
           </a:xfrm>
         </p:spPr>
         <p:txBody>
@@ -3461,8 +3496,8 @@
         </p:nvSpPr>
         <p:spPr>
           <a:xfrm>
-            <a:off x="839897" y="4217194"/>
-            <a:ext cx="3932750" cy="7812873"/>
+            <a:off x="839897" y="5297329"/>
+            <a:ext cx="3932750" cy="9813957"/>
           </a:xfrm>
         </p:spPr>
         <p:txBody>
@@ -3531,7 +3566,7 @@
           <a:p>
             <a:fld id="{F89A057A-0BEA-48B2-A216-D46DB2C83327}" type="datetimeFigureOut">
               <a:rPr lang="zh-CN" altLang="en-US" smtClean="0"/>
-              <a:t>2025/12/30</a:t>
+              <a:t>2026/1/4</a:t>
             </a:fld>
             <a:endParaRPr lang="zh-CN" altLang="en-US"/>
           </a:p>
@@ -3582,7 +3617,7 @@
     </p:spTree>
     <p:extLst>
       <p:ext uri="{BB962C8B-B14F-4D97-AF65-F5344CB8AC3E}">
-        <p14:creationId xmlns:p14="http://schemas.microsoft.com/office/powerpoint/2010/main" val="2458286353"/>
+        <p14:creationId xmlns:p14="http://schemas.microsoft.com/office/powerpoint/2010/main" val="4025938995"/>
       </p:ext>
     </p:extLst>
   </p:cSld>
@@ -3626,8 +3661,8 @@
         </p:nvSpPr>
         <p:spPr>
           <a:xfrm>
-            <a:off x="838309" y="748425"/>
-            <a:ext cx="10516970" cy="2717097"/>
+            <a:off x="838309" y="940116"/>
+            <a:ext cx="10516970" cy="3413018"/>
           </a:xfrm>
           <a:prstGeom prst="rect">
             <a:avLst/>
@@ -3659,8 +3694,8 @@
         </p:nvSpPr>
         <p:spPr>
           <a:xfrm>
-            <a:off x="838309" y="3742109"/>
-            <a:ext cx="10516970" cy="8919236"/>
+            <a:off x="838309" y="4700562"/>
+            <a:ext cx="10516970" cy="11203688"/>
           </a:xfrm>
           <a:prstGeom prst="rect">
             <a:avLst/>
@@ -3721,8 +3756,8 @@
         </p:nvSpPr>
         <p:spPr>
           <a:xfrm>
-            <a:off x="838309" y="13029050"/>
-            <a:ext cx="2743557" cy="748422"/>
+            <a:off x="838309" y="16366134"/>
+            <a:ext cx="2743557" cy="940112"/>
           </a:xfrm>
           <a:prstGeom prst="rect">
             <a:avLst/>
@@ -3744,7 +3779,7 @@
           <a:p>
             <a:fld id="{F89A057A-0BEA-48B2-A216-D46DB2C83327}" type="datetimeFigureOut">
               <a:rPr lang="zh-CN" altLang="en-US" smtClean="0"/>
-              <a:t>2025/12/30</a:t>
+              <a:t>2026/1/4</a:t>
             </a:fld>
             <a:endParaRPr lang="zh-CN" altLang="en-US"/>
           </a:p>
@@ -3762,8 +3797,8 @@
         </p:nvSpPr>
         <p:spPr>
           <a:xfrm>
-            <a:off x="4039126" y="13029050"/>
-            <a:ext cx="4115336" cy="748422"/>
+            <a:off x="4039126" y="16366134"/>
+            <a:ext cx="4115336" cy="940112"/>
           </a:xfrm>
           <a:prstGeom prst="rect">
             <a:avLst/>
@@ -3799,8 +3834,8 @@
         </p:nvSpPr>
         <p:spPr>
           <a:xfrm>
-            <a:off x="8611722" y="13029050"/>
-            <a:ext cx="2743557" cy="748422"/>
+            <a:off x="8611722" y="16366134"/>
+            <a:ext cx="2743557" cy="940112"/>
           </a:xfrm>
           <a:prstGeom prst="rect">
             <a:avLst/>
@@ -3831,23 +3866,23 @@
     </p:spTree>
     <p:extLst>
       <p:ext uri="{BB962C8B-B14F-4D97-AF65-F5344CB8AC3E}">
-        <p14:creationId xmlns:p14="http://schemas.microsoft.com/office/powerpoint/2010/main" val="376103380"/>
+        <p14:creationId xmlns:p14="http://schemas.microsoft.com/office/powerpoint/2010/main" val="1347988231"/>
       </p:ext>
     </p:extLst>
   </p:cSld>
   <p:clrMap bg1="lt1" tx1="dk1" bg2="lt2" tx2="dk2" accent1="accent1" accent2="accent2" accent3="accent3" accent4="accent4" accent5="accent5" accent6="accent6" hlink="hlink" folHlink="folHlink"/>
   <p:sldLayoutIdLst>
-    <p:sldLayoutId id="2147483673" r:id="rId1"/>
-    <p:sldLayoutId id="2147483674" r:id="rId2"/>
-    <p:sldLayoutId id="2147483675" r:id="rId3"/>
-    <p:sldLayoutId id="2147483676" r:id="rId4"/>
-    <p:sldLayoutId id="2147483677" r:id="rId5"/>
-    <p:sldLayoutId id="2147483678" r:id="rId6"/>
-    <p:sldLayoutId id="2147483679" r:id="rId7"/>
-    <p:sldLayoutId id="2147483680" r:id="rId8"/>
-    <p:sldLayoutId id="2147483681" r:id="rId9"/>
-    <p:sldLayoutId id="2147483682" r:id="rId10"/>
-    <p:sldLayoutId id="2147483683" r:id="rId11"/>
+    <p:sldLayoutId id="2147483685" r:id="rId1"/>
+    <p:sldLayoutId id="2147483686" r:id="rId2"/>
+    <p:sldLayoutId id="2147483687" r:id="rId3"/>
+    <p:sldLayoutId id="2147483688" r:id="rId4"/>
+    <p:sldLayoutId id="2147483689" r:id="rId5"/>
+    <p:sldLayoutId id="2147483690" r:id="rId6"/>
+    <p:sldLayoutId id="2147483691" r:id="rId7"/>
+    <p:sldLayoutId id="2147483692" r:id="rId8"/>
+    <p:sldLayoutId id="2147483693" r:id="rId9"/>
+    <p:sldLayoutId id="2147483694" r:id="rId10"/>
+    <p:sldLayoutId id="2147483695" r:id="rId11"/>
   </p:sldLayoutIdLst>
   <p:txStyles>
     <p:titleStyle>
@@ -4163,8 +4198,8 @@
         </p:nvSpPr>
         <p:spPr>
           <a:xfrm>
-            <a:off x="1850529" y="239911"/>
-            <a:ext cx="8676000" cy="8837828"/>
+            <a:off x="1850529" y="2040137"/>
+            <a:ext cx="8676000" cy="5966925"/>
           </a:xfrm>
           <a:prstGeom prst="roundRect">
             <a:avLst>
@@ -4220,7 +4255,7 @@
         </p:nvSpPr>
         <p:spPr>
           <a:xfrm>
-            <a:off x="1850527" y="205270"/>
+            <a:off x="1850527" y="2005495"/>
             <a:ext cx="1616234" cy="369332"/>
           </a:xfrm>
           <a:prstGeom prst="rect">
@@ -4269,7 +4304,7 @@
         </p:nvSpPr>
         <p:spPr>
           <a:xfrm>
-            <a:off x="1991993" y="1246768"/>
+            <a:off x="1991994" y="3046993"/>
             <a:ext cx="5321499" cy="369332"/>
           </a:xfrm>
           <a:prstGeom prst="rect">
@@ -4318,7 +4353,7 @@
         </p:nvSpPr>
         <p:spPr>
           <a:xfrm>
-            <a:off x="1839097" y="229629"/>
+            <a:off x="1839097" y="2029855"/>
             <a:ext cx="8676000" cy="309393"/>
           </a:xfrm>
           <a:prstGeom prst="roundRect">
@@ -4382,8 +4417,8 @@
         </p:nvSpPr>
         <p:spPr>
           <a:xfrm>
-            <a:off x="2062555" y="697731"/>
-            <a:ext cx="8676000" cy="7922187"/>
+            <a:off x="1882675" y="2363047"/>
+            <a:ext cx="8676000" cy="5768706"/>
           </a:xfrm>
           <a:prstGeom prst="rect">
             <a:avLst/>
@@ -4397,969 +4432,149 @@
           <a:lstStyle/>
           <a:p>
             <a:r>
-              <a:rPr lang="en-US" altLang="zh-CN" b="1" dirty="0">
-                <a:solidFill>
-                  <a:srgbClr val="000080"/>
-                </a:solidFill>
-                <a:effectLst/>
-                <a:latin typeface="Consolas" panose="020B0609020204030204" pitchFamily="49" charset="0"/>
-              </a:rPr>
-              <a:t>**Phase 2: CFG Construction (Single Pass, Indentation Driven)**</a:t>
-            </a:r>
-            <a:r>
-              <a:rPr lang="en-US" altLang="zh-CN" b="1" dirty="0">
-                <a:solidFill>
-                  <a:srgbClr val="800000"/>
-                </a:solidFill>
-                <a:effectLst/>
-                <a:latin typeface="Consolas" panose="020B0609020204030204" pitchFamily="49" charset="0"/>
-              </a:rPr>
-              <a:t>  </a:t>
-            </a:r>
-            <a:endParaRPr lang="en-US" altLang="zh-CN" b="0" dirty="0">
-              <a:solidFill>
-                <a:srgbClr val="000000"/>
-              </a:solidFill>
-              <a:effectLst/>
-              <a:latin typeface="Consolas" panose="020B0609020204030204" pitchFamily="49" charset="0"/>
-            </a:endParaRPr>
+              <a:rPr lang="en-GB" dirty="0"/>
+              <a:t>You are a static program analysis engine tasked with constructing a Control Flow Graph (CFG) for the given Python source code. </a:t>
+            </a:r>
+          </a:p>
+          <a:p>
+            <a:r>
+              <a:rPr lang="en-GB" b="1" dirty="0"/>
+              <a:t>Requirements</a:t>
+            </a:r>
+          </a:p>
+          <a:p>
+            <a:pPr>
+              <a:buFont typeface="+mj-lt"/>
+              <a:buAutoNum type="arabicPeriod"/>
+            </a:pPr>
+            <a:r>
+              <a:rPr lang="en-GB" b="1" dirty="0"/>
+              <a:t> Nodes:</a:t>
+            </a:r>
+            <a:r>
+              <a:rPr lang="en-GB" dirty="0"/>
+              <a:t> Each node represents at most one statement or a expression-level execution unit, with a single entry point, and a single exit point. </a:t>
+            </a:r>
+          </a:p>
+          <a:p>
+            <a:r>
+              <a:rPr lang="en-GB" b="1" dirty="0"/>
+              <a:t>2. Edges: </a:t>
+            </a:r>
+            <a:r>
+              <a:rPr lang="en-GB" dirty="0"/>
+              <a:t>The directed edges represent possible control transfers between nodes. Explicitly label edges with conditions (e.g., if condition=True/False), and include fall-through edges, loop back-edges, exceptional edges.</a:t>
+            </a:r>
+          </a:p>
+          <a:p>
+            <a:r>
+              <a:rPr lang="en-GB" b="1" dirty="0"/>
+              <a:t>3. Language Constructs</a:t>
+            </a:r>
+            <a:r>
+              <a:rPr lang="en-GB" dirty="0"/>
+              <a:t>: The CFG construction should handle Python language constructs, including but not limited to conditionals, loops, function-level control flow, exception handling, and context managers. </a:t>
+            </a:r>
+          </a:p>
+          <a:p>
+            <a:r>
+              <a:rPr lang="en-GB" b="1" dirty="0"/>
+              <a:t>4. Entry and Exit Nodes. </a:t>
+            </a:r>
+            <a:r>
+              <a:rPr lang="en-GB" dirty="0"/>
+              <a:t>Create a single Entry node representing function start, and a single </a:t>
+            </a:r>
+            <a:r>
+              <a:rPr lang="en-GB" b="1" dirty="0"/>
+              <a:t>Exit</a:t>
+            </a:r>
+            <a:r>
+              <a:rPr lang="en-GB" dirty="0"/>
+              <a:t> node representing normal termination. All return statements must connect to the Exit node.</a:t>
+            </a:r>
+          </a:p>
+          <a:p>
+            <a:r>
+              <a:rPr lang="en-GB" dirty="0"/>
+              <a:t>Now you will be given input as a function function, output the CFG in the following format:</a:t>
+            </a:r>
+          </a:p>
+          <a:p>
+            <a:r>
+              <a:rPr lang="en-GB" dirty="0"/>
+              <a:t>	[{</a:t>
+            </a:r>
+          </a:p>
+          <a:p>
+            <a:r>
+              <a:rPr lang="en-GB" dirty="0"/>
+              <a:t>		”</a:t>
+            </a:r>
+            <a:r>
+              <a:rPr lang="en-GB" dirty="0" err="1"/>
+              <a:t>from_id</a:t>
+            </a:r>
+            <a:r>
+              <a:rPr lang="en-GB" dirty="0"/>
+              <a:t>”: ID, “</a:t>
+            </a:r>
+            <a:r>
+              <a:rPr lang="en-GB" dirty="0" err="1"/>
+              <a:t>from_content</a:t>
+            </a:r>
+            <a:r>
+              <a:rPr lang="en-GB" dirty="0"/>
+              <a:t>”: content, </a:t>
+            </a:r>
+          </a:p>
+          <a:p>
+            <a:r>
+              <a:rPr lang="en-GB" dirty="0"/>
+              <a:t>		“</a:t>
+            </a:r>
+            <a:r>
+              <a:rPr lang="en-GB" dirty="0" err="1"/>
+              <a:t>to_id</a:t>
+            </a:r>
+            <a:r>
+              <a:rPr lang="en-GB" dirty="0"/>
+              <a:t>”: ID, “</a:t>
+            </a:r>
+            <a:r>
+              <a:rPr lang="en-GB" dirty="0" err="1"/>
+              <a:t>to_content</a:t>
+            </a:r>
+            <a:r>
+              <a:rPr lang="en-GB" dirty="0"/>
+              <a:t>”: content,</a:t>
+            </a:r>
+          </a:p>
+          <a:p>
+            <a:r>
+              <a:rPr lang="en-GB" dirty="0"/>
+              <a:t>		“edge”: ”If, Line Number, True”</a:t>
+            </a:r>
+          </a:p>
+          <a:p>
+            <a:r>
+              <a:rPr lang="en-GB" dirty="0"/>
+              <a:t>	}…]</a:t>
+            </a:r>
+            <a:endParaRPr lang="en-GB" b="1" dirty="0"/>
           </a:p>
           <a:p>
             <a:br>
-              <a:rPr lang="en-US" altLang="zh-CN" b="0" dirty="0">
-                <a:solidFill>
-                  <a:srgbClr val="000000"/>
-                </a:solidFill>
-                <a:effectLst/>
-                <a:latin typeface="Consolas" panose="020B0609020204030204" pitchFamily="49" charset="0"/>
-              </a:rPr>
+              <a:rPr lang="en-GB" dirty="0"/>
             </a:br>
-            <a:r>
-              <a:rPr lang="en-US" altLang="zh-CN" b="1" dirty="0">
-                <a:solidFill>
-                  <a:srgbClr val="800000"/>
-                </a:solidFill>
-                <a:effectLst/>
-                <a:latin typeface="Consolas" panose="020B0609020204030204" pitchFamily="49" charset="0"/>
-              </a:rPr>
-              <a:t>###### </a:t>
-            </a:r>
-            <a:r>
-              <a:rPr lang="en-US" altLang="zh-CN" b="1" dirty="0">
-                <a:solidFill>
-                  <a:srgbClr val="000000"/>
-                </a:solidFill>
-                <a:effectLst/>
-                <a:latin typeface="Consolas" panose="020B0609020204030204" pitchFamily="49" charset="0"/>
-              </a:rPr>
-              <a:t>Step 1: Indentation Reduction (Scope Exit)</a:t>
-            </a:r>
-            <a:br>
-              <a:rPr lang="en-US" altLang="zh-CN" b="0" dirty="0">
-                <a:solidFill>
-                  <a:srgbClr val="000000"/>
-                </a:solidFill>
-                <a:effectLst/>
-                <a:latin typeface="Consolas" panose="020B0609020204030204" pitchFamily="49" charset="0"/>
-              </a:rPr>
-            </a:br>
-            <a:r>
-              <a:rPr lang="en-US" altLang="zh-CN" b="1" dirty="0">
-                <a:solidFill>
-                  <a:srgbClr val="800000"/>
-                </a:solidFill>
-                <a:effectLst/>
-                <a:latin typeface="Consolas" panose="020B0609020204030204" pitchFamily="49" charset="0"/>
-              </a:rPr>
-              <a:t>###### </a:t>
-            </a:r>
-            <a:r>
-              <a:rPr lang="en-US" altLang="zh-CN" b="1" dirty="0">
-                <a:solidFill>
-                  <a:srgbClr val="000000"/>
-                </a:solidFill>
-                <a:effectLst/>
-                <a:latin typeface="Consolas" panose="020B0609020204030204" pitchFamily="49" charset="0"/>
-              </a:rPr>
-              <a:t>If statement is a condition:</a:t>
-            </a:r>
-            <a:br>
-              <a:rPr lang="en-US" altLang="zh-CN" b="0" dirty="0">
-                <a:solidFill>
-                  <a:srgbClr val="000000"/>
-                </a:solidFill>
-                <a:effectLst/>
-                <a:latin typeface="Consolas" panose="020B0609020204030204" pitchFamily="49" charset="0"/>
-              </a:rPr>
-            </a:br>
-            <a:r>
-              <a:rPr lang="en-US" altLang="zh-CN" b="0" dirty="0">
-                <a:solidFill>
-                  <a:srgbClr val="000000"/>
-                </a:solidFill>
-                <a:effectLst/>
-                <a:latin typeface="Consolas" panose="020B0609020204030204" pitchFamily="49" charset="0"/>
-              </a:rPr>
-              <a:t>For Condition Start Statements: (</a:t>
-            </a:r>
-            <a:r>
-              <a:rPr lang="en-US" altLang="zh-CN" b="0" dirty="0">
-                <a:solidFill>
-                  <a:srgbClr val="800000"/>
-                </a:solidFill>
-                <a:effectLst/>
-                <a:latin typeface="Consolas" panose="020B0609020204030204" pitchFamily="49" charset="0"/>
-              </a:rPr>
-              <a:t>`if`</a:t>
-            </a:r>
-            <a:r>
-              <a:rPr lang="en-US" altLang="zh-CN" b="0" dirty="0">
-                <a:solidFill>
-                  <a:srgbClr val="000000"/>
-                </a:solidFill>
-                <a:effectLst/>
-                <a:latin typeface="Consolas" panose="020B0609020204030204" pitchFamily="49" charset="0"/>
-              </a:rPr>
-              <a:t>, </a:t>
-            </a:r>
-            <a:r>
-              <a:rPr lang="en-US" altLang="zh-CN" b="0" dirty="0">
-                <a:solidFill>
-                  <a:srgbClr val="800000"/>
-                </a:solidFill>
-                <a:effectLst/>
-                <a:latin typeface="Consolas" panose="020B0609020204030204" pitchFamily="49" charset="0"/>
-              </a:rPr>
-              <a:t>`while`</a:t>
-            </a:r>
-            <a:r>
-              <a:rPr lang="en-US" altLang="zh-CN" b="0" dirty="0">
-                <a:solidFill>
-                  <a:srgbClr val="000000"/>
-                </a:solidFill>
-                <a:effectLst/>
-                <a:latin typeface="Consolas" panose="020B0609020204030204" pitchFamily="49" charset="0"/>
-              </a:rPr>
-              <a:t>, </a:t>
-            </a:r>
-            <a:r>
-              <a:rPr lang="en-US" altLang="zh-CN" b="0" dirty="0">
-                <a:solidFill>
-                  <a:srgbClr val="800000"/>
-                </a:solidFill>
-                <a:effectLst/>
-                <a:latin typeface="Consolas" panose="020B0609020204030204" pitchFamily="49" charset="0"/>
-              </a:rPr>
-              <a:t>`for`</a:t>
-            </a:r>
-            <a:r>
-              <a:rPr lang="en-US" altLang="zh-CN" b="0" dirty="0">
-                <a:solidFill>
-                  <a:srgbClr val="000000"/>
-                </a:solidFill>
-                <a:effectLst/>
-                <a:latin typeface="Consolas" panose="020B0609020204030204" pitchFamily="49" charset="0"/>
-              </a:rPr>
-              <a:t>, </a:t>
-            </a:r>
-            <a:r>
-              <a:rPr lang="en-US" altLang="zh-CN" b="0" dirty="0">
-                <a:solidFill>
-                  <a:srgbClr val="800000"/>
-                </a:solidFill>
-                <a:effectLst/>
-                <a:latin typeface="Consolas" panose="020B0609020204030204" pitchFamily="49" charset="0"/>
-              </a:rPr>
-              <a:t>`try`</a:t>
-            </a:r>
-            <a:r>
-              <a:rPr lang="en-US" altLang="zh-CN" b="0" dirty="0">
-                <a:solidFill>
-                  <a:srgbClr val="000000"/>
-                </a:solidFill>
-                <a:effectLst/>
-                <a:latin typeface="Consolas" panose="020B0609020204030204" pitchFamily="49" charset="0"/>
-              </a:rPr>
-              <a:t>)</a:t>
-            </a:r>
-            <a:br>
-              <a:rPr lang="en-US" altLang="zh-CN" b="0" dirty="0">
-                <a:solidFill>
-                  <a:srgbClr val="000000"/>
-                </a:solidFill>
-                <a:effectLst/>
-                <a:latin typeface="Consolas" panose="020B0609020204030204" pitchFamily="49" charset="0"/>
-              </a:rPr>
-            </a:br>
-            <a:r>
-              <a:rPr lang="en-US" altLang="zh-CN" b="0" dirty="0">
-                <a:solidFill>
-                  <a:srgbClr val="000000"/>
-                </a:solidFill>
-                <a:effectLst/>
-                <a:latin typeface="Consolas" panose="020B0609020204030204" pitchFamily="49" charset="0"/>
-              </a:rPr>
-              <a:t>    1. Create a new `Condition`:</a:t>
-            </a:r>
-          </a:p>
-          <a:p>
-            <a:r>
-              <a:rPr lang="en-US" altLang="zh-CN" b="0" dirty="0">
-                <a:solidFill>
-                  <a:srgbClr val="000000"/>
-                </a:solidFill>
-                <a:effectLst/>
-                <a:latin typeface="Consolas" panose="020B0609020204030204" pitchFamily="49" charset="0"/>
-              </a:rPr>
-              <a:t>        * `</a:t>
-            </a:r>
-            <a:r>
-              <a:rPr lang="en-US" altLang="zh-CN" b="0" dirty="0" err="1">
-                <a:solidFill>
-                  <a:srgbClr val="000000"/>
-                </a:solidFill>
-                <a:effectLst/>
-                <a:latin typeface="Consolas" panose="020B0609020204030204" pitchFamily="49" charset="0"/>
-              </a:rPr>
-              <a:t>parent_node</a:t>
-            </a:r>
-            <a:r>
-              <a:rPr lang="en-US" altLang="zh-CN" b="0" dirty="0">
-                <a:solidFill>
-                  <a:srgbClr val="000000"/>
-                </a:solidFill>
-                <a:effectLst/>
-                <a:latin typeface="Consolas" panose="020B0609020204030204" pitchFamily="49" charset="0"/>
-              </a:rPr>
-              <a:t> = [current]`</a:t>
-            </a:r>
-          </a:p>
-          <a:p>
-            <a:r>
-              <a:rPr lang="en-US" altLang="zh-CN" b="0" dirty="0">
-                <a:solidFill>
-                  <a:srgbClr val="000000"/>
-                </a:solidFill>
-                <a:effectLst/>
-                <a:latin typeface="Consolas" panose="020B0609020204030204" pitchFamily="49" charset="0"/>
-              </a:rPr>
-              <a:t>        * `content = line without trailing ':'`</a:t>
-            </a:r>
-          </a:p>
-          <a:p>
-            <a:r>
-              <a:rPr lang="en-US" altLang="zh-CN" b="0" dirty="0">
-                <a:solidFill>
-                  <a:srgbClr val="000000"/>
-                </a:solidFill>
-                <a:effectLst/>
-                <a:latin typeface="Consolas" panose="020B0609020204030204" pitchFamily="49" charset="0"/>
-              </a:rPr>
-              <a:t>    2. …</a:t>
-            </a:r>
-            <a:br>
-              <a:rPr lang="en-US" altLang="zh-CN" b="0" dirty="0">
-                <a:solidFill>
-                  <a:srgbClr val="000000"/>
-                </a:solidFill>
-                <a:effectLst/>
-                <a:latin typeface="Consolas" panose="020B0609020204030204" pitchFamily="49" charset="0"/>
-              </a:rPr>
-            </a:br>
-            <a:r>
-              <a:rPr lang="en-US" altLang="zh-CN" b="0" dirty="0">
-                <a:solidFill>
-                  <a:srgbClr val="000000"/>
-                </a:solidFill>
-                <a:effectLst/>
-                <a:latin typeface="Consolas" panose="020B0609020204030204" pitchFamily="49" charset="0"/>
-              </a:rPr>
-              <a:t>For Condition Middle Statements: (</a:t>
-            </a:r>
-            <a:r>
-              <a:rPr lang="en-US" altLang="zh-CN" b="0" dirty="0">
-                <a:solidFill>
-                  <a:srgbClr val="800000"/>
-                </a:solidFill>
-                <a:effectLst/>
-                <a:latin typeface="Consolas" panose="020B0609020204030204" pitchFamily="49" charset="0"/>
-              </a:rPr>
-              <a:t>`</a:t>
-            </a:r>
-            <a:r>
-              <a:rPr lang="en-US" altLang="zh-CN" b="0" dirty="0" err="1">
-                <a:solidFill>
-                  <a:srgbClr val="800000"/>
-                </a:solidFill>
-                <a:effectLst/>
-                <a:latin typeface="Consolas" panose="020B0609020204030204" pitchFamily="49" charset="0"/>
-              </a:rPr>
-              <a:t>elif</a:t>
-            </a:r>
-            <a:r>
-              <a:rPr lang="en-US" altLang="zh-CN" b="0" dirty="0">
-                <a:solidFill>
-                  <a:srgbClr val="800000"/>
-                </a:solidFill>
-                <a:effectLst/>
-                <a:latin typeface="Consolas" panose="020B0609020204030204" pitchFamily="49" charset="0"/>
-              </a:rPr>
-              <a:t>`</a:t>
-            </a:r>
-            <a:r>
-              <a:rPr lang="en-US" altLang="zh-CN" b="0" dirty="0">
-                <a:solidFill>
-                  <a:srgbClr val="000000"/>
-                </a:solidFill>
-                <a:effectLst/>
-                <a:latin typeface="Consolas" panose="020B0609020204030204" pitchFamily="49" charset="0"/>
-              </a:rPr>
-              <a:t>, </a:t>
-            </a:r>
-            <a:r>
-              <a:rPr lang="en-US" altLang="zh-CN" b="0" dirty="0">
-                <a:solidFill>
-                  <a:srgbClr val="800000"/>
-                </a:solidFill>
-                <a:effectLst/>
-                <a:latin typeface="Consolas" panose="020B0609020204030204" pitchFamily="49" charset="0"/>
-              </a:rPr>
-              <a:t>`else`</a:t>
-            </a:r>
-            <a:r>
-              <a:rPr lang="en-US" altLang="zh-CN" b="0" dirty="0">
-                <a:solidFill>
-                  <a:srgbClr val="000000"/>
-                </a:solidFill>
-                <a:effectLst/>
-                <a:latin typeface="Consolas" panose="020B0609020204030204" pitchFamily="49" charset="0"/>
-              </a:rPr>
-              <a:t>, </a:t>
-            </a:r>
-            <a:r>
-              <a:rPr lang="en-US" altLang="zh-CN" b="0" dirty="0">
-                <a:solidFill>
-                  <a:srgbClr val="800000"/>
-                </a:solidFill>
-                <a:effectLst/>
-                <a:latin typeface="Consolas" panose="020B0609020204030204" pitchFamily="49" charset="0"/>
-              </a:rPr>
-              <a:t>`except`</a:t>
-            </a:r>
-            <a:r>
-              <a:rPr lang="en-US" altLang="zh-CN" b="0" dirty="0">
-                <a:solidFill>
-                  <a:srgbClr val="000000"/>
-                </a:solidFill>
-                <a:effectLst/>
-                <a:latin typeface="Consolas" panose="020B0609020204030204" pitchFamily="49" charset="0"/>
-              </a:rPr>
-              <a:t>)</a:t>
-            </a:r>
-          </a:p>
-          <a:p>
-            <a:r>
-              <a:rPr lang="en-US" altLang="zh-CN" b="0" dirty="0">
-                <a:solidFill>
-                  <a:srgbClr val="000000"/>
-                </a:solidFill>
-                <a:effectLst/>
-                <a:latin typeface="Consolas" panose="020B0609020204030204" pitchFamily="49" charset="0"/>
-              </a:rPr>
-              <a:t>…</a:t>
-            </a:r>
-            <a:br>
-              <a:rPr lang="en-US" altLang="zh-CN" b="0" dirty="0">
-                <a:solidFill>
-                  <a:srgbClr val="000000"/>
-                </a:solidFill>
-                <a:effectLst/>
-                <a:latin typeface="Consolas" panose="020B0609020204030204" pitchFamily="49" charset="0"/>
-              </a:rPr>
-            </a:br>
-            <a:r>
-              <a:rPr lang="en-US" altLang="zh-CN" b="1" dirty="0">
-                <a:solidFill>
-                  <a:srgbClr val="800000"/>
-                </a:solidFill>
-                <a:effectLst/>
-                <a:latin typeface="Consolas" panose="020B0609020204030204" pitchFamily="49" charset="0"/>
-              </a:rPr>
-              <a:t>###### </a:t>
-            </a:r>
-            <a:r>
-              <a:rPr lang="en-US" altLang="zh-CN" b="1" dirty="0">
-                <a:solidFill>
-                  <a:srgbClr val="000000"/>
-                </a:solidFill>
-                <a:effectLst/>
-                <a:latin typeface="Consolas" panose="020B0609020204030204" pitchFamily="49" charset="0"/>
-              </a:rPr>
-              <a:t>If statement is an Ordinary Statement:</a:t>
-            </a:r>
-            <a:endParaRPr lang="en-US" altLang="zh-CN" b="0" dirty="0">
-              <a:solidFill>
-                <a:srgbClr val="000000"/>
-              </a:solidFill>
-              <a:effectLst/>
-              <a:latin typeface="Consolas" panose="020B0609020204030204" pitchFamily="49" charset="0"/>
-            </a:endParaRPr>
-          </a:p>
-          <a:p>
-            <a:r>
-              <a:rPr lang="en-US" altLang="zh-CN" b="0" dirty="0">
-                <a:solidFill>
-                  <a:srgbClr val="000000"/>
-                </a:solidFill>
-                <a:effectLst/>
-                <a:latin typeface="Consolas" panose="020B0609020204030204" pitchFamily="49" charset="0"/>
-              </a:rPr>
-              <a:t>…</a:t>
-            </a:r>
-            <a:br>
-              <a:rPr lang="en-US" altLang="zh-CN" b="0" dirty="0">
-                <a:solidFill>
-                  <a:srgbClr val="000000"/>
-                </a:solidFill>
-                <a:effectLst/>
-                <a:latin typeface="Consolas" panose="020B0609020204030204" pitchFamily="49" charset="0"/>
-              </a:rPr>
-            </a:br>
-            <a:r>
-              <a:rPr lang="en-US" altLang="zh-CN" b="0" dirty="0">
-                <a:solidFill>
-                  <a:srgbClr val="000000"/>
-                </a:solidFill>
-                <a:effectLst/>
-                <a:latin typeface="Consolas" panose="020B0609020204030204" pitchFamily="49" charset="0"/>
-              </a:rPr>
-              <a:t>Let </a:t>
-            </a:r>
-            <a:r>
-              <a:rPr lang="en-US" altLang="zh-CN" b="0" dirty="0">
-                <a:solidFill>
-                  <a:srgbClr val="800000"/>
-                </a:solidFill>
-                <a:effectLst/>
-                <a:latin typeface="Consolas" panose="020B0609020204030204" pitchFamily="49" charset="0"/>
-              </a:rPr>
-              <a:t>`indent`</a:t>
-            </a:r>
-            <a:r>
-              <a:rPr lang="en-US" altLang="zh-CN" b="0" dirty="0">
-                <a:solidFill>
-                  <a:srgbClr val="000000"/>
-                </a:solidFill>
-                <a:effectLst/>
-                <a:latin typeface="Consolas" panose="020B0609020204030204" pitchFamily="49" charset="0"/>
-              </a:rPr>
-              <a:t> be current indentation.</a:t>
-            </a:r>
-          </a:p>
-          <a:p>
-            <a:br>
-              <a:rPr lang="en-US" altLang="zh-CN" b="0" dirty="0">
-                <a:solidFill>
-                  <a:srgbClr val="000000"/>
-                </a:solidFill>
-                <a:effectLst/>
-                <a:latin typeface="Consolas" panose="020B0609020204030204" pitchFamily="49" charset="0"/>
-              </a:rPr>
-            </a:br>
-            <a:r>
-              <a:rPr lang="en-US" altLang="zh-CN" b="0" dirty="0">
-                <a:solidFill>
-                  <a:srgbClr val="000000"/>
-                </a:solidFill>
-                <a:effectLst/>
-                <a:latin typeface="Consolas" panose="020B0609020204030204" pitchFamily="49" charset="0"/>
-              </a:rPr>
-              <a:t>Case A: Indentation Increases (Entering Condition Body)</a:t>
-            </a:r>
-            <a:br>
-              <a:rPr lang="en-US" altLang="zh-CN" b="0" dirty="0">
-                <a:solidFill>
-                  <a:srgbClr val="000000"/>
-                </a:solidFill>
-                <a:effectLst/>
-                <a:latin typeface="Consolas" panose="020B0609020204030204" pitchFamily="49" charset="0"/>
-              </a:rPr>
-            </a:br>
-            <a:r>
-              <a:rPr lang="en-US" altLang="zh-CN" b="0" dirty="0">
-                <a:solidFill>
-                  <a:srgbClr val="0451A5"/>
-                </a:solidFill>
-                <a:effectLst/>
-                <a:latin typeface="Consolas" panose="020B0609020204030204" pitchFamily="49" charset="0"/>
-              </a:rPr>
-              <a:t>*</a:t>
-            </a:r>
-            <a:r>
-              <a:rPr lang="en-US" altLang="zh-CN" b="0" dirty="0">
-                <a:solidFill>
-                  <a:srgbClr val="000000"/>
-                </a:solidFill>
-                <a:effectLst/>
-                <a:latin typeface="Consolas" panose="020B0609020204030204" pitchFamily="49" charset="0"/>
-              </a:rPr>
-              <a:t> If </a:t>
-            </a:r>
-            <a:r>
-              <a:rPr lang="en-US" altLang="zh-CN" b="0" dirty="0">
-                <a:solidFill>
-                  <a:srgbClr val="800000"/>
-                </a:solidFill>
-                <a:effectLst/>
-                <a:latin typeface="Consolas" panose="020B0609020204030204" pitchFamily="49" charset="0"/>
-              </a:rPr>
-              <a:t>`</a:t>
-            </a:r>
-            <a:r>
-              <a:rPr lang="en-US" altLang="zh-CN" b="0" dirty="0" err="1">
-                <a:solidFill>
-                  <a:srgbClr val="800000"/>
-                </a:solidFill>
-                <a:effectLst/>
-                <a:latin typeface="Consolas" panose="020B0609020204030204" pitchFamily="49" charset="0"/>
-              </a:rPr>
-              <a:t>CS.top</a:t>
-            </a:r>
-            <a:r>
-              <a:rPr lang="en-US" altLang="zh-CN" b="0" dirty="0">
-                <a:solidFill>
-                  <a:srgbClr val="800000"/>
-                </a:solidFill>
-                <a:effectLst/>
-                <a:latin typeface="Consolas" panose="020B0609020204030204" pitchFamily="49" charset="0"/>
-              </a:rPr>
-              <a:t>()`</a:t>
-            </a:r>
-            <a:r>
-              <a:rPr lang="en-US" altLang="zh-CN" b="0" dirty="0">
-                <a:solidFill>
-                  <a:srgbClr val="000000"/>
-                </a:solidFill>
-                <a:effectLst/>
-                <a:latin typeface="Consolas" panose="020B0609020204030204" pitchFamily="49" charset="0"/>
-              </a:rPr>
-              <a:t> exists:</a:t>
-            </a:r>
-          </a:p>
-          <a:p>
-            <a:r>
-              <a:rPr lang="en-US" altLang="zh-CN" b="0" dirty="0">
-                <a:solidFill>
-                  <a:srgbClr val="000000"/>
-                </a:solidFill>
-                <a:effectLst/>
-                <a:latin typeface="Consolas" panose="020B0609020204030204" pitchFamily="49" charset="0"/>
-              </a:rPr>
-              <a:t>  </a:t>
-            </a:r>
-            <a:r>
-              <a:rPr lang="en-US" altLang="zh-CN" b="0" dirty="0">
-                <a:solidFill>
-                  <a:srgbClr val="0451A5"/>
-                </a:solidFill>
-                <a:effectLst/>
-                <a:latin typeface="Consolas" panose="020B0609020204030204" pitchFamily="49" charset="0"/>
-              </a:rPr>
-              <a:t>*</a:t>
-            </a:r>
-            <a:r>
-              <a:rPr lang="en-US" altLang="zh-CN" b="0" dirty="0">
-                <a:solidFill>
-                  <a:srgbClr val="000000"/>
-                </a:solidFill>
-                <a:effectLst/>
-                <a:latin typeface="Consolas" panose="020B0609020204030204" pitchFamily="49" charset="0"/>
-              </a:rPr>
-              <a:t> Add edge: </a:t>
-            </a:r>
-            <a:r>
-              <a:rPr lang="en-US" altLang="zh-CN" b="0" dirty="0">
-                <a:solidFill>
-                  <a:srgbClr val="800000"/>
-                </a:solidFill>
-                <a:effectLst/>
-                <a:latin typeface="Consolas" panose="020B0609020204030204" pitchFamily="49" charset="0"/>
-              </a:rPr>
-              <a:t>`current → node`</a:t>
-            </a:r>
-            <a:r>
-              <a:rPr lang="en-US" altLang="zh-CN" b="0" dirty="0">
-                <a:solidFill>
-                  <a:srgbClr val="000000"/>
-                </a:solidFill>
-                <a:effectLst/>
-                <a:latin typeface="Consolas" panose="020B0609020204030204" pitchFamily="49" charset="0"/>
-              </a:rPr>
-              <a:t> with condition = </a:t>
-            </a:r>
-            <a:r>
-              <a:rPr lang="en-US" altLang="zh-CN" b="0" dirty="0">
-                <a:solidFill>
-                  <a:srgbClr val="800000"/>
-                </a:solidFill>
-                <a:effectLst/>
-                <a:latin typeface="Consolas" panose="020B0609020204030204" pitchFamily="49" charset="0"/>
-              </a:rPr>
-              <a:t>`</a:t>
-            </a:r>
-            <a:r>
-              <a:rPr lang="en-US" altLang="zh-CN" b="0" dirty="0" err="1">
-                <a:solidFill>
-                  <a:srgbClr val="800000"/>
-                </a:solidFill>
-                <a:effectLst/>
-                <a:latin typeface="Consolas" panose="020B0609020204030204" pitchFamily="49" charset="0"/>
-              </a:rPr>
-              <a:t>CS.top</a:t>
-            </a:r>
-            <a:r>
-              <a:rPr lang="en-US" altLang="zh-CN" b="0" dirty="0">
-                <a:solidFill>
-                  <a:srgbClr val="800000"/>
-                </a:solidFill>
-                <a:effectLst/>
-                <a:latin typeface="Consolas" panose="020B0609020204030204" pitchFamily="49" charset="0"/>
-              </a:rPr>
-              <a:t>()`</a:t>
-            </a:r>
-            <a:endParaRPr lang="en-US" altLang="zh-CN" b="0" dirty="0">
-              <a:solidFill>
-                <a:srgbClr val="000000"/>
-              </a:solidFill>
-              <a:effectLst/>
-              <a:latin typeface="Consolas" panose="020B0609020204030204" pitchFamily="49" charset="0"/>
-            </a:endParaRPr>
-          </a:p>
-          <a:p>
-            <a:r>
-              <a:rPr lang="en-US" altLang="zh-CN" b="0" dirty="0">
-                <a:solidFill>
-                  <a:srgbClr val="000000"/>
-                </a:solidFill>
-                <a:effectLst/>
-                <a:latin typeface="Consolas" panose="020B0609020204030204" pitchFamily="49" charset="0"/>
-              </a:rPr>
-              <a:t>  </a:t>
-            </a:r>
-            <a:r>
-              <a:rPr lang="en-US" altLang="zh-CN" b="0" dirty="0">
-                <a:solidFill>
-                  <a:srgbClr val="0451A5"/>
-                </a:solidFill>
-                <a:effectLst/>
-                <a:latin typeface="Consolas" panose="020B0609020204030204" pitchFamily="49" charset="0"/>
-              </a:rPr>
-              <a:t>*</a:t>
-            </a:r>
-            <a:r>
-              <a:rPr lang="en-US" altLang="zh-CN" b="0" dirty="0">
-                <a:solidFill>
-                  <a:srgbClr val="000000"/>
-                </a:solidFill>
-                <a:effectLst/>
-                <a:latin typeface="Consolas" panose="020B0609020204030204" pitchFamily="49" charset="0"/>
-              </a:rPr>
-              <a:t> Push indentation</a:t>
-            </a:r>
-            <a:br>
-              <a:rPr lang="en-US" altLang="zh-CN" b="0" dirty="0">
-                <a:solidFill>
-                  <a:srgbClr val="000000"/>
-                </a:solidFill>
-                <a:effectLst/>
-                <a:latin typeface="Consolas" panose="020B0609020204030204" pitchFamily="49" charset="0"/>
-              </a:rPr>
-            </a:br>
-            <a:r>
-              <a:rPr lang="en-US" altLang="zh-CN" b="0" dirty="0">
-                <a:solidFill>
-                  <a:srgbClr val="000000"/>
-                </a:solidFill>
-                <a:effectLst/>
-                <a:latin typeface="Consolas" panose="020B0609020204030204" pitchFamily="49" charset="0"/>
-              </a:rPr>
-              <a:t>Case B: Same Indentation, Condition Active</a:t>
-            </a:r>
-          </a:p>
-          <a:p>
-            <a:r>
-              <a:rPr lang="en-US" altLang="zh-CN" b="0" dirty="0">
-                <a:solidFill>
-                  <a:srgbClr val="000000"/>
-                </a:solidFill>
-                <a:effectLst/>
-                <a:latin typeface="Consolas" panose="020B0609020204030204" pitchFamily="49" charset="0"/>
-              </a:rPr>
-              <a:t>…</a:t>
-            </a:r>
-            <a:br>
-              <a:rPr lang="en-US" altLang="zh-CN" b="0" dirty="0">
-                <a:solidFill>
-                  <a:srgbClr val="000000"/>
-                </a:solidFill>
-                <a:effectLst/>
-                <a:latin typeface="Consolas" panose="020B0609020204030204" pitchFamily="49" charset="0"/>
-              </a:rPr>
-            </a:br>
-            <a:r>
-              <a:rPr lang="en-US" altLang="zh-CN" b="0" dirty="0">
-                <a:solidFill>
-                  <a:srgbClr val="000000"/>
-                </a:solidFill>
-                <a:effectLst/>
-                <a:latin typeface="Consolas" panose="020B0609020204030204" pitchFamily="49" charset="0"/>
-              </a:rPr>
-              <a:t>Case C: Indentation Ends</a:t>
-            </a:r>
-          </a:p>
-          <a:p>
-            <a:r>
-              <a:rPr lang="en-US" altLang="zh-CN" b="0" dirty="0">
-                <a:solidFill>
-                  <a:srgbClr val="000000"/>
-                </a:solidFill>
-                <a:effectLst/>
-                <a:latin typeface="Consolas" panose="020B0609020204030204" pitchFamily="49" charset="0"/>
-              </a:rPr>
-              <a:t>…</a:t>
-            </a:r>
-            <a:br>
-              <a:rPr lang="en-US" altLang="zh-CN" b="0" dirty="0">
-                <a:solidFill>
-                  <a:srgbClr val="000000"/>
-                </a:solidFill>
-                <a:effectLst/>
-                <a:latin typeface="Consolas" panose="020B0609020204030204" pitchFamily="49" charset="0"/>
-              </a:rPr>
-            </a:br>
-            <a:r>
-              <a:rPr lang="en-US" altLang="zh-CN" b="1" dirty="0">
-                <a:solidFill>
-                  <a:srgbClr val="800000"/>
-                </a:solidFill>
-                <a:effectLst/>
-                <a:latin typeface="Consolas" panose="020B0609020204030204" pitchFamily="49" charset="0"/>
-              </a:rPr>
-              <a:t>###### </a:t>
-            </a:r>
-            <a:r>
-              <a:rPr lang="en-US" altLang="zh-CN" b="1" dirty="0">
-                <a:solidFill>
-                  <a:srgbClr val="000000"/>
-                </a:solidFill>
-                <a:effectLst/>
-                <a:latin typeface="Consolas" panose="020B0609020204030204" pitchFamily="49" charset="0"/>
-              </a:rPr>
-              <a:t>Finalization</a:t>
-            </a:r>
-            <a:br>
-              <a:rPr lang="en-US" altLang="zh-CN" b="0" dirty="0">
-                <a:solidFill>
-                  <a:srgbClr val="000000"/>
-                </a:solidFill>
-                <a:effectLst/>
-                <a:latin typeface="Consolas" panose="020B0609020204030204" pitchFamily="49" charset="0"/>
-              </a:rPr>
-            </a:br>
-            <a:r>
-              <a:rPr lang="en-US" altLang="zh-CN" b="0" dirty="0">
-                <a:solidFill>
-                  <a:srgbClr val="0451A5"/>
-                </a:solidFill>
-                <a:effectLst/>
-                <a:latin typeface="Consolas" panose="020B0609020204030204" pitchFamily="49" charset="0"/>
-              </a:rPr>
-              <a:t>1.</a:t>
-            </a:r>
-            <a:r>
-              <a:rPr lang="en-US" altLang="zh-CN" b="0" dirty="0">
-                <a:solidFill>
-                  <a:srgbClr val="000000"/>
-                </a:solidFill>
-                <a:effectLst/>
-                <a:latin typeface="Consolas" panose="020B0609020204030204" pitchFamily="49" charset="0"/>
-              </a:rPr>
-              <a:t> Pop all remaining conditions in </a:t>
-            </a:r>
-            <a:r>
-              <a:rPr lang="en-US" altLang="zh-CN" b="0" dirty="0">
-                <a:solidFill>
-                  <a:srgbClr val="800000"/>
-                </a:solidFill>
-                <a:effectLst/>
-                <a:latin typeface="Consolas" panose="020B0609020204030204" pitchFamily="49" charset="0"/>
-              </a:rPr>
-              <a:t>`CS`</a:t>
-            </a:r>
-            <a:endParaRPr lang="en-US" altLang="zh-CN" b="0" dirty="0">
-              <a:solidFill>
-                <a:srgbClr val="000000"/>
-              </a:solidFill>
-              <a:effectLst/>
-              <a:latin typeface="Consolas" panose="020B0609020204030204" pitchFamily="49" charset="0"/>
-            </a:endParaRPr>
-          </a:p>
-          <a:p>
-            <a:r>
-              <a:rPr lang="en-US" altLang="zh-CN" b="0" dirty="0">
-                <a:solidFill>
-                  <a:srgbClr val="0451A5"/>
-                </a:solidFill>
-                <a:effectLst/>
-                <a:latin typeface="Consolas" panose="020B0609020204030204" pitchFamily="49" charset="0"/>
-              </a:rPr>
-              <a:t>2.</a:t>
-            </a:r>
-            <a:r>
-              <a:rPr lang="en-US" altLang="zh-CN" b="0" dirty="0">
-                <a:solidFill>
-                  <a:srgbClr val="000000"/>
-                </a:solidFill>
-                <a:effectLst/>
-                <a:latin typeface="Consolas" panose="020B0609020204030204" pitchFamily="49" charset="0"/>
-              </a:rPr>
-              <a:t> For each parent node of those conditions:</a:t>
-            </a:r>
-          </a:p>
-          <a:p>
-            <a:r>
-              <a:rPr lang="en-US" altLang="zh-CN" b="0" dirty="0">
-                <a:solidFill>
-                  <a:srgbClr val="000000"/>
-                </a:solidFill>
-                <a:effectLst/>
-                <a:latin typeface="Consolas" panose="020B0609020204030204" pitchFamily="49" charset="0"/>
-              </a:rPr>
-              <a:t>   </a:t>
-            </a:r>
-            <a:r>
-              <a:rPr lang="en-US" altLang="zh-CN" b="0" dirty="0">
-                <a:solidFill>
-                  <a:srgbClr val="0451A5"/>
-                </a:solidFill>
-                <a:effectLst/>
-                <a:latin typeface="Consolas" panose="020B0609020204030204" pitchFamily="49" charset="0"/>
-              </a:rPr>
-              <a:t>*</a:t>
-            </a:r>
-            <a:r>
-              <a:rPr lang="en-US" altLang="zh-CN" b="0" dirty="0">
-                <a:solidFill>
-                  <a:srgbClr val="000000"/>
-                </a:solidFill>
-                <a:effectLst/>
-                <a:latin typeface="Consolas" panose="020B0609020204030204" pitchFamily="49" charset="0"/>
-              </a:rPr>
-              <a:t> Add edge to </a:t>
-            </a:r>
-            <a:r>
-              <a:rPr lang="en-US" altLang="zh-CN" b="0" dirty="0">
-                <a:solidFill>
-                  <a:srgbClr val="800000"/>
-                </a:solidFill>
-                <a:effectLst/>
-                <a:latin typeface="Consolas" panose="020B0609020204030204" pitchFamily="49" charset="0"/>
-              </a:rPr>
-              <a:t>`END`</a:t>
-            </a:r>
-            <a:endParaRPr lang="en-US" altLang="zh-CN" b="0" dirty="0">
-              <a:solidFill>
-                <a:srgbClr val="000000"/>
-              </a:solidFill>
-              <a:effectLst/>
-              <a:latin typeface="Consolas" panose="020B0609020204030204" pitchFamily="49" charset="0"/>
-            </a:endParaRPr>
-          </a:p>
-          <a:p>
-            <a:r>
-              <a:rPr lang="en-US" altLang="zh-CN" b="0" dirty="0">
-                <a:solidFill>
-                  <a:srgbClr val="0451A5"/>
-                </a:solidFill>
-                <a:effectLst/>
-                <a:latin typeface="Consolas" panose="020B0609020204030204" pitchFamily="49" charset="0"/>
-              </a:rPr>
-              <a:t>3.</a:t>
-            </a:r>
-            <a:r>
-              <a:rPr lang="en-US" altLang="zh-CN" b="0" dirty="0">
-                <a:solidFill>
-                  <a:srgbClr val="000000"/>
-                </a:solidFill>
-                <a:effectLst/>
-                <a:latin typeface="Consolas" panose="020B0609020204030204" pitchFamily="49" charset="0"/>
-              </a:rPr>
-              <a:t> If </a:t>
-            </a:r>
-            <a:r>
-              <a:rPr lang="en-US" altLang="zh-CN" b="0" dirty="0">
-                <a:solidFill>
-                  <a:srgbClr val="800000"/>
-                </a:solidFill>
-                <a:effectLst/>
-                <a:latin typeface="Consolas" panose="020B0609020204030204" pitchFamily="49" charset="0"/>
-              </a:rPr>
-              <a:t>`current`</a:t>
-            </a:r>
-            <a:r>
-              <a:rPr lang="en-US" altLang="zh-CN" b="0" dirty="0">
-                <a:solidFill>
-                  <a:srgbClr val="000000"/>
-                </a:solidFill>
-                <a:effectLst/>
-                <a:latin typeface="Consolas" panose="020B0609020204030204" pitchFamily="49" charset="0"/>
-              </a:rPr>
-              <a:t> is not </a:t>
-            </a:r>
-            <a:r>
-              <a:rPr lang="en-US" altLang="zh-CN" b="0" dirty="0">
-                <a:solidFill>
-                  <a:srgbClr val="800000"/>
-                </a:solidFill>
-                <a:effectLst/>
-                <a:latin typeface="Consolas" panose="020B0609020204030204" pitchFamily="49" charset="0"/>
-              </a:rPr>
-              <a:t>`END`</a:t>
-            </a:r>
-            <a:r>
-              <a:rPr lang="en-US" altLang="zh-CN" b="0" dirty="0">
-                <a:solidFill>
-                  <a:srgbClr val="000000"/>
-                </a:solidFill>
-                <a:effectLst/>
-                <a:latin typeface="Consolas" panose="020B0609020204030204" pitchFamily="49" charset="0"/>
-              </a:rPr>
-              <a:t>, connect </a:t>
-            </a:r>
-            <a:r>
-              <a:rPr lang="en-US" altLang="zh-CN" b="0" dirty="0">
-                <a:solidFill>
-                  <a:srgbClr val="800000"/>
-                </a:solidFill>
-                <a:effectLst/>
-                <a:latin typeface="Consolas" panose="020B0609020204030204" pitchFamily="49" charset="0"/>
-              </a:rPr>
-              <a:t>`current → END`</a:t>
-            </a:r>
-            <a:endParaRPr lang="en-US" altLang="zh-CN" b="0" dirty="0">
-              <a:solidFill>
-                <a:srgbClr val="000000"/>
-              </a:solidFill>
-              <a:effectLst/>
-              <a:latin typeface="Consolas" panose="020B0609020204030204" pitchFamily="49" charset="0"/>
-            </a:endParaRPr>
+            <a:endParaRPr lang="en-GB" dirty="0"/>
           </a:p>
         </p:txBody>
       </p:sp>
     </p:spTree>
     <p:extLst>
       <p:ext uri="{BB962C8B-B14F-4D97-AF65-F5344CB8AC3E}">
-        <p14:creationId xmlns:p14="http://schemas.microsoft.com/office/powerpoint/2010/main" val="1381218204"/>
+        <p14:creationId xmlns:p14="http://schemas.microsoft.com/office/powerpoint/2010/main" val="1499774373"/>
       </p:ext>
     </p:extLst>
   </p:cSld>
@@ -5400,8 +4615,8 @@
         </p:nvSpPr>
         <p:spPr>
           <a:xfrm>
-            <a:off x="1850529" y="239911"/>
-            <a:ext cx="8676000" cy="4411603"/>
+            <a:off x="1850529" y="2040136"/>
+            <a:ext cx="8676000" cy="5385034"/>
           </a:xfrm>
           <a:prstGeom prst="roundRect">
             <a:avLst>
@@ -5457,7 +4672,7 @@
         </p:nvSpPr>
         <p:spPr>
           <a:xfrm>
-            <a:off x="1850527" y="205270"/>
+            <a:off x="1850527" y="2005495"/>
             <a:ext cx="1616234" cy="369332"/>
           </a:xfrm>
           <a:prstGeom prst="rect">
@@ -5506,7 +4721,7 @@
         </p:nvSpPr>
         <p:spPr>
           <a:xfrm>
-            <a:off x="1991993" y="1246768"/>
+            <a:off x="1991994" y="3046993"/>
             <a:ext cx="5321499" cy="369332"/>
           </a:xfrm>
           <a:prstGeom prst="rect">
@@ -5555,7 +4770,7 @@
         </p:nvSpPr>
         <p:spPr>
           <a:xfrm>
-            <a:off x="1839097" y="229629"/>
+            <a:off x="1839097" y="2029855"/>
             <a:ext cx="8676000" cy="309393"/>
           </a:xfrm>
           <a:prstGeom prst="roundRect">
@@ -5607,10 +4822,10 @@
       </p:sp>
       <p:sp>
         <p:nvSpPr>
-          <p:cNvPr id="2" name="文本框 13">
+          <p:cNvPr id="3" name="文本框 13">
             <a:extLst>
               <a:ext uri="{FF2B5EF4-FFF2-40B4-BE49-F238E27FC236}">
-                <a16:creationId xmlns:a16="http://schemas.microsoft.com/office/drawing/2014/main" id="{5D7ED9CC-C2E1-6889-94F9-D85D828C0E3C}"/>
+                <a16:creationId xmlns:a16="http://schemas.microsoft.com/office/drawing/2014/main" id="{CB2D0DA2-1505-990E-D626-8067D361E7A9}"/>
               </a:ext>
             </a:extLst>
           </p:cNvPr>
@@ -5619,8 +4834,8 @@
         </p:nvSpPr>
         <p:spPr>
           <a:xfrm>
-            <a:off x="1850527" y="598962"/>
-            <a:ext cx="8676000" cy="4052552"/>
+            <a:off x="1850529" y="2343823"/>
+            <a:ext cx="8664568" cy="3335674"/>
           </a:xfrm>
           <a:prstGeom prst="rect">
             <a:avLst/>
@@ -5634,112 +4849,168 @@
           <a:lstStyle/>
           <a:p>
             <a:r>
-              <a:rPr lang="en-US" altLang="zh-CN" b="1" u="sng" dirty="0">
-                <a:latin typeface="Helvetica Neue" panose="02000503000000020004" pitchFamily="2" charset="0"/>
-                <a:ea typeface="Helvetica Neue" panose="02000503000000020004" pitchFamily="2" charset="0"/>
-                <a:cs typeface="Helvetica Neue" panose="02000503000000020004" pitchFamily="2" charset="0"/>
-              </a:rPr>
-              <a:t>System:</a:t>
-            </a:r>
-          </a:p>
-          <a:p>
-            <a:pPr marL="360000"/>
-            <a:r>
-              <a:rPr lang="en-US" altLang="zh-CN" dirty="0">
-                <a:solidFill>
-                  <a:srgbClr val="FF0000"/>
-                </a:solidFill>
-                <a:latin typeface="Helvetica Neue" panose="02000503000000020004" pitchFamily="2" charset="0"/>
-                <a:ea typeface="Helvetica Neue" panose="02000503000000020004" pitchFamily="2" charset="0"/>
-                <a:cs typeface="Helvetica Neue" panose="02000503000000020004" pitchFamily="2" charset="0"/>
-              </a:rPr>
-              <a:t>While constructing the CFG, Use the following data structure to record important nodes:</a:t>
-            </a:r>
-          </a:p>
-          <a:p>
-            <a:r>
-              <a:rPr lang="en-US" altLang="zh-CN" b="1" u="sng" dirty="0">
-                <a:latin typeface="Helvetica Neue" panose="02000503000000020004" pitchFamily="2" charset="0"/>
-                <a:ea typeface="Helvetica Neue" panose="02000503000000020004" pitchFamily="2" charset="0"/>
-                <a:cs typeface="Helvetica Neue" panose="02000503000000020004" pitchFamily="2" charset="0"/>
-              </a:rPr>
-              <a:t>Task:</a:t>
-            </a:r>
-          </a:p>
-          <a:p>
-            <a:pPr marL="360000"/>
-            <a:r>
-              <a:rPr lang="en-US" altLang="zh-CN" dirty="0">
-                <a:solidFill>
-                  <a:srgbClr val="FF0000"/>
-                </a:solidFill>
-                <a:latin typeface="Helvetica Neue" panose="02000503000000020004" pitchFamily="2" charset="0"/>
-                <a:ea typeface="Helvetica Neue" panose="02000503000000020004" pitchFamily="2" charset="0"/>
-                <a:cs typeface="Helvetica Neue" panose="02000503000000020004" pitchFamily="2" charset="0"/>
-              </a:rPr>
-              <a:t>* Parameter assignments and uses. For instance, PA_amount1 represents all nodes in CFG1 for code_v1 that contains an assignment to parameter `amount`</a:t>
-            </a:r>
-          </a:p>
-          <a:p>
-            <a:pPr marL="360000"/>
-            <a:r>
-              <a:rPr lang="en-US" altLang="zh-CN" dirty="0">
-                <a:solidFill>
-                  <a:srgbClr val="FF0000"/>
-                </a:solidFill>
-                <a:latin typeface="Helvetica Neue" panose="02000503000000020004" pitchFamily="2" charset="0"/>
-                <a:ea typeface="Helvetica Neue" panose="02000503000000020004" pitchFamily="2" charset="0"/>
-                <a:cs typeface="Helvetica Neue" panose="02000503000000020004" pitchFamily="2" charset="0"/>
-              </a:rPr>
-              <a:t>* Global variable assignments. Similar to Parameter but you have to decide which one is Global variable.</a:t>
-            </a:r>
-          </a:p>
-          <a:p>
-            <a:pPr marL="360000"/>
-            <a:r>
-              <a:rPr lang="en-US" altLang="zh-CN" dirty="0">
-                <a:solidFill>
-                  <a:srgbClr val="FF0000"/>
-                </a:solidFill>
-                <a:latin typeface="Helvetica Neue" panose="02000503000000020004" pitchFamily="2" charset="0"/>
-                <a:ea typeface="Helvetica Neue" panose="02000503000000020004" pitchFamily="2" charset="0"/>
-                <a:cs typeface="Helvetica Neue" panose="02000503000000020004" pitchFamily="2" charset="0"/>
-              </a:rPr>
-              <a:t>* Return nodes. For instance, R1 represents all nodes in CFG1 for code_v1 that contains a `Return` Statement.</a:t>
-            </a:r>
-          </a:p>
-          <a:p>
-            <a:pPr marL="360000"/>
-            <a:r>
-              <a:rPr lang="en-US" altLang="zh-CN" dirty="0">
-                <a:solidFill>
-                  <a:srgbClr val="FF0000"/>
-                </a:solidFill>
-                <a:latin typeface="Helvetica Neue" panose="02000503000000020004" pitchFamily="2" charset="0"/>
-                <a:ea typeface="Helvetica Neue" panose="02000503000000020004" pitchFamily="2" charset="0"/>
-                <a:cs typeface="Helvetica Neue" panose="02000503000000020004" pitchFamily="2" charset="0"/>
-              </a:rPr>
-              <a:t>* Exception nodes. Similar to Return.</a:t>
-            </a:r>
-          </a:p>
-          <a:p>
-            <a:pPr marL="360000"/>
-            <a:r>
-              <a:rPr lang="en-US" altLang="zh-CN" dirty="0">
-                <a:solidFill>
-                  <a:srgbClr val="FF0000"/>
-                </a:solidFill>
-                <a:latin typeface="Helvetica Neue" panose="02000503000000020004" pitchFamily="2" charset="0"/>
-                <a:ea typeface="Helvetica Neue" panose="02000503000000020004" pitchFamily="2" charset="0"/>
-                <a:cs typeface="Helvetica Neue" panose="02000503000000020004" pitchFamily="2" charset="0"/>
-              </a:rPr>
-              <a:t>* Nodes present in only one CFG version. For instance, OnlyV1 represents all nodes in CFG1 for code_v1 that doesn't exist in CFG2.</a:t>
-            </a:r>
-            <a:endParaRPr lang="en-US" altLang="zh-CN" i="1" dirty="0">
-              <a:latin typeface="Helvetica Neue" panose="02000503000000020004" pitchFamily="2" charset="0"/>
-              <a:ea typeface="Helvetica Neue" panose="02000503000000020004" pitchFamily="2" charset="0"/>
-              <a:cs typeface="Helvetica Neue" panose="02000503000000020004" pitchFamily="2" charset="0"/>
-            </a:endParaRPr>
+              <a:rPr lang="en-GB" dirty="0"/>
+              <a:t>You are an expert Python developer with expertise in control-flow analysis. You will be provided with a Control Flow Graph (CFG) constructed from a Python function. Your task is to traverse the CFG from the Entry node and identify source and sink nodes according to the definitions below.</a:t>
+            </a:r>
+          </a:p>
+          <a:p>
+            <a:r>
+              <a:rPr lang="en-GB" dirty="0"/>
+              <a:t>The </a:t>
+            </a:r>
+            <a:r>
+              <a:rPr lang="en-GB" dirty="0" err="1"/>
+              <a:t>analyzed</a:t>
+            </a:r>
+            <a:r>
+              <a:rPr lang="en-GB" dirty="0"/>
+              <a:t> function has the following signature: </a:t>
+            </a:r>
+            <a:r>
+              <a:rPr lang="en-GB" i="1" dirty="0"/>
+              <a:t>Foo(bar)</a:t>
+            </a:r>
+          </a:p>
+          <a:p>
+            <a:r>
+              <a:rPr lang="en-GB" dirty="0"/>
+              <a:t>A source is the first CFG node along its path that references one of its function parameters. </a:t>
+            </a:r>
+          </a:p>
+          <a:p>
+            <a:r>
+              <a:rPr lang="en-GB" dirty="0"/>
+              <a:t>A sink can either be:</a:t>
+            </a:r>
+          </a:p>
+          <a:p>
+            <a:pPr>
+              <a:buFont typeface="+mj-lt"/>
+              <a:buAutoNum type="arabicPeriod"/>
+            </a:pPr>
+            <a:r>
+              <a:rPr lang="en-GB" dirty="0"/>
+              <a:t> The predecessor of the exit node. E.g., a node that contains a return statement.</a:t>
+            </a:r>
+          </a:p>
+          <a:p>
+            <a:pPr>
+              <a:buFont typeface="+mj-lt"/>
+              <a:buAutoNum type="arabicPeriod"/>
+            </a:pPr>
+            <a:r>
+              <a:rPr lang="en-GB" dirty="0"/>
+              <a:t> The CFG node along its path that performs a last assignment to a global variable.</a:t>
+            </a:r>
+          </a:p>
+          <a:p>
+            <a:pPr>
+              <a:buFont typeface="+mj-lt"/>
+              <a:buAutoNum type="arabicPeriod"/>
+            </a:pPr>
+            <a:r>
+              <a:rPr lang="en-GB" dirty="0"/>
+              <a:t> A node that contains a raise statement.</a:t>
+            </a:r>
+          </a:p>
+          <a:p>
+            <a:r>
+              <a:rPr lang="en-GB" dirty="0"/>
+              <a:t>The CFG is given as follows:</a:t>
+            </a:r>
+          </a:p>
+          <a:p>
+            <a:r>
+              <a:rPr lang="en-GB" dirty="0"/>
+              <a:t># CFG CONTENT</a:t>
+            </a:r>
+          </a:p>
+          <a:p>
+            <a:r>
+              <a:rPr lang="en-GB" dirty="0"/>
+              <a:t>Output the source/sink node in the following format:</a:t>
+            </a:r>
+          </a:p>
+          <a:p>
+            <a:r>
+              <a:rPr lang="en-GB" dirty="0"/>
+              <a:t>[{</a:t>
+            </a:r>
+          </a:p>
+          <a:p>
+            <a:r>
+              <a:rPr lang="en-GB" dirty="0"/>
+              <a:t>	“type”: “</a:t>
+            </a:r>
+            <a:r>
+              <a:rPr lang="en-GB" dirty="0" err="1"/>
+              <a:t>source|sink</a:t>
+            </a:r>
+            <a:r>
+              <a:rPr lang="en-GB" dirty="0"/>
+              <a:t>”, </a:t>
+            </a:r>
+          </a:p>
+          <a:p>
+            <a:r>
+              <a:rPr lang="en-GB" dirty="0"/>
+              <a:t>	”sink_type”:”</a:t>
+            </a:r>
+            <a:r>
+              <a:rPr lang="en-GB" dirty="0" err="1"/>
+              <a:t>exit_pred|global_var_assign|raise</a:t>
+            </a:r>
+            <a:r>
+              <a:rPr lang="en-GB" dirty="0"/>
+              <a:t>” # non-empty for sinks</a:t>
+            </a:r>
+          </a:p>
+          <a:p>
+            <a:r>
+              <a:rPr lang="en-GB" dirty="0"/>
+              <a:t>	“node”: [”</a:t>
+            </a:r>
+            <a:r>
+              <a:rPr lang="en-GB" dirty="0" err="1"/>
+              <a:t>from_id</a:t>
+            </a:r>
+            <a:r>
+              <a:rPr lang="en-GB" dirty="0"/>
+              <a:t>”: ID, “</a:t>
+            </a:r>
+            <a:r>
+              <a:rPr lang="en-GB" dirty="0" err="1"/>
+              <a:t>from_content</a:t>
+            </a:r>
+            <a:r>
+              <a:rPr lang="en-GB" dirty="0"/>
+              <a:t>”: content,  “</a:t>
+            </a:r>
+            <a:r>
+              <a:rPr lang="en-GB" dirty="0" err="1"/>
+              <a:t>to_id</a:t>
+            </a:r>
+            <a:r>
+              <a:rPr lang="en-GB" dirty="0"/>
+              <a:t>”: ID, “</a:t>
+            </a:r>
+            <a:r>
+              <a:rPr lang="en-GB" dirty="0" err="1"/>
+              <a:t>to_content</a:t>
+            </a:r>
+            <a:r>
+              <a:rPr lang="en-GB" dirty="0"/>
+              <a:t>”: content]</a:t>
+            </a:r>
+          </a:p>
+          <a:p>
+            <a:r>
+              <a:rPr lang="en-GB" dirty="0"/>
+              <a:t>}]</a:t>
+            </a:r>
+          </a:p>
+          <a:p>
+            <a:endParaRPr lang="en-GB" dirty="0"/>
           </a:p>
         </p:txBody>
       </p:sp>
@@ -5787,8 +5058,8 @@
         </p:nvSpPr>
         <p:spPr>
           <a:xfrm>
-            <a:off x="1850529" y="239911"/>
-            <a:ext cx="8676000" cy="5272993"/>
+            <a:off x="1850529" y="2040137"/>
+            <a:ext cx="8676000" cy="5675979"/>
           </a:xfrm>
           <a:prstGeom prst="roundRect">
             <a:avLst>
@@ -5844,7 +5115,7 @@
         </p:nvSpPr>
         <p:spPr>
           <a:xfrm>
-            <a:off x="1850527" y="205270"/>
+            <a:off x="1850527" y="2005495"/>
             <a:ext cx="1616234" cy="369332"/>
           </a:xfrm>
           <a:prstGeom prst="rect">
@@ -5893,7 +5164,7 @@
         </p:nvSpPr>
         <p:spPr>
           <a:xfrm>
-            <a:off x="1991993" y="1246768"/>
+            <a:off x="1991994" y="3046993"/>
             <a:ext cx="5321499" cy="369332"/>
           </a:xfrm>
           <a:prstGeom prst="rect">
@@ -5942,7 +5213,7 @@
         </p:nvSpPr>
         <p:spPr>
           <a:xfrm>
-            <a:off x="1839097" y="229629"/>
+            <a:off x="1839097" y="2029855"/>
             <a:ext cx="8676000" cy="309393"/>
           </a:xfrm>
           <a:prstGeom prst="roundRect">
@@ -5994,10 +5265,10 @@
       </p:sp>
       <p:sp>
         <p:nvSpPr>
-          <p:cNvPr id="2" name="文本框 13">
+          <p:cNvPr id="3" name="文本框 13">
             <a:extLst>
               <a:ext uri="{FF2B5EF4-FFF2-40B4-BE49-F238E27FC236}">
-                <a16:creationId xmlns:a16="http://schemas.microsoft.com/office/drawing/2014/main" id="{5D7ED9CC-C2E1-6889-94F9-D85D828C0E3C}"/>
+                <a16:creationId xmlns:a16="http://schemas.microsoft.com/office/drawing/2014/main" id="{84D05AF5-12B5-F94C-15D0-6C552FAB4CD9}"/>
               </a:ext>
             </a:extLst>
           </p:cNvPr>
@@ -6006,8 +5277,8 @@
         </p:nvSpPr>
         <p:spPr>
           <a:xfrm>
-            <a:off x="1850527" y="598961"/>
-            <a:ext cx="8676000" cy="5059717"/>
+            <a:off x="1850529" y="2343823"/>
+            <a:ext cx="8664568" cy="5382574"/>
           </a:xfrm>
           <a:prstGeom prst="rect">
             <a:avLst/>
@@ -6020,276 +5291,175 @@
           </a:bodyPr>
           <a:lstStyle/>
           <a:p>
-            <a:pPr marL="360000"/>
-            <a:r>
-              <a:rPr lang="en-US" altLang="zh-CN" dirty="0">
-                <a:solidFill>
-                  <a:srgbClr val="FF0000"/>
-                </a:solidFill>
-                <a:latin typeface="Helvetica Neue" panose="02000503000000020004" pitchFamily="2" charset="0"/>
-              </a:rPr>
-              <a:t>Use data structures to identify the following incompatibilities and update Results:</a:t>
-            </a:r>
-          </a:p>
-          <a:p>
-            <a:pPr marL="360000"/>
-            <a:endParaRPr lang="en-US" altLang="zh-CN" dirty="0">
-              <a:solidFill>
-                <a:srgbClr val="FF0000"/>
-              </a:solidFill>
-              <a:latin typeface="Helvetica Neue" panose="02000503000000020004" pitchFamily="2" charset="0"/>
-            </a:endParaRPr>
-          </a:p>
-          <a:p>
-            <a:pPr marL="360000"/>
-            <a:r>
-              <a:rPr lang="en-US" altLang="zh-CN" dirty="0">
-                <a:solidFill>
-                  <a:srgbClr val="FF0000"/>
-                </a:solidFill>
-                <a:latin typeface="Helvetica Neue" panose="02000503000000020004" pitchFamily="2" charset="0"/>
-              </a:rPr>
-              <a:t>1. **CI2 (Key of </a:t>
-            </a:r>
-            <a:r>
-              <a:rPr lang="en-US" altLang="zh-CN" dirty="0" err="1">
-                <a:solidFill>
-                  <a:srgbClr val="FF0000"/>
-                </a:solidFill>
-                <a:latin typeface="Helvetica Neue" panose="02000503000000020004" pitchFamily="2" charset="0"/>
-              </a:rPr>
-              <a:t>kwargs</a:t>
-            </a:r>
-            <a:r>
-              <a:rPr lang="en-US" altLang="zh-CN" dirty="0">
-                <a:solidFill>
-                  <a:srgbClr val="FF0000"/>
-                </a:solidFill>
-                <a:latin typeface="Helvetica Neue" panose="02000503000000020004" pitchFamily="2" charset="0"/>
-              </a:rPr>
-              <a:t> Addition or Deletion)**: </a:t>
-            </a:r>
-          </a:p>
-          <a:p>
-            <a:pPr marL="360000"/>
-            <a:r>
-              <a:rPr lang="en-US" altLang="zh-CN" dirty="0">
-                <a:solidFill>
-                  <a:srgbClr val="FF0000"/>
-                </a:solidFill>
-                <a:latin typeface="Helvetica Neue" panose="02000503000000020004" pitchFamily="2" charset="0"/>
-              </a:rPr>
-              <a:t>KWARGS is NOT empty (both P1 and P2 have `**</a:t>
-            </a:r>
-            <a:r>
-              <a:rPr lang="en-US" altLang="zh-CN" dirty="0" err="1">
-                <a:solidFill>
-                  <a:srgbClr val="FF0000"/>
-                </a:solidFill>
-                <a:latin typeface="Helvetica Neue" panose="02000503000000020004" pitchFamily="2" charset="0"/>
-              </a:rPr>
-              <a:t>kwargs</a:t>
-            </a:r>
-            <a:r>
-              <a:rPr lang="en-US" altLang="zh-CN" dirty="0">
-                <a:solidFill>
-                  <a:srgbClr val="FF0000"/>
-                </a:solidFill>
-                <a:latin typeface="Helvetica Neue" panose="02000503000000020004" pitchFamily="2" charset="0"/>
-              </a:rPr>
-              <a:t>`):</a:t>
-            </a:r>
-          </a:p>
-          <a:p>
-            <a:pPr marL="360000"/>
-            <a:r>
-              <a:rPr lang="en-US" altLang="zh-CN" dirty="0">
-                <a:solidFill>
-                  <a:srgbClr val="FF0000"/>
-                </a:solidFill>
-                <a:latin typeface="Helvetica Neue" panose="02000503000000020004" pitchFamily="2" charset="0"/>
-              </a:rPr>
-              <a:t>    - For each nodes labeled in PU_kwargs1: record all keys accessed by `</a:t>
-            </a:r>
-            <a:r>
-              <a:rPr lang="en-US" altLang="zh-CN" dirty="0" err="1">
-                <a:solidFill>
-                  <a:srgbClr val="FF0000"/>
-                </a:solidFill>
-                <a:latin typeface="Helvetica Neue" panose="02000503000000020004" pitchFamily="2" charset="0"/>
-              </a:rPr>
-              <a:t>kwargs.get</a:t>
-            </a:r>
-            <a:r>
-              <a:rPr lang="en-US" altLang="zh-CN" dirty="0">
-                <a:solidFill>
-                  <a:srgbClr val="FF0000"/>
-                </a:solidFill>
-                <a:latin typeface="Helvetica Neue" panose="02000503000000020004" pitchFamily="2" charset="0"/>
-              </a:rPr>
-              <a:t>()` or `</a:t>
-            </a:r>
-            <a:r>
-              <a:rPr lang="en-US" altLang="zh-CN" dirty="0" err="1">
-                <a:solidFill>
-                  <a:srgbClr val="FF0000"/>
-                </a:solidFill>
-                <a:latin typeface="Helvetica Neue" panose="02000503000000020004" pitchFamily="2" charset="0"/>
-              </a:rPr>
-              <a:t>kwargs</a:t>
-            </a:r>
-            <a:r>
-              <a:rPr lang="en-US" altLang="zh-CN" dirty="0">
-                <a:solidFill>
-                  <a:srgbClr val="FF0000"/>
-                </a:solidFill>
-                <a:latin typeface="Helvetica Neue" panose="02000503000000020004" pitchFamily="2" charset="0"/>
-              </a:rPr>
-              <a:t>[]`</a:t>
-            </a:r>
-          </a:p>
-          <a:p>
-            <a:pPr marL="360000"/>
-            <a:r>
-              <a:rPr lang="en-US" altLang="zh-CN" dirty="0">
-                <a:solidFill>
-                  <a:srgbClr val="FF0000"/>
-                </a:solidFill>
-                <a:latin typeface="Helvetica Neue" panose="02000503000000020004" pitchFamily="2" charset="0"/>
-              </a:rPr>
-              <a:t>    - For each nodes labeled in PU_kwargs1: record all keys accessed by `</a:t>
-            </a:r>
-            <a:r>
-              <a:rPr lang="en-US" altLang="zh-CN" dirty="0" err="1">
-                <a:solidFill>
-                  <a:srgbClr val="FF0000"/>
-                </a:solidFill>
-                <a:latin typeface="Helvetica Neue" panose="02000503000000020004" pitchFamily="2" charset="0"/>
-              </a:rPr>
-              <a:t>kwargs.get</a:t>
-            </a:r>
-            <a:r>
-              <a:rPr lang="en-US" altLang="zh-CN" dirty="0">
-                <a:solidFill>
-                  <a:srgbClr val="FF0000"/>
-                </a:solidFill>
-                <a:latin typeface="Helvetica Neue" panose="02000503000000020004" pitchFamily="2" charset="0"/>
-              </a:rPr>
-              <a:t>()` or `</a:t>
-            </a:r>
-            <a:r>
-              <a:rPr lang="en-US" altLang="zh-CN" dirty="0" err="1">
-                <a:solidFill>
-                  <a:srgbClr val="FF0000"/>
-                </a:solidFill>
-                <a:latin typeface="Helvetica Neue" panose="02000503000000020004" pitchFamily="2" charset="0"/>
-              </a:rPr>
-              <a:t>kwargs</a:t>
-            </a:r>
-            <a:r>
-              <a:rPr lang="en-US" altLang="zh-CN" dirty="0">
-                <a:solidFill>
-                  <a:srgbClr val="FF0000"/>
-                </a:solidFill>
-                <a:latin typeface="Helvetica Neue" panose="02000503000000020004" pitchFamily="2" charset="0"/>
-              </a:rPr>
-              <a:t>[]`</a:t>
-            </a:r>
-          </a:p>
-          <a:p>
-            <a:pPr marL="360000"/>
-            <a:endParaRPr lang="en-US" altLang="zh-CN" dirty="0">
-              <a:solidFill>
-                <a:srgbClr val="FF0000"/>
-              </a:solidFill>
-              <a:latin typeface="Helvetica Neue" panose="02000503000000020004" pitchFamily="2" charset="0"/>
-            </a:endParaRPr>
-          </a:p>
-          <a:p>
-            <a:pPr marL="360000"/>
-            <a:r>
-              <a:rPr lang="en-US" altLang="zh-CN" dirty="0">
-                <a:solidFill>
-                  <a:srgbClr val="FF0000"/>
-                </a:solidFill>
-                <a:latin typeface="Helvetica Neue" panose="02000503000000020004" pitchFamily="2" charset="0"/>
-              </a:rPr>
-              <a:t>2. **CI3 (Parameter Rename)**: </a:t>
-            </a:r>
-          </a:p>
-          <a:p>
-            <a:pPr marL="360000"/>
-            <a:r>
-              <a:rPr lang="en-US" altLang="zh-CN" dirty="0">
-                <a:solidFill>
-                  <a:srgbClr val="FF0000"/>
-                </a:solidFill>
-                <a:latin typeface="Helvetica Neue" panose="02000503000000020004" pitchFamily="2" charset="0"/>
-              </a:rPr>
-              <a:t>- For each nodes labeled in PA_p1 and PU_p1: record all Usage of the parameter</a:t>
-            </a:r>
-          </a:p>
-          <a:p>
-            <a:pPr marL="645750" indent="-285750">
-              <a:buFontTx/>
-              <a:buChar char="-"/>
-            </a:pPr>
-            <a:r>
-              <a:rPr lang="en-US" altLang="zh-CN" dirty="0">
-                <a:solidFill>
-                  <a:srgbClr val="FF0000"/>
-                </a:solidFill>
-                <a:latin typeface="Helvetica Neue" panose="02000503000000020004" pitchFamily="2" charset="0"/>
-              </a:rPr>
-              <a:t>Do the same for p2</a:t>
-            </a:r>
-          </a:p>
-          <a:p>
-            <a:pPr marL="645750" indent="-285750">
-              <a:buFontTx/>
-              <a:buChar char="-"/>
-            </a:pPr>
-            <a:endParaRPr lang="en-US" altLang="zh-CN" dirty="0">
-              <a:solidFill>
-                <a:srgbClr val="FF0000"/>
-              </a:solidFill>
-              <a:latin typeface="Helvetica Neue" panose="02000503000000020004" pitchFamily="2" charset="0"/>
-            </a:endParaRPr>
-          </a:p>
-          <a:p>
-            <a:pPr marL="360000"/>
-            <a:r>
-              <a:rPr lang="en-US" altLang="zh-CN" dirty="0">
-                <a:solidFill>
-                  <a:srgbClr val="FF0000"/>
-                </a:solidFill>
-                <a:latin typeface="Helvetica Neue" panose="02000503000000020004" pitchFamily="2" charset="0"/>
-              </a:rPr>
-              <a:t>5. **CI7 (Return Value Change)**: </a:t>
-            </a:r>
-          </a:p>
-          <a:p>
-            <a:pPr marL="360000"/>
-            <a:r>
-              <a:rPr lang="en-US" altLang="zh-CN" dirty="0">
-                <a:solidFill>
-                  <a:srgbClr val="FF0000"/>
-                </a:solidFill>
-                <a:latin typeface="Helvetica Neue" panose="02000503000000020004" pitchFamily="2" charset="0"/>
-              </a:rPr>
-              <a:t>For each return node in R1, trace back for each return node through CFG, and find the data flow of the return variable differs.</a:t>
-            </a:r>
-          </a:p>
-          <a:p>
-            <a:pPr marL="360000"/>
-            <a:r>
-              <a:rPr lang="en-US" altLang="zh-CN" dirty="0">
-                <a:solidFill>
-                  <a:srgbClr val="FF0000"/>
-                </a:solidFill>
-                <a:latin typeface="Helvetica Neue" panose="02000503000000020004" pitchFamily="2" charset="0"/>
-              </a:rPr>
-              <a:t>    </a:t>
+            <a:r>
+              <a:rPr lang="en-GB" dirty="0"/>
+              <a:t>You are an expert Python developer with expertise in control-flow analysis. You will be provided with a Control Flow Graph (CFG) and identified source and sink nodes. Your task is to traverse the CFG from the source and sink nodes and identify source-sink paths. The </a:t>
+            </a:r>
+            <a:r>
+              <a:rPr lang="en-GB" dirty="0" err="1"/>
+              <a:t>analyzed</a:t>
+            </a:r>
+            <a:r>
+              <a:rPr lang="en-GB" dirty="0"/>
+              <a:t> function has the following signature: </a:t>
+            </a:r>
+            <a:r>
+              <a:rPr lang="en-GB" i="1" dirty="0"/>
+              <a:t>Foo(bar). </a:t>
+            </a:r>
+            <a:r>
+              <a:rPr lang="en-GB" dirty="0"/>
+              <a:t>The CFG is given as follows: # CFG CONTENT. The source and sink nodes are: # SOURCE and SINK nodes. Now you will output the source-sink paths in the following format:</a:t>
+            </a:r>
+          </a:p>
+          <a:p>
+            <a:r>
+              <a:rPr lang="en-GB" dirty="0"/>
+              <a:t>[{</a:t>
+            </a:r>
+          </a:p>
+          <a:p>
+            <a:r>
+              <a:rPr lang="en-GB" dirty="0"/>
+              <a:t>	“</a:t>
+            </a:r>
+            <a:r>
+              <a:rPr lang="en-GB" dirty="0" err="1"/>
+              <a:t>path_id</a:t>
+            </a:r>
+            <a:r>
+              <a:rPr lang="en-GB" dirty="0"/>
+              <a:t>”: 1,</a:t>
+            </a:r>
+          </a:p>
+          <a:p>
+            <a:r>
+              <a:rPr lang="en-GB" dirty="0"/>
+              <a:t>	“source-sink”: “”,</a:t>
+            </a:r>
+          </a:p>
+          <a:p>
+            <a:r>
+              <a:rPr lang="en-GB" dirty="0"/>
+              <a:t>	“edges”:[{</a:t>
+            </a:r>
+          </a:p>
+          <a:p>
+            <a:r>
+              <a:rPr lang="en-GB" dirty="0"/>
+              <a:t>			”</a:t>
+            </a:r>
+            <a:r>
+              <a:rPr lang="en-GB" dirty="0" err="1"/>
+              <a:t>from_id</a:t>
+            </a:r>
+            <a:r>
+              <a:rPr lang="en-GB" dirty="0"/>
+              <a:t>”: ID, “</a:t>
+            </a:r>
+            <a:r>
+              <a:rPr lang="en-GB" dirty="0" err="1"/>
+              <a:t>from_content</a:t>
+            </a:r>
+            <a:r>
+              <a:rPr lang="en-GB" dirty="0"/>
+              <a:t>”: content</a:t>
+            </a:r>
+          </a:p>
+          <a:p>
+            <a:r>
+              <a:rPr lang="en-GB" dirty="0"/>
+              <a:t>			 “</a:t>
+            </a:r>
+            <a:r>
+              <a:rPr lang="en-GB" dirty="0" err="1"/>
+              <a:t>to_id</a:t>
+            </a:r>
+            <a:r>
+              <a:rPr lang="en-GB" dirty="0"/>
+              <a:t>”: ID, “</a:t>
+            </a:r>
+            <a:r>
+              <a:rPr lang="en-GB" dirty="0" err="1"/>
+              <a:t>to_content</a:t>
+            </a:r>
+            <a:r>
+              <a:rPr lang="en-GB" dirty="0"/>
+              <a:t>”: content,</a:t>
+            </a:r>
+          </a:p>
+          <a:p>
+            <a:r>
+              <a:rPr lang="en-GB" dirty="0"/>
+              <a:t>			“edge”: ”If, Line Number, True”</a:t>
+            </a:r>
+          </a:p>
+          <a:p>
+            <a:r>
+              <a:rPr lang="en-GB" dirty="0"/>
+              <a:t>			}, {</a:t>
+            </a:r>
+          </a:p>
+          <a:p>
+            <a:r>
+              <a:rPr lang="en-GB" dirty="0"/>
+              <a:t>			”</a:t>
+            </a:r>
+            <a:r>
+              <a:rPr lang="en-GB" dirty="0" err="1"/>
+              <a:t>from_id</a:t>
+            </a:r>
+            <a:r>
+              <a:rPr lang="en-GB" dirty="0"/>
+              <a:t>”: ID, “</a:t>
+            </a:r>
+            <a:r>
+              <a:rPr lang="en-GB" dirty="0" err="1"/>
+              <a:t>from_content</a:t>
+            </a:r>
+            <a:r>
+              <a:rPr lang="en-GB" dirty="0"/>
+              <a:t>”: content</a:t>
+            </a:r>
+          </a:p>
+          <a:p>
+            <a:r>
+              <a:rPr lang="en-GB" dirty="0"/>
+              <a:t>			 “</a:t>
+            </a:r>
+            <a:r>
+              <a:rPr lang="en-GB" dirty="0" err="1"/>
+              <a:t>to_id</a:t>
+            </a:r>
+            <a:r>
+              <a:rPr lang="en-GB" dirty="0"/>
+              <a:t>”: ID, “</a:t>
+            </a:r>
+            <a:r>
+              <a:rPr lang="en-GB" dirty="0" err="1"/>
+              <a:t>to_content</a:t>
+            </a:r>
+            <a:r>
+              <a:rPr lang="en-GB" dirty="0"/>
+              <a:t>”: content,</a:t>
+            </a:r>
+          </a:p>
+          <a:p>
+            <a:r>
+              <a:rPr lang="en-GB" dirty="0"/>
+              <a:t>			“edge”: ”If, Line Number, True”, …</a:t>
+            </a:r>
+          </a:p>
+          <a:p>
+            <a:r>
+              <a:rPr lang="en-GB" dirty="0"/>
+              <a:t>			}]</a:t>
+            </a:r>
+          </a:p>
+          <a:p>
+            <a:r>
+              <a:rPr lang="en-GB" dirty="0"/>
+              <a:t>}]</a:t>
             </a:r>
           </a:p>
         </p:txBody>
@@ -6338,8 +5508,8 @@
         </p:nvSpPr>
         <p:spPr>
           <a:xfrm>
-            <a:off x="1850529" y="239911"/>
-            <a:ext cx="8676000" cy="8957098"/>
+            <a:off x="1850529" y="1885154"/>
+            <a:ext cx="8676000" cy="15475371"/>
           </a:xfrm>
           <a:prstGeom prst="roundRect">
             <a:avLst>
@@ -6395,7 +5565,7 @@
         </p:nvSpPr>
         <p:spPr>
           <a:xfrm>
-            <a:off x="1850527" y="205270"/>
+            <a:off x="1850527" y="1850513"/>
             <a:ext cx="1616234" cy="369332"/>
           </a:xfrm>
           <a:prstGeom prst="rect">
@@ -6444,7 +5614,7 @@
         </p:nvSpPr>
         <p:spPr>
           <a:xfrm>
-            <a:off x="1991993" y="1246768"/>
+            <a:off x="1991994" y="2892011"/>
             <a:ext cx="5321499" cy="369332"/>
           </a:xfrm>
           <a:prstGeom prst="rect">
@@ -6493,7 +5663,7 @@
         </p:nvSpPr>
         <p:spPr>
           <a:xfrm>
-            <a:off x="1839097" y="229629"/>
+            <a:off x="1839097" y="1874873"/>
             <a:ext cx="8676000" cy="309393"/>
           </a:xfrm>
           <a:prstGeom prst="roundRect">
@@ -6545,10 +5715,10 @@
       </p:sp>
       <p:sp>
         <p:nvSpPr>
-          <p:cNvPr id="2" name="文本框 13">
+          <p:cNvPr id="5" name="文本框 13">
             <a:extLst>
               <a:ext uri="{FF2B5EF4-FFF2-40B4-BE49-F238E27FC236}">
-                <a16:creationId xmlns:a16="http://schemas.microsoft.com/office/drawing/2014/main" id="{5D7ED9CC-C2E1-6889-94F9-D85D828C0E3C}"/>
+                <a16:creationId xmlns:a16="http://schemas.microsoft.com/office/drawing/2014/main" id="{B827C215-FDB3-41E0-0CA7-2E7CC9FDD2A8}"/>
               </a:ext>
             </a:extLst>
           </p:cNvPr>
@@ -6557,8 +5727,8 @@
         </p:nvSpPr>
         <p:spPr>
           <a:xfrm>
-            <a:off x="1850529" y="609243"/>
-            <a:ext cx="8676000" cy="8598048"/>
+            <a:off x="1914318" y="2230128"/>
+            <a:ext cx="8664568" cy="14835929"/>
           </a:xfrm>
           <a:prstGeom prst="rect">
             <a:avLst/>
@@ -6571,115 +5741,225 @@
           </a:bodyPr>
           <a:lstStyle/>
           <a:p>
-            <a:pPr marL="360000"/>
-            <a:r>
-              <a:rPr lang="en-US" altLang="zh-CN" dirty="0">
-                <a:solidFill>
-                  <a:srgbClr val="FF0000"/>
-                </a:solidFill>
-                <a:latin typeface="Helvetica Neue" panose="02000503000000020004" pitchFamily="2" charset="0"/>
-              </a:rPr>
-              <a:t>CI1 (Parameter Addition or Deletion) and CI4 (Parameter Default Value Change):</a:t>
-            </a:r>
-          </a:p>
-          <a:p>
-            <a:pPr marL="360000"/>
-            <a:r>
-              <a:rPr lang="en-US" altLang="zh-CN" dirty="0">
-                <a:solidFill>
-                  <a:srgbClr val="FF0000"/>
-                </a:solidFill>
-                <a:latin typeface="Helvetica Neue" panose="02000503000000020004" pitchFamily="2" charset="0"/>
-              </a:rPr>
-              <a:t>The difference occurs in the function signature parameters P1 and P2. Check Following situations:</a:t>
-            </a:r>
-          </a:p>
-          <a:p>
-            <a:pPr marL="360000"/>
-            <a:r>
-              <a:rPr lang="en-US" altLang="zh-CN" dirty="0">
-                <a:solidFill>
-                  <a:srgbClr val="FF0000"/>
-                </a:solidFill>
-                <a:latin typeface="Helvetica Neue" panose="02000503000000020004" pitchFamily="2" charset="0"/>
-              </a:rPr>
-              <a:t>    - A parameter `p` exists in P1 but not in P2, mark CI1.  </a:t>
-            </a:r>
-          </a:p>
-          <a:p>
-            <a:pPr marL="360000"/>
-            <a:r>
-              <a:rPr lang="en-US" altLang="zh-CN" dirty="0">
-                <a:solidFill>
-                  <a:srgbClr val="FF0000"/>
-                </a:solidFill>
-                <a:latin typeface="Helvetica Neue" panose="02000503000000020004" pitchFamily="2" charset="0"/>
-              </a:rPr>
-              <a:t>    - A parameter `p` exists in P2 but not in P1 and its type is `positional`, mark CI1.  </a:t>
-            </a:r>
-          </a:p>
-          <a:p>
-            <a:pPr marL="360000"/>
-            <a:r>
-              <a:rPr lang="en-US" altLang="zh-CN" dirty="0">
-                <a:solidFill>
-                  <a:srgbClr val="FF0000"/>
-                </a:solidFill>
-                <a:latin typeface="Helvetica Neue" panose="02000503000000020004" pitchFamily="2" charset="0"/>
-              </a:rPr>
-              <a:t>    - A parameter `p` exists in P2 but not in P1 and its type is `optional`, and the parameter at `</a:t>
-            </a:r>
-            <a:r>
-              <a:rPr lang="en-US" altLang="zh-CN" dirty="0" err="1">
-                <a:solidFill>
-                  <a:srgbClr val="FF0000"/>
-                </a:solidFill>
-                <a:latin typeface="Helvetica Neue" panose="02000503000000020004" pitchFamily="2" charset="0"/>
-              </a:rPr>
-              <a:t>position_index</a:t>
-            </a:r>
-            <a:r>
-              <a:rPr lang="en-US" altLang="zh-CN" dirty="0">
-                <a:solidFill>
-                  <a:srgbClr val="FF0000"/>
-                </a:solidFill>
-                <a:latin typeface="Helvetica Neue" panose="02000503000000020004" pitchFamily="2" charset="0"/>
-              </a:rPr>
-              <a:t> + 1` exists in P2, mark CI1.  </a:t>
-            </a:r>
-          </a:p>
-          <a:p>
-            <a:pPr marL="360000"/>
-            <a:r>
-              <a:rPr lang="en-US" altLang="zh-CN" dirty="0">
-                <a:solidFill>
-                  <a:srgbClr val="FF0000"/>
-                </a:solidFill>
-                <a:latin typeface="Helvetica Neue" panose="02000503000000020004" pitchFamily="2" charset="0"/>
-              </a:rPr>
-              <a:t>    - A parameter `p` exists both in P1 and P2(same name, can have different position index or different type </a:t>
-            </a:r>
-            <a:r>
-              <a:rPr lang="en-US" altLang="zh-CN" dirty="0" err="1">
-                <a:solidFill>
-                  <a:srgbClr val="FF0000"/>
-                </a:solidFill>
-                <a:latin typeface="Helvetica Neue" panose="02000503000000020004" pitchFamily="2" charset="0"/>
-              </a:rPr>
-              <a:t>nanotation</a:t>
-            </a:r>
-            <a:r>
-              <a:rPr lang="en-US" altLang="zh-CN" dirty="0">
-                <a:solidFill>
-                  <a:srgbClr val="FF0000"/>
-                </a:solidFill>
-                <a:latin typeface="Helvetica Neue" panose="02000503000000020004" pitchFamily="2" charset="0"/>
-              </a:rPr>
-              <a:t>) but the default values are different, mark CI4.</a:t>
-            </a:r>
-          </a:p>
-          <a:p>
-            <a:pPr marL="360000"/>
+            <a:r>
+              <a:rPr lang="en-GB" dirty="0"/>
+              <a:t>You are an expert Python developer with expertise in control-flow analysis. You will be provided with a Control Flow Graph (CFG) and identified source-sink paths of two Python API versions (</a:t>
+            </a:r>
+            <a:r>
+              <a:rPr lang="en-GB" dirty="0" err="1"/>
+              <a:t>API_b</a:t>
+            </a:r>
+            <a:r>
+              <a:rPr lang="en-GB" dirty="0"/>
+              <a:t> and </a:t>
+            </a:r>
+            <a:r>
+              <a:rPr lang="en-GB" dirty="0" err="1"/>
+              <a:t>API_a</a:t>
+            </a:r>
+            <a:r>
+              <a:rPr lang="en-GB" dirty="0"/>
+              <a:t>). Your task is to traverse the CFG paths and </a:t>
+            </a:r>
+            <a:r>
+              <a:rPr lang="en-GB" dirty="0" err="1"/>
+              <a:t>analyze</a:t>
+            </a:r>
+            <a:r>
+              <a:rPr lang="en-GB" dirty="0"/>
+              <a:t> the incompatibilities between the two versions. The Python API incompatibilities and the corresponding detection logic are illustrated as follows: </a:t>
+            </a:r>
+          </a:p>
+          <a:p>
+            <a:pPr marL="342900" indent="-342900">
+              <a:buAutoNum type="arabicPeriod"/>
+            </a:pPr>
+            <a:r>
+              <a:rPr lang="en-GB" b="1" dirty="0"/>
+              <a:t>Parameter Incompatibilities</a:t>
+            </a:r>
+          </a:p>
+          <a:p>
+            <a:r>
+              <a:rPr lang="en-GB" dirty="0"/>
+              <a:t>	Group the source–sink paths by parameter (source) name in the form &lt;</a:t>
+            </a:r>
+            <a:r>
+              <a:rPr lang="en-GB" dirty="0" err="1"/>
+              <a:t>source_name</a:t>
+            </a:r>
+            <a:r>
+              <a:rPr lang="en-GB" dirty="0"/>
+              <a:t>, source–sink paths&gt;. Then perform the following analyses: </a:t>
+            </a:r>
+            <a:r>
+              <a:rPr lang="en-GB" i="1" u="sng" dirty="0"/>
+              <a:t>(1) Default Parameter Value Change Analysis (CI4).</a:t>
+            </a:r>
+            <a:r>
+              <a:rPr lang="en-GB" i="1" dirty="0"/>
+              <a:t> </a:t>
+            </a:r>
+            <a:r>
+              <a:rPr lang="en-GB" dirty="0"/>
+              <a:t>Compare the parameter (source) names between </a:t>
+            </a:r>
+            <a:r>
+              <a:rPr lang="en-GB" dirty="0" err="1"/>
+              <a:t>API_b</a:t>
+            </a:r>
+            <a:r>
+              <a:rPr lang="en-GB" dirty="0"/>
+              <a:t> and </a:t>
+            </a:r>
+            <a:r>
+              <a:rPr lang="en-GB" dirty="0" err="1"/>
+              <a:t>API_a</a:t>
+            </a:r>
+            <a:r>
+              <a:rPr lang="en-GB" dirty="0"/>
+              <a:t>. For parameters that exist in both versions, identify a Parameter Default Value Change (CI4) if the parameter has the same name but different default values across the two versions. </a:t>
+            </a:r>
+            <a:r>
+              <a:rPr lang="en-GB" i="1" u="sng" dirty="0"/>
+              <a:t>(2) Parameter Addition, Deletion and Rename Analysis (CI1, CI3). </a:t>
+            </a:r>
+            <a:r>
+              <a:rPr lang="en-GB" dirty="0"/>
+              <a:t>Identify parameters that are added in </a:t>
+            </a:r>
+            <a:r>
+              <a:rPr lang="en-GB" dirty="0" err="1"/>
+              <a:t>API_a</a:t>
+            </a:r>
+            <a:r>
+              <a:rPr lang="en-GB" dirty="0"/>
+              <a:t> or deleted from </a:t>
+            </a:r>
+            <a:r>
+              <a:rPr lang="en-GB" dirty="0" err="1"/>
+              <a:t>API_b</a:t>
+            </a:r>
+            <a:r>
+              <a:rPr lang="en-GB" dirty="0"/>
+              <a:t>. For each added parameter in </a:t>
+            </a:r>
+            <a:r>
+              <a:rPr lang="en-GB" dirty="0" err="1"/>
+              <a:t>API_a</a:t>
+            </a:r>
+            <a:r>
+              <a:rPr lang="en-GB" dirty="0"/>
+              <a:t>, compare it against each deleted parameter from </a:t>
+            </a:r>
+            <a:r>
+              <a:rPr lang="en-GB" dirty="0" err="1"/>
+              <a:t>API_b</a:t>
+            </a:r>
+            <a:r>
+              <a:rPr lang="en-GB" dirty="0"/>
+              <a:t> by </a:t>
+            </a:r>
+            <a:r>
+              <a:rPr lang="en-GB" dirty="0" err="1"/>
+              <a:t>analyzing</a:t>
+            </a:r>
+            <a:r>
+              <a:rPr lang="en-GB" dirty="0"/>
+              <a:t> their corresponding source–sink paths: If the source–sink paths are semantically similar, identify the change as a Parameter Rename (CI3); If no semantically similar deleted parameter is found, classify the change as a Parameter Addition or Deletion (CI1). Two source–sink paths are considered </a:t>
+            </a:r>
+            <a:r>
+              <a:rPr lang="en-GB" dirty="0">
+                <a:solidFill>
+                  <a:srgbClr val="FF0000"/>
+                </a:solidFill>
+              </a:rPr>
+              <a:t>semantically similar if the parameter usages in the </a:t>
+            </a:r>
+            <a:r>
+              <a:rPr lang="en-GB" dirty="0"/>
+              <a:t>API implementation serve the same semantic role or affect the same execution </a:t>
+            </a:r>
+            <a:r>
+              <a:rPr lang="en-GB" dirty="0" err="1"/>
+              <a:t>behavior</a:t>
+            </a:r>
+            <a:r>
+              <a:rPr lang="en-GB" dirty="0"/>
+              <a:t>.</a:t>
+            </a:r>
+            <a:r>
+              <a:rPr lang="en-US" dirty="0"/>
+              <a:t> </a:t>
+            </a:r>
+            <a:r>
+              <a:rPr lang="en-US" altLang="zh-CN" i="1" u="sng" dirty="0"/>
+              <a:t>(3) </a:t>
+            </a:r>
+            <a:r>
+              <a:rPr lang="en-US" altLang="zh-CN" i="1" u="sng" dirty="0" err="1"/>
+              <a:t>Kwargs</a:t>
+            </a:r>
+            <a:r>
+              <a:rPr lang="en-US" altLang="zh-CN" i="1" u="sng" dirty="0"/>
+              <a:t> Key Addition, Deletion Analysis (CI2).</a:t>
+            </a:r>
+            <a:r>
+              <a:rPr lang="en-US" altLang="zh-CN" u="sng" dirty="0"/>
+              <a:t> </a:t>
+            </a:r>
+            <a:r>
+              <a:rPr lang="en-US" altLang="zh-CN" dirty="0"/>
+              <a:t>For parameters defined as </a:t>
+            </a:r>
+            <a:r>
+              <a:rPr lang="en-US" altLang="zh-CN" dirty="0" err="1"/>
+              <a:t>kwargs</a:t>
+            </a:r>
+            <a:r>
+              <a:rPr lang="en-US" altLang="zh-CN" dirty="0"/>
+              <a:t>, extract the keys accessed along their source–sink paths in both </a:t>
+            </a:r>
+            <a:r>
+              <a:rPr lang="en-US" altLang="zh-CN" dirty="0" err="1"/>
+              <a:t>API_b</a:t>
+            </a:r>
+            <a:r>
+              <a:rPr lang="en-US" altLang="zh-CN" dirty="0"/>
+              <a:t> and </a:t>
+            </a:r>
+            <a:r>
+              <a:rPr lang="en-US" altLang="zh-CN" dirty="0" err="1"/>
+              <a:t>API_a</a:t>
+            </a:r>
+            <a:r>
+              <a:rPr lang="en-US" altLang="zh-CN" dirty="0"/>
+              <a:t> (e.g., via </a:t>
+            </a:r>
+            <a:r>
+              <a:rPr lang="en-US" altLang="zh-CN" dirty="0" err="1"/>
+              <a:t>kwargs.get</a:t>
+            </a:r>
+            <a:r>
+              <a:rPr lang="en-US" altLang="zh-CN" dirty="0"/>
+              <a:t>(key) or </a:t>
+            </a:r>
+            <a:r>
+              <a:rPr lang="en-US" altLang="zh-CN" dirty="0" err="1"/>
+              <a:t>kwargs</a:t>
+            </a:r>
+            <a:r>
+              <a:rPr lang="en-US" altLang="zh-CN" dirty="0"/>
+              <a:t>[key]). If the sets of accessed keys differ between the two versions, identify the change as a </a:t>
+            </a:r>
+            <a:r>
+              <a:rPr lang="en-US" altLang="zh-CN" dirty="0" err="1"/>
+              <a:t>Kwargs</a:t>
+            </a:r>
+            <a:r>
+              <a:rPr lang="en-US" altLang="zh-CN" dirty="0"/>
+              <a:t> Key Addition/Deletion (CI2).</a:t>
+            </a:r>
             <a:endParaRPr lang="en-US" altLang="zh-CN" dirty="0">
               <a:solidFill>
                 <a:srgbClr val="FF0000"/>
@@ -6688,68 +5968,159 @@
             </a:endParaRPr>
           </a:p>
           <a:p>
-            <a:pPr marL="360000"/>
-            <a:r>
-              <a:rPr lang="en-US" altLang="zh-CN" dirty="0">
-                <a:solidFill>
-                  <a:srgbClr val="FF0000"/>
-                </a:solidFill>
-                <a:latin typeface="Helvetica Neue" panose="02000503000000020004" pitchFamily="2" charset="0"/>
-              </a:rPr>
-              <a:t>CI2 (Key of </a:t>
-            </a:r>
-            <a:r>
-              <a:rPr lang="en-US" altLang="zh-CN" dirty="0" err="1">
-                <a:solidFill>
-                  <a:srgbClr val="FF0000"/>
-                </a:solidFill>
-                <a:latin typeface="Helvetica Neue" panose="02000503000000020004" pitchFamily="2" charset="0"/>
-              </a:rPr>
-              <a:t>kwargs</a:t>
-            </a:r>
-            <a:r>
-              <a:rPr lang="en-US" altLang="zh-CN" dirty="0">
-                <a:solidFill>
-                  <a:srgbClr val="FF0000"/>
-                </a:solidFill>
-                <a:latin typeface="Helvetica Neue" panose="02000503000000020004" pitchFamily="2" charset="0"/>
-              </a:rPr>
-              <a:t> Addition or Deletion): </a:t>
-            </a:r>
-          </a:p>
-          <a:p>
-            <a:pPr marL="360000"/>
-            <a:r>
-              <a:rPr lang="en-US" altLang="zh-CN" dirty="0">
-                <a:solidFill>
-                  <a:srgbClr val="FF0000"/>
-                </a:solidFill>
-                <a:latin typeface="Helvetica Neue" panose="02000503000000020004" pitchFamily="2" charset="0"/>
-              </a:rPr>
-              <a:t>KWARGS is NOT empty (both P1 and P2 have `**</a:t>
-            </a:r>
-            <a:r>
-              <a:rPr lang="en-US" altLang="zh-CN" dirty="0" err="1">
-                <a:solidFill>
-                  <a:srgbClr val="FF0000"/>
-                </a:solidFill>
-                <a:latin typeface="Helvetica Neue" panose="02000503000000020004" pitchFamily="2" charset="0"/>
-              </a:rPr>
-              <a:t>kwargs</a:t>
-            </a:r>
-            <a:r>
-              <a:rPr lang="en-US" altLang="zh-CN" dirty="0">
-                <a:solidFill>
-                  <a:srgbClr val="FF0000"/>
-                </a:solidFill>
-                <a:latin typeface="Helvetica Neue" panose="02000503000000020004" pitchFamily="2" charset="0"/>
-              </a:rPr>
-              <a:t>`) and keys of PU_kwargs1 and PU_kwargs1 are different, mark as CI2</a:t>
-            </a:r>
-          </a:p>
-          <a:p>
-            <a:pPr marL="360000"/>
-            <a:endParaRPr lang="en-US" altLang="zh-CN" dirty="0">
+            <a:r>
+              <a:rPr lang="en-US" altLang="zh-CN" b="1" dirty="0"/>
+              <a:t>2. Exceptions </a:t>
+            </a:r>
+            <a:r>
+              <a:rPr lang="en-GB" b="1" dirty="0"/>
+              <a:t>Incompatibilities</a:t>
+            </a:r>
+            <a:endParaRPr lang="en-US" altLang="zh-CN" b="1" dirty="0"/>
+          </a:p>
+          <a:p>
+            <a:r>
+              <a:rPr lang="en-GB" dirty="0"/>
+              <a:t>	Select the source–sink paths whose </a:t>
+            </a:r>
+            <a:r>
+              <a:rPr lang="en-GB" dirty="0" err="1"/>
+              <a:t>sink_type</a:t>
+            </a:r>
+            <a:r>
+              <a:rPr lang="en-GB" dirty="0"/>
+              <a:t> is raise, and group them by exception (sink) name in the form &lt;</a:t>
+            </a:r>
+            <a:r>
+              <a:rPr lang="en-GB" dirty="0" err="1"/>
+              <a:t>sink_name</a:t>
+            </a:r>
+            <a:r>
+              <a:rPr lang="en-GB" dirty="0"/>
+              <a:t>, source–sink paths&gt;. Then perform the following analyses: </a:t>
+            </a:r>
+            <a:r>
+              <a:rPr lang="en-GB" i="1" u="sng" dirty="0"/>
+              <a:t>(1) Exception Addition or Deletion (CI6). </a:t>
+            </a:r>
+            <a:r>
+              <a:rPr lang="en-GB" dirty="0"/>
+              <a:t>Compare the exception (sink) names between </a:t>
+            </a:r>
+            <a:r>
+              <a:rPr lang="en-GB" dirty="0" err="1"/>
+              <a:t>API_b</a:t>
+            </a:r>
+            <a:r>
+              <a:rPr lang="en-GB" dirty="0"/>
+              <a:t> and </a:t>
+            </a:r>
+            <a:r>
+              <a:rPr lang="en-GB" dirty="0" err="1"/>
+              <a:t>API_a</a:t>
+            </a:r>
+            <a:r>
+              <a:rPr lang="en-GB" dirty="0"/>
+              <a:t>. If an exception name appears in one version but has no corresponding exception with the same name in the other version, identify the change as an Exception Change (CI6) (addition or deletion). </a:t>
+            </a:r>
+            <a:r>
+              <a:rPr lang="en-GB" i="1" u="sng" dirty="0"/>
+              <a:t>(2) Parameter Boundary Range Change (CI5). </a:t>
+            </a:r>
+            <a:r>
+              <a:rPr lang="en-GB" dirty="0"/>
+              <a:t>For exception names that appear in both </a:t>
+            </a:r>
+            <a:r>
+              <a:rPr lang="en-GB" dirty="0" err="1"/>
+              <a:t>API_b</a:t>
+            </a:r>
+            <a:r>
+              <a:rPr lang="en-GB" dirty="0"/>
+              <a:t> and </a:t>
+            </a:r>
+            <a:r>
+              <a:rPr lang="en-GB" dirty="0" err="1"/>
+              <a:t>API_a</a:t>
+            </a:r>
+            <a:r>
+              <a:rPr lang="en-GB" dirty="0"/>
+              <a:t>, compare their corresponding source–sink paths. Extract the control-flow conditions under which the exception is raised (e.g., conditional expressions guarding the raise statement). If the exception is raised </a:t>
+            </a:r>
+            <a:r>
+              <a:rPr lang="en-GB" dirty="0">
+                <a:solidFill>
+                  <a:srgbClr val="FF0000"/>
+                </a:solidFill>
+              </a:rPr>
+              <a:t>under different variable conditions </a:t>
+            </a:r>
+            <a:r>
+              <a:rPr lang="en-GB" dirty="0"/>
+              <a:t>or parameter value ranges between the two versions, report the change as a Parameter Range Change for Exception (CI5).</a:t>
+            </a:r>
+          </a:p>
+          <a:p>
+            <a:r>
+              <a:rPr lang="en-GB" b="1" dirty="0"/>
+              <a:t>3. Global Variable Incompatibilities</a:t>
+            </a:r>
+          </a:p>
+          <a:p>
+            <a:r>
+              <a:rPr lang="en-GB" altLang="zh-CN" dirty="0">
+                <a:solidFill>
+                  <a:srgbClr val="FF0000"/>
+                </a:solidFill>
+                <a:latin typeface="Helvetica Neue" panose="02000503000000020004" pitchFamily="2" charset="0"/>
+              </a:rPr>
+              <a:t>	</a:t>
+            </a:r>
+            <a:r>
+              <a:rPr lang="en-GB" dirty="0"/>
+              <a:t>Select the source–sink paths whose </a:t>
+            </a:r>
+            <a:r>
+              <a:rPr lang="en-GB" dirty="0" err="1"/>
+              <a:t>sink_type</a:t>
+            </a:r>
+            <a:r>
+              <a:rPr lang="en-GB" dirty="0"/>
+              <a:t> is </a:t>
+            </a:r>
+            <a:r>
+              <a:rPr lang="en-GB" dirty="0" err="1"/>
+              <a:t>global_var_assign</a:t>
+            </a:r>
+            <a:r>
+              <a:rPr lang="en-GB" dirty="0"/>
+              <a:t>, and group them by global variable (sink) name in the form &lt;</a:t>
+            </a:r>
+            <a:r>
+              <a:rPr lang="en-GB" dirty="0" err="1"/>
+              <a:t>sink_name</a:t>
+            </a:r>
+            <a:r>
+              <a:rPr lang="en-GB" dirty="0"/>
+              <a:t>, source–sink paths&gt;. Then, for global variables that appear in both </a:t>
+            </a:r>
+            <a:r>
+              <a:rPr lang="en-GB" dirty="0" err="1"/>
+              <a:t>API_b</a:t>
+            </a:r>
+            <a:r>
+              <a:rPr lang="en-GB" dirty="0"/>
+              <a:t> and </a:t>
+            </a:r>
+            <a:r>
+              <a:rPr lang="en-GB" dirty="0" err="1"/>
+              <a:t>API_a</a:t>
+            </a:r>
+            <a:r>
+              <a:rPr lang="en-GB" dirty="0"/>
+              <a:t>, compare their corresponding source–sink paths. Extract the control-flow conditions under which the global variable is assigned (e.g., guarding predicates or value constraints). If the global variable is assigned under different variable conditions or parameter value ranges between the two versions, report the change as a Global Variable Value Change (CI8).</a:t>
+            </a:r>
+            <a:endParaRPr lang="en-GB" altLang="zh-CN" dirty="0">
               <a:solidFill>
                 <a:srgbClr val="FF0000"/>
               </a:solidFill>
@@ -6757,6 +6128,208 @@
             </a:endParaRPr>
           </a:p>
           <a:p>
+            <a:r>
+              <a:rPr lang="en-US" altLang="zh-CN" b="1" dirty="0"/>
+              <a:t>4. Return Incompatibilities</a:t>
+            </a:r>
+          </a:p>
+          <a:p>
+            <a:r>
+              <a:rPr lang="en-US" altLang="zh-CN" dirty="0">
+                <a:latin typeface="Helvetica Neue" panose="02000503000000020004" pitchFamily="2" charset="0"/>
+              </a:rPr>
+              <a:t>	</a:t>
+            </a:r>
+            <a:r>
+              <a:rPr lang="en-GB" dirty="0"/>
+              <a:t> Select the source–sink paths whose </a:t>
+            </a:r>
+            <a:r>
+              <a:rPr lang="en-GB" dirty="0" err="1"/>
+              <a:t>sink_type</a:t>
+            </a:r>
+            <a:r>
+              <a:rPr lang="en-GB" dirty="0"/>
+              <a:t> is </a:t>
+            </a:r>
+            <a:r>
+              <a:rPr lang="en-GB" dirty="0" err="1"/>
+              <a:t>exit_pred</a:t>
+            </a:r>
+            <a:r>
+              <a:rPr lang="en-GB" dirty="0"/>
+              <a:t>. First, compare the number of predecessors (i.e., extracted &lt;predecessor, source–sink paths&gt; pairs) between </a:t>
+            </a:r>
+            <a:r>
+              <a:rPr lang="en-GB" dirty="0" err="1"/>
+              <a:t>API_b</a:t>
+            </a:r>
+            <a:r>
+              <a:rPr lang="en-GB" dirty="0"/>
+              <a:t> and </a:t>
+            </a:r>
+            <a:r>
+              <a:rPr lang="en-GB" dirty="0" err="1"/>
+              <a:t>API_a</a:t>
+            </a:r>
+            <a:r>
+              <a:rPr lang="en-GB" dirty="0"/>
+              <a:t>. Then perform predecessor mapping across versions. For each &lt;predecessor, source–sink paths&gt; pair in </a:t>
+            </a:r>
+            <a:r>
+              <a:rPr lang="en-GB" dirty="0" err="1"/>
+              <a:t>API_b</a:t>
+            </a:r>
+            <a:r>
+              <a:rPr lang="en-GB" dirty="0"/>
+              <a:t> and </a:t>
+            </a:r>
+            <a:r>
+              <a:rPr lang="en-GB" dirty="0" err="1"/>
+              <a:t>API_a</a:t>
+            </a:r>
+            <a:r>
+              <a:rPr lang="en-GB" dirty="0"/>
+              <a:t>, identify corresponding predecessors across the two versions by matching them based on the semantic similarity of their source–sink paths. Identify predecessors that cannot be mapped between </a:t>
+            </a:r>
+            <a:r>
+              <a:rPr lang="en-GB" dirty="0" err="1"/>
+              <a:t>API_b</a:t>
+            </a:r>
+            <a:r>
+              <a:rPr lang="en-GB" dirty="0"/>
+              <a:t> and </a:t>
+            </a:r>
+            <a:r>
+              <a:rPr lang="en-GB" dirty="0" err="1"/>
+              <a:t>API_a</a:t>
+            </a:r>
+            <a:r>
+              <a:rPr lang="en-GB" dirty="0"/>
+              <a:t>. If a new predecessor type appears in either version, report the change as a Return Type Change. For each mapped predecessor pair, compare their corresponding source–sink paths. If the return conditions</a:t>
+            </a:r>
+            <a:r>
+              <a:rPr lang="en-GB" dirty="0">
+                <a:solidFill>
+                  <a:srgbClr val="FF0000"/>
+                </a:solidFill>
+              </a:rPr>
+              <a:t>, value constraints, or controlling predicates differ between the two versions, r</a:t>
+            </a:r>
+            <a:r>
+              <a:rPr lang="en-GB" dirty="0"/>
+              <a:t>eport the change as a Return Value Change (CI7).</a:t>
+            </a:r>
+          </a:p>
+          <a:p>
+            <a:endParaRPr lang="en-GB" dirty="0"/>
+          </a:p>
+        </p:txBody>
+      </p:sp>
+      <p:sp>
+        <p:nvSpPr>
+          <p:cNvPr id="6" name="TextBox 5">
+            <a:extLst>
+              <a:ext uri="{FF2B5EF4-FFF2-40B4-BE49-F238E27FC236}">
+                <a16:creationId xmlns:a16="http://schemas.microsoft.com/office/drawing/2014/main" id="{C0B529B1-5768-6B67-563A-6AD9792D6252}"/>
+              </a:ext>
+            </a:extLst>
+          </p:cNvPr>
+          <p:cNvSpPr txBox="1"/>
+          <p:nvPr/>
+        </p:nvSpPr>
+        <p:spPr>
+          <a:xfrm>
+            <a:off x="12477750" y="4426543"/>
+            <a:ext cx="8172450" cy="1477328"/>
+          </a:xfrm>
+          <a:prstGeom prst="rect">
+            <a:avLst/>
+          </a:prstGeom>
+          <a:noFill/>
+        </p:spPr>
+        <p:txBody>
+          <a:bodyPr wrap="square" rtlCol="0">
+            <a:spAutoFit/>
+          </a:bodyPr>
+          <a:lstStyle/>
+          <a:p>
+            <a:r>
+              <a:rPr lang="en-US" altLang="zh-CN" dirty="0">
+                <a:solidFill>
+                  <a:srgbClr val="FF0000"/>
+                </a:solidFill>
+                <a:latin typeface="Helvetica Neue" panose="02000503000000020004" pitchFamily="2" charset="0"/>
+              </a:rPr>
+              <a:t>A parameter `p` exists in P2 but not in P1 and its type is `positional`, mark CI1.  A parameter `p` exists in P2 but not in P1 and its type is `optional`, and the parameter at `</a:t>
+            </a:r>
+            <a:r>
+              <a:rPr lang="en-US" altLang="zh-CN" dirty="0" err="1">
+                <a:solidFill>
+                  <a:srgbClr val="FF0000"/>
+                </a:solidFill>
+                <a:latin typeface="Helvetica Neue" panose="02000503000000020004" pitchFamily="2" charset="0"/>
+              </a:rPr>
+              <a:t>position_index</a:t>
+            </a:r>
+            <a:r>
+              <a:rPr lang="en-US" altLang="zh-CN" dirty="0">
+                <a:solidFill>
+                  <a:srgbClr val="FF0000"/>
+                </a:solidFill>
+                <a:latin typeface="Helvetica Neue" panose="02000503000000020004" pitchFamily="2" charset="0"/>
+              </a:rPr>
+              <a:t> + 1` exists in P2, mark CI1.  A parameter `p` exists both in P1 and P2(same name, can have different position index or different type </a:t>
+            </a:r>
+            <a:r>
+              <a:rPr lang="en-US" altLang="zh-CN" dirty="0" err="1">
+                <a:solidFill>
+                  <a:srgbClr val="FF0000"/>
+                </a:solidFill>
+                <a:latin typeface="Helvetica Neue" panose="02000503000000020004" pitchFamily="2" charset="0"/>
+              </a:rPr>
+              <a:t>nanotation</a:t>
+            </a:r>
+            <a:r>
+              <a:rPr lang="en-US" altLang="zh-CN" dirty="0">
+                <a:solidFill>
+                  <a:srgbClr val="FF0000"/>
+                </a:solidFill>
+                <a:latin typeface="Helvetica Neue" panose="02000503000000020004" pitchFamily="2" charset="0"/>
+              </a:rPr>
+              <a:t>) but the default values are different, mark CI4.</a:t>
+            </a:r>
+          </a:p>
+        </p:txBody>
+      </p:sp>
+      <p:sp>
+        <p:nvSpPr>
+          <p:cNvPr id="7" name="TextBox 6">
+            <a:extLst>
+              <a:ext uri="{FF2B5EF4-FFF2-40B4-BE49-F238E27FC236}">
+                <a16:creationId xmlns:a16="http://schemas.microsoft.com/office/drawing/2014/main" id="{FC2694D8-3AD7-62F4-708C-DBAC22C5B6A7}"/>
+              </a:ext>
+            </a:extLst>
+          </p:cNvPr>
+          <p:cNvSpPr txBox="1"/>
+          <p:nvPr/>
+        </p:nvSpPr>
+        <p:spPr>
+          <a:xfrm>
+            <a:off x="12477750" y="11255389"/>
+            <a:ext cx="6912244" cy="2862322"/>
+          </a:xfrm>
+          <a:prstGeom prst="rect">
+            <a:avLst/>
+          </a:prstGeom>
+          <a:noFill/>
+        </p:spPr>
+        <p:txBody>
+          <a:bodyPr wrap="square" rtlCol="0">
+            <a:spAutoFit/>
+          </a:bodyPr>
+          <a:lstStyle/>
+          <a:p>
             <a:pPr marL="360000"/>
             <a:r>
               <a:rPr lang="en-US" altLang="zh-CN" dirty="0">
@@ -6765,7 +6338,7 @@
                 </a:solidFill>
                 <a:latin typeface="Helvetica Neue" panose="02000503000000020004" pitchFamily="2" charset="0"/>
               </a:rPr>
-              <a:t>2. **CI3 (Parameter Rename)**: </a:t>
+              <a:t>3. **CI5 (Parameter Range Change for exception)**:</a:t>
             </a:r>
           </a:p>
           <a:p>
@@ -6777,7 +6350,7 @@
                 </a:solidFill>
                 <a:latin typeface="Helvetica Neue" panose="02000503000000020004" pitchFamily="2" charset="0"/>
               </a:rPr>
-              <a:t>The assignments to p1 and p2 are identical and most usages are </a:t>
+              <a:t>. If </a:t>
             </a:r>
             <a:r>
               <a:rPr lang="en-US" altLang="zh-CN" dirty="0" err="1">
@@ -6786,23 +6359,29 @@
                 </a:solidFill>
                 <a:latin typeface="Helvetica Neue" panose="02000503000000020004" pitchFamily="2" charset="0"/>
               </a:rPr>
-              <a:t>indentical</a:t>
-            </a:r>
-            <a:endParaRPr lang="en-US" altLang="zh-CN" dirty="0">
-              <a:solidFill>
-                <a:srgbClr val="FF0000"/>
-              </a:solidFill>
-              <a:latin typeface="Helvetica Neue" panose="02000503000000020004" pitchFamily="2" charset="0"/>
-            </a:endParaRPr>
+              <a:t>identifing</a:t>
+            </a:r>
+            <a:r>
+              <a:rPr lang="en-US" altLang="zh-CN" dirty="0">
+                <a:solidFill>
+                  <a:srgbClr val="FF0000"/>
+                </a:solidFill>
+                <a:latin typeface="Helvetica Neue" panose="02000503000000020004" pitchFamily="2" charset="0"/>
+              </a:rPr>
+              <a:t> following situation, mark CI5:</a:t>
+            </a:r>
           </a:p>
           <a:p>
             <a:pPr marL="360000"/>
-            <a:endParaRPr lang="en-US" altLang="zh-CN" dirty="0">
-              <a:solidFill>
-                <a:srgbClr val="FF0000"/>
-              </a:solidFill>
-              <a:latin typeface="Helvetica Neue" panose="02000503000000020004" pitchFamily="2" charset="0"/>
-            </a:endParaRPr>
+            <a:r>
+              <a:rPr lang="en-US" altLang="zh-CN" dirty="0">
+                <a:solidFill>
+                  <a:srgbClr val="FF0000"/>
+                </a:solidFill>
+                <a:latin typeface="Helvetica Neue" panose="02000503000000020004" pitchFamily="2" charset="0"/>
+              </a:rPr>
+              <a:t>    - For exception nodes in E1 and E2:</a:t>
+            </a:r>
           </a:p>
           <a:p>
             <a:pPr marL="360000"/>
@@ -6813,7 +6392,7 @@
                 </a:solidFill>
                 <a:latin typeface="Helvetica Neue" panose="02000503000000020004" pitchFamily="2" charset="0"/>
               </a:rPr>
-              <a:t>3. **CI5 (Parameter Range Change for exception)**:</a:t>
+              <a:t>    1. nodes amounts are different and the added/deleted exception `e` is associated with condition `c` which contains a parameter `p` (`p` must in condition description of `c`).</a:t>
             </a:r>
           </a:p>
           <a:p>
@@ -6825,79 +6404,7 @@
                 </a:solidFill>
                 <a:latin typeface="Helvetica Neue" panose="02000503000000020004" pitchFamily="2" charset="0"/>
               </a:rPr>
-              <a:t>CI5 denotes compatibility issues caused by changes of exception conditions which includes any parameter in parameter list. If </a:t>
-            </a:r>
-            <a:r>
-              <a:rPr lang="en-US" altLang="zh-CN" dirty="0" err="1">
-                <a:solidFill>
-                  <a:srgbClr val="FF0000"/>
-                </a:solidFill>
-                <a:latin typeface="Helvetica Neue" panose="02000503000000020004" pitchFamily="2" charset="0"/>
-              </a:rPr>
-              <a:t>identifing</a:t>
-            </a:r>
-            <a:r>
-              <a:rPr lang="en-US" altLang="zh-CN" dirty="0">
-                <a:solidFill>
-                  <a:srgbClr val="FF0000"/>
-                </a:solidFill>
-                <a:latin typeface="Helvetica Neue" panose="02000503000000020004" pitchFamily="2" charset="0"/>
-              </a:rPr>
-              <a:t> following situation, mark CI5:</a:t>
-            </a:r>
-          </a:p>
-          <a:p>
-            <a:pPr marL="360000"/>
-            <a:r>
-              <a:rPr lang="en-US" altLang="zh-CN" dirty="0">
-                <a:solidFill>
-                  <a:srgbClr val="FF0000"/>
-                </a:solidFill>
-                <a:latin typeface="Helvetica Neue" panose="02000503000000020004" pitchFamily="2" charset="0"/>
-              </a:rPr>
-              <a:t>    - For exception nodes in E1 and E2:</a:t>
-            </a:r>
-          </a:p>
-          <a:p>
-            <a:pPr marL="360000"/>
-            <a:r>
-              <a:rPr lang="en-US" altLang="zh-CN" dirty="0">
-                <a:solidFill>
-                  <a:srgbClr val="FF0000"/>
-                </a:solidFill>
-                <a:latin typeface="Helvetica Neue" panose="02000503000000020004" pitchFamily="2" charset="0"/>
-              </a:rPr>
-              <a:t>    1. nodes amounts are different and the added/deleted exception `e` is associated with condition `c` which contains a parameter `p` (`p` must in condition description of `c`).</a:t>
-            </a:r>
-          </a:p>
-          <a:p>
-            <a:pPr marL="360000"/>
-            <a:r>
-              <a:rPr lang="en-US" altLang="zh-CN" dirty="0">
-                <a:solidFill>
-                  <a:srgbClr val="FF0000"/>
-                </a:solidFill>
-                <a:latin typeface="Helvetica Neue" panose="02000503000000020004" pitchFamily="2" charset="0"/>
-              </a:rPr>
-              <a:t>    2. Or for any pair of exception (`e1` in E1 and `e2` in E2): </a:t>
-            </a:r>
-            <a:r>
-              <a:rPr lang="en-US" altLang="zh-CN" dirty="0" err="1">
-                <a:solidFill>
-                  <a:srgbClr val="FF0000"/>
-                </a:solidFill>
-                <a:latin typeface="Helvetica Neue" panose="02000503000000020004" pitchFamily="2" charset="0"/>
-              </a:rPr>
-              <a:t>backtrace</a:t>
-            </a:r>
-            <a:r>
-              <a:rPr lang="en-US" altLang="zh-CN" dirty="0">
-                <a:solidFill>
-                  <a:srgbClr val="FF0000"/>
-                </a:solidFill>
-                <a:latin typeface="Helvetica Neue" panose="02000503000000020004" pitchFamily="2" charset="0"/>
-              </a:rPr>
-              <a:t> the condition c1 for e1 and c2 for e2 through CFG. If both condition contain a parameter `p` but have different range criteria for `p`.</a:t>
+              <a:t>    2. Or for any pair of exception (`e1` in E1 and `e2` in E2): backtrace the condition c1 for e1 and c2 for e2 through CFG. If both condition contain a parameter `p` but have different range criteria for `p`.</a:t>
             </a:r>
           </a:p>
         </p:txBody>
@@ -6946,7 +6453,7 @@
         </p:nvSpPr>
         <p:spPr>
           <a:xfrm>
-            <a:off x="1850529" y="239911"/>
+            <a:off x="1850529" y="2040137"/>
             <a:ext cx="8676000" cy="7816069"/>
           </a:xfrm>
           <a:prstGeom prst="roundRect">
@@ -7003,7 +6510,7 @@
         </p:nvSpPr>
         <p:spPr>
           <a:xfrm>
-            <a:off x="1850527" y="205270"/>
+            <a:off x="1850527" y="2005495"/>
             <a:ext cx="1616234" cy="369332"/>
           </a:xfrm>
           <a:prstGeom prst="rect">
@@ -7052,7 +6559,7 @@
         </p:nvSpPr>
         <p:spPr>
           <a:xfrm>
-            <a:off x="1991993" y="1246768"/>
+            <a:off x="1991994" y="3046993"/>
             <a:ext cx="5321499" cy="369332"/>
           </a:xfrm>
           <a:prstGeom prst="rect">
@@ -7101,7 +6608,7 @@
         </p:nvSpPr>
         <p:spPr>
           <a:xfrm>
-            <a:off x="1839097" y="229629"/>
+            <a:off x="1839097" y="2029855"/>
             <a:ext cx="8676000" cy="309393"/>
           </a:xfrm>
           <a:prstGeom prst="roundRect">
@@ -7165,7 +6672,7 @@
         </p:nvSpPr>
         <p:spPr>
           <a:xfrm>
-            <a:off x="1850527" y="598961"/>
+            <a:off x="1850527" y="2399187"/>
             <a:ext cx="8676000" cy="7457019"/>
           </a:xfrm>
           <a:prstGeom prst="rect">
@@ -7834,7 +7341,7 @@
         </p:nvSpPr>
         <p:spPr>
           <a:xfrm>
-            <a:off x="1850529" y="239911"/>
+            <a:off x="1850529" y="2040137"/>
             <a:ext cx="8676000" cy="7816069"/>
           </a:xfrm>
           <a:prstGeom prst="roundRect">
@@ -7891,7 +7398,7 @@
         </p:nvSpPr>
         <p:spPr>
           <a:xfrm>
-            <a:off x="1850527" y="205270"/>
+            <a:off x="1850527" y="2005495"/>
             <a:ext cx="1616234" cy="369332"/>
           </a:xfrm>
           <a:prstGeom prst="rect">
@@ -7940,7 +7447,7 @@
         </p:nvSpPr>
         <p:spPr>
           <a:xfrm>
-            <a:off x="1991993" y="1246768"/>
+            <a:off x="1991994" y="3046993"/>
             <a:ext cx="5321499" cy="369332"/>
           </a:xfrm>
           <a:prstGeom prst="rect">
@@ -7989,7 +7496,7 @@
         </p:nvSpPr>
         <p:spPr>
           <a:xfrm>
-            <a:off x="1839097" y="229629"/>
+            <a:off x="1839097" y="2029855"/>
             <a:ext cx="8676000" cy="309393"/>
           </a:xfrm>
           <a:prstGeom prst="roundRect">
@@ -8053,7 +7560,7 @@
         </p:nvSpPr>
         <p:spPr>
           <a:xfrm>
-            <a:off x="1850527" y="598961"/>
+            <a:off x="1850527" y="2399187"/>
             <a:ext cx="8676000" cy="7457019"/>
           </a:xfrm>
           <a:prstGeom prst="rect">
@@ -8722,7 +8229,7 @@
         </p:nvSpPr>
         <p:spPr>
           <a:xfrm>
-            <a:off x="1850529" y="239911"/>
+            <a:off x="1850529" y="2040137"/>
             <a:ext cx="8676000" cy="7816069"/>
           </a:xfrm>
           <a:prstGeom prst="roundRect">
@@ -8779,7 +8286,7 @@
         </p:nvSpPr>
         <p:spPr>
           <a:xfrm>
-            <a:off x="1850527" y="205270"/>
+            <a:off x="1850527" y="2005495"/>
             <a:ext cx="1616234" cy="369332"/>
           </a:xfrm>
           <a:prstGeom prst="rect">
@@ -8828,7 +8335,7 @@
         </p:nvSpPr>
         <p:spPr>
           <a:xfrm>
-            <a:off x="1991993" y="1246768"/>
+            <a:off x="1991994" y="3046993"/>
             <a:ext cx="5321499" cy="369332"/>
           </a:xfrm>
           <a:prstGeom prst="rect">
@@ -8877,7 +8384,7 @@
         </p:nvSpPr>
         <p:spPr>
           <a:xfrm>
-            <a:off x="1839097" y="229629"/>
+            <a:off x="1839097" y="2029855"/>
             <a:ext cx="8676000" cy="309393"/>
           </a:xfrm>
           <a:prstGeom prst="roundRect">
@@ -8941,7 +8448,7 @@
         </p:nvSpPr>
         <p:spPr>
           <a:xfrm>
-            <a:off x="1850527" y="598961"/>
+            <a:off x="1850527" y="2399187"/>
             <a:ext cx="8676000" cy="7457019"/>
           </a:xfrm>
           <a:prstGeom prst="rect">

--- a/update/compatibility/fig/prompt.pptx
+++ b/update/compatibility/fig/prompt.pptx
@@ -203,7 +203,7 @@
           <a:p>
             <a:fld id="{2A4973AF-1E6D-4746-8FA3-3206D360D595}" type="datetimeFigureOut">
               <a:rPr lang="en-CN" smtClean="0"/>
-              <a:t>2026/1/4</a:t>
+              <a:t>01/05/2026</a:t>
             </a:fld>
             <a:endParaRPr lang="en-CN"/>
           </a:p>
@@ -1456,7 +1456,7 @@
           <a:p>
             <a:fld id="{F89A057A-0BEA-48B2-A216-D46DB2C83327}" type="datetimeFigureOut">
               <a:rPr lang="zh-CN" altLang="en-US" smtClean="0"/>
-              <a:t>2026/1/4</a:t>
+              <a:t>2026/1/5</a:t>
             </a:fld>
             <a:endParaRPr lang="zh-CN" altLang="en-US"/>
           </a:p>
@@ -1626,7 +1626,7 @@
           <a:p>
             <a:fld id="{F89A057A-0BEA-48B2-A216-D46DB2C83327}" type="datetimeFigureOut">
               <a:rPr lang="zh-CN" altLang="en-US" smtClean="0"/>
-              <a:t>2026/1/4</a:t>
+              <a:t>2026/1/5</a:t>
             </a:fld>
             <a:endParaRPr lang="zh-CN" altLang="en-US"/>
           </a:p>
@@ -1806,7 +1806,7 @@
           <a:p>
             <a:fld id="{F89A057A-0BEA-48B2-A216-D46DB2C83327}" type="datetimeFigureOut">
               <a:rPr lang="zh-CN" altLang="en-US" smtClean="0"/>
-              <a:t>2026/1/4</a:t>
+              <a:t>2026/1/5</a:t>
             </a:fld>
             <a:endParaRPr lang="zh-CN" altLang="en-US"/>
           </a:p>
@@ -1976,7 +1976,7 @@
           <a:p>
             <a:fld id="{F89A057A-0BEA-48B2-A216-D46DB2C83327}" type="datetimeFigureOut">
               <a:rPr lang="zh-CN" altLang="en-US" smtClean="0"/>
-              <a:t>2026/1/4</a:t>
+              <a:t>2026/1/5</a:t>
             </a:fld>
             <a:endParaRPr lang="zh-CN" altLang="en-US"/>
           </a:p>
@@ -2220,7 +2220,7 @@
           <a:p>
             <a:fld id="{F89A057A-0BEA-48B2-A216-D46DB2C83327}" type="datetimeFigureOut">
               <a:rPr lang="zh-CN" altLang="en-US" smtClean="0"/>
-              <a:t>2026/1/4</a:t>
+              <a:t>2026/1/5</a:t>
             </a:fld>
             <a:endParaRPr lang="zh-CN" altLang="en-US"/>
           </a:p>
@@ -2452,7 +2452,7 @@
           <a:p>
             <a:fld id="{F89A057A-0BEA-48B2-A216-D46DB2C83327}" type="datetimeFigureOut">
               <a:rPr lang="zh-CN" altLang="en-US" smtClean="0"/>
-              <a:t>2026/1/4</a:t>
+              <a:t>2026/1/5</a:t>
             </a:fld>
             <a:endParaRPr lang="zh-CN" altLang="en-US"/>
           </a:p>
@@ -2819,7 +2819,7 @@
           <a:p>
             <a:fld id="{F89A057A-0BEA-48B2-A216-D46DB2C83327}" type="datetimeFigureOut">
               <a:rPr lang="zh-CN" altLang="en-US" smtClean="0"/>
-              <a:t>2026/1/4</a:t>
+              <a:t>2026/1/5</a:t>
             </a:fld>
             <a:endParaRPr lang="zh-CN" altLang="en-US"/>
           </a:p>
@@ -2937,7 +2937,7 @@
           <a:p>
             <a:fld id="{F89A057A-0BEA-48B2-A216-D46DB2C83327}" type="datetimeFigureOut">
               <a:rPr lang="zh-CN" altLang="en-US" smtClean="0"/>
-              <a:t>2026/1/4</a:t>
+              <a:t>2026/1/5</a:t>
             </a:fld>
             <a:endParaRPr lang="zh-CN" altLang="en-US"/>
           </a:p>
@@ -3032,7 +3032,7 @@
           <a:p>
             <a:fld id="{F89A057A-0BEA-48B2-A216-D46DB2C83327}" type="datetimeFigureOut">
               <a:rPr lang="zh-CN" altLang="en-US" smtClean="0"/>
-              <a:t>2026/1/4</a:t>
+              <a:t>2026/1/5</a:t>
             </a:fld>
             <a:endParaRPr lang="zh-CN" altLang="en-US"/>
           </a:p>
@@ -3309,7 +3309,7 @@
           <a:p>
             <a:fld id="{F89A057A-0BEA-48B2-A216-D46DB2C83327}" type="datetimeFigureOut">
               <a:rPr lang="zh-CN" altLang="en-US" smtClean="0"/>
-              <a:t>2026/1/4</a:t>
+              <a:t>2026/1/5</a:t>
             </a:fld>
             <a:endParaRPr lang="zh-CN" altLang="en-US"/>
           </a:p>
@@ -3566,7 +3566,7 @@
           <a:p>
             <a:fld id="{F89A057A-0BEA-48B2-A216-D46DB2C83327}" type="datetimeFigureOut">
               <a:rPr lang="zh-CN" altLang="en-US" smtClean="0"/>
-              <a:t>2026/1/4</a:t>
+              <a:t>2026/1/5</a:t>
             </a:fld>
             <a:endParaRPr lang="zh-CN" altLang="en-US"/>
           </a:p>
@@ -3779,7 +3779,7 @@
           <a:p>
             <a:fld id="{F89A057A-0BEA-48B2-A216-D46DB2C83327}" type="datetimeFigureOut">
               <a:rPr lang="zh-CN" altLang="en-US" smtClean="0"/>
-              <a:t>2026/1/4</a:t>
+              <a:t>2026/1/5</a:t>
             </a:fld>
             <a:endParaRPr lang="zh-CN" altLang="en-US"/>
           </a:p>
@@ -4835,7 +4835,7 @@
         <p:spPr>
           <a:xfrm>
             <a:off x="1850529" y="2343823"/>
-            <a:ext cx="8664568" cy="3335674"/>
+            <a:ext cx="8664568" cy="5091628"/>
           </a:xfrm>
           <a:prstGeom prst="rect">
             <a:avLst/>
@@ -5508,8 +5508,8 @@
         </p:nvSpPr>
         <p:spPr>
           <a:xfrm>
-            <a:off x="1850529" y="1885154"/>
-            <a:ext cx="8676000" cy="15475371"/>
+            <a:off x="1770226" y="216011"/>
+            <a:ext cx="8676000" cy="17099532"/>
           </a:xfrm>
           <a:prstGeom prst="roundRect">
             <a:avLst>
@@ -5565,7 +5565,7 @@
         </p:nvSpPr>
         <p:spPr>
           <a:xfrm>
-            <a:off x="1850527" y="1850513"/>
+            <a:off x="1770224" y="181370"/>
             <a:ext cx="1616234" cy="369332"/>
           </a:xfrm>
           <a:prstGeom prst="rect">
@@ -5614,7 +5614,7 @@
         </p:nvSpPr>
         <p:spPr>
           <a:xfrm>
-            <a:off x="1991994" y="2892011"/>
+            <a:off x="1911691" y="1222868"/>
             <a:ext cx="5321499" cy="369332"/>
           </a:xfrm>
           <a:prstGeom prst="rect">
@@ -5663,7 +5663,7 @@
         </p:nvSpPr>
         <p:spPr>
           <a:xfrm>
-            <a:off x="1839097" y="1874873"/>
+            <a:off x="1758794" y="205730"/>
             <a:ext cx="8676000" cy="309393"/>
           </a:xfrm>
           <a:prstGeom prst="roundRect">
@@ -5727,8 +5727,8 @@
         </p:nvSpPr>
         <p:spPr>
           <a:xfrm>
-            <a:off x="1914318" y="2230128"/>
-            <a:ext cx="8664568" cy="14835929"/>
+            <a:off x="1834015" y="560985"/>
+            <a:ext cx="8664568" cy="16885186"/>
           </a:xfrm>
           <a:prstGeom prst="rect">
             <a:avLst/>
@@ -5866,31 +5866,19 @@
             </a:r>
             <a:r>
               <a:rPr lang="en-GB" dirty="0"/>
-              <a:t> their corresponding source–sink paths: If the source–sink paths are semantically similar, identify the change as a Parameter Rename (CI3); If no semantically similar deleted parameter is found, classify the change as a Parameter Addition or Deletion (CI1). Two source–sink paths are considered </a:t>
-            </a:r>
-            <a:r>
-              <a:rPr lang="en-GB" dirty="0">
-                <a:solidFill>
-                  <a:srgbClr val="FF0000"/>
-                </a:solidFill>
-              </a:rPr>
-              <a:t>semantically similar if the parameter usages in the </a:t>
-            </a:r>
-            <a:r>
-              <a:rPr lang="en-GB" dirty="0"/>
-              <a:t>API implementation serve the same semantic role or affect the same execution </a:t>
-            </a:r>
-            <a:r>
-              <a:rPr lang="en-GB" dirty="0" err="1"/>
-              <a:t>behavior</a:t>
-            </a:r>
-            <a:r>
-              <a:rPr lang="en-GB" dirty="0"/>
-              <a:t>.</a:t>
+              <a:t> their corresponding source–sink paths: If the source–sink paths are semantically similar, identify the change as a Parameter Rename (CI3); If no semantically similar deleted parameter is found</a:t>
             </a:r>
             <a:r>
               <a:rPr lang="en-US" dirty="0"/>
-              <a:t> </a:t>
+              <a:t> and the added parameter is not an optional parameter at the end of the parameter list</a:t>
+            </a:r>
+            <a:r>
+              <a:rPr lang="en-GB" dirty="0"/>
+              <a:t>, classify the change as a Parameter Addition or Deletion (CI1). </a:t>
+            </a:r>
+            <a:r>
+              <a:rPr lang="en-US" dirty="0"/>
+              <a:t>Two source–sink paths are considered semantically similar if the parameter assignment paths exhibit semantic equivalence, and the parameter usages, including value propagation to other variables, involvement in control-flow structures, and impact on observable execution behavior, are highly consistent. </a:t>
             </a:r>
             <a:r>
               <a:rPr lang="en-US" altLang="zh-CN" i="1" u="sng" dirty="0"/>
@@ -6045,7 +6033,15 @@
             </a:r>
             <a:r>
               <a:rPr lang="en-GB" dirty="0"/>
-              <a:t>, compare their corresponding source–sink paths. Extract the control-flow conditions under which the exception is raised (e.g., conditional expressions guarding the raise statement). If the exception is raised </a:t>
+              <a:t>, compare their corresponding source–sink paths. Extract the control-flow conditions under which the exception is raised (e.g., conditional expressions guarding the raise statement)</a:t>
+            </a:r>
+            <a:r>
+              <a:rPr lang="en-US" altLang="zh-CN" dirty="0"/>
+              <a:t> , and synthesize the input-parameter (source) value ranges required to trigger each exception</a:t>
+            </a:r>
+            <a:r>
+              <a:rPr lang="en-GB" dirty="0"/>
+              <a:t>. If the exception is raised </a:t>
             </a:r>
             <a:r>
               <a:rPr lang="en-GB" dirty="0">
@@ -6053,17 +6049,17 @@
                   <a:srgbClr val="FF0000"/>
                 </a:solidFill>
               </a:rPr>
-              <a:t>under different variable conditions </a:t>
-            </a:r>
-            <a:r>
-              <a:rPr lang="en-GB" dirty="0"/>
-              <a:t>or parameter value ranges between the two versions, report the change as a Parameter Range Change for Exception (CI5).</a:t>
+              <a:t>under different </a:t>
+            </a:r>
+            <a:r>
+              <a:rPr lang="en-GB" dirty="0"/>
+              <a:t>parameter value ranges between the two versions, report the change as a Parameter Range Change for Exception (CI5).</a:t>
             </a:r>
           </a:p>
           <a:p>
             <a:r>
               <a:rPr lang="en-GB" b="1" dirty="0"/>
-              <a:t>3. Global Variable Incompatibilities</a:t>
+              <a:t>3. Non-local Variable Incompatibilities</a:t>
             </a:r>
           </a:p>
           <a:p>
@@ -6086,7 +6082,15 @@
             </a:r>
             <a:r>
               <a:rPr lang="en-GB" dirty="0"/>
-              <a:t> is </a:t>
+              <a:t> is non-</a:t>
+            </a:r>
+            <a:r>
+              <a:rPr lang="en-GB" dirty="0" err="1"/>
+              <a:t>local_var_assign</a:t>
+            </a:r>
+            <a:r>
+              <a:rPr lang="en-GB" dirty="0"/>
+              <a:t>(</a:t>
             </a:r>
             <a:r>
               <a:rPr lang="en-GB" dirty="0" err="1"/>
@@ -6094,7 +6098,15 @@
             </a:r>
             <a:r>
               <a:rPr lang="en-GB" dirty="0"/>
-              <a:t>, and group them by global variable (sink) name in the form &lt;</a:t>
+              <a:t>, </a:t>
+            </a:r>
+            <a:r>
+              <a:rPr lang="en-GB" dirty="0" err="1"/>
+              <a:t>reference_var_assign</a:t>
+            </a:r>
+            <a:r>
+              <a:rPr lang="en-GB" dirty="0"/>
+              <a:t>), and group them by non-local variable (sink) name in the form &lt;</a:t>
             </a:r>
             <a:r>
               <a:rPr lang="en-GB" dirty="0" err="1"/>
@@ -6102,7 +6114,7 @@
             </a:r>
             <a:r>
               <a:rPr lang="en-GB" dirty="0"/>
-              <a:t>, source–sink paths&gt;. Then, for global variables that appear in both </a:t>
+              <a:t>, source–sink paths&gt;. Then, for non-local variables that appear in both </a:t>
             </a:r>
             <a:r>
               <a:rPr lang="en-GB" dirty="0" err="1"/>
@@ -6118,7 +6130,23 @@
             </a:r>
             <a:r>
               <a:rPr lang="en-GB" dirty="0"/>
-              <a:t>, compare their corresponding source–sink paths. Extract the control-flow conditions under which the global variable is assigned (e.g., guarding predicates or value constraints). If the global variable is assigned under different variable conditions or parameter value ranges between the two versions, report the change as a Global Variable Value Change (CI8).</a:t>
+              <a:t>, compare their corresponding source–sink paths. Extract the control-flow conditions under which the non-local variable is assigned (e.g., guarding predicates or value constraints). If the </a:t>
+            </a:r>
+            <a:r>
+              <a:rPr lang="en-GB" altLang="zh-CN" dirty="0"/>
+              <a:t>non-local</a:t>
+            </a:r>
+            <a:r>
+              <a:rPr lang="en-GB" dirty="0"/>
+              <a:t> variable type is global variable and is assigned under different variable conditions or parameter value ranges between the two versions, report the change as a Global Variable Value Change (CI8)</a:t>
+            </a:r>
+            <a:r>
+              <a:rPr lang="en-GB" altLang="zh-CN" dirty="0"/>
+              <a:t>. If the non-local variable type is reference variable and is assigned or its attribute is assigned under different variable conditions or parameter value ranges between the two versions, report the change as a Reference Variable Value Change (CI9).</a:t>
+            </a:r>
+            <a:r>
+              <a:rPr lang="en-GB" dirty="0"/>
+              <a:t> </a:t>
             </a:r>
             <a:endParaRPr lang="en-GB" altLang="zh-CN" dirty="0">
               <a:solidFill>
@@ -6240,7 +6268,7 @@
         </p:nvSpPr>
         <p:spPr>
           <a:xfrm>
-            <a:off x="12477750" y="4426543"/>
+            <a:off x="17152781" y="2338013"/>
             <a:ext cx="8172450" cy="1477328"/>
           </a:xfrm>
           <a:prstGeom prst="rect">
@@ -6316,7 +6344,7 @@
         </p:nvSpPr>
         <p:spPr>
           <a:xfrm>
-            <a:off x="12477750" y="11255389"/>
+            <a:off x="14403253" y="14984728"/>
             <a:ext cx="6912244" cy="2862322"/>
           </a:xfrm>
           <a:prstGeom prst="rect">
@@ -6406,6 +6434,252 @@
               </a:rPr>
               <a:t>    2. Or for any pair of exception (`e1` in E1 and `e2` in E2): backtrace the condition c1 for e1 and c2 for e2 through CFG. If both condition contain a parameter `p` but have different range criteria for `p`.</a:t>
             </a:r>
+          </a:p>
+        </p:txBody>
+      </p:sp>
+      <p:sp>
+        <p:nvSpPr>
+          <p:cNvPr id="9" name="TextBox 5">
+            <a:extLst>
+              <a:ext uri="{FF2B5EF4-FFF2-40B4-BE49-F238E27FC236}">
+                <a16:creationId xmlns:a16="http://schemas.microsoft.com/office/drawing/2014/main" id="{9B2787C2-7442-4A5E-8AD1-A933DD155581}"/>
+              </a:ext>
+            </a:extLst>
+          </p:cNvPr>
+          <p:cNvSpPr txBox="1"/>
+          <p:nvPr/>
+        </p:nvSpPr>
+        <p:spPr>
+          <a:xfrm>
+            <a:off x="10992459" y="4691688"/>
+            <a:ext cx="8172450" cy="646331"/>
+          </a:xfrm>
+          <a:prstGeom prst="rect">
+            <a:avLst/>
+          </a:prstGeom>
+          <a:noFill/>
+        </p:spPr>
+        <p:txBody>
+          <a:bodyPr wrap="square" rtlCol="0">
+            <a:spAutoFit/>
+          </a:bodyPr>
+          <a:lstStyle/>
+          <a:p>
+            <a:r>
+              <a:rPr lang="en-US" altLang="zh-CN" dirty="0">
+                <a:solidFill>
+                  <a:srgbClr val="FF0000"/>
+                </a:solidFill>
+                <a:latin typeface="Helvetica Neue" panose="02000503000000020004" pitchFamily="2" charset="0"/>
+              </a:rPr>
+              <a:t>+ and the added parameter is not an optional parameter at the end of the parameter list</a:t>
+            </a:r>
+          </a:p>
+        </p:txBody>
+      </p:sp>
+      <p:sp>
+        <p:nvSpPr>
+          <p:cNvPr id="11" name="文本框 10">
+            <a:extLst>
+              <a:ext uri="{FF2B5EF4-FFF2-40B4-BE49-F238E27FC236}">
+                <a16:creationId xmlns:a16="http://schemas.microsoft.com/office/drawing/2014/main" id="{78A154DD-71DA-438C-B2A8-B912D1CDCE35}"/>
+              </a:ext>
+            </a:extLst>
+          </p:cNvPr>
+          <p:cNvSpPr txBox="1"/>
+          <p:nvPr/>
+        </p:nvSpPr>
+        <p:spPr>
+          <a:xfrm>
+            <a:off x="10793256" y="9347299"/>
+            <a:ext cx="12719050" cy="1477328"/>
+          </a:xfrm>
+          <a:prstGeom prst="rect">
+            <a:avLst/>
+          </a:prstGeom>
+          <a:noFill/>
+        </p:spPr>
+        <p:txBody>
+          <a:bodyPr wrap="square">
+            <a:spAutoFit/>
+          </a:bodyPr>
+          <a:lstStyle/>
+          <a:p>
+            <a:r>
+              <a:rPr lang="en-US" altLang="zh-CN" dirty="0"/>
+              <a:t>+ , and synthesize the input-parameter (source) value ranges required to trigger each exception</a:t>
+            </a:r>
+          </a:p>
+          <a:p>
+            <a:endParaRPr lang="en-US" altLang="zh-CN" dirty="0"/>
+          </a:p>
+          <a:p>
+            <a:r>
+              <a:rPr lang="en-US" altLang="zh-CN" dirty="0"/>
+              <a:t>Ori: </a:t>
+            </a:r>
+            <a:r>
+              <a:rPr lang="en-GB" altLang="zh-CN" dirty="0"/>
+              <a:t>Extract the control-flow conditions under which the exception is raised (e.g., conditional expressions guarding the raise statement). If the exception is raised </a:t>
+            </a:r>
+            <a:r>
+              <a:rPr lang="en-GB" altLang="zh-CN" dirty="0">
+                <a:solidFill>
+                  <a:srgbClr val="FF0000"/>
+                </a:solidFill>
+              </a:rPr>
+              <a:t>under different variable conditions </a:t>
+            </a:r>
+            <a:r>
+              <a:rPr lang="en-GB" altLang="zh-CN" dirty="0"/>
+              <a:t>or parameter value ranges between the two versions, report the change as a Parameter Range Change for Exception (CI5).</a:t>
+            </a:r>
+            <a:endParaRPr lang="zh-CN" altLang="en-US" dirty="0"/>
+          </a:p>
+        </p:txBody>
+      </p:sp>
+      <p:sp>
+        <p:nvSpPr>
+          <p:cNvPr id="12" name="文本框 11">
+            <a:extLst>
+              <a:ext uri="{FF2B5EF4-FFF2-40B4-BE49-F238E27FC236}">
+                <a16:creationId xmlns:a16="http://schemas.microsoft.com/office/drawing/2014/main" id="{11078984-F3E5-4317-8F2E-EE1E1700D64D}"/>
+              </a:ext>
+            </a:extLst>
+          </p:cNvPr>
+          <p:cNvSpPr txBox="1"/>
+          <p:nvPr/>
+        </p:nvSpPr>
+        <p:spPr>
+          <a:xfrm>
+            <a:off x="10948009" y="13185051"/>
+            <a:ext cx="12719050" cy="923330"/>
+          </a:xfrm>
+          <a:prstGeom prst="rect">
+            <a:avLst/>
+          </a:prstGeom>
+          <a:noFill/>
+        </p:spPr>
+        <p:txBody>
+          <a:bodyPr wrap="square">
+            <a:spAutoFit/>
+          </a:bodyPr>
+          <a:lstStyle/>
+          <a:p>
+            <a:r>
+              <a:rPr lang="en-US" altLang="zh-CN" dirty="0"/>
+              <a:t>Global -&gt; Non-local</a:t>
+            </a:r>
+          </a:p>
+          <a:p>
+            <a:r>
+              <a:rPr lang="en-US" altLang="zh-CN" dirty="0">
+                <a:solidFill>
+                  <a:srgbClr val="FF0000"/>
+                </a:solidFill>
+                <a:latin typeface="Helvetica Neue" panose="02000503000000020004" pitchFamily="2" charset="0"/>
+              </a:rPr>
+              <a:t>+ CI8: when non-local is global</a:t>
+            </a:r>
+          </a:p>
+          <a:p>
+            <a:r>
+              <a:rPr lang="en-US" altLang="zh-CN" dirty="0">
+                <a:solidFill>
+                  <a:srgbClr val="FF0000"/>
+                </a:solidFill>
+                <a:latin typeface="Helvetica Neue" panose="02000503000000020004" pitchFamily="2" charset="0"/>
+              </a:rPr>
+              <a:t>+ CI9: when non-local is reference</a:t>
+            </a:r>
+            <a:endParaRPr lang="en-GB" altLang="zh-CN" dirty="0">
+              <a:solidFill>
+                <a:srgbClr val="FF0000"/>
+              </a:solidFill>
+              <a:latin typeface="Helvetica Neue" panose="02000503000000020004" pitchFamily="2" charset="0"/>
+            </a:endParaRPr>
+          </a:p>
+        </p:txBody>
+      </p:sp>
+      <p:sp>
+        <p:nvSpPr>
+          <p:cNvPr id="14" name="文本框 13">
+            <a:extLst>
+              <a:ext uri="{FF2B5EF4-FFF2-40B4-BE49-F238E27FC236}">
+                <a16:creationId xmlns:a16="http://schemas.microsoft.com/office/drawing/2014/main" id="{9E6FE874-9AC0-4B04-9093-76E3BA658915}"/>
+              </a:ext>
+            </a:extLst>
+          </p:cNvPr>
+          <p:cNvSpPr txBox="1"/>
+          <p:nvPr/>
+        </p:nvSpPr>
+        <p:spPr>
+          <a:xfrm>
+            <a:off x="10992459" y="5779567"/>
+            <a:ext cx="12719050" cy="1477328"/>
+          </a:xfrm>
+          <a:prstGeom prst="rect">
+            <a:avLst/>
+          </a:prstGeom>
+          <a:noFill/>
+        </p:spPr>
+        <p:txBody>
+          <a:bodyPr wrap="square">
+            <a:spAutoFit/>
+          </a:bodyPr>
+          <a:lstStyle/>
+          <a:p>
+            <a:r>
+              <a:rPr lang="en-US" altLang="zh-CN" dirty="0"/>
+              <a:t>Ori: </a:t>
+            </a:r>
+            <a:r>
+              <a:rPr lang="en-GB" altLang="zh-CN" dirty="0"/>
+              <a:t>Two source–sink paths are considered </a:t>
+            </a:r>
+            <a:r>
+              <a:rPr lang="en-GB" altLang="zh-CN" dirty="0">
+                <a:solidFill>
+                  <a:srgbClr val="FF0000"/>
+                </a:solidFill>
+              </a:rPr>
+              <a:t>semantically similar if the parameter usages in the </a:t>
+            </a:r>
+            <a:r>
+              <a:rPr lang="en-GB" altLang="zh-CN" dirty="0"/>
+              <a:t>API implementation serve the same semantic role or affect the same execution </a:t>
+            </a:r>
+            <a:r>
+              <a:rPr lang="en-GB" altLang="zh-CN" dirty="0" err="1"/>
+              <a:t>behavior</a:t>
+            </a:r>
+            <a:r>
+              <a:rPr lang="en-GB" altLang="zh-CN" dirty="0"/>
+              <a:t>.</a:t>
+            </a:r>
+            <a:r>
+              <a:rPr lang="en-US" altLang="zh-CN" dirty="0"/>
+              <a:t> </a:t>
+            </a:r>
+          </a:p>
+          <a:p>
+            <a:pPr marL="342900" indent="-342900">
+              <a:buAutoNum type="arabicPeriod"/>
+            </a:pPr>
+            <a:r>
+              <a:rPr lang="en-US" altLang="zh-CN" dirty="0"/>
+              <a:t>+ the parameter assignment paths exhibit semantic equivalence, </a:t>
+            </a:r>
+          </a:p>
+          <a:p>
+            <a:pPr marL="342900" indent="-342900">
+              <a:buAutoNum type="arabicPeriod"/>
+            </a:pPr>
+            <a:r>
+              <a:rPr lang="en-US" altLang="zh-CN" dirty="0"/>
+              <a:t>+ and the parameter usages, including value propagation to other variables, involvement in control-flow structures, and impact on observable execution behavior, are highly consistent.</a:t>
+            </a:r>
+            <a:endParaRPr lang="zh-CN" altLang="en-US" dirty="0"/>
           </a:p>
         </p:txBody>
       </p:sp>

--- a/update/compatibility/fig/prompt.pptx
+++ b/update/compatibility/fig/prompt.pptx
@@ -203,7 +203,7 @@
           <a:p>
             <a:fld id="{2A4973AF-1E6D-4746-8FA3-3206D360D595}" type="datetimeFigureOut">
               <a:rPr lang="en-CN" smtClean="0"/>
-              <a:t>01/05/2026</a:t>
+              <a:t>2026/1/11</a:t>
             </a:fld>
             <a:endParaRPr lang="en-CN"/>
           </a:p>
@@ -1456,7 +1456,7 @@
           <a:p>
             <a:fld id="{F89A057A-0BEA-48B2-A216-D46DB2C83327}" type="datetimeFigureOut">
               <a:rPr lang="zh-CN" altLang="en-US" smtClean="0"/>
-              <a:t>2026/1/5</a:t>
+              <a:t>2026/1/11</a:t>
             </a:fld>
             <a:endParaRPr lang="zh-CN" altLang="en-US"/>
           </a:p>
@@ -1626,7 +1626,7 @@
           <a:p>
             <a:fld id="{F89A057A-0BEA-48B2-A216-D46DB2C83327}" type="datetimeFigureOut">
               <a:rPr lang="zh-CN" altLang="en-US" smtClean="0"/>
-              <a:t>2026/1/5</a:t>
+              <a:t>2026/1/11</a:t>
             </a:fld>
             <a:endParaRPr lang="zh-CN" altLang="en-US"/>
           </a:p>
@@ -1806,7 +1806,7 @@
           <a:p>
             <a:fld id="{F89A057A-0BEA-48B2-A216-D46DB2C83327}" type="datetimeFigureOut">
               <a:rPr lang="zh-CN" altLang="en-US" smtClean="0"/>
-              <a:t>2026/1/5</a:t>
+              <a:t>2026/1/11</a:t>
             </a:fld>
             <a:endParaRPr lang="zh-CN" altLang="en-US"/>
           </a:p>
@@ -1976,7 +1976,7 @@
           <a:p>
             <a:fld id="{F89A057A-0BEA-48B2-A216-D46DB2C83327}" type="datetimeFigureOut">
               <a:rPr lang="zh-CN" altLang="en-US" smtClean="0"/>
-              <a:t>2026/1/5</a:t>
+              <a:t>2026/1/11</a:t>
             </a:fld>
             <a:endParaRPr lang="zh-CN" altLang="en-US"/>
           </a:p>
@@ -2220,7 +2220,7 @@
           <a:p>
             <a:fld id="{F89A057A-0BEA-48B2-A216-D46DB2C83327}" type="datetimeFigureOut">
               <a:rPr lang="zh-CN" altLang="en-US" smtClean="0"/>
-              <a:t>2026/1/5</a:t>
+              <a:t>2026/1/11</a:t>
             </a:fld>
             <a:endParaRPr lang="zh-CN" altLang="en-US"/>
           </a:p>
@@ -2452,7 +2452,7 @@
           <a:p>
             <a:fld id="{F89A057A-0BEA-48B2-A216-D46DB2C83327}" type="datetimeFigureOut">
               <a:rPr lang="zh-CN" altLang="en-US" smtClean="0"/>
-              <a:t>2026/1/5</a:t>
+              <a:t>2026/1/11</a:t>
             </a:fld>
             <a:endParaRPr lang="zh-CN" altLang="en-US"/>
           </a:p>
@@ -2819,7 +2819,7 @@
           <a:p>
             <a:fld id="{F89A057A-0BEA-48B2-A216-D46DB2C83327}" type="datetimeFigureOut">
               <a:rPr lang="zh-CN" altLang="en-US" smtClean="0"/>
-              <a:t>2026/1/5</a:t>
+              <a:t>2026/1/11</a:t>
             </a:fld>
             <a:endParaRPr lang="zh-CN" altLang="en-US"/>
           </a:p>
@@ -2937,7 +2937,7 @@
           <a:p>
             <a:fld id="{F89A057A-0BEA-48B2-A216-D46DB2C83327}" type="datetimeFigureOut">
               <a:rPr lang="zh-CN" altLang="en-US" smtClean="0"/>
-              <a:t>2026/1/5</a:t>
+              <a:t>2026/1/11</a:t>
             </a:fld>
             <a:endParaRPr lang="zh-CN" altLang="en-US"/>
           </a:p>
@@ -3032,7 +3032,7 @@
           <a:p>
             <a:fld id="{F89A057A-0BEA-48B2-A216-D46DB2C83327}" type="datetimeFigureOut">
               <a:rPr lang="zh-CN" altLang="en-US" smtClean="0"/>
-              <a:t>2026/1/5</a:t>
+              <a:t>2026/1/11</a:t>
             </a:fld>
             <a:endParaRPr lang="zh-CN" altLang="en-US"/>
           </a:p>
@@ -3309,7 +3309,7 @@
           <a:p>
             <a:fld id="{F89A057A-0BEA-48B2-A216-D46DB2C83327}" type="datetimeFigureOut">
               <a:rPr lang="zh-CN" altLang="en-US" smtClean="0"/>
-              <a:t>2026/1/5</a:t>
+              <a:t>2026/1/11</a:t>
             </a:fld>
             <a:endParaRPr lang="zh-CN" altLang="en-US"/>
           </a:p>
@@ -3566,7 +3566,7 @@
           <a:p>
             <a:fld id="{F89A057A-0BEA-48B2-A216-D46DB2C83327}" type="datetimeFigureOut">
               <a:rPr lang="zh-CN" altLang="en-US" smtClean="0"/>
-              <a:t>2026/1/5</a:t>
+              <a:t>2026/1/11</a:t>
             </a:fld>
             <a:endParaRPr lang="zh-CN" altLang="en-US"/>
           </a:p>
@@ -3779,7 +3779,7 @@
           <a:p>
             <a:fld id="{F89A057A-0BEA-48B2-A216-D46DB2C83327}" type="datetimeFigureOut">
               <a:rPr lang="zh-CN" altLang="en-US" smtClean="0"/>
-              <a:t>2026/1/5</a:t>
+              <a:t>2026/1/11</a:t>
             </a:fld>
             <a:endParaRPr lang="zh-CN" altLang="en-US"/>
           </a:p>
@@ -4198,8 +4198,8 @@
         </p:nvSpPr>
         <p:spPr>
           <a:xfrm>
-            <a:off x="1850529" y="2040137"/>
-            <a:ext cx="8676000" cy="5966925"/>
+            <a:off x="1850529" y="2040138"/>
+            <a:ext cx="8676000" cy="4611034"/>
           </a:xfrm>
           <a:prstGeom prst="roundRect">
             <a:avLst>
@@ -4418,7 +4418,7 @@
         <p:spPr>
           <a:xfrm>
             <a:off x="1882675" y="2363047"/>
-            <a:ext cx="8676000" cy="5768706"/>
+            <a:ext cx="8676000" cy="4146610"/>
           </a:xfrm>
           <a:prstGeom prst="rect">
             <a:avLst/>
@@ -4497,73 +4497,14 @@
           <a:p>
             <a:r>
               <a:rPr lang="en-GB" dirty="0"/>
-              <a:t>Now you will be given input as a function function, output the CFG in the following format:</a:t>
+              <a:t>Now you will be given input as a function, output the CFG in the following format:</a:t>
             </a:r>
           </a:p>
           <a:p>
             <a:r>
               <a:rPr lang="en-GB" dirty="0"/>
-              <a:t>	[{</a:t>
-            </a:r>
-          </a:p>
-          <a:p>
-            <a:r>
-              <a:rPr lang="en-GB" dirty="0"/>
-              <a:t>		”</a:t>
-            </a:r>
-            <a:r>
-              <a:rPr lang="en-GB" dirty="0" err="1"/>
-              <a:t>from_id</a:t>
-            </a:r>
-            <a:r>
-              <a:rPr lang="en-GB" dirty="0"/>
-              <a:t>”: ID, “</a:t>
-            </a:r>
-            <a:r>
-              <a:rPr lang="en-GB" dirty="0" err="1"/>
-              <a:t>from_content</a:t>
-            </a:r>
-            <a:r>
-              <a:rPr lang="en-GB" dirty="0"/>
-              <a:t>”: content, </a:t>
-            </a:r>
-          </a:p>
-          <a:p>
-            <a:r>
-              <a:rPr lang="en-GB" dirty="0"/>
-              <a:t>		“</a:t>
-            </a:r>
-            <a:r>
-              <a:rPr lang="en-GB" dirty="0" err="1"/>
-              <a:t>to_id</a:t>
-            </a:r>
-            <a:r>
-              <a:rPr lang="en-GB" dirty="0"/>
-              <a:t>”: ID, “</a:t>
-            </a:r>
-            <a:r>
-              <a:rPr lang="en-GB" dirty="0" err="1"/>
-              <a:t>to_content</a:t>
-            </a:r>
-            <a:r>
-              <a:rPr lang="en-GB" dirty="0"/>
-              <a:t>”: content,</a:t>
-            </a:r>
-          </a:p>
-          <a:p>
-            <a:r>
-              <a:rPr lang="en-GB" dirty="0"/>
-              <a:t>		“edge”: ”If, Line Number, True”</a:t>
-            </a:r>
-          </a:p>
-          <a:p>
-            <a:r>
-              <a:rPr lang="en-GB" dirty="0"/>
-              <a:t>	}…]</a:t>
-            </a:r>
-            <a:endParaRPr lang="en-GB" b="1" dirty="0"/>
-          </a:p>
-          <a:p>
+              <a:t>	</a:t>
+            </a:r>
             <a:br>
               <a:rPr lang="en-GB" dirty="0"/>
             </a:br>
@@ -4616,7 +4557,7 @@
         <p:spPr>
           <a:xfrm>
             <a:off x="1850529" y="2040136"/>
-            <a:ext cx="8676000" cy="5385034"/>
+            <a:ext cx="8676000" cy="4219150"/>
           </a:xfrm>
           <a:prstGeom prst="roundRect">
             <a:avLst>
@@ -4835,7 +4776,7 @@
         <p:spPr>
           <a:xfrm>
             <a:off x="1850529" y="2343823"/>
-            <a:ext cx="8664568" cy="5091628"/>
+            <a:ext cx="8664568" cy="3915463"/>
           </a:xfrm>
           <a:prstGeom prst="rect">
             <a:avLst/>
@@ -4900,7 +4841,7 @@
             </a:pPr>
             <a:r>
               <a:rPr lang="en-GB" dirty="0"/>
-              <a:t> The CFG node along its path that performs a last assignment to a global variable.</a:t>
+              <a:t> The CFG node along its path that performs a last assignment to a global variable or a class attribute.</a:t>
             </a:r>
           </a:p>
           <a:p>
@@ -4930,87 +4871,6 @@
               <a:rPr lang="en-GB" dirty="0"/>
               <a:t>Output the source/sink node in the following format:</a:t>
             </a:r>
-          </a:p>
-          <a:p>
-            <a:r>
-              <a:rPr lang="en-GB" dirty="0"/>
-              <a:t>[{</a:t>
-            </a:r>
-          </a:p>
-          <a:p>
-            <a:r>
-              <a:rPr lang="en-GB" dirty="0"/>
-              <a:t>	“type”: “</a:t>
-            </a:r>
-            <a:r>
-              <a:rPr lang="en-GB" dirty="0" err="1"/>
-              <a:t>source|sink</a:t>
-            </a:r>
-            <a:r>
-              <a:rPr lang="en-GB" dirty="0"/>
-              <a:t>”, </a:t>
-            </a:r>
-          </a:p>
-          <a:p>
-            <a:r>
-              <a:rPr lang="en-GB" dirty="0"/>
-              <a:t>	”sink_type”:”</a:t>
-            </a:r>
-            <a:r>
-              <a:rPr lang="en-GB" dirty="0" err="1"/>
-              <a:t>exit_pred|global_var_assign|raise</a:t>
-            </a:r>
-            <a:r>
-              <a:rPr lang="en-GB" dirty="0"/>
-              <a:t>” # non-empty for sinks</a:t>
-            </a:r>
-          </a:p>
-          <a:p>
-            <a:r>
-              <a:rPr lang="en-GB" dirty="0"/>
-              <a:t>	“node”: [”</a:t>
-            </a:r>
-            <a:r>
-              <a:rPr lang="en-GB" dirty="0" err="1"/>
-              <a:t>from_id</a:t>
-            </a:r>
-            <a:r>
-              <a:rPr lang="en-GB" dirty="0"/>
-              <a:t>”: ID, “</a:t>
-            </a:r>
-            <a:r>
-              <a:rPr lang="en-GB" dirty="0" err="1"/>
-              <a:t>from_content</a:t>
-            </a:r>
-            <a:r>
-              <a:rPr lang="en-GB" dirty="0"/>
-              <a:t>”: content,  “</a:t>
-            </a:r>
-            <a:r>
-              <a:rPr lang="en-GB" dirty="0" err="1"/>
-              <a:t>to_id</a:t>
-            </a:r>
-            <a:r>
-              <a:rPr lang="en-GB" dirty="0"/>
-              <a:t>”: ID, “</a:t>
-            </a:r>
-            <a:r>
-              <a:rPr lang="en-GB" dirty="0" err="1"/>
-              <a:t>to_content</a:t>
-            </a:r>
-            <a:r>
-              <a:rPr lang="en-GB" dirty="0"/>
-              <a:t>”: content]</a:t>
-            </a:r>
-          </a:p>
-          <a:p>
-            <a:r>
-              <a:rPr lang="en-GB" dirty="0"/>
-              <a:t>}]</a:t>
-            </a:r>
-          </a:p>
-          <a:p>
-            <a:endParaRPr lang="en-GB" dirty="0"/>
           </a:p>
         </p:txBody>
       </p:sp>
@@ -5059,7 +4919,7 @@
         <p:spPr>
           <a:xfrm>
             <a:off x="1850529" y="2040137"/>
-            <a:ext cx="8676000" cy="5675979"/>
+            <a:ext cx="8676000" cy="1998463"/>
           </a:xfrm>
           <a:prstGeom prst="roundRect">
             <a:avLst>
@@ -5278,7 +5138,7 @@
         <p:spPr>
           <a:xfrm>
             <a:off x="1850529" y="2343823"/>
-            <a:ext cx="8664568" cy="5382574"/>
+            <a:ext cx="8664568" cy="1694777"/>
           </a:xfrm>
           <a:prstGeom prst="rect">
             <a:avLst/>
@@ -5310,156 +5170,6 @@
             <a:r>
               <a:rPr lang="en-GB" dirty="0"/>
               <a:t>The CFG is given as follows: # CFG CONTENT. The source and sink nodes are: # SOURCE and SINK nodes. Now you will output the source-sink paths in the following format:</a:t>
-            </a:r>
-          </a:p>
-          <a:p>
-            <a:r>
-              <a:rPr lang="en-GB" dirty="0"/>
-              <a:t>[{</a:t>
-            </a:r>
-          </a:p>
-          <a:p>
-            <a:r>
-              <a:rPr lang="en-GB" dirty="0"/>
-              <a:t>	“</a:t>
-            </a:r>
-            <a:r>
-              <a:rPr lang="en-GB" dirty="0" err="1"/>
-              <a:t>path_id</a:t>
-            </a:r>
-            <a:r>
-              <a:rPr lang="en-GB" dirty="0"/>
-              <a:t>”: 1,</a:t>
-            </a:r>
-          </a:p>
-          <a:p>
-            <a:r>
-              <a:rPr lang="en-GB" dirty="0"/>
-              <a:t>	“source-sink”: “”,</a:t>
-            </a:r>
-          </a:p>
-          <a:p>
-            <a:r>
-              <a:rPr lang="en-GB" dirty="0"/>
-              <a:t>	“edges”:[{</a:t>
-            </a:r>
-          </a:p>
-          <a:p>
-            <a:r>
-              <a:rPr lang="en-GB" dirty="0"/>
-              <a:t>			”</a:t>
-            </a:r>
-            <a:r>
-              <a:rPr lang="en-GB" dirty="0" err="1"/>
-              <a:t>from_id</a:t>
-            </a:r>
-            <a:r>
-              <a:rPr lang="en-GB" dirty="0"/>
-              <a:t>”: ID, “</a:t>
-            </a:r>
-            <a:r>
-              <a:rPr lang="en-GB" dirty="0" err="1"/>
-              <a:t>from_content</a:t>
-            </a:r>
-            <a:r>
-              <a:rPr lang="en-GB" dirty="0"/>
-              <a:t>”: content</a:t>
-            </a:r>
-          </a:p>
-          <a:p>
-            <a:r>
-              <a:rPr lang="en-GB" dirty="0"/>
-              <a:t>			 “</a:t>
-            </a:r>
-            <a:r>
-              <a:rPr lang="en-GB" dirty="0" err="1"/>
-              <a:t>to_id</a:t>
-            </a:r>
-            <a:r>
-              <a:rPr lang="en-GB" dirty="0"/>
-              <a:t>”: ID, “</a:t>
-            </a:r>
-            <a:r>
-              <a:rPr lang="en-GB" dirty="0" err="1"/>
-              <a:t>to_content</a:t>
-            </a:r>
-            <a:r>
-              <a:rPr lang="en-GB" dirty="0"/>
-              <a:t>”: content,</a:t>
-            </a:r>
-          </a:p>
-          <a:p>
-            <a:r>
-              <a:rPr lang="en-GB" dirty="0"/>
-              <a:t>			“edge”: ”If, Line Number, True”</a:t>
-            </a:r>
-          </a:p>
-          <a:p>
-            <a:r>
-              <a:rPr lang="en-GB" dirty="0"/>
-              <a:t>			}, {</a:t>
-            </a:r>
-          </a:p>
-          <a:p>
-            <a:r>
-              <a:rPr lang="en-GB" dirty="0"/>
-              <a:t>			”</a:t>
-            </a:r>
-            <a:r>
-              <a:rPr lang="en-GB" dirty="0" err="1"/>
-              <a:t>from_id</a:t>
-            </a:r>
-            <a:r>
-              <a:rPr lang="en-GB" dirty="0"/>
-              <a:t>”: ID, “</a:t>
-            </a:r>
-            <a:r>
-              <a:rPr lang="en-GB" dirty="0" err="1"/>
-              <a:t>from_content</a:t>
-            </a:r>
-            <a:r>
-              <a:rPr lang="en-GB" dirty="0"/>
-              <a:t>”: content</a:t>
-            </a:r>
-          </a:p>
-          <a:p>
-            <a:r>
-              <a:rPr lang="en-GB" dirty="0"/>
-              <a:t>			 “</a:t>
-            </a:r>
-            <a:r>
-              <a:rPr lang="en-GB" dirty="0" err="1"/>
-              <a:t>to_id</a:t>
-            </a:r>
-            <a:r>
-              <a:rPr lang="en-GB" dirty="0"/>
-              <a:t>”: ID, “</a:t>
-            </a:r>
-            <a:r>
-              <a:rPr lang="en-GB" dirty="0" err="1"/>
-              <a:t>to_content</a:t>
-            </a:r>
-            <a:r>
-              <a:rPr lang="en-GB" dirty="0"/>
-              <a:t>”: content,</a:t>
-            </a:r>
-          </a:p>
-          <a:p>
-            <a:r>
-              <a:rPr lang="en-GB" dirty="0"/>
-              <a:t>			“edge”: ”If, Line Number, True”, …</a:t>
-            </a:r>
-          </a:p>
-          <a:p>
-            <a:r>
-              <a:rPr lang="en-GB" dirty="0"/>
-              <a:t>			}]</a:t>
-            </a:r>
-          </a:p>
-          <a:p>
-            <a:r>
-              <a:rPr lang="en-GB" dirty="0"/>
-              <a:t>}]</a:t>
             </a:r>
           </a:p>
         </p:txBody>
@@ -5508,8 +5218,8 @@
         </p:nvSpPr>
         <p:spPr>
           <a:xfrm>
-            <a:off x="1770226" y="216011"/>
-            <a:ext cx="8676000" cy="17099532"/>
+            <a:off x="1770226" y="216012"/>
+            <a:ext cx="8676000" cy="14640020"/>
           </a:xfrm>
           <a:prstGeom prst="roundRect">
             <a:avLst>
@@ -5728,7 +5438,7 @@
         <p:spPr>
           <a:xfrm>
             <a:off x="1834015" y="560985"/>
-            <a:ext cx="8664568" cy="16885186"/>
+            <a:ext cx="8664568" cy="14295046"/>
           </a:xfrm>
           <a:prstGeom prst="rect">
             <a:avLst/>
@@ -5767,7 +5477,7 @@
             </a:r>
             <a:r>
               <a:rPr lang="en-GB" dirty="0"/>
-              <a:t> the incompatibilities between the two versions. The Python API incompatibilities and the corresponding detection logic are illustrated as follows: </a:t>
+              <a:t> the incompatibilities between the two versions. Follow the detection logic step-by-step: </a:t>
             </a:r>
           </a:p>
           <a:p>
@@ -5782,15 +5492,7 @@
           <a:p>
             <a:r>
               <a:rPr lang="en-GB" dirty="0"/>
-              <a:t>	Group the source–sink paths by parameter (source) name in the form &lt;</a:t>
-            </a:r>
-            <a:r>
-              <a:rPr lang="en-GB" dirty="0" err="1"/>
-              <a:t>source_name</a:t>
-            </a:r>
-            <a:r>
-              <a:rPr lang="en-GB" dirty="0"/>
-              <a:t>, source–sink paths&gt;. Then perform the following analyses: </a:t>
+              <a:t>	Group the source–sink paths by parameter (source) name in the form &lt;source, &lt;source–sink path&gt;&gt;. Then perform: </a:t>
             </a:r>
             <a:r>
               <a:rPr lang="en-GB" i="1" u="sng" dirty="0"/>
@@ -5818,7 +5520,7 @@
             </a:r>
             <a:r>
               <a:rPr lang="en-GB" dirty="0"/>
-              <a:t>. For parameters that exist in both versions, identify a Parameter Default Value Change (CI4) if the parameter has the same name but different default values across the two versions. </a:t>
+              <a:t>. For parameters that exist in both versions, identify the parameter default value change (CI4) if the parameter has the same name but different default values across the two versions. </a:t>
             </a:r>
             <a:r>
               <a:rPr lang="en-GB" i="1" u="sng" dirty="0"/>
@@ -5858,27 +5560,27 @@
             </a:r>
             <a:r>
               <a:rPr lang="en-GB" dirty="0"/>
-              <a:t> by </a:t>
-            </a:r>
-            <a:r>
-              <a:rPr lang="en-GB" dirty="0" err="1"/>
-              <a:t>analyzing</a:t>
+              <a:t> by comparing their source–sink paths: If the source–sink paths are semantically similar, identify the change as a Parameter Rename (CI3); Otherwise</a:t>
+            </a:r>
+            <a:r>
+              <a:rPr lang="en-US" dirty="0"/>
+              <a:t> and the added parameter is not an optional parameter</a:t>
             </a:r>
             <a:r>
               <a:rPr lang="en-GB" dirty="0"/>
-              <a:t> their corresponding source–sink paths: If the source–sink paths are semantically similar, identify the change as a Parameter Rename (CI3); If no semantically similar deleted parameter is found</a:t>
+              <a:t>, classify the change as a Parameter Addition (CI1). </a:t>
             </a:r>
             <a:r>
               <a:rPr lang="en-US" dirty="0"/>
-              <a:t> and the added parameter is not an optional parameter at the end of the parameter list</a:t>
-            </a:r>
-            <a:r>
-              <a:rPr lang="en-GB" dirty="0"/>
-              <a:t>, classify the change as a Parameter Addition or Deletion (CI1). </a:t>
+              <a:t>The source-sink paths are semantically similar if the statements within the paths exhibit semantic equivalence. The same applies to </a:t>
+            </a:r>
+            <a:r>
+              <a:rPr lang="en-US" dirty="0" err="1"/>
+              <a:t>API_b</a:t>
             </a:r>
             <a:r>
               <a:rPr lang="en-US" dirty="0"/>
-              <a:t>Two source–sink paths are considered semantically similar if the parameter assignment paths exhibit semantic equivalence, and the parameter usages, including value propagation to other variables, involvement in control-flow structures, and impact on observable execution behavior, are highly consistent. </a:t>
+              <a:t>. </a:t>
             </a:r>
             <a:r>
               <a:rPr lang="en-US" altLang="zh-CN" i="1" u="sng" dirty="0"/>
@@ -5890,15 +5592,39 @@
             </a:r>
             <a:r>
               <a:rPr lang="en-US" altLang="zh-CN" i="1" u="sng" dirty="0"/>
-              <a:t> Key Addition, Deletion Analysis (CI2).</a:t>
-            </a:r>
-            <a:r>
-              <a:rPr lang="en-US" altLang="zh-CN" u="sng" dirty="0"/>
-              <a:t> </a:t>
+              <a:t> Key Addition, Deletion Analysis (CI2). </a:t>
+            </a:r>
+            <a:r>
+              <a:rPr lang="en-US" altLang="zh-CN" i="1" dirty="0"/>
+              <a:t>E</a:t>
             </a:r>
             <a:r>
               <a:rPr lang="en-US" altLang="zh-CN" dirty="0"/>
-              <a:t>For parameters defined as </a:t>
+              <a:t>xtract the keys accessed along their source–sink paths in both </a:t>
+            </a:r>
+            <a:r>
+              <a:rPr lang="en-US" altLang="zh-CN" dirty="0" err="1"/>
+              <a:t>API_b</a:t>
+            </a:r>
+            <a:r>
+              <a:rPr lang="en-US" altLang="zh-CN" dirty="0"/>
+              <a:t> and </a:t>
+            </a:r>
+            <a:r>
+              <a:rPr lang="en-US" altLang="zh-CN" dirty="0" err="1"/>
+              <a:t>API_a</a:t>
+            </a:r>
+            <a:r>
+              <a:rPr lang="en-US" altLang="zh-CN" dirty="0"/>
+              <a:t> (e.g., via </a:t>
+            </a:r>
+            <a:r>
+              <a:rPr lang="en-US" altLang="zh-CN" dirty="0" err="1"/>
+              <a:t>kwargs.get</a:t>
+            </a:r>
+            <a:r>
+              <a:rPr lang="en-US" altLang="zh-CN" dirty="0"/>
+              <a:t>(key) or </a:t>
             </a:r>
             <a:r>
               <a:rPr lang="en-US" altLang="zh-CN" dirty="0" err="1"/>
@@ -5906,39 +5632,7 @@
             </a:r>
             <a:r>
               <a:rPr lang="en-US" altLang="zh-CN" dirty="0"/>
-              <a:t>, extract the keys accessed along their source–sink paths in both </a:t>
-            </a:r>
-            <a:r>
-              <a:rPr lang="en-US" altLang="zh-CN" dirty="0" err="1"/>
-              <a:t>API_b</a:t>
-            </a:r>
-            <a:r>
-              <a:rPr lang="en-US" altLang="zh-CN" dirty="0"/>
-              <a:t> and </a:t>
-            </a:r>
-            <a:r>
-              <a:rPr lang="en-US" altLang="zh-CN" dirty="0" err="1"/>
-              <a:t>API_a</a:t>
-            </a:r>
-            <a:r>
-              <a:rPr lang="en-US" altLang="zh-CN" dirty="0"/>
-              <a:t> (e.g., via </a:t>
-            </a:r>
-            <a:r>
-              <a:rPr lang="en-US" altLang="zh-CN" dirty="0" err="1"/>
-              <a:t>kwargs.get</a:t>
-            </a:r>
-            <a:r>
-              <a:rPr lang="en-US" altLang="zh-CN" dirty="0"/>
-              <a:t>(key) or </a:t>
-            </a:r>
-            <a:r>
-              <a:rPr lang="en-US" altLang="zh-CN" dirty="0" err="1"/>
-              <a:t>kwargs</a:t>
-            </a:r>
-            <a:r>
-              <a:rPr lang="en-US" altLang="zh-CN" dirty="0"/>
-              <a:t>[key]). If the sets of accessed keys differ between the two versions, identify the change as a </a:t>
+              <a:t>[key]). If the accessed keys differ between the two versions, identify it as a </a:t>
             </a:r>
             <a:r>
               <a:rPr lang="en-US" altLang="zh-CN" dirty="0" err="1"/>
@@ -5977,15 +5671,7 @@
             </a:r>
             <a:r>
               <a:rPr lang="en-GB" dirty="0"/>
-              <a:t> is raise, and group them by exception (sink) name in the form &lt;</a:t>
-            </a:r>
-            <a:r>
-              <a:rPr lang="en-GB" dirty="0" err="1"/>
-              <a:t>sink_name</a:t>
-            </a:r>
-            <a:r>
-              <a:rPr lang="en-GB" dirty="0"/>
-              <a:t>, source–sink paths&gt;. Then perform the following analyses: </a:t>
+              <a:t> is raise, and group them by exception (sink) name in the form &lt;sink, &lt;source–sink path&gt;&gt;. Then perform: </a:t>
             </a:r>
             <a:r>
               <a:rPr lang="en-GB" i="1" u="sng" dirty="0"/>
@@ -6009,7 +5695,7 @@
             </a:r>
             <a:r>
               <a:rPr lang="en-GB" dirty="0"/>
-              <a:t>. If an exception name appears in one version but has no corresponding exception with the same name in the other version, identify the change as an Exception Change (CI6) (addition or deletion). </a:t>
+              <a:t>. If an exception name appears in one version but has no corresponding exception in the other version, identify the change as an Exception Change (CI6) (addition/deletion). </a:t>
             </a:r>
             <a:r>
               <a:rPr lang="en-GB" i="1" u="sng" dirty="0"/>
@@ -6041,19 +5727,7 @@
             </a:r>
             <a:r>
               <a:rPr lang="en-GB" dirty="0"/>
-              <a:t>. If the exception is raised </a:t>
-            </a:r>
-            <a:r>
-              <a:rPr lang="en-GB" dirty="0">
-                <a:solidFill>
-                  <a:srgbClr val="FF0000"/>
-                </a:solidFill>
-              </a:rPr>
-              <a:t>under different </a:t>
-            </a:r>
-            <a:r>
-              <a:rPr lang="en-GB" dirty="0"/>
-              <a:t>parameter value ranges between the two versions, report the change as a Parameter Range Change for Exception (CI5).</a:t>
+              <a:t>. If the exception is raised under different parameter value constraints between the two versions, report the change as a Parameter Range Change for Exception (CI5).</a:t>
             </a:r>
           </a:p>
           <a:p>
@@ -6082,39 +5756,23 @@
             </a:r>
             <a:r>
               <a:rPr lang="en-GB" dirty="0"/>
-              <a:t> is non-</a:t>
+              <a:t> is </a:t>
             </a:r>
             <a:r>
               <a:rPr lang="en-GB" dirty="0" err="1"/>
-              <a:t>local_var_assign</a:t>
+              <a:t>global_var</a:t>
             </a:r>
             <a:r>
               <a:rPr lang="en-GB" dirty="0"/>
-              <a:t>(</a:t>
+              <a:t> or </a:t>
             </a:r>
             <a:r>
               <a:rPr lang="en-GB" dirty="0" err="1"/>
-              <a:t>global_var_assign</a:t>
+              <a:t>attri_var</a:t>
             </a:r>
             <a:r>
               <a:rPr lang="en-GB" dirty="0"/>
-              <a:t>, </a:t>
-            </a:r>
-            <a:r>
-              <a:rPr lang="en-GB" dirty="0" err="1"/>
-              <a:t>reference_var_assign</a:t>
-            </a:r>
-            <a:r>
-              <a:rPr lang="en-GB" dirty="0"/>
-              <a:t>), and group them by non-local variable (sink) name in the form &lt;</a:t>
-            </a:r>
-            <a:r>
-              <a:rPr lang="en-GB" dirty="0" err="1"/>
-              <a:t>sink_name</a:t>
-            </a:r>
-            <a:r>
-              <a:rPr lang="en-GB" dirty="0"/>
-              <a:t>, source–sink paths&gt;. Then, for non-local variables that appear in both </a:t>
+              <a:t>, and group them by variable (sink) name in the form &lt;sink, &lt;source–sink paths&gt;&gt;. Then, for variables that appear in both </a:t>
             </a:r>
             <a:r>
               <a:rPr lang="en-GB" dirty="0" err="1"/>
@@ -6130,19 +5788,19 @@
             </a:r>
             <a:r>
               <a:rPr lang="en-GB" dirty="0"/>
-              <a:t>, compare their corresponding source–sink paths. Extract the control-flow conditions under which the non-local variable is assigned (e.g., guarding predicates or value constraints). If the </a:t>
+              <a:t>, compare their source–sink paths. Extract the control-flow conditions under which the variable is assigned (e.g., guarding predicates or value constraints). If the global variable is assigned under different conditions, report the change as a Global Variable Value Change (CI8)</a:t>
             </a:r>
             <a:r>
               <a:rPr lang="en-GB" altLang="zh-CN" dirty="0"/>
-              <a:t>non-local</a:t>
-            </a:r>
-            <a:r>
-              <a:rPr lang="en-GB" dirty="0"/>
-              <a:t> variable type is global variable and is assigned under different variable conditions or parameter value ranges between the two versions, report the change as a Global Variable Value Change (CI8)</a:t>
+              <a:t>. If the attribute variable is assigned in one version but unassigned in the other, report the change as an Instance Attribute </a:t>
+            </a:r>
+            <a:r>
+              <a:rPr lang="en-GB" altLang="zh-CN" dirty="0" err="1"/>
+              <a:t>Unitialized</a:t>
             </a:r>
             <a:r>
               <a:rPr lang="en-GB" altLang="zh-CN" dirty="0"/>
-              <a:t>. If the non-local variable type is reference variable and is assigned or its attribute is assigned under different variable conditions or parameter value ranges between the two versions, report the change as a Reference Variable Value Change (CI9).</a:t>
+              <a:t> (CI9).</a:t>
             </a:r>
             <a:r>
               <a:rPr lang="en-GB" dirty="0"/>
@@ -6186,7 +5844,7 @@
             </a:r>
             <a:r>
               <a:rPr lang="en-GB" dirty="0"/>
-              <a:t>. First, compare the number of predecessors (i.e., extracted &lt;predecessor, source–sink paths&gt; pairs) between </a:t>
+              <a:t>. First, compare the number of predecessors (i.e., &lt;predecessor, &lt;source–sink path&gt;&gt; pairs) between </a:t>
             </a:r>
             <a:r>
               <a:rPr lang="en-GB" dirty="0" err="1"/>
@@ -6202,7 +5860,7 @@
             </a:r>
             <a:r>
               <a:rPr lang="en-GB" dirty="0"/>
-              <a:t>. Then perform predecessor mapping across versions. For each &lt;predecessor, source–sink paths&gt; pair in </a:t>
+              <a:t>. Then perform predecessor mapping across versions. For each &lt;predecessor, &lt;source–sink path&gt;&gt; pair in </a:t>
             </a:r>
             <a:r>
               <a:rPr lang="en-GB" dirty="0" err="1"/>
@@ -6234,452 +5892,8 @@
             </a:r>
             <a:r>
               <a:rPr lang="en-GB" dirty="0"/>
-              <a:t>. If a new predecessor type appears in either version, report the change as a Return Type Change. For each mapped predecessor pair, compare their corresponding source–sink paths. If the return conditions</a:t>
-            </a:r>
-            <a:r>
-              <a:rPr lang="en-GB" dirty="0">
-                <a:solidFill>
-                  <a:srgbClr val="FF0000"/>
-                </a:solidFill>
-              </a:rPr>
-              <a:t>, value constraints, or controlling predicates differ between the two versions, r</a:t>
-            </a:r>
-            <a:r>
-              <a:rPr lang="en-GB" dirty="0"/>
-              <a:t>eport the change as a Return Value Change (CI7).</a:t>
-            </a:r>
-          </a:p>
-          <a:p>
-            <a:endParaRPr lang="en-GB" dirty="0"/>
-          </a:p>
-        </p:txBody>
-      </p:sp>
-      <p:sp>
-        <p:nvSpPr>
-          <p:cNvPr id="6" name="TextBox 5">
-            <a:extLst>
-              <a:ext uri="{FF2B5EF4-FFF2-40B4-BE49-F238E27FC236}">
-                <a16:creationId xmlns:a16="http://schemas.microsoft.com/office/drawing/2014/main" id="{C0B529B1-5768-6B67-563A-6AD9792D6252}"/>
-              </a:ext>
-            </a:extLst>
-          </p:cNvPr>
-          <p:cNvSpPr txBox="1"/>
-          <p:nvPr/>
-        </p:nvSpPr>
-        <p:spPr>
-          <a:xfrm>
-            <a:off x="17152781" y="2338013"/>
-            <a:ext cx="8172450" cy="1477328"/>
-          </a:xfrm>
-          <a:prstGeom prst="rect">
-            <a:avLst/>
-          </a:prstGeom>
-          <a:noFill/>
-        </p:spPr>
-        <p:txBody>
-          <a:bodyPr wrap="square" rtlCol="0">
-            <a:spAutoFit/>
-          </a:bodyPr>
-          <a:lstStyle/>
-          <a:p>
-            <a:r>
-              <a:rPr lang="en-US" altLang="zh-CN" dirty="0">
-                <a:solidFill>
-                  <a:srgbClr val="FF0000"/>
-                </a:solidFill>
-                <a:latin typeface="Helvetica Neue" panose="02000503000000020004" pitchFamily="2" charset="0"/>
-              </a:rPr>
-              <a:t>A parameter `p` exists in P2 but not in P1 and its type is `positional`, mark CI1.  A parameter `p` exists in P2 but not in P1 and its type is `optional`, and the parameter at `</a:t>
-            </a:r>
-            <a:r>
-              <a:rPr lang="en-US" altLang="zh-CN" dirty="0" err="1">
-                <a:solidFill>
-                  <a:srgbClr val="FF0000"/>
-                </a:solidFill>
-                <a:latin typeface="Helvetica Neue" panose="02000503000000020004" pitchFamily="2" charset="0"/>
-              </a:rPr>
-              <a:t>position_index</a:t>
-            </a:r>
-            <a:r>
-              <a:rPr lang="en-US" altLang="zh-CN" dirty="0">
-                <a:solidFill>
-                  <a:srgbClr val="FF0000"/>
-                </a:solidFill>
-                <a:latin typeface="Helvetica Neue" panose="02000503000000020004" pitchFamily="2" charset="0"/>
-              </a:rPr>
-              <a:t> + 1` exists in P2, mark CI1.  A parameter `p` exists both in P1 and P2(same name, can have different position index or different type </a:t>
-            </a:r>
-            <a:r>
-              <a:rPr lang="en-US" altLang="zh-CN" dirty="0" err="1">
-                <a:solidFill>
-                  <a:srgbClr val="FF0000"/>
-                </a:solidFill>
-                <a:latin typeface="Helvetica Neue" panose="02000503000000020004" pitchFamily="2" charset="0"/>
-              </a:rPr>
-              <a:t>nanotation</a:t>
-            </a:r>
-            <a:r>
-              <a:rPr lang="en-US" altLang="zh-CN" dirty="0">
-                <a:solidFill>
-                  <a:srgbClr val="FF0000"/>
-                </a:solidFill>
-                <a:latin typeface="Helvetica Neue" panose="02000503000000020004" pitchFamily="2" charset="0"/>
-              </a:rPr>
-              <a:t>) but the default values are different, mark CI4.</a:t>
-            </a:r>
-          </a:p>
-        </p:txBody>
-      </p:sp>
-      <p:sp>
-        <p:nvSpPr>
-          <p:cNvPr id="7" name="TextBox 6">
-            <a:extLst>
-              <a:ext uri="{FF2B5EF4-FFF2-40B4-BE49-F238E27FC236}">
-                <a16:creationId xmlns:a16="http://schemas.microsoft.com/office/drawing/2014/main" id="{FC2694D8-3AD7-62F4-708C-DBAC22C5B6A7}"/>
-              </a:ext>
-            </a:extLst>
-          </p:cNvPr>
-          <p:cNvSpPr txBox="1"/>
-          <p:nvPr/>
-        </p:nvSpPr>
-        <p:spPr>
-          <a:xfrm>
-            <a:off x="14403253" y="14984728"/>
-            <a:ext cx="6912244" cy="2862322"/>
-          </a:xfrm>
-          <a:prstGeom prst="rect">
-            <a:avLst/>
-          </a:prstGeom>
-          <a:noFill/>
-        </p:spPr>
-        <p:txBody>
-          <a:bodyPr wrap="square" rtlCol="0">
-            <a:spAutoFit/>
-          </a:bodyPr>
-          <a:lstStyle/>
-          <a:p>
-            <a:pPr marL="360000"/>
-            <a:r>
-              <a:rPr lang="en-US" altLang="zh-CN" dirty="0">
-                <a:solidFill>
-                  <a:srgbClr val="FF0000"/>
-                </a:solidFill>
-                <a:latin typeface="Helvetica Neue" panose="02000503000000020004" pitchFamily="2" charset="0"/>
-              </a:rPr>
-              <a:t>3. **CI5 (Parameter Range Change for exception)**:</a:t>
-            </a:r>
-          </a:p>
-          <a:p>
-            <a:pPr marL="360000"/>
-            <a:r>
-              <a:rPr lang="en-US" altLang="zh-CN" dirty="0">
-                <a:solidFill>
-                  <a:srgbClr val="FF0000"/>
-                </a:solidFill>
-                <a:latin typeface="Helvetica Neue" panose="02000503000000020004" pitchFamily="2" charset="0"/>
-              </a:rPr>
-              <a:t>. If </a:t>
-            </a:r>
-            <a:r>
-              <a:rPr lang="en-US" altLang="zh-CN" dirty="0" err="1">
-                <a:solidFill>
-                  <a:srgbClr val="FF0000"/>
-                </a:solidFill>
-                <a:latin typeface="Helvetica Neue" panose="02000503000000020004" pitchFamily="2" charset="0"/>
-              </a:rPr>
-              <a:t>identifing</a:t>
-            </a:r>
-            <a:r>
-              <a:rPr lang="en-US" altLang="zh-CN" dirty="0">
-                <a:solidFill>
-                  <a:srgbClr val="FF0000"/>
-                </a:solidFill>
-                <a:latin typeface="Helvetica Neue" panose="02000503000000020004" pitchFamily="2" charset="0"/>
-              </a:rPr>
-              <a:t> following situation, mark CI5:</a:t>
-            </a:r>
-          </a:p>
-          <a:p>
-            <a:pPr marL="360000"/>
-            <a:r>
-              <a:rPr lang="en-US" altLang="zh-CN" dirty="0">
-                <a:solidFill>
-                  <a:srgbClr val="FF0000"/>
-                </a:solidFill>
-                <a:latin typeface="Helvetica Neue" panose="02000503000000020004" pitchFamily="2" charset="0"/>
-              </a:rPr>
-              <a:t>    - For exception nodes in E1 and E2:</a:t>
-            </a:r>
-          </a:p>
-          <a:p>
-            <a:pPr marL="360000"/>
-            <a:r>
-              <a:rPr lang="en-US" altLang="zh-CN" dirty="0">
-                <a:solidFill>
-                  <a:srgbClr val="FF0000"/>
-                </a:solidFill>
-                <a:latin typeface="Helvetica Neue" panose="02000503000000020004" pitchFamily="2" charset="0"/>
-              </a:rPr>
-              <a:t>    1. nodes amounts are different and the added/deleted exception `e` is associated with condition `c` which contains a parameter `p` (`p` must in condition description of `c`).</a:t>
-            </a:r>
-          </a:p>
-          <a:p>
-            <a:pPr marL="360000"/>
-            <a:r>
-              <a:rPr lang="en-US" altLang="zh-CN" dirty="0">
-                <a:solidFill>
-                  <a:srgbClr val="FF0000"/>
-                </a:solidFill>
-                <a:latin typeface="Helvetica Neue" panose="02000503000000020004" pitchFamily="2" charset="0"/>
-              </a:rPr>
-              <a:t>    2. Or for any pair of exception (`e1` in E1 and `e2` in E2): backtrace the condition c1 for e1 and c2 for e2 through CFG. If both condition contain a parameter `p` but have different range criteria for `p`.</a:t>
-            </a:r>
-          </a:p>
-        </p:txBody>
-      </p:sp>
-      <p:sp>
-        <p:nvSpPr>
-          <p:cNvPr id="9" name="TextBox 5">
-            <a:extLst>
-              <a:ext uri="{FF2B5EF4-FFF2-40B4-BE49-F238E27FC236}">
-                <a16:creationId xmlns:a16="http://schemas.microsoft.com/office/drawing/2014/main" id="{9B2787C2-7442-4A5E-8AD1-A933DD155581}"/>
-              </a:ext>
-            </a:extLst>
-          </p:cNvPr>
-          <p:cNvSpPr txBox="1"/>
-          <p:nvPr/>
-        </p:nvSpPr>
-        <p:spPr>
-          <a:xfrm>
-            <a:off x="10992459" y="4691688"/>
-            <a:ext cx="8172450" cy="646331"/>
-          </a:xfrm>
-          <a:prstGeom prst="rect">
-            <a:avLst/>
-          </a:prstGeom>
-          <a:noFill/>
-        </p:spPr>
-        <p:txBody>
-          <a:bodyPr wrap="square" rtlCol="0">
-            <a:spAutoFit/>
-          </a:bodyPr>
-          <a:lstStyle/>
-          <a:p>
-            <a:r>
-              <a:rPr lang="en-US" altLang="zh-CN" dirty="0">
-                <a:solidFill>
-                  <a:srgbClr val="FF0000"/>
-                </a:solidFill>
-                <a:latin typeface="Helvetica Neue" panose="02000503000000020004" pitchFamily="2" charset="0"/>
-              </a:rPr>
-              <a:t>+ and the added parameter is not an optional parameter at the end of the parameter list</a:t>
-            </a:r>
-          </a:p>
-        </p:txBody>
-      </p:sp>
-      <p:sp>
-        <p:nvSpPr>
-          <p:cNvPr id="11" name="文本框 10">
-            <a:extLst>
-              <a:ext uri="{FF2B5EF4-FFF2-40B4-BE49-F238E27FC236}">
-                <a16:creationId xmlns:a16="http://schemas.microsoft.com/office/drawing/2014/main" id="{78A154DD-71DA-438C-B2A8-B912D1CDCE35}"/>
-              </a:ext>
-            </a:extLst>
-          </p:cNvPr>
-          <p:cNvSpPr txBox="1"/>
-          <p:nvPr/>
-        </p:nvSpPr>
-        <p:spPr>
-          <a:xfrm>
-            <a:off x="10793256" y="9347299"/>
-            <a:ext cx="12719050" cy="1477328"/>
-          </a:xfrm>
-          <a:prstGeom prst="rect">
-            <a:avLst/>
-          </a:prstGeom>
-          <a:noFill/>
-        </p:spPr>
-        <p:txBody>
-          <a:bodyPr wrap="square">
-            <a:spAutoFit/>
-          </a:bodyPr>
-          <a:lstStyle/>
-          <a:p>
-            <a:r>
-              <a:rPr lang="en-US" altLang="zh-CN" dirty="0"/>
-              <a:t>+ , and synthesize the input-parameter (source) value ranges required to trigger each exception</a:t>
-            </a:r>
-          </a:p>
-          <a:p>
-            <a:endParaRPr lang="en-US" altLang="zh-CN" dirty="0"/>
-          </a:p>
-          <a:p>
-            <a:r>
-              <a:rPr lang="en-US" altLang="zh-CN" dirty="0"/>
-              <a:t>Ori: </a:t>
-            </a:r>
-            <a:r>
-              <a:rPr lang="en-GB" altLang="zh-CN" dirty="0"/>
-              <a:t>Extract the control-flow conditions under which the exception is raised (e.g., conditional expressions guarding the raise statement). If the exception is raised </a:t>
-            </a:r>
-            <a:r>
-              <a:rPr lang="en-GB" altLang="zh-CN" dirty="0">
-                <a:solidFill>
-                  <a:srgbClr val="FF0000"/>
-                </a:solidFill>
-              </a:rPr>
-              <a:t>under different variable conditions </a:t>
-            </a:r>
-            <a:r>
-              <a:rPr lang="en-GB" altLang="zh-CN" dirty="0"/>
-              <a:t>or parameter value ranges between the two versions, report the change as a Parameter Range Change for Exception (CI5).</a:t>
-            </a:r>
-            <a:endParaRPr lang="zh-CN" altLang="en-US" dirty="0"/>
-          </a:p>
-        </p:txBody>
-      </p:sp>
-      <p:sp>
-        <p:nvSpPr>
-          <p:cNvPr id="12" name="文本框 11">
-            <a:extLst>
-              <a:ext uri="{FF2B5EF4-FFF2-40B4-BE49-F238E27FC236}">
-                <a16:creationId xmlns:a16="http://schemas.microsoft.com/office/drawing/2014/main" id="{11078984-F3E5-4317-8F2E-EE1E1700D64D}"/>
-              </a:ext>
-            </a:extLst>
-          </p:cNvPr>
-          <p:cNvSpPr txBox="1"/>
-          <p:nvPr/>
-        </p:nvSpPr>
-        <p:spPr>
-          <a:xfrm>
-            <a:off x="10948009" y="13185051"/>
-            <a:ext cx="12719050" cy="923330"/>
-          </a:xfrm>
-          <a:prstGeom prst="rect">
-            <a:avLst/>
-          </a:prstGeom>
-          <a:noFill/>
-        </p:spPr>
-        <p:txBody>
-          <a:bodyPr wrap="square">
-            <a:spAutoFit/>
-          </a:bodyPr>
-          <a:lstStyle/>
-          <a:p>
-            <a:r>
-              <a:rPr lang="en-US" altLang="zh-CN" dirty="0"/>
-              <a:t>Global -&gt; Non-local</a:t>
-            </a:r>
-          </a:p>
-          <a:p>
-            <a:r>
-              <a:rPr lang="en-US" altLang="zh-CN" dirty="0">
-                <a:solidFill>
-                  <a:srgbClr val="FF0000"/>
-                </a:solidFill>
-                <a:latin typeface="Helvetica Neue" panose="02000503000000020004" pitchFamily="2" charset="0"/>
-              </a:rPr>
-              <a:t>+ CI8: when non-local is global</a:t>
-            </a:r>
-          </a:p>
-          <a:p>
-            <a:r>
-              <a:rPr lang="en-US" altLang="zh-CN" dirty="0">
-                <a:solidFill>
-                  <a:srgbClr val="FF0000"/>
-                </a:solidFill>
-                <a:latin typeface="Helvetica Neue" panose="02000503000000020004" pitchFamily="2" charset="0"/>
-              </a:rPr>
-              <a:t>+ CI9: when non-local is reference</a:t>
-            </a:r>
-            <a:endParaRPr lang="en-GB" altLang="zh-CN" dirty="0">
-              <a:solidFill>
-                <a:srgbClr val="FF0000"/>
-              </a:solidFill>
-              <a:latin typeface="Helvetica Neue" panose="02000503000000020004" pitchFamily="2" charset="0"/>
-            </a:endParaRPr>
-          </a:p>
-        </p:txBody>
-      </p:sp>
-      <p:sp>
-        <p:nvSpPr>
-          <p:cNvPr id="14" name="文本框 13">
-            <a:extLst>
-              <a:ext uri="{FF2B5EF4-FFF2-40B4-BE49-F238E27FC236}">
-                <a16:creationId xmlns:a16="http://schemas.microsoft.com/office/drawing/2014/main" id="{9E6FE874-9AC0-4B04-9093-76E3BA658915}"/>
-              </a:ext>
-            </a:extLst>
-          </p:cNvPr>
-          <p:cNvSpPr txBox="1"/>
-          <p:nvPr/>
-        </p:nvSpPr>
-        <p:spPr>
-          <a:xfrm>
-            <a:off x="10992459" y="5779567"/>
-            <a:ext cx="12719050" cy="1477328"/>
-          </a:xfrm>
-          <a:prstGeom prst="rect">
-            <a:avLst/>
-          </a:prstGeom>
-          <a:noFill/>
-        </p:spPr>
-        <p:txBody>
-          <a:bodyPr wrap="square">
-            <a:spAutoFit/>
-          </a:bodyPr>
-          <a:lstStyle/>
-          <a:p>
-            <a:r>
-              <a:rPr lang="en-US" altLang="zh-CN" dirty="0"/>
-              <a:t>Ori: </a:t>
-            </a:r>
-            <a:r>
-              <a:rPr lang="en-GB" altLang="zh-CN" dirty="0"/>
-              <a:t>Two source–sink paths are considered </a:t>
-            </a:r>
-            <a:r>
-              <a:rPr lang="en-GB" altLang="zh-CN" dirty="0">
-                <a:solidFill>
-                  <a:srgbClr val="FF0000"/>
-                </a:solidFill>
-              </a:rPr>
-              <a:t>semantically similar if the parameter usages in the </a:t>
-            </a:r>
-            <a:r>
-              <a:rPr lang="en-GB" altLang="zh-CN" dirty="0"/>
-              <a:t>API implementation serve the same semantic role or affect the same execution </a:t>
-            </a:r>
-            <a:r>
-              <a:rPr lang="en-GB" altLang="zh-CN" dirty="0" err="1"/>
-              <a:t>behavior</a:t>
-            </a:r>
-            <a:r>
-              <a:rPr lang="en-GB" altLang="zh-CN" dirty="0"/>
-              <a:t>.</a:t>
-            </a:r>
-            <a:r>
-              <a:rPr lang="en-US" altLang="zh-CN" dirty="0"/>
-              <a:t> </a:t>
-            </a:r>
-          </a:p>
-          <a:p>
-            <a:pPr marL="342900" indent="-342900">
-              <a:buAutoNum type="arabicPeriod"/>
-            </a:pPr>
-            <a:r>
-              <a:rPr lang="en-US" altLang="zh-CN" dirty="0"/>
-              <a:t>+ the parameter assignment paths exhibit semantic equivalence, </a:t>
-            </a:r>
-          </a:p>
-          <a:p>
-            <a:pPr marL="342900" indent="-342900">
-              <a:buAutoNum type="arabicPeriod"/>
-            </a:pPr>
-            <a:r>
-              <a:rPr lang="en-US" altLang="zh-CN" dirty="0"/>
-              <a:t>+ and the parameter usages, including value propagation to other variables, involvement in control-flow structures, and impact on observable execution behavior, are highly consistent.</a:t>
-            </a:r>
-            <a:endParaRPr lang="zh-CN" altLang="en-US" dirty="0"/>
+              <a:t>. If a new predecessor type appears in either version, report the change as a Return Type Change. For each mapped predecessor pair, compare their corresponding source–sink paths. If the return conditions, value constraints, or controlling predicates differ between the two versions, report the change as a Return Value Change (CI7).</a:t>
+            </a:r>
           </a:p>
         </p:txBody>
       </p:sp>
@@ -6697,7 +5911,7 @@
 </file>
 
 <file path=ppt/slides/slide5.xml><?xml version="1.0" encoding="utf-8"?>
-<p:sld xmlns:a="http://schemas.openxmlformats.org/drawingml/2006/main" xmlns:r="http://schemas.openxmlformats.org/officeDocument/2006/relationships" xmlns:p="http://schemas.openxmlformats.org/presentationml/2006/main">
+<p:sld xmlns:a="http://schemas.openxmlformats.org/drawingml/2006/main" xmlns:r="http://schemas.openxmlformats.org/officeDocument/2006/relationships" xmlns:p="http://schemas.openxmlformats.org/presentationml/2006/main" show="0">
   <p:cSld>
     <p:spTree>
       <p:nvGrpSpPr>
@@ -7585,7 +6799,7 @@
 </file>
 
 <file path=ppt/slides/slide6.xml><?xml version="1.0" encoding="utf-8"?>
-<p:sld xmlns:a="http://schemas.openxmlformats.org/drawingml/2006/main" xmlns:r="http://schemas.openxmlformats.org/officeDocument/2006/relationships" xmlns:p="http://schemas.openxmlformats.org/presentationml/2006/main">
+<p:sld xmlns:a="http://schemas.openxmlformats.org/drawingml/2006/main" xmlns:r="http://schemas.openxmlformats.org/officeDocument/2006/relationships" xmlns:p="http://schemas.openxmlformats.org/presentationml/2006/main" show="0">
   <p:cSld>
     <p:spTree>
       <p:nvGrpSpPr>
@@ -8473,7 +7687,7 @@
 </file>
 
 <file path=ppt/slides/slide7.xml><?xml version="1.0" encoding="utf-8"?>
-<p:sld xmlns:a="http://schemas.openxmlformats.org/drawingml/2006/main" xmlns:r="http://schemas.openxmlformats.org/officeDocument/2006/relationships" xmlns:p="http://schemas.openxmlformats.org/presentationml/2006/main">
+<p:sld xmlns:a="http://schemas.openxmlformats.org/drawingml/2006/main" xmlns:r="http://schemas.openxmlformats.org/officeDocument/2006/relationships" xmlns:p="http://schemas.openxmlformats.org/presentationml/2006/main" show="0">
   <p:cSld>
     <p:spTree>
       <p:nvGrpSpPr>
